--- a/docs/presentation/SmartClassroom_IoT104TC_Demo.pptx
+++ b/docs/presentation/SmartClassroom_IoT104TC_Demo.pptx
@@ -2,28 +2,28 @@
 <file path=ppt/presentation.xml><?xml version="1.0" encoding="utf-8"?>
 <p:presentation xmlns:p="http://schemas.openxmlformats.org/presentationml/2006/main">
   <p:sldMasterIdLst>
-    <p:sldMasterId xmlns:r="http://schemas.openxmlformats.org/officeDocument/2006/relationships" id="2147483648" r:id="R41fd67f955aa46f1"/>
+    <p:sldMasterId xmlns:r="http://schemas.openxmlformats.org/officeDocument/2006/relationships" id="2147483648" r:id="R64f449d6dc5241fd"/>
   </p:sldMasterIdLst>
   <p:notesMasterIdLst>
-    <p:notesMasterId xmlns:r="http://schemas.openxmlformats.org/officeDocument/2006/relationships" r:id="R596e7dffbe514c7a"/>
+    <p:notesMasterId xmlns:r="http://schemas.openxmlformats.org/officeDocument/2006/relationships" r:id="Rd9b8a929c1994b24"/>
   </p:notesMasterIdLst>
   <p:sldIdLst>
-    <p:sldId xmlns:r="http://schemas.openxmlformats.org/officeDocument/2006/relationships" id="256" r:id="R7d5c2a8f2cfb497c"/>
-    <p:sldId xmlns:r="http://schemas.openxmlformats.org/officeDocument/2006/relationships" id="257" r:id="Rc2dc30e157f3480f"/>
-    <p:sldId xmlns:r="http://schemas.openxmlformats.org/officeDocument/2006/relationships" id="258" r:id="R5e713ad0ea464067"/>
-    <p:sldId xmlns:r="http://schemas.openxmlformats.org/officeDocument/2006/relationships" id="259" r:id="R0508a0d24f594280"/>
-    <p:sldId xmlns:r="http://schemas.openxmlformats.org/officeDocument/2006/relationships" id="260" r:id="R333633f538264b47"/>
-    <p:sldId xmlns:r="http://schemas.openxmlformats.org/officeDocument/2006/relationships" id="261" r:id="R49de9fca3e464a94"/>
-    <p:sldId xmlns:r="http://schemas.openxmlformats.org/officeDocument/2006/relationships" id="262" r:id="R8987c6173e52425e"/>
-    <p:sldId xmlns:r="http://schemas.openxmlformats.org/officeDocument/2006/relationships" id="263" r:id="Rb056d0be445f487d"/>
-    <p:sldId xmlns:r="http://schemas.openxmlformats.org/officeDocument/2006/relationships" id="264" r:id="R3c48e4c20ecf47b4"/>
-    <p:sldId xmlns:r="http://schemas.openxmlformats.org/officeDocument/2006/relationships" id="265" r:id="Rff360d4a14f0419a"/>
-    <p:sldId xmlns:r="http://schemas.openxmlformats.org/officeDocument/2006/relationships" id="266" r:id="Rcdfcdfad34f14e44"/>
-    <p:sldId xmlns:r="http://schemas.openxmlformats.org/officeDocument/2006/relationships" id="267" r:id="R26c8a712db224efa"/>
-    <p:sldId xmlns:r="http://schemas.openxmlformats.org/officeDocument/2006/relationships" id="268" r:id="R4a6bf62fcd5743cb"/>
-    <p:sldId xmlns:r="http://schemas.openxmlformats.org/officeDocument/2006/relationships" id="269" r:id="R352be8bbc21b47c2"/>
-    <p:sldId xmlns:r="http://schemas.openxmlformats.org/officeDocument/2006/relationships" id="270" r:id="R15ed975077bf46c5"/>
-    <p:sldId xmlns:r="http://schemas.openxmlformats.org/officeDocument/2006/relationships" id="271" r:id="R70b946042c7a417e"/>
+    <p:sldId xmlns:r="http://schemas.openxmlformats.org/officeDocument/2006/relationships" id="256" r:id="Rf456fb862836476e"/>
+    <p:sldId xmlns:r="http://schemas.openxmlformats.org/officeDocument/2006/relationships" id="257" r:id="R20f5fff044fd4c9a"/>
+    <p:sldId xmlns:r="http://schemas.openxmlformats.org/officeDocument/2006/relationships" id="258" r:id="R9761f1aa96664936"/>
+    <p:sldId xmlns:r="http://schemas.openxmlformats.org/officeDocument/2006/relationships" id="259" r:id="Rbc3a88ea79a946dd"/>
+    <p:sldId xmlns:r="http://schemas.openxmlformats.org/officeDocument/2006/relationships" id="260" r:id="R88a080d4b1a743e4"/>
+    <p:sldId xmlns:r="http://schemas.openxmlformats.org/officeDocument/2006/relationships" id="261" r:id="R110519bee9be487a"/>
+    <p:sldId xmlns:r="http://schemas.openxmlformats.org/officeDocument/2006/relationships" id="262" r:id="Rc5b9f83b7b0a486b"/>
+    <p:sldId xmlns:r="http://schemas.openxmlformats.org/officeDocument/2006/relationships" id="263" r:id="Raf6e3df0ea1449bd"/>
+    <p:sldId xmlns:r="http://schemas.openxmlformats.org/officeDocument/2006/relationships" id="264" r:id="R5d627c572d464d9f"/>
+    <p:sldId xmlns:r="http://schemas.openxmlformats.org/officeDocument/2006/relationships" id="265" r:id="Rd0214e2d9b924406"/>
+    <p:sldId xmlns:r="http://schemas.openxmlformats.org/officeDocument/2006/relationships" id="266" r:id="Rf9797b2bdc09411a"/>
+    <p:sldId xmlns:r="http://schemas.openxmlformats.org/officeDocument/2006/relationships" id="267" r:id="Rc2665ef06e51477f"/>
+    <p:sldId xmlns:r="http://schemas.openxmlformats.org/officeDocument/2006/relationships" id="268" r:id="R5c46f0ef51fa4853"/>
+    <p:sldId xmlns:r="http://schemas.openxmlformats.org/officeDocument/2006/relationships" id="269" r:id="R7c3ceb6d205b414f"/>
+    <p:sldId xmlns:r="http://schemas.openxmlformats.org/officeDocument/2006/relationships" id="270" r:id="R4218a1b977f64e85"/>
+    <p:sldId xmlns:r="http://schemas.openxmlformats.org/officeDocument/2006/relationships" id="271" r:id="Rf31eb619bdb44705"/>
   </p:sldIdLst>
   <p:sldSz cx="12192000" cy="6858000"/>
   <p:notesSz cx="6858000" cy="9144000"/>
@@ -1560,7 +1560,7 @@
   </p:cSld>
   <p:clrMap bg1="lt1" tx1="dk1" bg2="lt2" tx2="dk2" accent1="accent1" accent2="accent2" accent3="accent3" accent4="accent4" accent5="accent5" accent6="accent6" hlink="hlink" folHlink="folHlink"/>
   <p:sldLayoutIdLst>
-    <p:sldLayoutId xmlns:r="http://schemas.openxmlformats.org/officeDocument/2006/relationships" id="2147483649" r:id="R15c45d5575534427"/>
+    <p:sldLayoutId xmlns:r="http://schemas.openxmlformats.org/officeDocument/2006/relationships" id="2147483649" r:id="R50e9071aa83144bb"/>
   </p:sldLayoutIdLst>
   <p:txStyles>
     <p:titleStyle>
@@ -1859,7 +1859,7 @@
           <p:cNvPr id="1" name="">
             <a:extLst xmlns:a="http://schemas.openxmlformats.org/drawingml/2006/main">
               <a:ext uri="{FF2B5EF4-FFF2-40B4-BE49-F238E27FC236}">
-                <a16:creationId xmlns:a16="http://schemas.microsoft.com/office/drawing/2014/main" id="{F885B686-1E05-471F-AB81-E5A60E825ED0}"/>
+                <a16:creationId xmlns:a16="http://schemas.microsoft.com/office/drawing/2014/main" id="{C9940632-7253-4A00-923D-F3E807F23CC3}"/>
               </a:ext>
             </a:extLst>
           </p:cNvPr>
@@ -1894,7 +1894,7 @@
           <p:cNvPr id="2" name="">
             <a:extLst xmlns:a="http://schemas.openxmlformats.org/drawingml/2006/main">
               <a:ext uri="{FF2B5EF4-FFF2-40B4-BE49-F238E27FC236}">
-                <a16:creationId xmlns:a16="http://schemas.microsoft.com/office/drawing/2014/main" id="{A4EDDFDF-A46F-49FB-9E92-71377EED6318}"/>
+                <a16:creationId xmlns:a16="http://schemas.microsoft.com/office/drawing/2014/main" id="{CFEC7447-04BE-45F4-B8C5-3CC006DF1778}"/>
               </a:ext>
             </a:extLst>
           </p:cNvPr>
@@ -1940,7 +1940,7 @@
           <p:cNvPr id="3" name="">
             <a:extLst xmlns:a="http://schemas.openxmlformats.org/drawingml/2006/main">
               <a:ext uri="{FF2B5EF4-FFF2-40B4-BE49-F238E27FC236}">
-                <a16:creationId xmlns:a16="http://schemas.microsoft.com/office/drawing/2014/main" id="{02899DA3-1AAD-4EBF-869E-61C0BC16514F}"/>
+                <a16:creationId xmlns:a16="http://schemas.microsoft.com/office/drawing/2014/main" id="{2DCD7048-623A-4760-8EB8-77B24C2261A5}"/>
               </a:ext>
             </a:extLst>
           </p:cNvPr>
@@ -1977,7 +1977,7 @@
           <p:cNvPr id="4" name="">
             <a:extLst xmlns:a="http://schemas.openxmlformats.org/drawingml/2006/main">
               <a:ext uri="{FF2B5EF4-FFF2-40B4-BE49-F238E27FC236}">
-                <a16:creationId xmlns:a16="http://schemas.microsoft.com/office/drawing/2014/main" id="{A3D516DC-8BFC-41DA-BB57-45500A0898D3}"/>
+                <a16:creationId xmlns:a16="http://schemas.microsoft.com/office/drawing/2014/main" id="{2E8B73DC-86C7-4E12-BF9B-366B2EBF4098}"/>
               </a:ext>
             </a:extLst>
           </p:cNvPr>
@@ -2014,7 +2014,7 @@
           <p:cNvPr id="5" name="">
             <a:extLst xmlns:a="http://schemas.openxmlformats.org/drawingml/2006/main">
               <a:ext uri="{FF2B5EF4-FFF2-40B4-BE49-F238E27FC236}">
-                <a16:creationId xmlns:a16="http://schemas.microsoft.com/office/drawing/2014/main" id="{2ECF41F2-AB87-4CE7-8FBA-5D31314D7B83}"/>
+                <a16:creationId xmlns:a16="http://schemas.microsoft.com/office/drawing/2014/main" id="{F6B2350A-4900-4D10-A373-2671E98885A9}"/>
               </a:ext>
             </a:extLst>
           </p:cNvPr>
@@ -2051,7 +2051,7 @@
           <p:cNvPr id="6" name="">
             <a:extLst xmlns:a="http://schemas.openxmlformats.org/drawingml/2006/main">
               <a:ext uri="{FF2B5EF4-FFF2-40B4-BE49-F238E27FC236}">
-                <a16:creationId xmlns:a16="http://schemas.microsoft.com/office/drawing/2014/main" id="{1C5C36F8-D2B4-4FC9-AC01-54DD63B54416}"/>
+                <a16:creationId xmlns:a16="http://schemas.microsoft.com/office/drawing/2014/main" id="{9B13463B-FBC5-428B-BF50-F9D89E99DB5B}"/>
               </a:ext>
             </a:extLst>
           </p:cNvPr>
@@ -2088,7 +2088,7 @@
           <p:cNvPr id="7" name="">
             <a:extLst xmlns:a="http://schemas.openxmlformats.org/drawingml/2006/main">
               <a:ext uri="{FF2B5EF4-FFF2-40B4-BE49-F238E27FC236}">
-                <a16:creationId xmlns:a16="http://schemas.microsoft.com/office/drawing/2014/main" id="{546F0490-9468-41E2-B221-CDCE4FFAAE71}"/>
+                <a16:creationId xmlns:a16="http://schemas.microsoft.com/office/drawing/2014/main" id="{FDEDD479-9E25-4D9F-8445-1D5BD9745FC3}"/>
               </a:ext>
             </a:extLst>
           </p:cNvPr>
@@ -2125,7 +2125,7 @@
           <p:cNvPr id="8" name="">
             <a:extLst xmlns:a="http://schemas.openxmlformats.org/drawingml/2006/main">
               <a:ext uri="{FF2B5EF4-FFF2-40B4-BE49-F238E27FC236}">
-                <a16:creationId xmlns:a16="http://schemas.microsoft.com/office/drawing/2014/main" id="{A2775CEC-E385-4919-BCA5-32B95EAAE055}"/>
+                <a16:creationId xmlns:a16="http://schemas.microsoft.com/office/drawing/2014/main" id="{A18F34FA-A60C-4E4C-B94D-090074CE8FB0}"/>
               </a:ext>
             </a:extLst>
           </p:cNvPr>
@@ -2162,7 +2162,7 @@
           <p:cNvPr id="9" name="">
             <a:extLst xmlns:a="http://schemas.openxmlformats.org/drawingml/2006/main">
               <a:ext uri="{FF2B5EF4-FFF2-40B4-BE49-F238E27FC236}">
-                <a16:creationId xmlns:a16="http://schemas.microsoft.com/office/drawing/2014/main" id="{0447309C-7CAD-480B-A5B8-D9BB8A4537C7}"/>
+                <a16:creationId xmlns:a16="http://schemas.microsoft.com/office/drawing/2014/main" id="{D23B60A1-134A-4E2E-B562-07BEEB6FAC50}"/>
               </a:ext>
             </a:extLst>
           </p:cNvPr>
@@ -2199,7 +2199,7 @@
           <p:cNvPr id="10" name="">
             <a:extLst xmlns:a="http://schemas.openxmlformats.org/drawingml/2006/main">
               <a:ext uri="{FF2B5EF4-FFF2-40B4-BE49-F238E27FC236}">
-                <a16:creationId xmlns:a16="http://schemas.microsoft.com/office/drawing/2014/main" id="{A10EA7B6-F453-4252-A5C8-0568D6060F14}"/>
+                <a16:creationId xmlns:a16="http://schemas.microsoft.com/office/drawing/2014/main" id="{F7D73732-CD61-4AE8-9A72-D8B059C59A25}"/>
               </a:ext>
             </a:extLst>
           </p:cNvPr>
@@ -2236,7 +2236,7 @@
           <p:cNvPr id="11" name="">
             <a:extLst xmlns:a="http://schemas.openxmlformats.org/drawingml/2006/main">
               <a:ext uri="{FF2B5EF4-FFF2-40B4-BE49-F238E27FC236}">
-                <a16:creationId xmlns:a16="http://schemas.microsoft.com/office/drawing/2014/main" id="{377E6443-B7A4-4A2F-8F72-96F81A32FD95}"/>
+                <a16:creationId xmlns:a16="http://schemas.microsoft.com/office/drawing/2014/main" id="{BCD601A3-7CD5-486C-ACAB-A27F0328169E}"/>
               </a:ext>
             </a:extLst>
           </p:cNvPr>
@@ -2273,7 +2273,7 @@
           <p:cNvPr id="12" name="">
             <a:extLst xmlns:a="http://schemas.openxmlformats.org/drawingml/2006/main">
               <a:ext uri="{FF2B5EF4-FFF2-40B4-BE49-F238E27FC236}">
-                <a16:creationId xmlns:a16="http://schemas.microsoft.com/office/drawing/2014/main" id="{5815FCA0-3D7D-479E-B071-35EC995785A9}"/>
+                <a16:creationId xmlns:a16="http://schemas.microsoft.com/office/drawing/2014/main" id="{37746D86-1B57-433B-BBB3-B4E9F2C80FE9}"/>
               </a:ext>
             </a:extLst>
           </p:cNvPr>
@@ -2310,7 +2310,7 @@
           <p:cNvPr id="13" name="">
             <a:extLst xmlns:a="http://schemas.openxmlformats.org/drawingml/2006/main">
               <a:ext uri="{FF2B5EF4-FFF2-40B4-BE49-F238E27FC236}">
-                <a16:creationId xmlns:a16="http://schemas.microsoft.com/office/drawing/2014/main" id="{C0F8079C-9250-4426-9323-319FD1A91150}"/>
+                <a16:creationId xmlns:a16="http://schemas.microsoft.com/office/drawing/2014/main" id="{7801A0A8-0DEF-4E38-B340-406CA51899F4}"/>
               </a:ext>
             </a:extLst>
           </p:cNvPr>
@@ -2347,7 +2347,7 @@
           <p:cNvPr id="14" name="">
             <a:extLst xmlns:a="http://schemas.openxmlformats.org/drawingml/2006/main">
               <a:ext uri="{FF2B5EF4-FFF2-40B4-BE49-F238E27FC236}">
-                <a16:creationId xmlns:a16="http://schemas.microsoft.com/office/drawing/2014/main" id="{570E7C5C-0148-4D77-869C-DAE760EE8937}"/>
+                <a16:creationId xmlns:a16="http://schemas.microsoft.com/office/drawing/2014/main" id="{5588C058-6A9C-46E2-8A61-1011611B63CD}"/>
               </a:ext>
             </a:extLst>
           </p:cNvPr>
@@ -2384,7 +2384,7 @@
           <p:cNvPr id="15" name="">
             <a:extLst xmlns:a="http://schemas.openxmlformats.org/drawingml/2006/main">
               <a:ext uri="{FF2B5EF4-FFF2-40B4-BE49-F238E27FC236}">
-                <a16:creationId xmlns:a16="http://schemas.microsoft.com/office/drawing/2014/main" id="{E2359DB5-2301-4BF1-AA80-F87C1826FDC3}"/>
+                <a16:creationId xmlns:a16="http://schemas.microsoft.com/office/drawing/2014/main" id="{7CD34421-AEA2-438B-9F0E-08CF68C2E1D8}"/>
               </a:ext>
             </a:extLst>
           </p:cNvPr>
@@ -2421,7 +2421,7 @@
           <p:cNvPr id="16" name="">
             <a:extLst xmlns:a="http://schemas.openxmlformats.org/drawingml/2006/main">
               <a:ext uri="{FF2B5EF4-FFF2-40B4-BE49-F238E27FC236}">
-                <a16:creationId xmlns:a16="http://schemas.microsoft.com/office/drawing/2014/main" id="{712612B9-A3E2-4B18-95DB-11CEBFDE57B2}"/>
+                <a16:creationId xmlns:a16="http://schemas.microsoft.com/office/drawing/2014/main" id="{C482AED3-B835-4A40-AC04-FEEDAE4A60FF}"/>
               </a:ext>
             </a:extLst>
           </p:cNvPr>
@@ -2458,7 +2458,7 @@
           <p:cNvPr id="17" name="">
             <a:extLst xmlns:a="http://schemas.openxmlformats.org/drawingml/2006/main">
               <a:ext uri="{FF2B5EF4-FFF2-40B4-BE49-F238E27FC236}">
-                <a16:creationId xmlns:a16="http://schemas.microsoft.com/office/drawing/2014/main" id="{99EC6339-CE39-414C-848F-A57C765B06E6}"/>
+                <a16:creationId xmlns:a16="http://schemas.microsoft.com/office/drawing/2014/main" id="{CAB4A7E7-70FE-4FEC-8FFF-C75F9588F74D}"/>
               </a:ext>
             </a:extLst>
           </p:cNvPr>
@@ -2495,7 +2495,7 @@
           <p:cNvPr id="18" name="">
             <a:extLst xmlns:a="http://schemas.openxmlformats.org/drawingml/2006/main">
               <a:ext uri="{FF2B5EF4-FFF2-40B4-BE49-F238E27FC236}">
-                <a16:creationId xmlns:a16="http://schemas.microsoft.com/office/drawing/2014/main" id="{CF8E246D-D66D-4ABB-90F9-F8278FCF7C05}"/>
+                <a16:creationId xmlns:a16="http://schemas.microsoft.com/office/drawing/2014/main" id="{2AA4B9EA-E563-4E41-846F-33C5349A9B7A}"/>
               </a:ext>
             </a:extLst>
           </p:cNvPr>
@@ -2532,7 +2532,7 @@
           <p:cNvPr id="19" name="">
             <a:extLst xmlns:a="http://schemas.openxmlformats.org/drawingml/2006/main">
               <a:ext uri="{FF2B5EF4-FFF2-40B4-BE49-F238E27FC236}">
-                <a16:creationId xmlns:a16="http://schemas.microsoft.com/office/drawing/2014/main" id="{3673C2F7-323C-4024-BE91-3C489B64DA6D}"/>
+                <a16:creationId xmlns:a16="http://schemas.microsoft.com/office/drawing/2014/main" id="{CDEB045C-AAF9-4120-AEEE-28FD7F18557F}"/>
               </a:ext>
             </a:extLst>
           </p:cNvPr>
@@ -2569,7 +2569,7 @@
           <p:cNvPr id="20" name="">
             <a:extLst xmlns:a="http://schemas.openxmlformats.org/drawingml/2006/main">
               <a:ext uri="{FF2B5EF4-FFF2-40B4-BE49-F238E27FC236}">
-                <a16:creationId xmlns:a16="http://schemas.microsoft.com/office/drawing/2014/main" id="{E5090ADC-6C1C-457C-A311-EDBC24A0863A}"/>
+                <a16:creationId xmlns:a16="http://schemas.microsoft.com/office/drawing/2014/main" id="{FC282B55-6B61-41C0-93F8-CF115878276E}"/>
               </a:ext>
             </a:extLst>
           </p:cNvPr>
@@ -2606,7 +2606,7 @@
           <p:cNvPr id="21" name="">
             <a:extLst xmlns:a="http://schemas.openxmlformats.org/drawingml/2006/main">
               <a:ext uri="{FF2B5EF4-FFF2-40B4-BE49-F238E27FC236}">
-                <a16:creationId xmlns:a16="http://schemas.microsoft.com/office/drawing/2014/main" id="{BD80A448-0598-4D43-AA91-2889F145EF8E}"/>
+                <a16:creationId xmlns:a16="http://schemas.microsoft.com/office/drawing/2014/main" id="{FD6E65C1-23FB-410C-9A40-C08A37D5A22F}"/>
               </a:ext>
             </a:extLst>
           </p:cNvPr>
@@ -2643,7 +2643,7 @@
           <p:cNvPr id="22" name="">
             <a:extLst xmlns:a="http://schemas.openxmlformats.org/drawingml/2006/main">
               <a:ext uri="{FF2B5EF4-FFF2-40B4-BE49-F238E27FC236}">
-                <a16:creationId xmlns:a16="http://schemas.microsoft.com/office/drawing/2014/main" id="{3E958984-FABC-45A5-BE3E-2F8BC7DB88F9}"/>
+                <a16:creationId xmlns:a16="http://schemas.microsoft.com/office/drawing/2014/main" id="{448245C7-F9F5-4368-A935-AAD00E857F6B}"/>
               </a:ext>
             </a:extLst>
           </p:cNvPr>
@@ -2680,7 +2680,7 @@
           <p:cNvPr id="23" name="">
             <a:extLst xmlns:a="http://schemas.openxmlformats.org/drawingml/2006/main">
               <a:ext uri="{FF2B5EF4-FFF2-40B4-BE49-F238E27FC236}">
-                <a16:creationId xmlns:a16="http://schemas.microsoft.com/office/drawing/2014/main" id="{A5842EBF-3693-4716-B5C3-7D21135C52E2}"/>
+                <a16:creationId xmlns:a16="http://schemas.microsoft.com/office/drawing/2014/main" id="{4C84BF71-C095-4F24-9A44-D97F2EC308E5}"/>
               </a:ext>
             </a:extLst>
           </p:cNvPr>
@@ -2717,7 +2717,7 @@
           <p:cNvPr id="24" name="">
             <a:extLst xmlns:a="http://schemas.openxmlformats.org/drawingml/2006/main">
               <a:ext uri="{FF2B5EF4-FFF2-40B4-BE49-F238E27FC236}">
-                <a16:creationId xmlns:a16="http://schemas.microsoft.com/office/drawing/2014/main" id="{9206D34E-CB49-4444-8B56-9DA955A7F95C}"/>
+                <a16:creationId xmlns:a16="http://schemas.microsoft.com/office/drawing/2014/main" id="{F7069966-70F5-43CE-B96A-347E640AFF81}"/>
               </a:ext>
             </a:extLst>
           </p:cNvPr>
@@ -2754,7 +2754,7 @@
           <p:cNvPr id="25" name="">
             <a:extLst xmlns:a="http://schemas.openxmlformats.org/drawingml/2006/main">
               <a:ext uri="{FF2B5EF4-FFF2-40B4-BE49-F238E27FC236}">
-                <a16:creationId xmlns:a16="http://schemas.microsoft.com/office/drawing/2014/main" id="{0B9DAB6E-29E8-4A32-A198-3F5860988A21}"/>
+                <a16:creationId xmlns:a16="http://schemas.microsoft.com/office/drawing/2014/main" id="{7B5EE16E-90D5-44AB-AA82-9559B8CC344A}"/>
               </a:ext>
             </a:extLst>
           </p:cNvPr>
@@ -2791,7 +2791,7 @@
           <p:cNvPr id="26" name="">
             <a:extLst xmlns:a="http://schemas.openxmlformats.org/drawingml/2006/main">
               <a:ext uri="{FF2B5EF4-FFF2-40B4-BE49-F238E27FC236}">
-                <a16:creationId xmlns:a16="http://schemas.microsoft.com/office/drawing/2014/main" id="{2AA0E6D6-289A-4CFF-9887-D1653CB1A55D}"/>
+                <a16:creationId xmlns:a16="http://schemas.microsoft.com/office/drawing/2014/main" id="{0B249C62-A506-43F5-B016-EBC40E4EF8EF}"/>
               </a:ext>
             </a:extLst>
           </p:cNvPr>
@@ -2838,7 +2838,7 @@
           <p:cNvPr id="27" name="">
             <a:extLst xmlns:a="http://schemas.openxmlformats.org/drawingml/2006/main">
               <a:ext uri="{FF2B5EF4-FFF2-40B4-BE49-F238E27FC236}">
-                <a16:creationId xmlns:a16="http://schemas.microsoft.com/office/drawing/2014/main" id="{BC9D6844-EB73-4CF4-8475-0EBC58B1B3C2}"/>
+                <a16:creationId xmlns:a16="http://schemas.microsoft.com/office/drawing/2014/main" id="{79C4E1BF-ACC8-41EE-BAEF-7D5295DC16B7}"/>
               </a:ext>
             </a:extLst>
           </p:cNvPr>
@@ -2885,7 +2885,7 @@
           <p:cNvPr id="28" name="">
             <a:extLst xmlns:a="http://schemas.openxmlformats.org/drawingml/2006/main">
               <a:ext uri="{FF2B5EF4-FFF2-40B4-BE49-F238E27FC236}">
-                <a16:creationId xmlns:a16="http://schemas.microsoft.com/office/drawing/2014/main" id="{551A1098-F47F-47A6-A239-99499019E369}"/>
+                <a16:creationId xmlns:a16="http://schemas.microsoft.com/office/drawing/2014/main" id="{FD62BF0E-6CF2-4248-9BC2-7215BFB7BC19}"/>
               </a:ext>
             </a:extLst>
           </p:cNvPr>
@@ -2922,7 +2922,7 @@
           <p:cNvPr id="29" name="">
             <a:extLst xmlns:a="http://schemas.openxmlformats.org/drawingml/2006/main">
               <a:ext uri="{FF2B5EF4-FFF2-40B4-BE49-F238E27FC236}">
-                <a16:creationId xmlns:a16="http://schemas.microsoft.com/office/drawing/2014/main" id="{5733517D-AC40-4640-A3E2-3F192548DAF8}"/>
+                <a16:creationId xmlns:a16="http://schemas.microsoft.com/office/drawing/2014/main" id="{7308394C-A714-4187-BA1E-378C3178F4E4}"/>
               </a:ext>
             </a:extLst>
           </p:cNvPr>
@@ -2986,7 +2986,7 @@
           <p:cNvPr id="30" name="">
             <a:extLst xmlns:a="http://schemas.openxmlformats.org/drawingml/2006/main">
               <a:ext uri="{FF2B5EF4-FFF2-40B4-BE49-F238E27FC236}">
-                <a16:creationId xmlns:a16="http://schemas.microsoft.com/office/drawing/2014/main" id="{221B96F1-44EF-4BCA-9130-90A63E427BA7}"/>
+                <a16:creationId xmlns:a16="http://schemas.microsoft.com/office/drawing/2014/main" id="{3850AD7F-09BC-4933-9F9E-B4AE7F7AF934}"/>
               </a:ext>
             </a:extLst>
           </p:cNvPr>
@@ -3050,7 +3050,7 @@
           <p:cNvPr id="31" name="">
             <a:extLst xmlns:a="http://schemas.openxmlformats.org/drawingml/2006/main">
               <a:ext uri="{FF2B5EF4-FFF2-40B4-BE49-F238E27FC236}">
-                <a16:creationId xmlns:a16="http://schemas.microsoft.com/office/drawing/2014/main" id="{266E2F9A-A3D6-4250-9321-ADAF1F604E84}"/>
+                <a16:creationId xmlns:a16="http://schemas.microsoft.com/office/drawing/2014/main" id="{FAF6B440-9ABC-4A82-A1C3-A41694E21F3D}"/>
               </a:ext>
             </a:extLst>
           </p:cNvPr>
@@ -3137,7 +3137,7 @@
           <p:cNvPr id="32" name="">
             <a:extLst xmlns:a="http://schemas.openxmlformats.org/drawingml/2006/main">
               <a:ext uri="{FF2B5EF4-FFF2-40B4-BE49-F238E27FC236}">
-                <a16:creationId xmlns:a16="http://schemas.microsoft.com/office/drawing/2014/main" id="{8A83E3C4-4B92-4323-8E5A-9BCCFF50CFB9}"/>
+                <a16:creationId xmlns:a16="http://schemas.microsoft.com/office/drawing/2014/main" id="{2B9E822D-036D-4B2B-ACDF-FB52224A7184}"/>
               </a:ext>
             </a:extLst>
           </p:cNvPr>
@@ -3201,7 +3201,7 @@
           <p:cNvPr id="33" name="">
             <a:extLst xmlns:a="http://schemas.openxmlformats.org/drawingml/2006/main">
               <a:ext uri="{FF2B5EF4-FFF2-40B4-BE49-F238E27FC236}">
-                <a16:creationId xmlns:a16="http://schemas.microsoft.com/office/drawing/2014/main" id="{E6C79844-0F77-413F-80DE-C0E665FA4BE2}"/>
+                <a16:creationId xmlns:a16="http://schemas.microsoft.com/office/drawing/2014/main" id="{B2CF6313-EC5D-4336-A66F-19312EB73991}"/>
               </a:ext>
             </a:extLst>
           </p:cNvPr>
@@ -3213,7 +3213,7 @@
         <p:spPr>
           <a:xfrm xmlns:a="http://schemas.openxmlformats.org/drawingml/2006/main">
             <a:off x="7810500" y="895350"/>
-            <a:ext cx="3048000" cy="4286250"/>
+            <a:ext cx="3048000" cy="4000500"/>
           </a:xfrm>
           <a:prstGeom xmlns:a="http://schemas.openxmlformats.org/drawingml/2006/main" prst="rect">
             <a:avLst/>
@@ -3238,7 +3238,7 @@
           <p:cNvPr id="34" name="">
             <a:extLst xmlns:a="http://schemas.openxmlformats.org/drawingml/2006/main">
               <a:ext uri="{FF2B5EF4-FFF2-40B4-BE49-F238E27FC236}">
-                <a16:creationId xmlns:a16="http://schemas.microsoft.com/office/drawing/2014/main" id="{B8A688BD-E3B6-4735-8A3E-CA480A339A19}"/>
+                <a16:creationId xmlns:a16="http://schemas.microsoft.com/office/drawing/2014/main" id="{5CEF8CB4-C530-4683-B8E5-EB9F94D299C8}"/>
               </a:ext>
             </a:extLst>
           </p:cNvPr>
@@ -3302,7 +3302,7 @@
           <p:cNvPr id="35" name="">
             <a:extLst xmlns:a="http://schemas.openxmlformats.org/drawingml/2006/main">
               <a:ext uri="{FF2B5EF4-FFF2-40B4-BE49-F238E27FC236}">
-                <a16:creationId xmlns:a16="http://schemas.microsoft.com/office/drawing/2014/main" id="{7219E498-D6EC-4E42-A268-0B3591DABE3D}"/>
+                <a16:creationId xmlns:a16="http://schemas.microsoft.com/office/drawing/2014/main" id="{A9876325-EA3A-4F40-803C-648098A55248}"/>
               </a:ext>
             </a:extLst>
           </p:cNvPr>
@@ -3366,7 +3366,7 @@
           <p:cNvPr id="36" name="">
             <a:extLst xmlns:a="http://schemas.openxmlformats.org/drawingml/2006/main">
               <a:ext uri="{FF2B5EF4-FFF2-40B4-BE49-F238E27FC236}">
-                <a16:creationId xmlns:a16="http://schemas.microsoft.com/office/drawing/2014/main" id="{EBE125C5-E1C1-4CBD-98A7-8B310B94978E}"/>
+                <a16:creationId xmlns:a16="http://schemas.microsoft.com/office/drawing/2014/main" id="{7F7666EE-BC53-4186-A2CB-EDE01AF49B9E}"/>
               </a:ext>
             </a:extLst>
           </p:cNvPr>
@@ -3401,7 +3401,7 @@
           <p:cNvPr id="37" name="">
             <a:extLst xmlns:a="http://schemas.openxmlformats.org/drawingml/2006/main">
               <a:ext uri="{FF2B5EF4-FFF2-40B4-BE49-F238E27FC236}">
-                <a16:creationId xmlns:a16="http://schemas.microsoft.com/office/drawing/2014/main" id="{0A3768B0-5D42-4EF0-BFEC-567020139A17}"/>
+                <a16:creationId xmlns:a16="http://schemas.microsoft.com/office/drawing/2014/main" id="{86BB3A62-D5D8-4D55-BF9C-2BDEC330AB0C}"/>
               </a:ext>
             </a:extLst>
           </p:cNvPr>
@@ -3465,7 +3465,7 @@
           <p:cNvPr id="38" name="">
             <a:extLst xmlns:a="http://schemas.openxmlformats.org/drawingml/2006/main">
               <a:ext uri="{FF2B5EF4-FFF2-40B4-BE49-F238E27FC236}">
-                <a16:creationId xmlns:a16="http://schemas.microsoft.com/office/drawing/2014/main" id="{49814D95-F811-4958-9307-41448D73209E}"/>
+                <a16:creationId xmlns:a16="http://schemas.microsoft.com/office/drawing/2014/main" id="{040BBF8D-FEE0-4A24-8BE0-D0C823646B1D}"/>
               </a:ext>
             </a:extLst>
           </p:cNvPr>
@@ -3529,7 +3529,7 @@
           <p:cNvPr id="39" name="">
             <a:extLst xmlns:a="http://schemas.openxmlformats.org/drawingml/2006/main">
               <a:ext uri="{FF2B5EF4-FFF2-40B4-BE49-F238E27FC236}">
-                <a16:creationId xmlns:a16="http://schemas.microsoft.com/office/drawing/2014/main" id="{BDFCA686-A238-4F7B-8BAD-9AC08450BA54}"/>
+                <a16:creationId xmlns:a16="http://schemas.microsoft.com/office/drawing/2014/main" id="{58CD10A9-BC8B-4C4D-A782-E65953F0214B}"/>
               </a:ext>
             </a:extLst>
           </p:cNvPr>
@@ -3593,7 +3593,7 @@
           <p:cNvPr id="40" name="">
             <a:extLst xmlns:a="http://schemas.openxmlformats.org/drawingml/2006/main">
               <a:ext uri="{FF2B5EF4-FFF2-40B4-BE49-F238E27FC236}">
-                <a16:creationId xmlns:a16="http://schemas.microsoft.com/office/drawing/2014/main" id="{75CA32C6-B74A-43F6-9E5D-70B15B5FD0B8}"/>
+                <a16:creationId xmlns:a16="http://schemas.microsoft.com/office/drawing/2014/main" id="{4D34D873-6A4C-438E-B7E6-E51F2504A5F7}"/>
               </a:ext>
             </a:extLst>
           </p:cNvPr>
@@ -3630,7 +3630,7 @@
           <p:cNvPr id="41" name="">
             <a:extLst xmlns:a="http://schemas.openxmlformats.org/drawingml/2006/main">
               <a:ext uri="{FF2B5EF4-FFF2-40B4-BE49-F238E27FC236}">
-                <a16:creationId xmlns:a16="http://schemas.microsoft.com/office/drawing/2014/main" id="{340C7ED0-FBC4-43B7-985B-39C396637074}"/>
+                <a16:creationId xmlns:a16="http://schemas.microsoft.com/office/drawing/2014/main" id="{5E909B57-3A25-4452-ABE8-0DA06C9783B1}"/>
               </a:ext>
             </a:extLst>
           </p:cNvPr>
@@ -3667,7 +3667,7 @@
           <p:cNvPr id="42" name="">
             <a:extLst xmlns:a="http://schemas.openxmlformats.org/drawingml/2006/main">
               <a:ext uri="{FF2B5EF4-FFF2-40B4-BE49-F238E27FC236}">
-                <a16:creationId xmlns:a16="http://schemas.microsoft.com/office/drawing/2014/main" id="{001DFD13-BD81-4C0E-BB72-62CCC1C65F43}"/>
+                <a16:creationId xmlns:a16="http://schemas.microsoft.com/office/drawing/2014/main" id="{C9F0F5CB-AD72-4FBD-8C30-C76E2CC1EBEE}"/>
               </a:ext>
             </a:extLst>
           </p:cNvPr>
@@ -3731,7 +3731,7 @@
           <p:cNvPr id="43" name="">
             <a:extLst xmlns:a="http://schemas.openxmlformats.org/drawingml/2006/main">
               <a:ext uri="{FF2B5EF4-FFF2-40B4-BE49-F238E27FC236}">
-                <a16:creationId xmlns:a16="http://schemas.microsoft.com/office/drawing/2014/main" id="{4EB910E4-740D-4876-9362-FB5E23C1971D}"/>
+                <a16:creationId xmlns:a16="http://schemas.microsoft.com/office/drawing/2014/main" id="{44E1943C-9D83-44FE-B630-0E864FB5A886}"/>
               </a:ext>
             </a:extLst>
           </p:cNvPr>
@@ -3795,7 +3795,7 @@
           <p:cNvPr id="44" name="">
             <a:extLst xmlns:a="http://schemas.openxmlformats.org/drawingml/2006/main">
               <a:ext uri="{FF2B5EF4-FFF2-40B4-BE49-F238E27FC236}">
-                <a16:creationId xmlns:a16="http://schemas.microsoft.com/office/drawing/2014/main" id="{365F5311-21F6-4598-8078-0B91F3D3DE37}"/>
+                <a16:creationId xmlns:a16="http://schemas.microsoft.com/office/drawing/2014/main" id="{CAB869B4-D259-41F0-B4E0-72DCFCF911B7}"/>
               </a:ext>
             </a:extLst>
           </p:cNvPr>
@@ -3832,7 +3832,7 @@
           <p:cNvPr id="45" name="">
             <a:extLst xmlns:a="http://schemas.openxmlformats.org/drawingml/2006/main">
               <a:ext uri="{FF2B5EF4-FFF2-40B4-BE49-F238E27FC236}">
-                <a16:creationId xmlns:a16="http://schemas.microsoft.com/office/drawing/2014/main" id="{3CF68E6B-17C6-4064-8B24-ECE0400DAF94}"/>
+                <a16:creationId xmlns:a16="http://schemas.microsoft.com/office/drawing/2014/main" id="{D8021B2B-4E0E-421E-A868-E3C99987B482}"/>
               </a:ext>
             </a:extLst>
           </p:cNvPr>
@@ -3869,7 +3869,7 @@
           <p:cNvPr id="46" name="">
             <a:extLst xmlns:a="http://schemas.openxmlformats.org/drawingml/2006/main">
               <a:ext uri="{FF2B5EF4-FFF2-40B4-BE49-F238E27FC236}">
-                <a16:creationId xmlns:a16="http://schemas.microsoft.com/office/drawing/2014/main" id="{B67B473E-821A-469E-9794-EE83F8A77396}"/>
+                <a16:creationId xmlns:a16="http://schemas.microsoft.com/office/drawing/2014/main" id="{A6BDE9E4-DBC0-4B15-A15A-FE8F7CDD4D3A}"/>
               </a:ext>
             </a:extLst>
           </p:cNvPr>
@@ -3933,7 +3933,7 @@
           <p:cNvPr id="47" name="">
             <a:extLst xmlns:a="http://schemas.openxmlformats.org/drawingml/2006/main">
               <a:ext uri="{FF2B5EF4-FFF2-40B4-BE49-F238E27FC236}">
-                <a16:creationId xmlns:a16="http://schemas.microsoft.com/office/drawing/2014/main" id="{27AFFF84-CCCA-42D7-AA41-183CE45D0A2D}"/>
+                <a16:creationId xmlns:a16="http://schemas.microsoft.com/office/drawing/2014/main" id="{E97618F2-0E5E-47F5-940D-E12A831D13E8}"/>
               </a:ext>
             </a:extLst>
           </p:cNvPr>
@@ -3997,7 +3997,7 @@
           <p:cNvPr id="48" name="">
             <a:extLst xmlns:a="http://schemas.openxmlformats.org/drawingml/2006/main">
               <a:ext uri="{FF2B5EF4-FFF2-40B4-BE49-F238E27FC236}">
-                <a16:creationId xmlns:a16="http://schemas.microsoft.com/office/drawing/2014/main" id="{9FFAD847-40B3-4F4C-8D3B-1033A09552E7}"/>
+                <a16:creationId xmlns:a16="http://schemas.microsoft.com/office/drawing/2014/main" id="{A5134C04-9F7A-4984-A24A-11F93AB38C3E}"/>
               </a:ext>
             </a:extLst>
           </p:cNvPr>
@@ -4034,7 +4034,7 @@
           <p:cNvPr id="49" name="">
             <a:extLst xmlns:a="http://schemas.openxmlformats.org/drawingml/2006/main">
               <a:ext uri="{FF2B5EF4-FFF2-40B4-BE49-F238E27FC236}">
-                <a16:creationId xmlns:a16="http://schemas.microsoft.com/office/drawing/2014/main" id="{BF288167-75C5-4BA2-8D96-D3406E75FA2C}"/>
+                <a16:creationId xmlns:a16="http://schemas.microsoft.com/office/drawing/2014/main" id="{1232A9AC-40D0-4DEB-ABB7-71B175FE0133}"/>
               </a:ext>
             </a:extLst>
           </p:cNvPr>
@@ -4071,7 +4071,7 @@
           <p:cNvPr id="50" name="">
             <a:extLst xmlns:a="http://schemas.openxmlformats.org/drawingml/2006/main">
               <a:ext uri="{FF2B5EF4-FFF2-40B4-BE49-F238E27FC236}">
-                <a16:creationId xmlns:a16="http://schemas.microsoft.com/office/drawing/2014/main" id="{F91C845B-D721-44F5-B582-EE5AAA31F2CB}"/>
+                <a16:creationId xmlns:a16="http://schemas.microsoft.com/office/drawing/2014/main" id="{92FD74B1-5602-4F5E-82DE-0E2BEDD2B492}"/>
               </a:ext>
             </a:extLst>
           </p:cNvPr>
@@ -4135,7 +4135,7 @@
           <p:cNvPr id="51" name="">
             <a:extLst xmlns:a="http://schemas.openxmlformats.org/drawingml/2006/main">
               <a:ext uri="{FF2B5EF4-FFF2-40B4-BE49-F238E27FC236}">
-                <a16:creationId xmlns:a16="http://schemas.microsoft.com/office/drawing/2014/main" id="{0C13F4B5-1D1F-4339-8A35-08F359CA7C83}"/>
+                <a16:creationId xmlns:a16="http://schemas.microsoft.com/office/drawing/2014/main" id="{B085F5A7-E03B-459C-9348-AEAC78AF01A3}"/>
               </a:ext>
             </a:extLst>
           </p:cNvPr>
@@ -4199,7 +4199,7 @@
           <p:cNvPr id="52" name="">
             <a:extLst xmlns:a="http://schemas.openxmlformats.org/drawingml/2006/main">
               <a:ext uri="{FF2B5EF4-FFF2-40B4-BE49-F238E27FC236}">
-                <a16:creationId xmlns:a16="http://schemas.microsoft.com/office/drawing/2014/main" id="{8F2E6311-FB8C-47C1-A328-4B2B1873C817}"/>
+                <a16:creationId xmlns:a16="http://schemas.microsoft.com/office/drawing/2014/main" id="{D71993A3-8E44-48C2-AA76-805B13235E73}"/>
               </a:ext>
             </a:extLst>
           </p:cNvPr>
@@ -4236,7 +4236,7 @@
           <p:cNvPr id="53" name="">
             <a:extLst xmlns:a="http://schemas.openxmlformats.org/drawingml/2006/main">
               <a:ext uri="{FF2B5EF4-FFF2-40B4-BE49-F238E27FC236}">
-                <a16:creationId xmlns:a16="http://schemas.microsoft.com/office/drawing/2014/main" id="{9A638254-FFC8-46DB-AE1B-AD1B95FDCCC2}"/>
+                <a16:creationId xmlns:a16="http://schemas.microsoft.com/office/drawing/2014/main" id="{E8F94647-20EF-4B94-9890-6B8117B99689}"/>
               </a:ext>
             </a:extLst>
           </p:cNvPr>
@@ -4273,7 +4273,7 @@
           <p:cNvPr id="54" name="">
             <a:extLst xmlns:a="http://schemas.openxmlformats.org/drawingml/2006/main">
               <a:ext uri="{FF2B5EF4-FFF2-40B4-BE49-F238E27FC236}">
-                <a16:creationId xmlns:a16="http://schemas.microsoft.com/office/drawing/2014/main" id="{ABAB946A-5CC7-4FA7-9189-2A9BDB4DF11B}"/>
+                <a16:creationId xmlns:a16="http://schemas.microsoft.com/office/drawing/2014/main" id="{9EE37B50-0BF7-4F0C-ABB6-5596349D6C34}"/>
               </a:ext>
             </a:extLst>
           </p:cNvPr>
@@ -4337,7 +4337,7 @@
           <p:cNvPr id="55" name="">
             <a:extLst xmlns:a="http://schemas.openxmlformats.org/drawingml/2006/main">
               <a:ext uri="{FF2B5EF4-FFF2-40B4-BE49-F238E27FC236}">
-                <a16:creationId xmlns:a16="http://schemas.microsoft.com/office/drawing/2014/main" id="{7E5E8F18-4011-4555-ADAB-F6337437FD69}"/>
+                <a16:creationId xmlns:a16="http://schemas.microsoft.com/office/drawing/2014/main" id="{2F00CD8A-EA7F-4285-8925-921F2EC810D1}"/>
               </a:ext>
             </a:extLst>
           </p:cNvPr>
@@ -4401,7 +4401,7 @@
           <p:cNvPr id="56" name="">
             <a:extLst xmlns:a="http://schemas.openxmlformats.org/drawingml/2006/main">
               <a:ext uri="{FF2B5EF4-FFF2-40B4-BE49-F238E27FC236}">
-                <a16:creationId xmlns:a16="http://schemas.microsoft.com/office/drawing/2014/main" id="{7733B79C-CB7A-4CB9-8BB8-21D34532D2B2}"/>
+                <a16:creationId xmlns:a16="http://schemas.microsoft.com/office/drawing/2014/main" id="{A532A63C-0ADE-4A54-9F10-3BA01B2B97D9}"/>
               </a:ext>
             </a:extLst>
           </p:cNvPr>
@@ -4438,7 +4438,7 @@
           <p:cNvPr id="57" name="">
             <a:extLst xmlns:a="http://schemas.openxmlformats.org/drawingml/2006/main">
               <a:ext uri="{FF2B5EF4-FFF2-40B4-BE49-F238E27FC236}">
-                <a16:creationId xmlns:a16="http://schemas.microsoft.com/office/drawing/2014/main" id="{9CF8B958-9EEA-4998-83FE-61705629E84C}"/>
+                <a16:creationId xmlns:a16="http://schemas.microsoft.com/office/drawing/2014/main" id="{84EB59A2-B941-4B30-B7BA-32FCC58E7574}"/>
               </a:ext>
             </a:extLst>
           </p:cNvPr>
@@ -4500,7 +4500,7 @@
     </p:spTree>
     <p:extLst>
       <p:ext uri="{BB962C8B-B14F-4D97-AF65-F5344CB8AC3E}">
-        <p14:creationId xmlns:p14="http://schemas.microsoft.com/office/powerpoint/2010/main" val="2028136259"/>
+        <p14:creationId xmlns:p14="http://schemas.microsoft.com/office/powerpoint/2010/main" val="2005061275"/>
       </p:ext>
     </p:extLst>
   </p:cSld>
@@ -4524,7 +4524,7 @@
           <p:cNvPr id="1" name="">
             <a:extLst xmlns:a="http://schemas.openxmlformats.org/drawingml/2006/main">
               <a:ext uri="{FF2B5EF4-FFF2-40B4-BE49-F238E27FC236}">
-                <a16:creationId xmlns:a16="http://schemas.microsoft.com/office/drawing/2014/main" id="{6FD238F0-5741-4AB0-8238-4DF225E36775}"/>
+                <a16:creationId xmlns:a16="http://schemas.microsoft.com/office/drawing/2014/main" id="{6CE065EB-D066-4ACE-BCCE-65E09B93DE16}"/>
               </a:ext>
             </a:extLst>
           </p:cNvPr>
@@ -4559,7 +4559,7 @@
           <p:cNvPr id="2" name="">
             <a:extLst xmlns:a="http://schemas.openxmlformats.org/drawingml/2006/main">
               <a:ext uri="{FF2B5EF4-FFF2-40B4-BE49-F238E27FC236}">
-                <a16:creationId xmlns:a16="http://schemas.microsoft.com/office/drawing/2014/main" id="{C9254652-8683-4E1F-B282-BE08064E4083}"/>
+                <a16:creationId xmlns:a16="http://schemas.microsoft.com/office/drawing/2014/main" id="{5EA99D55-AAAD-4FF4-9D66-7DBE51FA7075}"/>
               </a:ext>
             </a:extLst>
           </p:cNvPr>
@@ -4605,7 +4605,7 @@
           <p:cNvPr id="3" name="">
             <a:extLst xmlns:a="http://schemas.openxmlformats.org/drawingml/2006/main">
               <a:ext uri="{FF2B5EF4-FFF2-40B4-BE49-F238E27FC236}">
-                <a16:creationId xmlns:a16="http://schemas.microsoft.com/office/drawing/2014/main" id="{6750D856-FF6A-4D7E-AB5A-6DC0C15D3B02}"/>
+                <a16:creationId xmlns:a16="http://schemas.microsoft.com/office/drawing/2014/main" id="{DC6D9C40-C231-42F2-B71B-338EBF3DE25C}"/>
               </a:ext>
             </a:extLst>
           </p:cNvPr>
@@ -4642,7 +4642,7 @@
           <p:cNvPr id="4" name="">
             <a:extLst xmlns:a="http://schemas.openxmlformats.org/drawingml/2006/main">
               <a:ext uri="{FF2B5EF4-FFF2-40B4-BE49-F238E27FC236}">
-                <a16:creationId xmlns:a16="http://schemas.microsoft.com/office/drawing/2014/main" id="{6C32D2FC-531B-429B-A7D6-F0492D942F57}"/>
+                <a16:creationId xmlns:a16="http://schemas.microsoft.com/office/drawing/2014/main" id="{511338FC-26FD-463D-80AB-085AD7CA6ECC}"/>
               </a:ext>
             </a:extLst>
           </p:cNvPr>
@@ -4679,7 +4679,7 @@
           <p:cNvPr id="5" name="">
             <a:extLst xmlns:a="http://schemas.openxmlformats.org/drawingml/2006/main">
               <a:ext uri="{FF2B5EF4-FFF2-40B4-BE49-F238E27FC236}">
-                <a16:creationId xmlns:a16="http://schemas.microsoft.com/office/drawing/2014/main" id="{0A29F64D-50F6-495F-9447-80374CF30279}"/>
+                <a16:creationId xmlns:a16="http://schemas.microsoft.com/office/drawing/2014/main" id="{A8BFE9AD-9F63-4AB4-B712-A69A006F7240}"/>
               </a:ext>
             </a:extLst>
           </p:cNvPr>
@@ -4716,7 +4716,7 @@
           <p:cNvPr id="6" name="">
             <a:extLst xmlns:a="http://schemas.openxmlformats.org/drawingml/2006/main">
               <a:ext uri="{FF2B5EF4-FFF2-40B4-BE49-F238E27FC236}">
-                <a16:creationId xmlns:a16="http://schemas.microsoft.com/office/drawing/2014/main" id="{68CD7F9A-EA16-4FC1-970F-AED559B5AEFC}"/>
+                <a16:creationId xmlns:a16="http://schemas.microsoft.com/office/drawing/2014/main" id="{E9315F8A-132F-4D87-86D6-FB33E0570E29}"/>
               </a:ext>
             </a:extLst>
           </p:cNvPr>
@@ -4753,7 +4753,7 @@
           <p:cNvPr id="7" name="">
             <a:extLst xmlns:a="http://schemas.openxmlformats.org/drawingml/2006/main">
               <a:ext uri="{FF2B5EF4-FFF2-40B4-BE49-F238E27FC236}">
-                <a16:creationId xmlns:a16="http://schemas.microsoft.com/office/drawing/2014/main" id="{204767CB-959A-4C52-8DD0-411559ABCDBD}"/>
+                <a16:creationId xmlns:a16="http://schemas.microsoft.com/office/drawing/2014/main" id="{A699A9B2-92E8-4EF8-9CDA-0184B4F4E2D4}"/>
               </a:ext>
             </a:extLst>
           </p:cNvPr>
@@ -4790,7 +4790,7 @@
           <p:cNvPr id="8" name="">
             <a:extLst xmlns:a="http://schemas.openxmlformats.org/drawingml/2006/main">
               <a:ext uri="{FF2B5EF4-FFF2-40B4-BE49-F238E27FC236}">
-                <a16:creationId xmlns:a16="http://schemas.microsoft.com/office/drawing/2014/main" id="{08453665-3704-40F5-AFD6-D62A216E4A02}"/>
+                <a16:creationId xmlns:a16="http://schemas.microsoft.com/office/drawing/2014/main" id="{8F48907C-6898-429C-AB87-F8898D080150}"/>
               </a:ext>
             </a:extLst>
           </p:cNvPr>
@@ -4827,7 +4827,7 @@
           <p:cNvPr id="9" name="">
             <a:extLst xmlns:a="http://schemas.openxmlformats.org/drawingml/2006/main">
               <a:ext uri="{FF2B5EF4-FFF2-40B4-BE49-F238E27FC236}">
-                <a16:creationId xmlns:a16="http://schemas.microsoft.com/office/drawing/2014/main" id="{6BB36347-178D-477F-97DD-E0741988EE97}"/>
+                <a16:creationId xmlns:a16="http://schemas.microsoft.com/office/drawing/2014/main" id="{D638869F-EB89-4EA8-B4D7-0A963361877E}"/>
               </a:ext>
             </a:extLst>
           </p:cNvPr>
@@ -4864,7 +4864,7 @@
           <p:cNvPr id="10" name="">
             <a:extLst xmlns:a="http://schemas.openxmlformats.org/drawingml/2006/main">
               <a:ext uri="{FF2B5EF4-FFF2-40B4-BE49-F238E27FC236}">
-                <a16:creationId xmlns:a16="http://schemas.microsoft.com/office/drawing/2014/main" id="{F60A7269-447B-46E3-A510-6158F5D2A2C8}"/>
+                <a16:creationId xmlns:a16="http://schemas.microsoft.com/office/drawing/2014/main" id="{8F708157-F263-4378-BE7F-BA578DE425D3}"/>
               </a:ext>
             </a:extLst>
           </p:cNvPr>
@@ -4901,7 +4901,7 @@
           <p:cNvPr id="11" name="">
             <a:extLst xmlns:a="http://schemas.openxmlformats.org/drawingml/2006/main">
               <a:ext uri="{FF2B5EF4-FFF2-40B4-BE49-F238E27FC236}">
-                <a16:creationId xmlns:a16="http://schemas.microsoft.com/office/drawing/2014/main" id="{D4631594-A56B-498D-92EE-F36FCDEE2AFB}"/>
+                <a16:creationId xmlns:a16="http://schemas.microsoft.com/office/drawing/2014/main" id="{0B7FFD3E-4860-4E43-9EC8-F111F650D068}"/>
               </a:ext>
             </a:extLst>
           </p:cNvPr>
@@ -4938,7 +4938,7 @@
           <p:cNvPr id="12" name="">
             <a:extLst xmlns:a="http://schemas.openxmlformats.org/drawingml/2006/main">
               <a:ext uri="{FF2B5EF4-FFF2-40B4-BE49-F238E27FC236}">
-                <a16:creationId xmlns:a16="http://schemas.microsoft.com/office/drawing/2014/main" id="{3BE7822F-BE63-421F-8221-A14817D55936}"/>
+                <a16:creationId xmlns:a16="http://schemas.microsoft.com/office/drawing/2014/main" id="{9A8ADBDC-8635-4D99-9584-CFCE3D365302}"/>
               </a:ext>
             </a:extLst>
           </p:cNvPr>
@@ -4975,7 +4975,7 @@
           <p:cNvPr id="13" name="">
             <a:extLst xmlns:a="http://schemas.openxmlformats.org/drawingml/2006/main">
               <a:ext uri="{FF2B5EF4-FFF2-40B4-BE49-F238E27FC236}">
-                <a16:creationId xmlns:a16="http://schemas.microsoft.com/office/drawing/2014/main" id="{3E28C428-E15F-4A54-89CD-361432B27BAB}"/>
+                <a16:creationId xmlns:a16="http://schemas.microsoft.com/office/drawing/2014/main" id="{39FCB7D7-4618-4E57-AF0A-148D4415F106}"/>
               </a:ext>
             </a:extLst>
           </p:cNvPr>
@@ -5012,7 +5012,7 @@
           <p:cNvPr id="14" name="">
             <a:extLst xmlns:a="http://schemas.openxmlformats.org/drawingml/2006/main">
               <a:ext uri="{FF2B5EF4-FFF2-40B4-BE49-F238E27FC236}">
-                <a16:creationId xmlns:a16="http://schemas.microsoft.com/office/drawing/2014/main" id="{0F26EBDE-0DE7-4550-B69C-A6244E1E9134}"/>
+                <a16:creationId xmlns:a16="http://schemas.microsoft.com/office/drawing/2014/main" id="{73D9B660-10B7-4EB6-BD8F-71E1CD8DF51A}"/>
               </a:ext>
             </a:extLst>
           </p:cNvPr>
@@ -5049,7 +5049,7 @@
           <p:cNvPr id="15" name="">
             <a:extLst xmlns:a="http://schemas.openxmlformats.org/drawingml/2006/main">
               <a:ext uri="{FF2B5EF4-FFF2-40B4-BE49-F238E27FC236}">
-                <a16:creationId xmlns:a16="http://schemas.microsoft.com/office/drawing/2014/main" id="{D1E2F6EE-B8EB-474D-8B9E-17F9192B753D}"/>
+                <a16:creationId xmlns:a16="http://schemas.microsoft.com/office/drawing/2014/main" id="{8696568E-117B-4D59-B143-CDCED71EC6B5}"/>
               </a:ext>
             </a:extLst>
           </p:cNvPr>
@@ -5086,7 +5086,7 @@
           <p:cNvPr id="16" name="">
             <a:extLst xmlns:a="http://schemas.openxmlformats.org/drawingml/2006/main">
               <a:ext uri="{FF2B5EF4-FFF2-40B4-BE49-F238E27FC236}">
-                <a16:creationId xmlns:a16="http://schemas.microsoft.com/office/drawing/2014/main" id="{F534A45B-194B-4232-AA21-E124C64F34AD}"/>
+                <a16:creationId xmlns:a16="http://schemas.microsoft.com/office/drawing/2014/main" id="{3FFD340C-BA18-4F8E-BEC8-D7BB90EECA22}"/>
               </a:ext>
             </a:extLst>
           </p:cNvPr>
@@ -5123,7 +5123,7 @@
           <p:cNvPr id="17" name="">
             <a:extLst xmlns:a="http://schemas.openxmlformats.org/drawingml/2006/main">
               <a:ext uri="{FF2B5EF4-FFF2-40B4-BE49-F238E27FC236}">
-                <a16:creationId xmlns:a16="http://schemas.microsoft.com/office/drawing/2014/main" id="{5EA3CE70-56D5-443F-B3B9-F71C8C5D52A8}"/>
+                <a16:creationId xmlns:a16="http://schemas.microsoft.com/office/drawing/2014/main" id="{37A3B315-EB1F-42C0-A6B3-E04905F25E1A}"/>
               </a:ext>
             </a:extLst>
           </p:cNvPr>
@@ -5160,7 +5160,7 @@
           <p:cNvPr id="18" name="">
             <a:extLst xmlns:a="http://schemas.openxmlformats.org/drawingml/2006/main">
               <a:ext uri="{FF2B5EF4-FFF2-40B4-BE49-F238E27FC236}">
-                <a16:creationId xmlns:a16="http://schemas.microsoft.com/office/drawing/2014/main" id="{87F30F21-0766-4B6A-9870-478C48F09A5A}"/>
+                <a16:creationId xmlns:a16="http://schemas.microsoft.com/office/drawing/2014/main" id="{1BF6FFA4-3463-4CF1-ABD5-9A71E9BCB12B}"/>
               </a:ext>
             </a:extLst>
           </p:cNvPr>
@@ -5197,7 +5197,7 @@
           <p:cNvPr id="19" name="">
             <a:extLst xmlns:a="http://schemas.openxmlformats.org/drawingml/2006/main">
               <a:ext uri="{FF2B5EF4-FFF2-40B4-BE49-F238E27FC236}">
-                <a16:creationId xmlns:a16="http://schemas.microsoft.com/office/drawing/2014/main" id="{AC5C6BE6-B055-4DF8-842E-D19DDDA3A519}"/>
+                <a16:creationId xmlns:a16="http://schemas.microsoft.com/office/drawing/2014/main" id="{42267A30-5C05-4629-8C98-FB98453D78C2}"/>
               </a:ext>
             </a:extLst>
           </p:cNvPr>
@@ -5234,7 +5234,7 @@
           <p:cNvPr id="20" name="">
             <a:extLst xmlns:a="http://schemas.openxmlformats.org/drawingml/2006/main">
               <a:ext uri="{FF2B5EF4-FFF2-40B4-BE49-F238E27FC236}">
-                <a16:creationId xmlns:a16="http://schemas.microsoft.com/office/drawing/2014/main" id="{295C69DC-1E61-4D82-BB6D-364232F408E3}"/>
+                <a16:creationId xmlns:a16="http://schemas.microsoft.com/office/drawing/2014/main" id="{41B04FA7-7F0D-4A7B-BF82-80DF3DC2131E}"/>
               </a:ext>
             </a:extLst>
           </p:cNvPr>
@@ -5271,7 +5271,7 @@
           <p:cNvPr id="21" name="">
             <a:extLst xmlns:a="http://schemas.openxmlformats.org/drawingml/2006/main">
               <a:ext uri="{FF2B5EF4-FFF2-40B4-BE49-F238E27FC236}">
-                <a16:creationId xmlns:a16="http://schemas.microsoft.com/office/drawing/2014/main" id="{9DFC18E8-33C8-4811-BC27-7D0AF644D941}"/>
+                <a16:creationId xmlns:a16="http://schemas.microsoft.com/office/drawing/2014/main" id="{012B9018-A474-44B1-B8A4-B5DE14C2CF50}"/>
               </a:ext>
             </a:extLst>
           </p:cNvPr>
@@ -5308,7 +5308,7 @@
           <p:cNvPr id="22" name="">
             <a:extLst xmlns:a="http://schemas.openxmlformats.org/drawingml/2006/main">
               <a:ext uri="{FF2B5EF4-FFF2-40B4-BE49-F238E27FC236}">
-                <a16:creationId xmlns:a16="http://schemas.microsoft.com/office/drawing/2014/main" id="{99E9241A-6EEE-4395-B4A7-8E379A02CE49}"/>
+                <a16:creationId xmlns:a16="http://schemas.microsoft.com/office/drawing/2014/main" id="{E1CBB677-6F60-476A-9F46-4433F032B40A}"/>
               </a:ext>
             </a:extLst>
           </p:cNvPr>
@@ -5345,7 +5345,7 @@
           <p:cNvPr id="23" name="">
             <a:extLst xmlns:a="http://schemas.openxmlformats.org/drawingml/2006/main">
               <a:ext uri="{FF2B5EF4-FFF2-40B4-BE49-F238E27FC236}">
-                <a16:creationId xmlns:a16="http://schemas.microsoft.com/office/drawing/2014/main" id="{DB62821A-2AB0-4789-9E3B-F9ECED8FCD35}"/>
+                <a16:creationId xmlns:a16="http://schemas.microsoft.com/office/drawing/2014/main" id="{C29448BA-5C99-436F-BBD2-B355C7574BC1}"/>
               </a:ext>
             </a:extLst>
           </p:cNvPr>
@@ -5382,7 +5382,7 @@
           <p:cNvPr id="24" name="">
             <a:extLst xmlns:a="http://schemas.openxmlformats.org/drawingml/2006/main">
               <a:ext uri="{FF2B5EF4-FFF2-40B4-BE49-F238E27FC236}">
-                <a16:creationId xmlns:a16="http://schemas.microsoft.com/office/drawing/2014/main" id="{7CB6B6F7-62C8-436B-8997-8F0D1EE5C463}"/>
+                <a16:creationId xmlns:a16="http://schemas.microsoft.com/office/drawing/2014/main" id="{45AD091D-8D5D-4112-BE97-E859DF4254A2}"/>
               </a:ext>
             </a:extLst>
           </p:cNvPr>
@@ -5419,7 +5419,7 @@
           <p:cNvPr id="25" name="">
             <a:extLst xmlns:a="http://schemas.openxmlformats.org/drawingml/2006/main">
               <a:ext uri="{FF2B5EF4-FFF2-40B4-BE49-F238E27FC236}">
-                <a16:creationId xmlns:a16="http://schemas.microsoft.com/office/drawing/2014/main" id="{F2349D9E-A501-4612-AAB3-01EE7FF4BBBF}"/>
+                <a16:creationId xmlns:a16="http://schemas.microsoft.com/office/drawing/2014/main" id="{783133C6-C55E-4B7E-8887-9F3684EEF443}"/>
               </a:ext>
             </a:extLst>
           </p:cNvPr>
@@ -5456,7 +5456,7 @@
           <p:cNvPr id="26" name="">
             <a:extLst xmlns:a="http://schemas.openxmlformats.org/drawingml/2006/main">
               <a:ext uri="{FF2B5EF4-FFF2-40B4-BE49-F238E27FC236}">
-                <a16:creationId xmlns:a16="http://schemas.microsoft.com/office/drawing/2014/main" id="{0FADACA9-60C6-4BED-93E9-C4F4CFD6F98D}"/>
+                <a16:creationId xmlns:a16="http://schemas.microsoft.com/office/drawing/2014/main" id="{B7325106-27EA-43B2-9B4A-AE9EC587B975}"/>
               </a:ext>
             </a:extLst>
           </p:cNvPr>
@@ -5503,7 +5503,7 @@
           <p:cNvPr id="27" name="">
             <a:extLst xmlns:a="http://schemas.openxmlformats.org/drawingml/2006/main">
               <a:ext uri="{FF2B5EF4-FFF2-40B4-BE49-F238E27FC236}">
-                <a16:creationId xmlns:a16="http://schemas.microsoft.com/office/drawing/2014/main" id="{30C49EDD-F4D6-4393-AFEB-D3E7DC181DDC}"/>
+                <a16:creationId xmlns:a16="http://schemas.microsoft.com/office/drawing/2014/main" id="{3C289D03-DD78-4100-8BDC-8F5442A942F4}"/>
               </a:ext>
             </a:extLst>
           </p:cNvPr>
@@ -5550,7 +5550,7 @@
           <p:cNvPr id="28" name="">
             <a:extLst xmlns:a="http://schemas.openxmlformats.org/drawingml/2006/main">
               <a:ext uri="{FF2B5EF4-FFF2-40B4-BE49-F238E27FC236}">
-                <a16:creationId xmlns:a16="http://schemas.microsoft.com/office/drawing/2014/main" id="{B1EB879D-5FD7-4B95-9538-48151F83F1E8}"/>
+                <a16:creationId xmlns:a16="http://schemas.microsoft.com/office/drawing/2014/main" id="{269A5A35-E9E9-4A9B-806D-905E620B72AB}"/>
               </a:ext>
             </a:extLst>
           </p:cNvPr>
@@ -5614,7 +5614,7 @@
           <p:cNvPr id="29" name="">
             <a:extLst xmlns:a="http://schemas.openxmlformats.org/drawingml/2006/main">
               <a:ext uri="{FF2B5EF4-FFF2-40B4-BE49-F238E27FC236}">
-                <a16:creationId xmlns:a16="http://schemas.microsoft.com/office/drawing/2014/main" id="{94D0AE43-EB59-4DB9-93EA-1E6C6FA00D0A}"/>
+                <a16:creationId xmlns:a16="http://schemas.microsoft.com/office/drawing/2014/main" id="{56B97994-C4C5-43D4-8679-3F9B70DAD5FB}"/>
               </a:ext>
             </a:extLst>
           </p:cNvPr>
@@ -5678,7 +5678,7 @@
           <p:cNvPr id="30" name="">
             <a:extLst xmlns:a="http://schemas.openxmlformats.org/drawingml/2006/main">
               <a:ext uri="{FF2B5EF4-FFF2-40B4-BE49-F238E27FC236}">
-                <a16:creationId xmlns:a16="http://schemas.microsoft.com/office/drawing/2014/main" id="{F85EF9F7-C785-4185-92A8-AB753965D942}"/>
+                <a16:creationId xmlns:a16="http://schemas.microsoft.com/office/drawing/2014/main" id="{7A3F9D98-5425-47B8-A453-C963C1B6BA02}"/>
               </a:ext>
             </a:extLst>
           </p:cNvPr>
@@ -5742,7 +5742,7 @@
           <p:cNvPr id="31" name="">
             <a:extLst xmlns:a="http://schemas.openxmlformats.org/drawingml/2006/main">
               <a:ext uri="{FF2B5EF4-FFF2-40B4-BE49-F238E27FC236}">
-                <a16:creationId xmlns:a16="http://schemas.microsoft.com/office/drawing/2014/main" id="{BEFC3218-2995-4242-9DF5-049B9C285563}"/>
+                <a16:creationId xmlns:a16="http://schemas.microsoft.com/office/drawing/2014/main" id="{4F388A55-AFD8-4CB8-A545-8F1AB82F06BC}"/>
               </a:ext>
             </a:extLst>
           </p:cNvPr>
@@ -5806,7 +5806,7 @@
           <p:cNvPr id="32" name="">
             <a:extLst xmlns:a="http://schemas.openxmlformats.org/drawingml/2006/main">
               <a:ext uri="{FF2B5EF4-FFF2-40B4-BE49-F238E27FC236}">
-                <a16:creationId xmlns:a16="http://schemas.microsoft.com/office/drawing/2014/main" id="{8EADD582-C86C-4F51-B79C-50F5405773D0}"/>
+                <a16:creationId xmlns:a16="http://schemas.microsoft.com/office/drawing/2014/main" id="{4A427BD5-B1F9-4A36-AAC6-72697DFECD33}"/>
               </a:ext>
             </a:extLst>
           </p:cNvPr>
@@ -5847,7 +5847,7 @@
           <p:nvPr/>
         </p:nvPicPr>
         <p:blipFill>
-          <a:blip xmlns:r="http://schemas.openxmlformats.org/officeDocument/2006/relationships" xmlns:a="http://schemas.openxmlformats.org/drawingml/2006/main" r:embed="R54fa3d1e3e824b23"/>
+          <a:blip xmlns:r="http://schemas.openxmlformats.org/officeDocument/2006/relationships" xmlns:a="http://schemas.openxmlformats.org/drawingml/2006/main" r:embed="R901c2a628a0c46b2"/>
           <a:srcRect xmlns:a="http://schemas.openxmlformats.org/drawingml/2006/main" l="0" t="8112" r="0" b="8112"/>
           <a:stretch xmlns:a="http://schemas.openxmlformats.org/drawingml/2006/main">
             <a:fillRect l="0" t="0" r="0" b="0"/>
@@ -5868,7 +5868,7 @@
           <p:cNvPr id="34" name="">
             <a:extLst xmlns:a="http://schemas.openxmlformats.org/drawingml/2006/main">
               <a:ext uri="{FF2B5EF4-FFF2-40B4-BE49-F238E27FC236}">
-                <a16:creationId xmlns:a16="http://schemas.microsoft.com/office/drawing/2014/main" id="{23F0D23D-458C-49DC-966B-3D450D4E1B32}"/>
+                <a16:creationId xmlns:a16="http://schemas.microsoft.com/office/drawing/2014/main" id="{0F386C6A-165E-4E7B-B2E8-BDA571687572}"/>
               </a:ext>
             </a:extLst>
           </p:cNvPr>
@@ -5909,7 +5909,7 @@
           <p:nvPr/>
         </p:nvPicPr>
         <p:blipFill>
-          <a:blip xmlns:r="http://schemas.openxmlformats.org/officeDocument/2006/relationships" xmlns:a="http://schemas.openxmlformats.org/drawingml/2006/main" r:embed="Rf386e9e4494646c4"/>
+          <a:blip xmlns:r="http://schemas.openxmlformats.org/officeDocument/2006/relationships" xmlns:a="http://schemas.openxmlformats.org/drawingml/2006/main" r:embed="R9ff00650d6a9472d"/>
           <a:srcRect xmlns:a="http://schemas.openxmlformats.org/drawingml/2006/main" l="1092" t="0" r="1092" b="0"/>
           <a:stretch xmlns:a="http://schemas.openxmlformats.org/drawingml/2006/main">
             <a:fillRect l="0" t="0" r="0" b="0"/>
@@ -5930,7 +5930,7 @@
           <p:cNvPr id="36" name="">
             <a:extLst xmlns:a="http://schemas.openxmlformats.org/drawingml/2006/main">
               <a:ext uri="{FF2B5EF4-FFF2-40B4-BE49-F238E27FC236}">
-                <a16:creationId xmlns:a16="http://schemas.microsoft.com/office/drawing/2014/main" id="{19C35BC0-75DB-4B1B-A93E-7A3C1812B9A4}"/>
+                <a16:creationId xmlns:a16="http://schemas.microsoft.com/office/drawing/2014/main" id="{CD4BFF04-59B3-4672-AD27-D31DF005896E}"/>
               </a:ext>
             </a:extLst>
           </p:cNvPr>
@@ -5971,7 +5971,7 @@
           <p:nvPr/>
         </p:nvPicPr>
         <p:blipFill>
-          <a:blip xmlns:r="http://schemas.openxmlformats.org/officeDocument/2006/relationships" xmlns:a="http://schemas.openxmlformats.org/drawingml/2006/main" r:embed="R7fde1159ceb04ee9"/>
+          <a:blip xmlns:r="http://schemas.openxmlformats.org/officeDocument/2006/relationships" xmlns:a="http://schemas.openxmlformats.org/drawingml/2006/main" r:embed="Refe0db43dd0344ee"/>
           <a:srcRect xmlns:a="http://schemas.openxmlformats.org/drawingml/2006/main" l="19780" t="0" r="19780" b="0"/>
           <a:stretch xmlns:a="http://schemas.openxmlformats.org/drawingml/2006/main">
             <a:fillRect l="0" t="0" r="0" b="0"/>
@@ -5992,7 +5992,7 @@
           <p:cNvPr id="38" name="">
             <a:extLst xmlns:a="http://schemas.openxmlformats.org/drawingml/2006/main">
               <a:ext uri="{FF2B5EF4-FFF2-40B4-BE49-F238E27FC236}">
-                <a16:creationId xmlns:a16="http://schemas.microsoft.com/office/drawing/2014/main" id="{5241DF9A-5B72-40DB-BD06-3EE2775ECC28}"/>
+                <a16:creationId xmlns:a16="http://schemas.microsoft.com/office/drawing/2014/main" id="{2F6E0892-FE14-46D9-8F51-3A07656604E1}"/>
               </a:ext>
             </a:extLst>
           </p:cNvPr>
@@ -6004,7 +6004,7 @@
         <p:spPr>
           <a:xfrm xmlns:a="http://schemas.openxmlformats.org/drawingml/2006/main">
             <a:off x="7143750" y="4171950"/>
-            <a:ext cx="1714500" cy="1219200"/>
+            <a:ext cx="1524000" cy="1219200"/>
           </a:xfrm>
           <a:prstGeom xmlns:a="http://schemas.openxmlformats.org/drawingml/2006/main" prst="rect">
             <a:avLst/>
@@ -6029,7 +6029,7 @@
           <p:cNvPr id="39" name="">
             <a:extLst xmlns:a="http://schemas.openxmlformats.org/drawingml/2006/main">
               <a:ext uri="{FF2B5EF4-FFF2-40B4-BE49-F238E27FC236}">
-                <a16:creationId xmlns:a16="http://schemas.microsoft.com/office/drawing/2014/main" id="{0A90CD9B-BB23-40F9-86FA-B28C8501F860}"/>
+                <a16:creationId xmlns:a16="http://schemas.microsoft.com/office/drawing/2014/main" id="{B725FB5C-D8FC-434F-80CE-ACD668C9A73E}"/>
               </a:ext>
             </a:extLst>
           </p:cNvPr>
@@ -6041,7 +6041,7 @@
         <p:spPr>
           <a:xfrm xmlns:a="http://schemas.openxmlformats.org/drawingml/2006/main">
             <a:off x="7153275" y="4181475"/>
-            <a:ext cx="1695450" cy="47625"/>
+            <a:ext cx="1504950" cy="47625"/>
           </a:xfrm>
           <a:prstGeom xmlns:a="http://schemas.openxmlformats.org/drawingml/2006/main" prst="rect">
             <a:avLst/>
@@ -6066,7 +6066,7 @@
           <p:cNvPr id="40" name="">
             <a:extLst xmlns:a="http://schemas.openxmlformats.org/drawingml/2006/main">
               <a:ext uri="{FF2B5EF4-FFF2-40B4-BE49-F238E27FC236}">
-                <a16:creationId xmlns:a16="http://schemas.microsoft.com/office/drawing/2014/main" id="{53D74219-AE09-4E16-995B-21D5645B390D}"/>
+                <a16:creationId xmlns:a16="http://schemas.microsoft.com/office/drawing/2014/main" id="{8D20E68A-1BC3-4619-AD88-785C571CBB8B}"/>
               </a:ext>
             </a:extLst>
           </p:cNvPr>
@@ -6078,7 +6078,7 @@
         <p:spPr>
           <a:xfrm xmlns:a="http://schemas.openxmlformats.org/drawingml/2006/main">
             <a:off x="7334250" y="4343400"/>
-            <a:ext cx="1333500" cy="419100"/>
+            <a:ext cx="1143000" cy="419100"/>
           </a:xfrm>
           <a:prstGeom xmlns:a="http://schemas.openxmlformats.org/drawingml/2006/main" prst="rect">
             <a:avLst/>
@@ -6130,7 +6130,7 @@
           <p:cNvPr id="41" name="">
             <a:extLst xmlns:a="http://schemas.openxmlformats.org/drawingml/2006/main">
               <a:ext uri="{FF2B5EF4-FFF2-40B4-BE49-F238E27FC236}">
-                <a16:creationId xmlns:a16="http://schemas.microsoft.com/office/drawing/2014/main" id="{042E45B7-9353-4E03-9273-58263513F256}"/>
+                <a16:creationId xmlns:a16="http://schemas.microsoft.com/office/drawing/2014/main" id="{BC978D35-77DC-4B84-9CDF-98B7E6EC70EA}"/>
               </a:ext>
             </a:extLst>
           </p:cNvPr>
@@ -6142,7 +6142,7 @@
         <p:spPr>
           <a:xfrm xmlns:a="http://schemas.openxmlformats.org/drawingml/2006/main">
             <a:off x="7334250" y="4895850"/>
-            <a:ext cx="1333500" cy="419100"/>
+            <a:ext cx="1143000" cy="419100"/>
           </a:xfrm>
           <a:prstGeom xmlns:a="http://schemas.openxmlformats.org/drawingml/2006/main" prst="rect">
             <a:avLst/>
@@ -6194,19 +6194,19 @@
           <p:cNvPr id="42" name="">
             <a:extLst xmlns:a="http://schemas.openxmlformats.org/drawingml/2006/main">
               <a:ext uri="{FF2B5EF4-FFF2-40B4-BE49-F238E27FC236}">
-                <a16:creationId xmlns:a16="http://schemas.microsoft.com/office/drawing/2014/main" id="{A99F0E51-3DD9-4D48-9397-F9A245B7BFCD}"/>
-              </a:ext>
-            </a:extLst>
-          </p:cNvPr>
-          <p:cNvSpPr>
-            <a:spLocks xmlns:a="http://schemas.openxmlformats.org/drawingml/2006/main" noGrp="1"/>
-          </p:cNvSpPr>
-          <p:nvPr/>
-        </p:nvSpPr>
-        <p:spPr>
-          <a:xfrm xmlns:a="http://schemas.openxmlformats.org/drawingml/2006/main">
-            <a:off x="9096375" y="4171950"/>
-            <a:ext cx="1714500" cy="1219200"/>
+                <a16:creationId xmlns:a16="http://schemas.microsoft.com/office/drawing/2014/main" id="{B241F09B-FB10-496F-B9FA-16205506569A}"/>
+              </a:ext>
+            </a:extLst>
+          </p:cNvPr>
+          <p:cNvSpPr>
+            <a:spLocks xmlns:a="http://schemas.openxmlformats.org/drawingml/2006/main" noGrp="1"/>
+          </p:cNvSpPr>
+          <p:nvPr/>
+        </p:nvSpPr>
+        <p:spPr>
+          <a:xfrm xmlns:a="http://schemas.openxmlformats.org/drawingml/2006/main">
+            <a:off x="8877300" y="4171950"/>
+            <a:ext cx="1581150" cy="1219200"/>
           </a:xfrm>
           <a:prstGeom xmlns:a="http://schemas.openxmlformats.org/drawingml/2006/main" prst="rect">
             <a:avLst/>
@@ -6231,19 +6231,19 @@
           <p:cNvPr id="43" name="">
             <a:extLst xmlns:a="http://schemas.openxmlformats.org/drawingml/2006/main">
               <a:ext uri="{FF2B5EF4-FFF2-40B4-BE49-F238E27FC236}">
-                <a16:creationId xmlns:a16="http://schemas.microsoft.com/office/drawing/2014/main" id="{196CF699-DF77-4D45-8DAC-BC655959CE2B}"/>
-              </a:ext>
-            </a:extLst>
-          </p:cNvPr>
-          <p:cNvSpPr>
-            <a:spLocks xmlns:a="http://schemas.openxmlformats.org/drawingml/2006/main" noGrp="1"/>
-          </p:cNvSpPr>
-          <p:nvPr/>
-        </p:nvSpPr>
-        <p:spPr>
-          <a:xfrm xmlns:a="http://schemas.openxmlformats.org/drawingml/2006/main">
-            <a:off x="9105900" y="4181475"/>
-            <a:ext cx="1695450" cy="47625"/>
+                <a16:creationId xmlns:a16="http://schemas.microsoft.com/office/drawing/2014/main" id="{3153C9EF-A15F-4C99-A44D-407188B1C4F0}"/>
+              </a:ext>
+            </a:extLst>
+          </p:cNvPr>
+          <p:cNvSpPr>
+            <a:spLocks xmlns:a="http://schemas.openxmlformats.org/drawingml/2006/main" noGrp="1"/>
+          </p:cNvSpPr>
+          <p:nvPr/>
+        </p:nvSpPr>
+        <p:spPr>
+          <a:xfrm xmlns:a="http://schemas.openxmlformats.org/drawingml/2006/main">
+            <a:off x="8886825" y="4181475"/>
+            <a:ext cx="1562100" cy="47625"/>
           </a:xfrm>
           <a:prstGeom xmlns:a="http://schemas.openxmlformats.org/drawingml/2006/main" prst="rect">
             <a:avLst/>
@@ -6268,19 +6268,19 @@
           <p:cNvPr id="44" name="">
             <a:extLst xmlns:a="http://schemas.openxmlformats.org/drawingml/2006/main">
               <a:ext uri="{FF2B5EF4-FFF2-40B4-BE49-F238E27FC236}">
-                <a16:creationId xmlns:a16="http://schemas.microsoft.com/office/drawing/2014/main" id="{00C70612-88FC-4F96-9863-9EFB38D107A7}"/>
-              </a:ext>
-            </a:extLst>
-          </p:cNvPr>
-          <p:cNvSpPr>
-            <a:spLocks xmlns:a="http://schemas.openxmlformats.org/drawingml/2006/main" noGrp="1"/>
-          </p:cNvSpPr>
-          <p:nvPr/>
-        </p:nvSpPr>
-        <p:spPr>
-          <a:xfrm xmlns:a="http://schemas.openxmlformats.org/drawingml/2006/main">
-            <a:off x="9286875" y="4343400"/>
-            <a:ext cx="1333500" cy="419100"/>
+                <a16:creationId xmlns:a16="http://schemas.microsoft.com/office/drawing/2014/main" id="{5881CCA5-4869-4507-8597-B7532DFE4F05}"/>
+              </a:ext>
+            </a:extLst>
+          </p:cNvPr>
+          <p:cNvSpPr>
+            <a:spLocks xmlns:a="http://schemas.openxmlformats.org/drawingml/2006/main" noGrp="1"/>
+          </p:cNvSpPr>
+          <p:nvPr/>
+        </p:nvSpPr>
+        <p:spPr>
+          <a:xfrm xmlns:a="http://schemas.openxmlformats.org/drawingml/2006/main">
+            <a:off x="9067800" y="4343400"/>
+            <a:ext cx="1200150" cy="419100"/>
           </a:xfrm>
           <a:prstGeom xmlns:a="http://schemas.openxmlformats.org/drawingml/2006/main" prst="rect">
             <a:avLst/>
@@ -6322,7 +6322,7 @@
                 <a:ea typeface="Aptos Display"/>
                 <a:cs typeface="Aptos Display"/>
               </a:rPr>
-              <a:t>Presets</a:t>
+              <a:t>Scenes</a:t>
             </a:r>
           </a:p>
         </p:txBody>
@@ -6332,19 +6332,19 @@
           <p:cNvPr id="45" name="">
             <a:extLst xmlns:a="http://schemas.openxmlformats.org/drawingml/2006/main">
               <a:ext uri="{FF2B5EF4-FFF2-40B4-BE49-F238E27FC236}">
-                <a16:creationId xmlns:a16="http://schemas.microsoft.com/office/drawing/2014/main" id="{D510D71B-3067-4588-82D6-052AD890E1CF}"/>
-              </a:ext>
-            </a:extLst>
-          </p:cNvPr>
-          <p:cNvSpPr>
-            <a:spLocks xmlns:a="http://schemas.openxmlformats.org/drawingml/2006/main" noGrp="1"/>
-          </p:cNvSpPr>
-          <p:nvPr/>
-        </p:nvSpPr>
-        <p:spPr>
-          <a:xfrm xmlns:a="http://schemas.openxmlformats.org/drawingml/2006/main">
-            <a:off x="9286875" y="4895850"/>
-            <a:ext cx="1333500" cy="419100"/>
+                <a16:creationId xmlns:a16="http://schemas.microsoft.com/office/drawing/2014/main" id="{A60783DA-7D4A-465B-802D-E1148416F692}"/>
+              </a:ext>
+            </a:extLst>
+          </p:cNvPr>
+          <p:cNvSpPr>
+            <a:spLocks xmlns:a="http://schemas.openxmlformats.org/drawingml/2006/main" noGrp="1"/>
+          </p:cNvSpPr>
+          <p:nvPr/>
+        </p:nvSpPr>
+        <p:spPr>
+          <a:xfrm xmlns:a="http://schemas.openxmlformats.org/drawingml/2006/main">
+            <a:off x="9067800" y="4895850"/>
+            <a:ext cx="1200150" cy="419100"/>
           </a:xfrm>
           <a:prstGeom xmlns:a="http://schemas.openxmlformats.org/drawingml/2006/main" prst="rect">
             <a:avLst/>
@@ -6386,7 +6386,7 @@
                 <a:ea typeface="Aptos"/>
                 <a:cs typeface="Aptos"/>
               </a:rPr>
-              <a:t>one-click scenes</a:t>
+              <a:t>one-click presets</a:t>
             </a:r>
           </a:p>
         </p:txBody>
@@ -6396,7 +6396,7 @@
           <p:cNvPr id="46" name="">
             <a:extLst xmlns:a="http://schemas.openxmlformats.org/drawingml/2006/main">
               <a:ext uri="{FF2B5EF4-FFF2-40B4-BE49-F238E27FC236}">
-                <a16:creationId xmlns:a16="http://schemas.microsoft.com/office/drawing/2014/main" id="{886C7331-2CDB-4075-BC9E-1F333FB3AF19}"/>
+                <a16:creationId xmlns:a16="http://schemas.microsoft.com/office/drawing/2014/main" id="{969E8423-7F93-4A47-A16C-3095A6249562}"/>
               </a:ext>
             </a:extLst>
           </p:cNvPr>
@@ -6433,7 +6433,7 @@
           <p:cNvPr id="47" name="">
             <a:extLst xmlns:a="http://schemas.openxmlformats.org/drawingml/2006/main">
               <a:ext uri="{FF2B5EF4-FFF2-40B4-BE49-F238E27FC236}">
-                <a16:creationId xmlns:a16="http://schemas.microsoft.com/office/drawing/2014/main" id="{D37511BE-06B8-4F56-B494-00E0B602A0BC}"/>
+                <a16:creationId xmlns:a16="http://schemas.microsoft.com/office/drawing/2014/main" id="{E9ACB810-0FD6-4E83-9AEA-CCC67E2960C0}"/>
               </a:ext>
             </a:extLst>
           </p:cNvPr>
@@ -6495,7 +6495,7 @@
     </p:spTree>
     <p:extLst>
       <p:ext uri="{BB962C8B-B14F-4D97-AF65-F5344CB8AC3E}">
-        <p14:creationId xmlns:p14="http://schemas.microsoft.com/office/powerpoint/2010/main" val="1871573513"/>
+        <p14:creationId xmlns:p14="http://schemas.microsoft.com/office/powerpoint/2010/main" val="2071946216"/>
       </p:ext>
     </p:extLst>
   </p:cSld>
@@ -6519,7 +6519,7 @@
           <p:cNvPr id="1" name="">
             <a:extLst xmlns:a="http://schemas.openxmlformats.org/drawingml/2006/main">
               <a:ext uri="{FF2B5EF4-FFF2-40B4-BE49-F238E27FC236}">
-                <a16:creationId xmlns:a16="http://schemas.microsoft.com/office/drawing/2014/main" id="{0E2EBAA8-5900-4FB6-B8F5-43A314E8A928}"/>
+                <a16:creationId xmlns:a16="http://schemas.microsoft.com/office/drawing/2014/main" id="{EFB1725A-381F-4B3D-AEE4-06B9954BA73C}"/>
               </a:ext>
             </a:extLst>
           </p:cNvPr>
@@ -6554,7 +6554,7 @@
           <p:cNvPr id="2" name="">
             <a:extLst xmlns:a="http://schemas.openxmlformats.org/drawingml/2006/main">
               <a:ext uri="{FF2B5EF4-FFF2-40B4-BE49-F238E27FC236}">
-                <a16:creationId xmlns:a16="http://schemas.microsoft.com/office/drawing/2014/main" id="{53682DF1-17E7-46D6-8770-27185D71A876}"/>
+                <a16:creationId xmlns:a16="http://schemas.microsoft.com/office/drawing/2014/main" id="{1AFE8F8D-E2F0-434D-9CD4-7004551786F5}"/>
               </a:ext>
             </a:extLst>
           </p:cNvPr>
@@ -6600,7 +6600,7 @@
           <p:cNvPr id="3" name="">
             <a:extLst xmlns:a="http://schemas.openxmlformats.org/drawingml/2006/main">
               <a:ext uri="{FF2B5EF4-FFF2-40B4-BE49-F238E27FC236}">
-                <a16:creationId xmlns:a16="http://schemas.microsoft.com/office/drawing/2014/main" id="{1CE2B769-83CC-43A9-A132-F82CACADD2D8}"/>
+                <a16:creationId xmlns:a16="http://schemas.microsoft.com/office/drawing/2014/main" id="{2249C2B4-0A2E-4D90-BBB7-D6A28501DC9D}"/>
               </a:ext>
             </a:extLst>
           </p:cNvPr>
@@ -6637,7 +6637,7 @@
           <p:cNvPr id="4" name="">
             <a:extLst xmlns:a="http://schemas.openxmlformats.org/drawingml/2006/main">
               <a:ext uri="{FF2B5EF4-FFF2-40B4-BE49-F238E27FC236}">
-                <a16:creationId xmlns:a16="http://schemas.microsoft.com/office/drawing/2014/main" id="{55C3DB96-F475-46B1-9A93-537C9A6A85B6}"/>
+                <a16:creationId xmlns:a16="http://schemas.microsoft.com/office/drawing/2014/main" id="{B6E5C7AC-EBC6-466A-ABE1-D7DA5FD9A0D2}"/>
               </a:ext>
             </a:extLst>
           </p:cNvPr>
@@ -6674,7 +6674,7 @@
           <p:cNvPr id="5" name="">
             <a:extLst xmlns:a="http://schemas.openxmlformats.org/drawingml/2006/main">
               <a:ext uri="{FF2B5EF4-FFF2-40B4-BE49-F238E27FC236}">
-                <a16:creationId xmlns:a16="http://schemas.microsoft.com/office/drawing/2014/main" id="{6B360D4A-56D6-4D01-901F-2D8367165EC0}"/>
+                <a16:creationId xmlns:a16="http://schemas.microsoft.com/office/drawing/2014/main" id="{8D1DA5B0-34CE-477A-A83A-AF18BA34A245}"/>
               </a:ext>
             </a:extLst>
           </p:cNvPr>
@@ -6711,7 +6711,7 @@
           <p:cNvPr id="6" name="">
             <a:extLst xmlns:a="http://schemas.openxmlformats.org/drawingml/2006/main">
               <a:ext uri="{FF2B5EF4-FFF2-40B4-BE49-F238E27FC236}">
-                <a16:creationId xmlns:a16="http://schemas.microsoft.com/office/drawing/2014/main" id="{522D38DF-E516-4827-820A-58A4EDDAD9A9}"/>
+                <a16:creationId xmlns:a16="http://schemas.microsoft.com/office/drawing/2014/main" id="{62A444ED-216A-487E-A74A-BEAC9F853050}"/>
               </a:ext>
             </a:extLst>
           </p:cNvPr>
@@ -6748,7 +6748,7 @@
           <p:cNvPr id="7" name="">
             <a:extLst xmlns:a="http://schemas.openxmlformats.org/drawingml/2006/main">
               <a:ext uri="{FF2B5EF4-FFF2-40B4-BE49-F238E27FC236}">
-                <a16:creationId xmlns:a16="http://schemas.microsoft.com/office/drawing/2014/main" id="{B751E256-8C52-46EA-8130-659B7D177247}"/>
+                <a16:creationId xmlns:a16="http://schemas.microsoft.com/office/drawing/2014/main" id="{48C00C46-CFDF-4C83-AE7D-400B745D408B}"/>
               </a:ext>
             </a:extLst>
           </p:cNvPr>
@@ -6785,7 +6785,7 @@
           <p:cNvPr id="8" name="">
             <a:extLst xmlns:a="http://schemas.openxmlformats.org/drawingml/2006/main">
               <a:ext uri="{FF2B5EF4-FFF2-40B4-BE49-F238E27FC236}">
-                <a16:creationId xmlns:a16="http://schemas.microsoft.com/office/drawing/2014/main" id="{5B9E0479-E6D6-416C-B3DD-5FC33A3139F5}"/>
+                <a16:creationId xmlns:a16="http://schemas.microsoft.com/office/drawing/2014/main" id="{5F2B8D42-AFC0-4633-9083-838073866F52}"/>
               </a:ext>
             </a:extLst>
           </p:cNvPr>
@@ -6822,7 +6822,7 @@
           <p:cNvPr id="9" name="">
             <a:extLst xmlns:a="http://schemas.openxmlformats.org/drawingml/2006/main">
               <a:ext uri="{FF2B5EF4-FFF2-40B4-BE49-F238E27FC236}">
-                <a16:creationId xmlns:a16="http://schemas.microsoft.com/office/drawing/2014/main" id="{A62B66EE-2810-4726-9D88-0F72B034318A}"/>
+                <a16:creationId xmlns:a16="http://schemas.microsoft.com/office/drawing/2014/main" id="{AE6D818D-52F5-4DD8-9CC0-A14B621F053F}"/>
               </a:ext>
             </a:extLst>
           </p:cNvPr>
@@ -6859,7 +6859,7 @@
           <p:cNvPr id="10" name="">
             <a:extLst xmlns:a="http://schemas.openxmlformats.org/drawingml/2006/main">
               <a:ext uri="{FF2B5EF4-FFF2-40B4-BE49-F238E27FC236}">
-                <a16:creationId xmlns:a16="http://schemas.microsoft.com/office/drawing/2014/main" id="{A673F1EA-3D87-400E-873D-0F6207F1D6C1}"/>
+                <a16:creationId xmlns:a16="http://schemas.microsoft.com/office/drawing/2014/main" id="{C63753F4-2C14-431D-841B-AF1B9D81149C}"/>
               </a:ext>
             </a:extLst>
           </p:cNvPr>
@@ -6896,7 +6896,7 @@
           <p:cNvPr id="11" name="">
             <a:extLst xmlns:a="http://schemas.openxmlformats.org/drawingml/2006/main">
               <a:ext uri="{FF2B5EF4-FFF2-40B4-BE49-F238E27FC236}">
-                <a16:creationId xmlns:a16="http://schemas.microsoft.com/office/drawing/2014/main" id="{F542DC90-7FA2-4E3A-81B1-03C2E06AA520}"/>
+                <a16:creationId xmlns:a16="http://schemas.microsoft.com/office/drawing/2014/main" id="{85E6E697-523E-433A-8CE3-8A30A47BA357}"/>
               </a:ext>
             </a:extLst>
           </p:cNvPr>
@@ -6933,7 +6933,7 @@
           <p:cNvPr id="12" name="">
             <a:extLst xmlns:a="http://schemas.openxmlformats.org/drawingml/2006/main">
               <a:ext uri="{FF2B5EF4-FFF2-40B4-BE49-F238E27FC236}">
-                <a16:creationId xmlns:a16="http://schemas.microsoft.com/office/drawing/2014/main" id="{B1E9514C-6B09-4734-977B-B502FCC1C25D}"/>
+                <a16:creationId xmlns:a16="http://schemas.microsoft.com/office/drawing/2014/main" id="{D4AC4F80-9D4C-429B-A55D-F0765732A1A5}"/>
               </a:ext>
             </a:extLst>
           </p:cNvPr>
@@ -6970,7 +6970,7 @@
           <p:cNvPr id="13" name="">
             <a:extLst xmlns:a="http://schemas.openxmlformats.org/drawingml/2006/main">
               <a:ext uri="{FF2B5EF4-FFF2-40B4-BE49-F238E27FC236}">
-                <a16:creationId xmlns:a16="http://schemas.microsoft.com/office/drawing/2014/main" id="{3FCB007E-5117-4739-886C-311A8C754064}"/>
+                <a16:creationId xmlns:a16="http://schemas.microsoft.com/office/drawing/2014/main" id="{0E9BE8F8-CC57-41F1-9CE6-A3387971E0A5}"/>
               </a:ext>
             </a:extLst>
           </p:cNvPr>
@@ -7007,7 +7007,7 @@
           <p:cNvPr id="14" name="">
             <a:extLst xmlns:a="http://schemas.openxmlformats.org/drawingml/2006/main">
               <a:ext uri="{FF2B5EF4-FFF2-40B4-BE49-F238E27FC236}">
-                <a16:creationId xmlns:a16="http://schemas.microsoft.com/office/drawing/2014/main" id="{BCF31A89-F5EF-4862-9855-657713CC2B52}"/>
+                <a16:creationId xmlns:a16="http://schemas.microsoft.com/office/drawing/2014/main" id="{C141E76A-51C3-4A04-9EAD-840A8CF76C87}"/>
               </a:ext>
             </a:extLst>
           </p:cNvPr>
@@ -7044,7 +7044,7 @@
           <p:cNvPr id="15" name="">
             <a:extLst xmlns:a="http://schemas.openxmlformats.org/drawingml/2006/main">
               <a:ext uri="{FF2B5EF4-FFF2-40B4-BE49-F238E27FC236}">
-                <a16:creationId xmlns:a16="http://schemas.microsoft.com/office/drawing/2014/main" id="{2C3DB988-3C05-46C4-9FD9-8ED30D295184}"/>
+                <a16:creationId xmlns:a16="http://schemas.microsoft.com/office/drawing/2014/main" id="{8A8C83D0-91EB-45D9-AE18-50DE0E7E6EF5}"/>
               </a:ext>
             </a:extLst>
           </p:cNvPr>
@@ -7081,7 +7081,7 @@
           <p:cNvPr id="16" name="">
             <a:extLst xmlns:a="http://schemas.openxmlformats.org/drawingml/2006/main">
               <a:ext uri="{FF2B5EF4-FFF2-40B4-BE49-F238E27FC236}">
-                <a16:creationId xmlns:a16="http://schemas.microsoft.com/office/drawing/2014/main" id="{327F9DF6-FD62-47A5-AC3E-481D07852AAC}"/>
+                <a16:creationId xmlns:a16="http://schemas.microsoft.com/office/drawing/2014/main" id="{822E00CD-DFC6-48C4-BA06-4CA2D3F38DF1}"/>
               </a:ext>
             </a:extLst>
           </p:cNvPr>
@@ -7118,7 +7118,7 @@
           <p:cNvPr id="17" name="">
             <a:extLst xmlns:a="http://schemas.openxmlformats.org/drawingml/2006/main">
               <a:ext uri="{FF2B5EF4-FFF2-40B4-BE49-F238E27FC236}">
-                <a16:creationId xmlns:a16="http://schemas.microsoft.com/office/drawing/2014/main" id="{BC79A7A0-E4E2-4365-A133-7AB43069D362}"/>
+                <a16:creationId xmlns:a16="http://schemas.microsoft.com/office/drawing/2014/main" id="{CBE5A13F-5782-4E86-9B58-FC10C74323F1}"/>
               </a:ext>
             </a:extLst>
           </p:cNvPr>
@@ -7155,7 +7155,7 @@
           <p:cNvPr id="18" name="">
             <a:extLst xmlns:a="http://schemas.openxmlformats.org/drawingml/2006/main">
               <a:ext uri="{FF2B5EF4-FFF2-40B4-BE49-F238E27FC236}">
-                <a16:creationId xmlns:a16="http://schemas.microsoft.com/office/drawing/2014/main" id="{7CC4E906-06BC-4627-BD16-9F6685A104F4}"/>
+                <a16:creationId xmlns:a16="http://schemas.microsoft.com/office/drawing/2014/main" id="{FB2DA0C9-D6DE-4A45-BD4A-068BFE4D5030}"/>
               </a:ext>
             </a:extLst>
           </p:cNvPr>
@@ -7192,7 +7192,7 @@
           <p:cNvPr id="19" name="">
             <a:extLst xmlns:a="http://schemas.openxmlformats.org/drawingml/2006/main">
               <a:ext uri="{FF2B5EF4-FFF2-40B4-BE49-F238E27FC236}">
-                <a16:creationId xmlns:a16="http://schemas.microsoft.com/office/drawing/2014/main" id="{37A70C09-6E85-4283-8002-6272E06C1429}"/>
+                <a16:creationId xmlns:a16="http://schemas.microsoft.com/office/drawing/2014/main" id="{78D6C315-4DC8-40F9-A508-139751F8D6B5}"/>
               </a:ext>
             </a:extLst>
           </p:cNvPr>
@@ -7229,7 +7229,7 @@
           <p:cNvPr id="20" name="">
             <a:extLst xmlns:a="http://schemas.openxmlformats.org/drawingml/2006/main">
               <a:ext uri="{FF2B5EF4-FFF2-40B4-BE49-F238E27FC236}">
-                <a16:creationId xmlns:a16="http://schemas.microsoft.com/office/drawing/2014/main" id="{2101F02E-8AFF-4CCD-B24C-B105062A5AF6}"/>
+                <a16:creationId xmlns:a16="http://schemas.microsoft.com/office/drawing/2014/main" id="{BA07A63B-EA2A-4504-AAA7-EDF1EC0BF6EB}"/>
               </a:ext>
             </a:extLst>
           </p:cNvPr>
@@ -7266,7 +7266,7 @@
           <p:cNvPr id="21" name="">
             <a:extLst xmlns:a="http://schemas.openxmlformats.org/drawingml/2006/main">
               <a:ext uri="{FF2B5EF4-FFF2-40B4-BE49-F238E27FC236}">
-                <a16:creationId xmlns:a16="http://schemas.microsoft.com/office/drawing/2014/main" id="{40D97F37-FB1C-4CE8-B31E-020F9F04EB82}"/>
+                <a16:creationId xmlns:a16="http://schemas.microsoft.com/office/drawing/2014/main" id="{ADCDEA35-08CE-4023-BFA6-94E97BA57B71}"/>
               </a:ext>
             </a:extLst>
           </p:cNvPr>
@@ -7303,7 +7303,7 @@
           <p:cNvPr id="22" name="">
             <a:extLst xmlns:a="http://schemas.openxmlformats.org/drawingml/2006/main">
               <a:ext uri="{FF2B5EF4-FFF2-40B4-BE49-F238E27FC236}">
-                <a16:creationId xmlns:a16="http://schemas.microsoft.com/office/drawing/2014/main" id="{DEE0C5FC-48AD-4326-8672-F2776946D2C7}"/>
+                <a16:creationId xmlns:a16="http://schemas.microsoft.com/office/drawing/2014/main" id="{7B20AFB6-289F-40BF-9510-91AC8C45A4AD}"/>
               </a:ext>
             </a:extLst>
           </p:cNvPr>
@@ -7340,7 +7340,7 @@
           <p:cNvPr id="23" name="">
             <a:extLst xmlns:a="http://schemas.openxmlformats.org/drawingml/2006/main">
               <a:ext uri="{FF2B5EF4-FFF2-40B4-BE49-F238E27FC236}">
-                <a16:creationId xmlns:a16="http://schemas.microsoft.com/office/drawing/2014/main" id="{E979B849-1A43-4B4F-B2B9-4C8E27B45292}"/>
+                <a16:creationId xmlns:a16="http://schemas.microsoft.com/office/drawing/2014/main" id="{85A6566A-8DA8-4620-B380-7D08DC1570EC}"/>
               </a:ext>
             </a:extLst>
           </p:cNvPr>
@@ -7377,7 +7377,7 @@
           <p:cNvPr id="24" name="">
             <a:extLst xmlns:a="http://schemas.openxmlformats.org/drawingml/2006/main">
               <a:ext uri="{FF2B5EF4-FFF2-40B4-BE49-F238E27FC236}">
-                <a16:creationId xmlns:a16="http://schemas.microsoft.com/office/drawing/2014/main" id="{35F8977F-712F-4AAD-B906-9E11F6F45BF5}"/>
+                <a16:creationId xmlns:a16="http://schemas.microsoft.com/office/drawing/2014/main" id="{E313FC1A-193F-4B3F-835F-F36CE3900D50}"/>
               </a:ext>
             </a:extLst>
           </p:cNvPr>
@@ -7414,7 +7414,7 @@
           <p:cNvPr id="25" name="">
             <a:extLst xmlns:a="http://schemas.openxmlformats.org/drawingml/2006/main">
               <a:ext uri="{FF2B5EF4-FFF2-40B4-BE49-F238E27FC236}">
-                <a16:creationId xmlns:a16="http://schemas.microsoft.com/office/drawing/2014/main" id="{B8198920-933F-4DD5-BFAE-FB65F12DB4D3}"/>
+                <a16:creationId xmlns:a16="http://schemas.microsoft.com/office/drawing/2014/main" id="{116DEAEB-0DBD-4EF4-BDE5-4CEEB7476040}"/>
               </a:ext>
             </a:extLst>
           </p:cNvPr>
@@ -7451,7 +7451,7 @@
           <p:cNvPr id="26" name="">
             <a:extLst xmlns:a="http://schemas.openxmlformats.org/drawingml/2006/main">
               <a:ext uri="{FF2B5EF4-FFF2-40B4-BE49-F238E27FC236}">
-                <a16:creationId xmlns:a16="http://schemas.microsoft.com/office/drawing/2014/main" id="{10C20B60-4120-4316-80CD-A6AFC1B785BF}"/>
+                <a16:creationId xmlns:a16="http://schemas.microsoft.com/office/drawing/2014/main" id="{EE6C0377-3C53-402E-8808-C1F5886B677A}"/>
               </a:ext>
             </a:extLst>
           </p:cNvPr>
@@ -7498,7 +7498,7 @@
           <p:cNvPr id="27" name="">
             <a:extLst xmlns:a="http://schemas.openxmlformats.org/drawingml/2006/main">
               <a:ext uri="{FF2B5EF4-FFF2-40B4-BE49-F238E27FC236}">
-                <a16:creationId xmlns:a16="http://schemas.microsoft.com/office/drawing/2014/main" id="{BE32D2F2-3095-49EC-B672-60BCB6322D95}"/>
+                <a16:creationId xmlns:a16="http://schemas.microsoft.com/office/drawing/2014/main" id="{F75D9B33-DCA7-4B85-9663-B7CC65683A9B}"/>
               </a:ext>
             </a:extLst>
           </p:cNvPr>
@@ -7545,7 +7545,7 @@
           <p:cNvPr id="28" name="">
             <a:extLst xmlns:a="http://schemas.openxmlformats.org/drawingml/2006/main">
               <a:ext uri="{FF2B5EF4-FFF2-40B4-BE49-F238E27FC236}">
-                <a16:creationId xmlns:a16="http://schemas.microsoft.com/office/drawing/2014/main" id="{33213914-C7AD-4BBE-B79E-2E6A8B8DA873}"/>
+                <a16:creationId xmlns:a16="http://schemas.microsoft.com/office/drawing/2014/main" id="{A4CA4108-16AA-40B4-9E16-C4A66747DD36}"/>
               </a:ext>
             </a:extLst>
           </p:cNvPr>
@@ -7609,7 +7609,7 @@
           <p:cNvPr id="29" name="">
             <a:extLst xmlns:a="http://schemas.openxmlformats.org/drawingml/2006/main">
               <a:ext uri="{FF2B5EF4-FFF2-40B4-BE49-F238E27FC236}">
-                <a16:creationId xmlns:a16="http://schemas.microsoft.com/office/drawing/2014/main" id="{D8F2D93A-75E4-4FDF-88C3-11847C4555C1}"/>
+                <a16:creationId xmlns:a16="http://schemas.microsoft.com/office/drawing/2014/main" id="{032842D2-FB5D-4901-A6DD-B0128DA3B6F0}"/>
               </a:ext>
             </a:extLst>
           </p:cNvPr>
@@ -7673,7 +7673,7 @@
           <p:cNvPr id="30" name="">
             <a:extLst xmlns:a="http://schemas.openxmlformats.org/drawingml/2006/main">
               <a:ext uri="{FF2B5EF4-FFF2-40B4-BE49-F238E27FC236}">
-                <a16:creationId xmlns:a16="http://schemas.microsoft.com/office/drawing/2014/main" id="{6113A157-EF7C-403C-AC5C-0CE5BAC4194D}"/>
+                <a16:creationId xmlns:a16="http://schemas.microsoft.com/office/drawing/2014/main" id="{400F826D-05EC-40A5-9323-6788517CB6F5}"/>
               </a:ext>
             </a:extLst>
           </p:cNvPr>
@@ -7737,7 +7737,7 @@
           <p:cNvPr id="31" name="">
             <a:extLst xmlns:a="http://schemas.openxmlformats.org/drawingml/2006/main">
               <a:ext uri="{FF2B5EF4-FFF2-40B4-BE49-F238E27FC236}">
-                <a16:creationId xmlns:a16="http://schemas.microsoft.com/office/drawing/2014/main" id="{018886D6-31A0-4685-B595-220B6DEBB29C}"/>
+                <a16:creationId xmlns:a16="http://schemas.microsoft.com/office/drawing/2014/main" id="{64587377-1D4B-443C-BE04-E5DEF2597E81}"/>
               </a:ext>
             </a:extLst>
           </p:cNvPr>
@@ -7801,7 +7801,7 @@
           <p:cNvPr id="32" name="">
             <a:extLst xmlns:a="http://schemas.openxmlformats.org/drawingml/2006/main">
               <a:ext uri="{FF2B5EF4-FFF2-40B4-BE49-F238E27FC236}">
-                <a16:creationId xmlns:a16="http://schemas.microsoft.com/office/drawing/2014/main" id="{CCF8D27A-6E04-4C28-A2A5-4E81511C593B}"/>
+                <a16:creationId xmlns:a16="http://schemas.microsoft.com/office/drawing/2014/main" id="{01B21331-5C98-4456-82C7-5ADD53BE1648}"/>
               </a:ext>
             </a:extLst>
           </p:cNvPr>
@@ -7842,7 +7842,7 @@
           <p:nvPr/>
         </p:nvPicPr>
         <p:blipFill>
-          <a:blip xmlns:r="http://schemas.openxmlformats.org/officeDocument/2006/relationships" xmlns:a="http://schemas.openxmlformats.org/drawingml/2006/main" r:embed="R04c29c820ab64f5c"/>
+          <a:blip xmlns:r="http://schemas.openxmlformats.org/officeDocument/2006/relationships" xmlns:a="http://schemas.openxmlformats.org/drawingml/2006/main" r:embed="R9b0d6d0b46fd42c5"/>
           <a:stretch xmlns:a="http://schemas.openxmlformats.org/drawingml/2006/main"/>
         </p:blipFill>
         <p:spPr>
@@ -7860,7 +7860,7 @@
           <p:cNvPr id="34" name="">
             <a:extLst xmlns:a="http://schemas.openxmlformats.org/drawingml/2006/main">
               <a:ext uri="{FF2B5EF4-FFF2-40B4-BE49-F238E27FC236}">
-                <a16:creationId xmlns:a16="http://schemas.microsoft.com/office/drawing/2014/main" id="{058B736E-9C98-4431-94A8-5ECEF5461A15}"/>
+                <a16:creationId xmlns:a16="http://schemas.microsoft.com/office/drawing/2014/main" id="{2D8DADF9-8336-4C02-A66D-41D98BB5F6F1}"/>
               </a:ext>
             </a:extLst>
           </p:cNvPr>
@@ -7901,7 +7901,7 @@
           <p:nvPr/>
         </p:nvPicPr>
         <p:blipFill>
-          <a:blip xmlns:r="http://schemas.openxmlformats.org/officeDocument/2006/relationships" xmlns:a="http://schemas.openxmlformats.org/drawingml/2006/main" r:embed="R474b32f08661432c"/>
+          <a:blip xmlns:r="http://schemas.openxmlformats.org/officeDocument/2006/relationships" xmlns:a="http://schemas.openxmlformats.org/drawingml/2006/main" r:embed="R3326b569c07e45ba"/>
           <a:stretch xmlns:a="http://schemas.openxmlformats.org/drawingml/2006/main"/>
         </p:blipFill>
         <p:spPr>
@@ -7919,7 +7919,7 @@
           <p:cNvPr id="36" name="">
             <a:extLst xmlns:a="http://schemas.openxmlformats.org/drawingml/2006/main">
               <a:ext uri="{FF2B5EF4-FFF2-40B4-BE49-F238E27FC236}">
-                <a16:creationId xmlns:a16="http://schemas.microsoft.com/office/drawing/2014/main" id="{57401488-7617-4B9E-A186-74EF6BECAB2E}"/>
+                <a16:creationId xmlns:a16="http://schemas.microsoft.com/office/drawing/2014/main" id="{00F24E7B-E46C-4A8B-993E-058A471883D4}"/>
               </a:ext>
             </a:extLst>
           </p:cNvPr>
@@ -7983,7 +7983,7 @@
           <p:cNvPr id="37" name="">
             <a:extLst xmlns:a="http://schemas.openxmlformats.org/drawingml/2006/main">
               <a:ext uri="{FF2B5EF4-FFF2-40B4-BE49-F238E27FC236}">
-                <a16:creationId xmlns:a16="http://schemas.microsoft.com/office/drawing/2014/main" id="{1F088BD6-E678-4AE7-9B20-C01A8E9BC670}"/>
+                <a16:creationId xmlns:a16="http://schemas.microsoft.com/office/drawing/2014/main" id="{257B04C4-1CC0-4015-B743-5E8652F0249C}"/>
               </a:ext>
             </a:extLst>
           </p:cNvPr>
@@ -8020,7 +8020,7 @@
           <p:cNvPr id="38" name="">
             <a:extLst xmlns:a="http://schemas.openxmlformats.org/drawingml/2006/main">
               <a:ext uri="{FF2B5EF4-FFF2-40B4-BE49-F238E27FC236}">
-                <a16:creationId xmlns:a16="http://schemas.microsoft.com/office/drawing/2014/main" id="{9BA9EE63-8C7B-4808-AE80-0DE52C083C5F}"/>
+                <a16:creationId xmlns:a16="http://schemas.microsoft.com/office/drawing/2014/main" id="{03B0CE81-FFE9-4032-A34A-6870999F3B8B}"/>
               </a:ext>
             </a:extLst>
           </p:cNvPr>
@@ -8082,7 +8082,7 @@
     </p:spTree>
     <p:extLst>
       <p:ext uri="{BB962C8B-B14F-4D97-AF65-F5344CB8AC3E}">
-        <p14:creationId xmlns:p14="http://schemas.microsoft.com/office/powerpoint/2010/main" val="1126526010"/>
+        <p14:creationId xmlns:p14="http://schemas.microsoft.com/office/powerpoint/2010/main" val="1358559919"/>
       </p:ext>
     </p:extLst>
   </p:cSld>
@@ -8106,7 +8106,7 @@
           <p:cNvPr id="1" name="">
             <a:extLst xmlns:a="http://schemas.openxmlformats.org/drawingml/2006/main">
               <a:ext uri="{FF2B5EF4-FFF2-40B4-BE49-F238E27FC236}">
-                <a16:creationId xmlns:a16="http://schemas.microsoft.com/office/drawing/2014/main" id="{284ED9CD-55A0-4F4D-8A24-B185B798DD82}"/>
+                <a16:creationId xmlns:a16="http://schemas.microsoft.com/office/drawing/2014/main" id="{E6DBB87C-D959-4E29-B4CE-2B770CD272B0}"/>
               </a:ext>
             </a:extLst>
           </p:cNvPr>
@@ -8141,7 +8141,7 @@
           <p:cNvPr id="2" name="">
             <a:extLst xmlns:a="http://schemas.openxmlformats.org/drawingml/2006/main">
               <a:ext uri="{FF2B5EF4-FFF2-40B4-BE49-F238E27FC236}">
-                <a16:creationId xmlns:a16="http://schemas.microsoft.com/office/drawing/2014/main" id="{0ACCF45A-FA6D-4167-820C-7699FD917520}"/>
+                <a16:creationId xmlns:a16="http://schemas.microsoft.com/office/drawing/2014/main" id="{234E0B28-859A-43CD-B5FA-7A340DC339D5}"/>
               </a:ext>
             </a:extLst>
           </p:cNvPr>
@@ -8187,7 +8187,7 @@
           <p:cNvPr id="3" name="">
             <a:extLst xmlns:a="http://schemas.openxmlformats.org/drawingml/2006/main">
               <a:ext uri="{FF2B5EF4-FFF2-40B4-BE49-F238E27FC236}">
-                <a16:creationId xmlns:a16="http://schemas.microsoft.com/office/drawing/2014/main" id="{C7B2BD51-091C-4731-AE08-1D0DF17B4EAE}"/>
+                <a16:creationId xmlns:a16="http://schemas.microsoft.com/office/drawing/2014/main" id="{511063CF-707E-489C-A753-A3FF3C01BAEE}"/>
               </a:ext>
             </a:extLst>
           </p:cNvPr>
@@ -8224,7 +8224,7 @@
           <p:cNvPr id="4" name="">
             <a:extLst xmlns:a="http://schemas.openxmlformats.org/drawingml/2006/main">
               <a:ext uri="{FF2B5EF4-FFF2-40B4-BE49-F238E27FC236}">
-                <a16:creationId xmlns:a16="http://schemas.microsoft.com/office/drawing/2014/main" id="{DFC685EF-CDFE-4A7B-936E-0BCD8DE2A143}"/>
+                <a16:creationId xmlns:a16="http://schemas.microsoft.com/office/drawing/2014/main" id="{1E4C5FD8-169F-4C40-9BC5-85D981BD9473}"/>
               </a:ext>
             </a:extLst>
           </p:cNvPr>
@@ -8261,7 +8261,7 @@
           <p:cNvPr id="5" name="">
             <a:extLst xmlns:a="http://schemas.openxmlformats.org/drawingml/2006/main">
               <a:ext uri="{FF2B5EF4-FFF2-40B4-BE49-F238E27FC236}">
-                <a16:creationId xmlns:a16="http://schemas.microsoft.com/office/drawing/2014/main" id="{5119E390-5A91-46F7-B0DF-8FEB43A3E1E1}"/>
+                <a16:creationId xmlns:a16="http://schemas.microsoft.com/office/drawing/2014/main" id="{31680BAF-95BC-4F4B-82EE-D38CDB68B973}"/>
               </a:ext>
             </a:extLst>
           </p:cNvPr>
@@ -8298,7 +8298,7 @@
           <p:cNvPr id="6" name="">
             <a:extLst xmlns:a="http://schemas.openxmlformats.org/drawingml/2006/main">
               <a:ext uri="{FF2B5EF4-FFF2-40B4-BE49-F238E27FC236}">
-                <a16:creationId xmlns:a16="http://schemas.microsoft.com/office/drawing/2014/main" id="{8A5A9711-01CB-479B-80C1-EB2E0436A529}"/>
+                <a16:creationId xmlns:a16="http://schemas.microsoft.com/office/drawing/2014/main" id="{EFA355AC-3819-4AE5-918E-153010B0B852}"/>
               </a:ext>
             </a:extLst>
           </p:cNvPr>
@@ -8335,7 +8335,7 @@
           <p:cNvPr id="7" name="">
             <a:extLst xmlns:a="http://schemas.openxmlformats.org/drawingml/2006/main">
               <a:ext uri="{FF2B5EF4-FFF2-40B4-BE49-F238E27FC236}">
-                <a16:creationId xmlns:a16="http://schemas.microsoft.com/office/drawing/2014/main" id="{21CC0FFF-410B-4FF2-975B-E120BCCDC306}"/>
+                <a16:creationId xmlns:a16="http://schemas.microsoft.com/office/drawing/2014/main" id="{336F62B6-67E5-4027-A257-B9E6BA62D9CC}"/>
               </a:ext>
             </a:extLst>
           </p:cNvPr>
@@ -8372,7 +8372,7 @@
           <p:cNvPr id="8" name="">
             <a:extLst xmlns:a="http://schemas.openxmlformats.org/drawingml/2006/main">
               <a:ext uri="{FF2B5EF4-FFF2-40B4-BE49-F238E27FC236}">
-                <a16:creationId xmlns:a16="http://schemas.microsoft.com/office/drawing/2014/main" id="{0EDD71E0-3ABE-42B5-9DD0-91B46A87AD91}"/>
+                <a16:creationId xmlns:a16="http://schemas.microsoft.com/office/drawing/2014/main" id="{DC087A3C-C33A-41A9-B8D7-42FE86E7BE7B}"/>
               </a:ext>
             </a:extLst>
           </p:cNvPr>
@@ -8409,7 +8409,7 @@
           <p:cNvPr id="9" name="">
             <a:extLst xmlns:a="http://schemas.openxmlformats.org/drawingml/2006/main">
               <a:ext uri="{FF2B5EF4-FFF2-40B4-BE49-F238E27FC236}">
-                <a16:creationId xmlns:a16="http://schemas.microsoft.com/office/drawing/2014/main" id="{21E55D03-4E59-412B-886C-E559788B7D1E}"/>
+                <a16:creationId xmlns:a16="http://schemas.microsoft.com/office/drawing/2014/main" id="{D1C7C9AF-6CAA-4C0C-9C87-DF613A5E1720}"/>
               </a:ext>
             </a:extLst>
           </p:cNvPr>
@@ -8446,7 +8446,7 @@
           <p:cNvPr id="10" name="">
             <a:extLst xmlns:a="http://schemas.openxmlformats.org/drawingml/2006/main">
               <a:ext uri="{FF2B5EF4-FFF2-40B4-BE49-F238E27FC236}">
-                <a16:creationId xmlns:a16="http://schemas.microsoft.com/office/drawing/2014/main" id="{6218D7E2-3E06-4200-9A66-3686216FE683}"/>
+                <a16:creationId xmlns:a16="http://schemas.microsoft.com/office/drawing/2014/main" id="{549FCD09-ABD4-4DD8-85FA-6F0F7B2259F9}"/>
               </a:ext>
             </a:extLst>
           </p:cNvPr>
@@ -8483,7 +8483,7 @@
           <p:cNvPr id="11" name="">
             <a:extLst xmlns:a="http://schemas.openxmlformats.org/drawingml/2006/main">
               <a:ext uri="{FF2B5EF4-FFF2-40B4-BE49-F238E27FC236}">
-                <a16:creationId xmlns:a16="http://schemas.microsoft.com/office/drawing/2014/main" id="{FA6649C5-8046-475D-95D9-00241A91D110}"/>
+                <a16:creationId xmlns:a16="http://schemas.microsoft.com/office/drawing/2014/main" id="{CA941C3D-0D15-4837-8F14-7BDBAE5243BB}"/>
               </a:ext>
             </a:extLst>
           </p:cNvPr>
@@ -8520,7 +8520,7 @@
           <p:cNvPr id="12" name="">
             <a:extLst xmlns:a="http://schemas.openxmlformats.org/drawingml/2006/main">
               <a:ext uri="{FF2B5EF4-FFF2-40B4-BE49-F238E27FC236}">
-                <a16:creationId xmlns:a16="http://schemas.microsoft.com/office/drawing/2014/main" id="{E1DDF61D-C951-4306-80FD-6815B047BE24}"/>
+                <a16:creationId xmlns:a16="http://schemas.microsoft.com/office/drawing/2014/main" id="{DCAD06C2-13C6-42AA-861E-78053DE0F8AE}"/>
               </a:ext>
             </a:extLst>
           </p:cNvPr>
@@ -8557,7 +8557,7 @@
           <p:cNvPr id="13" name="">
             <a:extLst xmlns:a="http://schemas.openxmlformats.org/drawingml/2006/main">
               <a:ext uri="{FF2B5EF4-FFF2-40B4-BE49-F238E27FC236}">
-                <a16:creationId xmlns:a16="http://schemas.microsoft.com/office/drawing/2014/main" id="{AA3D042F-3304-4823-A962-8B23AE34AC34}"/>
+                <a16:creationId xmlns:a16="http://schemas.microsoft.com/office/drawing/2014/main" id="{2E3F95D1-B5B3-4F8D-A670-E5CC25375274}"/>
               </a:ext>
             </a:extLst>
           </p:cNvPr>
@@ -8594,7 +8594,7 @@
           <p:cNvPr id="14" name="">
             <a:extLst xmlns:a="http://schemas.openxmlformats.org/drawingml/2006/main">
               <a:ext uri="{FF2B5EF4-FFF2-40B4-BE49-F238E27FC236}">
-                <a16:creationId xmlns:a16="http://schemas.microsoft.com/office/drawing/2014/main" id="{A309DCD6-219B-44DF-BC8A-8580CFBED6D6}"/>
+                <a16:creationId xmlns:a16="http://schemas.microsoft.com/office/drawing/2014/main" id="{BEFA7B75-4823-444A-895F-61A7A2F392BB}"/>
               </a:ext>
             </a:extLst>
           </p:cNvPr>
@@ -8631,7 +8631,7 @@
           <p:cNvPr id="15" name="">
             <a:extLst xmlns:a="http://schemas.openxmlformats.org/drawingml/2006/main">
               <a:ext uri="{FF2B5EF4-FFF2-40B4-BE49-F238E27FC236}">
-                <a16:creationId xmlns:a16="http://schemas.microsoft.com/office/drawing/2014/main" id="{64EA1CA4-9A5E-44CE-B039-49E1EE876B1A}"/>
+                <a16:creationId xmlns:a16="http://schemas.microsoft.com/office/drawing/2014/main" id="{40BCCB1A-2761-4344-9B6E-2ED78E8A0919}"/>
               </a:ext>
             </a:extLst>
           </p:cNvPr>
@@ -8668,7 +8668,7 @@
           <p:cNvPr id="16" name="">
             <a:extLst xmlns:a="http://schemas.openxmlformats.org/drawingml/2006/main">
               <a:ext uri="{FF2B5EF4-FFF2-40B4-BE49-F238E27FC236}">
-                <a16:creationId xmlns:a16="http://schemas.microsoft.com/office/drawing/2014/main" id="{93F4E769-5FD0-40CA-BD61-610D6143046F}"/>
+                <a16:creationId xmlns:a16="http://schemas.microsoft.com/office/drawing/2014/main" id="{95F257D6-D988-4AD9-BE8E-A57C774D5564}"/>
               </a:ext>
             </a:extLst>
           </p:cNvPr>
@@ -8705,7 +8705,7 @@
           <p:cNvPr id="17" name="">
             <a:extLst xmlns:a="http://schemas.openxmlformats.org/drawingml/2006/main">
               <a:ext uri="{FF2B5EF4-FFF2-40B4-BE49-F238E27FC236}">
-                <a16:creationId xmlns:a16="http://schemas.microsoft.com/office/drawing/2014/main" id="{E69F6091-31DE-4B8C-8FD7-AA632B56F779}"/>
+                <a16:creationId xmlns:a16="http://schemas.microsoft.com/office/drawing/2014/main" id="{105DF4BC-9165-4E8E-93A6-57254E5C77CF}"/>
               </a:ext>
             </a:extLst>
           </p:cNvPr>
@@ -8742,7 +8742,7 @@
           <p:cNvPr id="18" name="">
             <a:extLst xmlns:a="http://schemas.openxmlformats.org/drawingml/2006/main">
               <a:ext uri="{FF2B5EF4-FFF2-40B4-BE49-F238E27FC236}">
-                <a16:creationId xmlns:a16="http://schemas.microsoft.com/office/drawing/2014/main" id="{4CB21261-1229-4484-815B-4177559589B9}"/>
+                <a16:creationId xmlns:a16="http://schemas.microsoft.com/office/drawing/2014/main" id="{843CF665-63C7-4D61-ADDA-DFD4C0AA524F}"/>
               </a:ext>
             </a:extLst>
           </p:cNvPr>
@@ -8779,7 +8779,7 @@
           <p:cNvPr id="19" name="">
             <a:extLst xmlns:a="http://schemas.openxmlformats.org/drawingml/2006/main">
               <a:ext uri="{FF2B5EF4-FFF2-40B4-BE49-F238E27FC236}">
-                <a16:creationId xmlns:a16="http://schemas.microsoft.com/office/drawing/2014/main" id="{837BAF37-24A3-4D86-95F7-B3A2B024079A}"/>
+                <a16:creationId xmlns:a16="http://schemas.microsoft.com/office/drawing/2014/main" id="{928EED56-CE82-44A0-B03E-0313BA47FB9A}"/>
               </a:ext>
             </a:extLst>
           </p:cNvPr>
@@ -8816,7 +8816,7 @@
           <p:cNvPr id="20" name="">
             <a:extLst xmlns:a="http://schemas.openxmlformats.org/drawingml/2006/main">
               <a:ext uri="{FF2B5EF4-FFF2-40B4-BE49-F238E27FC236}">
-                <a16:creationId xmlns:a16="http://schemas.microsoft.com/office/drawing/2014/main" id="{A9C6ACA6-8117-49B4-92A7-09638ACA6EC8}"/>
+                <a16:creationId xmlns:a16="http://schemas.microsoft.com/office/drawing/2014/main" id="{36C2DEE6-013B-4717-A253-A2CE9BF38BC5}"/>
               </a:ext>
             </a:extLst>
           </p:cNvPr>
@@ -8853,7 +8853,7 @@
           <p:cNvPr id="21" name="">
             <a:extLst xmlns:a="http://schemas.openxmlformats.org/drawingml/2006/main">
               <a:ext uri="{FF2B5EF4-FFF2-40B4-BE49-F238E27FC236}">
-                <a16:creationId xmlns:a16="http://schemas.microsoft.com/office/drawing/2014/main" id="{115D18D3-7205-42BA-A277-AF8879CA815A}"/>
+                <a16:creationId xmlns:a16="http://schemas.microsoft.com/office/drawing/2014/main" id="{7C57380D-192C-45E4-856E-1A000BCD959C}"/>
               </a:ext>
             </a:extLst>
           </p:cNvPr>
@@ -8890,7 +8890,7 @@
           <p:cNvPr id="22" name="">
             <a:extLst xmlns:a="http://schemas.openxmlformats.org/drawingml/2006/main">
               <a:ext uri="{FF2B5EF4-FFF2-40B4-BE49-F238E27FC236}">
-                <a16:creationId xmlns:a16="http://schemas.microsoft.com/office/drawing/2014/main" id="{9BE7D9E1-8B77-471D-ADC5-A1C87D04283D}"/>
+                <a16:creationId xmlns:a16="http://schemas.microsoft.com/office/drawing/2014/main" id="{52012F90-081D-4EC6-B106-04A623340ECE}"/>
               </a:ext>
             </a:extLst>
           </p:cNvPr>
@@ -8927,7 +8927,7 @@
           <p:cNvPr id="23" name="">
             <a:extLst xmlns:a="http://schemas.openxmlformats.org/drawingml/2006/main">
               <a:ext uri="{FF2B5EF4-FFF2-40B4-BE49-F238E27FC236}">
-                <a16:creationId xmlns:a16="http://schemas.microsoft.com/office/drawing/2014/main" id="{5632F528-035B-445E-BC41-0400C3DFD2CB}"/>
+                <a16:creationId xmlns:a16="http://schemas.microsoft.com/office/drawing/2014/main" id="{51242175-768C-4848-876A-92752F6EC4CE}"/>
               </a:ext>
             </a:extLst>
           </p:cNvPr>
@@ -8964,7 +8964,7 @@
           <p:cNvPr id="24" name="">
             <a:extLst xmlns:a="http://schemas.openxmlformats.org/drawingml/2006/main">
               <a:ext uri="{FF2B5EF4-FFF2-40B4-BE49-F238E27FC236}">
-                <a16:creationId xmlns:a16="http://schemas.microsoft.com/office/drawing/2014/main" id="{F21E0969-5726-4B7F-B2CC-0B960A4130CB}"/>
+                <a16:creationId xmlns:a16="http://schemas.microsoft.com/office/drawing/2014/main" id="{3B19976F-8D59-4EDF-8CB8-AE7FDBA8D716}"/>
               </a:ext>
             </a:extLst>
           </p:cNvPr>
@@ -9001,7 +9001,7 @@
           <p:cNvPr id="25" name="">
             <a:extLst xmlns:a="http://schemas.openxmlformats.org/drawingml/2006/main">
               <a:ext uri="{FF2B5EF4-FFF2-40B4-BE49-F238E27FC236}">
-                <a16:creationId xmlns:a16="http://schemas.microsoft.com/office/drawing/2014/main" id="{50ABFCA7-9A9D-47D0-8BF9-D27CBD4FA423}"/>
+                <a16:creationId xmlns:a16="http://schemas.microsoft.com/office/drawing/2014/main" id="{0851DB68-B9DA-49AD-8FEC-296FC78BAECF}"/>
               </a:ext>
             </a:extLst>
           </p:cNvPr>
@@ -9038,7 +9038,7 @@
           <p:cNvPr id="26" name="">
             <a:extLst xmlns:a="http://schemas.openxmlformats.org/drawingml/2006/main">
               <a:ext uri="{FF2B5EF4-FFF2-40B4-BE49-F238E27FC236}">
-                <a16:creationId xmlns:a16="http://schemas.microsoft.com/office/drawing/2014/main" id="{A8A1DBCE-8FDD-4942-B6F4-1E0862F3F905}"/>
+                <a16:creationId xmlns:a16="http://schemas.microsoft.com/office/drawing/2014/main" id="{F4872B2A-1C1C-4028-B4D8-3F1A197EC0DB}"/>
               </a:ext>
             </a:extLst>
           </p:cNvPr>
@@ -9085,7 +9085,7 @@
           <p:cNvPr id="27" name="">
             <a:extLst xmlns:a="http://schemas.openxmlformats.org/drawingml/2006/main">
               <a:ext uri="{FF2B5EF4-FFF2-40B4-BE49-F238E27FC236}">
-                <a16:creationId xmlns:a16="http://schemas.microsoft.com/office/drawing/2014/main" id="{1F1C6C6E-9956-47E4-B648-7A7059015EE8}"/>
+                <a16:creationId xmlns:a16="http://schemas.microsoft.com/office/drawing/2014/main" id="{25E84442-27F8-4069-8801-B1587C74B22D}"/>
               </a:ext>
             </a:extLst>
           </p:cNvPr>
@@ -9132,7 +9132,7 @@
           <p:cNvPr id="28" name="">
             <a:extLst xmlns:a="http://schemas.openxmlformats.org/drawingml/2006/main">
               <a:ext uri="{FF2B5EF4-FFF2-40B4-BE49-F238E27FC236}">
-                <a16:creationId xmlns:a16="http://schemas.microsoft.com/office/drawing/2014/main" id="{A583CA0C-2391-4E13-A22A-AB92F6E9735D}"/>
+                <a16:creationId xmlns:a16="http://schemas.microsoft.com/office/drawing/2014/main" id="{E9D7D917-38B9-44AA-9A21-2A7A8BB89750}"/>
               </a:ext>
             </a:extLst>
           </p:cNvPr>
@@ -9196,7 +9196,7 @@
           <p:cNvPr id="29" name="">
             <a:extLst xmlns:a="http://schemas.openxmlformats.org/drawingml/2006/main">
               <a:ext uri="{FF2B5EF4-FFF2-40B4-BE49-F238E27FC236}">
-                <a16:creationId xmlns:a16="http://schemas.microsoft.com/office/drawing/2014/main" id="{8EA7B026-FB02-44FC-95E0-3FBF47583194}"/>
+                <a16:creationId xmlns:a16="http://schemas.microsoft.com/office/drawing/2014/main" id="{E05DE680-74DD-456D-966A-19F436BB87C7}"/>
               </a:ext>
             </a:extLst>
           </p:cNvPr>
@@ -9260,7 +9260,7 @@
           <p:cNvPr id="30" name="">
             <a:extLst xmlns:a="http://schemas.openxmlformats.org/drawingml/2006/main">
               <a:ext uri="{FF2B5EF4-FFF2-40B4-BE49-F238E27FC236}">
-                <a16:creationId xmlns:a16="http://schemas.microsoft.com/office/drawing/2014/main" id="{BAE56261-C5FE-4865-ABFE-E99E6F2F3385}"/>
+                <a16:creationId xmlns:a16="http://schemas.microsoft.com/office/drawing/2014/main" id="{BBA6194A-AB03-4706-9C1B-A80B7F96DD52}"/>
               </a:ext>
             </a:extLst>
           </p:cNvPr>
@@ -9324,7 +9324,7 @@
           <p:cNvPr id="31" name="">
             <a:extLst xmlns:a="http://schemas.openxmlformats.org/drawingml/2006/main">
               <a:ext uri="{FF2B5EF4-FFF2-40B4-BE49-F238E27FC236}">
-                <a16:creationId xmlns:a16="http://schemas.microsoft.com/office/drawing/2014/main" id="{9F892FC6-6CB1-4AD9-A3B9-EB2B325BEF8F}"/>
+                <a16:creationId xmlns:a16="http://schemas.microsoft.com/office/drawing/2014/main" id="{AC0B40A9-CE5C-438E-BE1E-BAF8E9880875}"/>
               </a:ext>
             </a:extLst>
           </p:cNvPr>
@@ -9388,7 +9388,7 @@
           <p:cNvPr id="32" name="">
             <a:extLst xmlns:a="http://schemas.openxmlformats.org/drawingml/2006/main">
               <a:ext uri="{FF2B5EF4-FFF2-40B4-BE49-F238E27FC236}">
-                <a16:creationId xmlns:a16="http://schemas.microsoft.com/office/drawing/2014/main" id="{83C5D04E-344D-45D7-B4D4-B15D87080A59}"/>
+                <a16:creationId xmlns:a16="http://schemas.microsoft.com/office/drawing/2014/main" id="{10EE855E-6A11-420D-8F0C-C2DDF7B584EA}"/>
               </a:ext>
             </a:extLst>
           </p:cNvPr>
@@ -9429,7 +9429,7 @@
           <p:nvPr/>
         </p:nvPicPr>
         <p:blipFill>
-          <a:blip xmlns:r="http://schemas.openxmlformats.org/officeDocument/2006/relationships" xmlns:a="http://schemas.openxmlformats.org/drawingml/2006/main" r:embed="R79982c923b1a4c5e"/>
+          <a:blip xmlns:r="http://schemas.openxmlformats.org/officeDocument/2006/relationships" xmlns:a="http://schemas.openxmlformats.org/drawingml/2006/main" r:embed="Ra0d45fc223474342"/>
           <a:stretch xmlns:a="http://schemas.openxmlformats.org/drawingml/2006/main"/>
         </p:blipFill>
         <p:spPr>
@@ -9447,7 +9447,7 @@
           <p:cNvPr id="34" name="">
             <a:extLst xmlns:a="http://schemas.openxmlformats.org/drawingml/2006/main">
               <a:ext uri="{FF2B5EF4-FFF2-40B4-BE49-F238E27FC236}">
-                <a16:creationId xmlns:a16="http://schemas.microsoft.com/office/drawing/2014/main" id="{F35283C3-A1ED-4B2D-98B3-99B8AF014D36}"/>
+                <a16:creationId xmlns:a16="http://schemas.microsoft.com/office/drawing/2014/main" id="{33E85719-9015-4989-825D-570DA4488D97}"/>
               </a:ext>
             </a:extLst>
           </p:cNvPr>
@@ -9484,7 +9484,7 @@
           <p:cNvPr id="35" name="">
             <a:extLst xmlns:a="http://schemas.openxmlformats.org/drawingml/2006/main">
               <a:ext uri="{FF2B5EF4-FFF2-40B4-BE49-F238E27FC236}">
-                <a16:creationId xmlns:a16="http://schemas.microsoft.com/office/drawing/2014/main" id="{69E9E4A0-052F-4E79-8724-9FD25C71BB33}"/>
+                <a16:creationId xmlns:a16="http://schemas.microsoft.com/office/drawing/2014/main" id="{CB08E881-51FF-4B90-861A-2BEAA797EF23}"/>
               </a:ext>
             </a:extLst>
           </p:cNvPr>
@@ -9521,7 +9521,7 @@
           <p:cNvPr id="36" name="">
             <a:extLst xmlns:a="http://schemas.openxmlformats.org/drawingml/2006/main">
               <a:ext uri="{FF2B5EF4-FFF2-40B4-BE49-F238E27FC236}">
-                <a16:creationId xmlns:a16="http://schemas.microsoft.com/office/drawing/2014/main" id="{FB9EE120-BE97-49A4-83B5-126991042DA2}"/>
+                <a16:creationId xmlns:a16="http://schemas.microsoft.com/office/drawing/2014/main" id="{7644378F-4D53-4BFF-98EC-BED0372133BD}"/>
               </a:ext>
             </a:extLst>
           </p:cNvPr>
@@ -9585,7 +9585,7 @@
           <p:cNvPr id="37" name="">
             <a:extLst xmlns:a="http://schemas.openxmlformats.org/drawingml/2006/main">
               <a:ext uri="{FF2B5EF4-FFF2-40B4-BE49-F238E27FC236}">
-                <a16:creationId xmlns:a16="http://schemas.microsoft.com/office/drawing/2014/main" id="{F8FB2A75-DA7B-47F8-9D04-74E1E9F494A5}"/>
+                <a16:creationId xmlns:a16="http://schemas.microsoft.com/office/drawing/2014/main" id="{478FA004-CDA2-4666-8287-19F439445B42}"/>
               </a:ext>
             </a:extLst>
           </p:cNvPr>
@@ -9649,7 +9649,7 @@
           <p:cNvPr id="38" name="">
             <a:extLst xmlns:a="http://schemas.openxmlformats.org/drawingml/2006/main">
               <a:ext uri="{FF2B5EF4-FFF2-40B4-BE49-F238E27FC236}">
-                <a16:creationId xmlns:a16="http://schemas.microsoft.com/office/drawing/2014/main" id="{7B22C708-8FE1-4BAF-8F25-09EE9BC4337C}"/>
+                <a16:creationId xmlns:a16="http://schemas.microsoft.com/office/drawing/2014/main" id="{A5B82170-DE27-4F17-93E6-C8CB46076FE1}"/>
               </a:ext>
             </a:extLst>
           </p:cNvPr>
@@ -9686,7 +9686,7 @@
           <p:cNvPr id="39" name="">
             <a:extLst xmlns:a="http://schemas.openxmlformats.org/drawingml/2006/main">
               <a:ext uri="{FF2B5EF4-FFF2-40B4-BE49-F238E27FC236}">
-                <a16:creationId xmlns:a16="http://schemas.microsoft.com/office/drawing/2014/main" id="{3D567884-6B32-4461-99A4-067D5BABAE18}"/>
+                <a16:creationId xmlns:a16="http://schemas.microsoft.com/office/drawing/2014/main" id="{27A4950E-5665-4933-BA5C-21BAE9BE0054}"/>
               </a:ext>
             </a:extLst>
           </p:cNvPr>
@@ -9723,7 +9723,7 @@
           <p:cNvPr id="40" name="">
             <a:extLst xmlns:a="http://schemas.openxmlformats.org/drawingml/2006/main">
               <a:ext uri="{FF2B5EF4-FFF2-40B4-BE49-F238E27FC236}">
-                <a16:creationId xmlns:a16="http://schemas.microsoft.com/office/drawing/2014/main" id="{BC376E9B-805A-4E1D-928C-545229E8153F}"/>
+                <a16:creationId xmlns:a16="http://schemas.microsoft.com/office/drawing/2014/main" id="{3DCEC115-972F-4A87-857C-51569941B63B}"/>
               </a:ext>
             </a:extLst>
           </p:cNvPr>
@@ -9787,7 +9787,7 @@
           <p:cNvPr id="41" name="">
             <a:extLst xmlns:a="http://schemas.openxmlformats.org/drawingml/2006/main">
               <a:ext uri="{FF2B5EF4-FFF2-40B4-BE49-F238E27FC236}">
-                <a16:creationId xmlns:a16="http://schemas.microsoft.com/office/drawing/2014/main" id="{8826AD3D-BBE5-4070-87F8-6FA5A3E87D1F}"/>
+                <a16:creationId xmlns:a16="http://schemas.microsoft.com/office/drawing/2014/main" id="{6836ABF4-0255-4374-9FBB-0998CC59356E}"/>
               </a:ext>
             </a:extLst>
           </p:cNvPr>
@@ -9851,7 +9851,7 @@
           <p:cNvPr id="42" name="">
             <a:extLst xmlns:a="http://schemas.openxmlformats.org/drawingml/2006/main">
               <a:ext uri="{FF2B5EF4-FFF2-40B4-BE49-F238E27FC236}">
-                <a16:creationId xmlns:a16="http://schemas.microsoft.com/office/drawing/2014/main" id="{0485B598-F7CC-43DE-A164-80247ECE6F6F}"/>
+                <a16:creationId xmlns:a16="http://schemas.microsoft.com/office/drawing/2014/main" id="{00020AA2-B025-4A2B-82A9-5E390897ECD9}"/>
               </a:ext>
             </a:extLst>
           </p:cNvPr>
@@ -9888,7 +9888,7 @@
           <p:cNvPr id="43" name="">
             <a:extLst xmlns:a="http://schemas.openxmlformats.org/drawingml/2006/main">
               <a:ext uri="{FF2B5EF4-FFF2-40B4-BE49-F238E27FC236}">
-                <a16:creationId xmlns:a16="http://schemas.microsoft.com/office/drawing/2014/main" id="{E79C0711-E3C1-4256-A45D-6A78BF45973C}"/>
+                <a16:creationId xmlns:a16="http://schemas.microsoft.com/office/drawing/2014/main" id="{C473B447-7300-4E29-B940-A374CFBFDD5F}"/>
               </a:ext>
             </a:extLst>
           </p:cNvPr>
@@ -9925,7 +9925,7 @@
           <p:cNvPr id="44" name="">
             <a:extLst xmlns:a="http://schemas.openxmlformats.org/drawingml/2006/main">
               <a:ext uri="{FF2B5EF4-FFF2-40B4-BE49-F238E27FC236}">
-                <a16:creationId xmlns:a16="http://schemas.microsoft.com/office/drawing/2014/main" id="{6263D69D-27B9-40FA-97C0-0D0C18B3AC71}"/>
+                <a16:creationId xmlns:a16="http://schemas.microsoft.com/office/drawing/2014/main" id="{DFA3EAAF-C057-4DDA-9112-1475B832D6A8}"/>
               </a:ext>
             </a:extLst>
           </p:cNvPr>
@@ -9989,7 +9989,7 @@
           <p:cNvPr id="45" name="">
             <a:extLst xmlns:a="http://schemas.openxmlformats.org/drawingml/2006/main">
               <a:ext uri="{FF2B5EF4-FFF2-40B4-BE49-F238E27FC236}">
-                <a16:creationId xmlns:a16="http://schemas.microsoft.com/office/drawing/2014/main" id="{C72C5CED-7B76-471E-8C4A-A4E70E3DE51D}"/>
+                <a16:creationId xmlns:a16="http://schemas.microsoft.com/office/drawing/2014/main" id="{02072E25-2445-40C3-97E4-C0C425AA3FF5}"/>
               </a:ext>
             </a:extLst>
           </p:cNvPr>
@@ -10053,7 +10053,7 @@
           <p:cNvPr id="46" name="">
             <a:extLst xmlns:a="http://schemas.openxmlformats.org/drawingml/2006/main">
               <a:ext uri="{FF2B5EF4-FFF2-40B4-BE49-F238E27FC236}">
-                <a16:creationId xmlns:a16="http://schemas.microsoft.com/office/drawing/2014/main" id="{A4D52814-D333-4B62-9EDA-10D68310BC84}"/>
+                <a16:creationId xmlns:a16="http://schemas.microsoft.com/office/drawing/2014/main" id="{80A8D708-3D0D-491C-8D3B-83B64A4D813C}"/>
               </a:ext>
             </a:extLst>
           </p:cNvPr>
@@ -10090,7 +10090,7 @@
           <p:cNvPr id="47" name="">
             <a:extLst xmlns:a="http://schemas.openxmlformats.org/drawingml/2006/main">
               <a:ext uri="{FF2B5EF4-FFF2-40B4-BE49-F238E27FC236}">
-                <a16:creationId xmlns:a16="http://schemas.microsoft.com/office/drawing/2014/main" id="{E61ED974-830A-4C00-B459-75AA2A6A6563}"/>
+                <a16:creationId xmlns:a16="http://schemas.microsoft.com/office/drawing/2014/main" id="{B5A95990-5C53-4DC6-B62C-04B3511F663A}"/>
               </a:ext>
             </a:extLst>
           </p:cNvPr>
@@ -10127,7 +10127,7 @@
           <p:cNvPr id="48" name="">
             <a:extLst xmlns:a="http://schemas.openxmlformats.org/drawingml/2006/main">
               <a:ext uri="{FF2B5EF4-FFF2-40B4-BE49-F238E27FC236}">
-                <a16:creationId xmlns:a16="http://schemas.microsoft.com/office/drawing/2014/main" id="{A827B39F-E407-4405-8EA8-EE90C76AE9F2}"/>
+                <a16:creationId xmlns:a16="http://schemas.microsoft.com/office/drawing/2014/main" id="{6A7D5AC8-2B9B-4F92-A6C5-E689D2F220D6}"/>
               </a:ext>
             </a:extLst>
           </p:cNvPr>
@@ -10191,7 +10191,7 @@
           <p:cNvPr id="49" name="">
             <a:extLst xmlns:a="http://schemas.openxmlformats.org/drawingml/2006/main">
               <a:ext uri="{FF2B5EF4-FFF2-40B4-BE49-F238E27FC236}">
-                <a16:creationId xmlns:a16="http://schemas.microsoft.com/office/drawing/2014/main" id="{FA8D7790-A38B-4997-86D4-5D6184661C34}"/>
+                <a16:creationId xmlns:a16="http://schemas.microsoft.com/office/drawing/2014/main" id="{C02EC944-D451-49EE-AA6E-FD3A7DC03012}"/>
               </a:ext>
             </a:extLst>
           </p:cNvPr>
@@ -10255,7 +10255,7 @@
           <p:cNvPr id="50" name="">
             <a:extLst xmlns:a="http://schemas.openxmlformats.org/drawingml/2006/main">
               <a:ext uri="{FF2B5EF4-FFF2-40B4-BE49-F238E27FC236}">
-                <a16:creationId xmlns:a16="http://schemas.microsoft.com/office/drawing/2014/main" id="{757F79BA-36A7-4549-BEF5-BD9EB71CEB1E}"/>
+                <a16:creationId xmlns:a16="http://schemas.microsoft.com/office/drawing/2014/main" id="{56752C74-05FE-48A6-8E61-AA7AFBF9C11B}"/>
               </a:ext>
             </a:extLst>
           </p:cNvPr>
@@ -10292,7 +10292,7 @@
           <p:cNvPr id="51" name="">
             <a:extLst xmlns:a="http://schemas.openxmlformats.org/drawingml/2006/main">
               <a:ext uri="{FF2B5EF4-FFF2-40B4-BE49-F238E27FC236}">
-                <a16:creationId xmlns:a16="http://schemas.microsoft.com/office/drawing/2014/main" id="{7B5872ED-DB35-44D8-A00A-1DC37101A29D}"/>
+                <a16:creationId xmlns:a16="http://schemas.microsoft.com/office/drawing/2014/main" id="{1610F184-F206-4E4D-BD16-CC36E644B3D3}"/>
               </a:ext>
             </a:extLst>
           </p:cNvPr>
@@ -10329,7 +10329,7 @@
           <p:cNvPr id="52" name="">
             <a:extLst xmlns:a="http://schemas.openxmlformats.org/drawingml/2006/main">
               <a:ext uri="{FF2B5EF4-FFF2-40B4-BE49-F238E27FC236}">
-                <a16:creationId xmlns:a16="http://schemas.microsoft.com/office/drawing/2014/main" id="{CB42BD4E-8B80-49CA-A794-CD07B45F1782}"/>
+                <a16:creationId xmlns:a16="http://schemas.microsoft.com/office/drawing/2014/main" id="{22BB73A9-0EDC-48F1-BED0-301D13C8A2A9}"/>
               </a:ext>
             </a:extLst>
           </p:cNvPr>
@@ -10393,7 +10393,7 @@
           <p:cNvPr id="53" name="">
             <a:extLst xmlns:a="http://schemas.openxmlformats.org/drawingml/2006/main">
               <a:ext uri="{FF2B5EF4-FFF2-40B4-BE49-F238E27FC236}">
-                <a16:creationId xmlns:a16="http://schemas.microsoft.com/office/drawing/2014/main" id="{8C4C8CB0-7E80-489B-BA1B-80CCB833032C}"/>
+                <a16:creationId xmlns:a16="http://schemas.microsoft.com/office/drawing/2014/main" id="{BA499876-0C1A-4AC0-8726-677C4B6AE62A}"/>
               </a:ext>
             </a:extLst>
           </p:cNvPr>
@@ -10457,7 +10457,7 @@
           <p:cNvPr id="54" name="">
             <a:extLst xmlns:a="http://schemas.openxmlformats.org/drawingml/2006/main">
               <a:ext uri="{FF2B5EF4-FFF2-40B4-BE49-F238E27FC236}">
-                <a16:creationId xmlns:a16="http://schemas.microsoft.com/office/drawing/2014/main" id="{8AAC67EA-4BF7-4C38-A53C-DC863EEA1DC2}"/>
+                <a16:creationId xmlns:a16="http://schemas.microsoft.com/office/drawing/2014/main" id="{6C27354C-2077-4789-8547-6B3D5E919DF5}"/>
               </a:ext>
             </a:extLst>
           </p:cNvPr>
@@ -10494,7 +10494,7 @@
           <p:cNvPr id="55" name="">
             <a:extLst xmlns:a="http://schemas.openxmlformats.org/drawingml/2006/main">
               <a:ext uri="{FF2B5EF4-FFF2-40B4-BE49-F238E27FC236}">
-                <a16:creationId xmlns:a16="http://schemas.microsoft.com/office/drawing/2014/main" id="{BFBF3D4C-E7A2-49E4-B476-FFA6D80E5B8A}"/>
+                <a16:creationId xmlns:a16="http://schemas.microsoft.com/office/drawing/2014/main" id="{3E734445-449F-465A-9BC5-99B8C0E14A25}"/>
               </a:ext>
             </a:extLst>
           </p:cNvPr>
@@ -10556,7 +10556,7 @@
     </p:spTree>
     <p:extLst>
       <p:ext uri="{BB962C8B-B14F-4D97-AF65-F5344CB8AC3E}">
-        <p14:creationId xmlns:p14="http://schemas.microsoft.com/office/powerpoint/2010/main" val="1228048586"/>
+        <p14:creationId xmlns:p14="http://schemas.microsoft.com/office/powerpoint/2010/main" val="1798152320"/>
       </p:ext>
     </p:extLst>
   </p:cSld>
@@ -10580,7 +10580,7 @@
           <p:cNvPr id="1" name="">
             <a:extLst xmlns:a="http://schemas.openxmlformats.org/drawingml/2006/main">
               <a:ext uri="{FF2B5EF4-FFF2-40B4-BE49-F238E27FC236}">
-                <a16:creationId xmlns:a16="http://schemas.microsoft.com/office/drawing/2014/main" id="{8E746328-F8C9-473D-AFB0-BFAD2C3BBB50}"/>
+                <a16:creationId xmlns:a16="http://schemas.microsoft.com/office/drawing/2014/main" id="{2BA50715-00A2-4C52-9BE5-F876439A46D4}"/>
               </a:ext>
             </a:extLst>
           </p:cNvPr>
@@ -10615,7 +10615,7 @@
           <p:cNvPr id="2" name="">
             <a:extLst xmlns:a="http://schemas.openxmlformats.org/drawingml/2006/main">
               <a:ext uri="{FF2B5EF4-FFF2-40B4-BE49-F238E27FC236}">
-                <a16:creationId xmlns:a16="http://schemas.microsoft.com/office/drawing/2014/main" id="{C1719534-CDA9-414E-8B77-05245361845B}"/>
+                <a16:creationId xmlns:a16="http://schemas.microsoft.com/office/drawing/2014/main" id="{095366EE-EE71-4040-B527-7F2048AFE4C5}"/>
               </a:ext>
             </a:extLst>
           </p:cNvPr>
@@ -10661,7 +10661,7 @@
           <p:cNvPr id="3" name="">
             <a:extLst xmlns:a="http://schemas.openxmlformats.org/drawingml/2006/main">
               <a:ext uri="{FF2B5EF4-FFF2-40B4-BE49-F238E27FC236}">
-                <a16:creationId xmlns:a16="http://schemas.microsoft.com/office/drawing/2014/main" id="{A84B871D-ED54-4665-B46A-50D2EE7AF97C}"/>
+                <a16:creationId xmlns:a16="http://schemas.microsoft.com/office/drawing/2014/main" id="{F004BAEE-93D7-4C5A-BADD-14E10CD61CCC}"/>
               </a:ext>
             </a:extLst>
           </p:cNvPr>
@@ -10698,7 +10698,7 @@
           <p:cNvPr id="4" name="">
             <a:extLst xmlns:a="http://schemas.openxmlformats.org/drawingml/2006/main">
               <a:ext uri="{FF2B5EF4-FFF2-40B4-BE49-F238E27FC236}">
-                <a16:creationId xmlns:a16="http://schemas.microsoft.com/office/drawing/2014/main" id="{8B2706F7-0C5E-4CBA-AFA2-9628ECC9103F}"/>
+                <a16:creationId xmlns:a16="http://schemas.microsoft.com/office/drawing/2014/main" id="{8DD4AD4A-0133-423C-9A6F-99B04E257D4A}"/>
               </a:ext>
             </a:extLst>
           </p:cNvPr>
@@ -10735,7 +10735,7 @@
           <p:cNvPr id="5" name="">
             <a:extLst xmlns:a="http://schemas.openxmlformats.org/drawingml/2006/main">
               <a:ext uri="{FF2B5EF4-FFF2-40B4-BE49-F238E27FC236}">
-                <a16:creationId xmlns:a16="http://schemas.microsoft.com/office/drawing/2014/main" id="{9B9385F7-319F-4483-8DC5-12DB35321CEE}"/>
+                <a16:creationId xmlns:a16="http://schemas.microsoft.com/office/drawing/2014/main" id="{B73E6FE4-41C4-4A67-86BA-9DB4D23D9F19}"/>
               </a:ext>
             </a:extLst>
           </p:cNvPr>
@@ -10772,7 +10772,7 @@
           <p:cNvPr id="6" name="">
             <a:extLst xmlns:a="http://schemas.openxmlformats.org/drawingml/2006/main">
               <a:ext uri="{FF2B5EF4-FFF2-40B4-BE49-F238E27FC236}">
-                <a16:creationId xmlns:a16="http://schemas.microsoft.com/office/drawing/2014/main" id="{9B0F1735-FEAB-473F-B845-05C347B6A3DC}"/>
+                <a16:creationId xmlns:a16="http://schemas.microsoft.com/office/drawing/2014/main" id="{95D96E8C-C552-4603-918C-5A736550BC40}"/>
               </a:ext>
             </a:extLst>
           </p:cNvPr>
@@ -10809,7 +10809,7 @@
           <p:cNvPr id="7" name="">
             <a:extLst xmlns:a="http://schemas.openxmlformats.org/drawingml/2006/main">
               <a:ext uri="{FF2B5EF4-FFF2-40B4-BE49-F238E27FC236}">
-                <a16:creationId xmlns:a16="http://schemas.microsoft.com/office/drawing/2014/main" id="{8129F9B5-7C47-4503-B6B3-2EBEA68E1E2E}"/>
+                <a16:creationId xmlns:a16="http://schemas.microsoft.com/office/drawing/2014/main" id="{922E93AB-C53D-4EE4-9165-30EE832055B7}"/>
               </a:ext>
             </a:extLst>
           </p:cNvPr>
@@ -10846,7 +10846,7 @@
           <p:cNvPr id="8" name="">
             <a:extLst xmlns:a="http://schemas.openxmlformats.org/drawingml/2006/main">
               <a:ext uri="{FF2B5EF4-FFF2-40B4-BE49-F238E27FC236}">
-                <a16:creationId xmlns:a16="http://schemas.microsoft.com/office/drawing/2014/main" id="{5F2CF936-AF33-4B18-838B-6A7EE9F1D0CB}"/>
+                <a16:creationId xmlns:a16="http://schemas.microsoft.com/office/drawing/2014/main" id="{00ED2DD6-022F-4B7C-B816-46ED396C446A}"/>
               </a:ext>
             </a:extLst>
           </p:cNvPr>
@@ -10883,7 +10883,7 @@
           <p:cNvPr id="9" name="">
             <a:extLst xmlns:a="http://schemas.openxmlformats.org/drawingml/2006/main">
               <a:ext uri="{FF2B5EF4-FFF2-40B4-BE49-F238E27FC236}">
-                <a16:creationId xmlns:a16="http://schemas.microsoft.com/office/drawing/2014/main" id="{570E33C8-6B41-452C-A0FA-BFE8487A61B2}"/>
+                <a16:creationId xmlns:a16="http://schemas.microsoft.com/office/drawing/2014/main" id="{FBDE4C23-B5D9-490D-83BB-1F77339D564F}"/>
               </a:ext>
             </a:extLst>
           </p:cNvPr>
@@ -10920,7 +10920,7 @@
           <p:cNvPr id="10" name="">
             <a:extLst xmlns:a="http://schemas.openxmlformats.org/drawingml/2006/main">
               <a:ext uri="{FF2B5EF4-FFF2-40B4-BE49-F238E27FC236}">
-                <a16:creationId xmlns:a16="http://schemas.microsoft.com/office/drawing/2014/main" id="{73DB0232-4E43-491D-B488-A6706A3EB19F}"/>
+                <a16:creationId xmlns:a16="http://schemas.microsoft.com/office/drawing/2014/main" id="{10CEA2FC-9E4A-4A6E-9596-D17EAB2842D8}"/>
               </a:ext>
             </a:extLst>
           </p:cNvPr>
@@ -10957,7 +10957,7 @@
           <p:cNvPr id="11" name="">
             <a:extLst xmlns:a="http://schemas.openxmlformats.org/drawingml/2006/main">
               <a:ext uri="{FF2B5EF4-FFF2-40B4-BE49-F238E27FC236}">
-                <a16:creationId xmlns:a16="http://schemas.microsoft.com/office/drawing/2014/main" id="{C107D1E5-5847-46A2-BCC8-6F6130B05AE7}"/>
+                <a16:creationId xmlns:a16="http://schemas.microsoft.com/office/drawing/2014/main" id="{DA6ECC78-3046-4B86-8E54-9C8A588DA3E1}"/>
               </a:ext>
             </a:extLst>
           </p:cNvPr>
@@ -10994,7 +10994,7 @@
           <p:cNvPr id="12" name="">
             <a:extLst xmlns:a="http://schemas.openxmlformats.org/drawingml/2006/main">
               <a:ext uri="{FF2B5EF4-FFF2-40B4-BE49-F238E27FC236}">
-                <a16:creationId xmlns:a16="http://schemas.microsoft.com/office/drawing/2014/main" id="{CB020330-B9D2-4C97-BFEB-EF1C115BEFC4}"/>
+                <a16:creationId xmlns:a16="http://schemas.microsoft.com/office/drawing/2014/main" id="{CBF76370-76CF-4DD4-A181-1BCE93AE7DD7}"/>
               </a:ext>
             </a:extLst>
           </p:cNvPr>
@@ -11031,7 +11031,7 @@
           <p:cNvPr id="13" name="">
             <a:extLst xmlns:a="http://schemas.openxmlformats.org/drawingml/2006/main">
               <a:ext uri="{FF2B5EF4-FFF2-40B4-BE49-F238E27FC236}">
-                <a16:creationId xmlns:a16="http://schemas.microsoft.com/office/drawing/2014/main" id="{6B34C886-2C27-4C6B-987E-4769A67FD29C}"/>
+                <a16:creationId xmlns:a16="http://schemas.microsoft.com/office/drawing/2014/main" id="{9E02328F-D589-4237-B618-13B1FC2C474C}"/>
               </a:ext>
             </a:extLst>
           </p:cNvPr>
@@ -11068,7 +11068,7 @@
           <p:cNvPr id="14" name="">
             <a:extLst xmlns:a="http://schemas.openxmlformats.org/drawingml/2006/main">
               <a:ext uri="{FF2B5EF4-FFF2-40B4-BE49-F238E27FC236}">
-                <a16:creationId xmlns:a16="http://schemas.microsoft.com/office/drawing/2014/main" id="{AA5F9D4C-3F9D-4A83-8C25-B704BFB2911A}"/>
+                <a16:creationId xmlns:a16="http://schemas.microsoft.com/office/drawing/2014/main" id="{EB27BB83-CC54-47DD-854C-1F2724AA3D0C}"/>
               </a:ext>
             </a:extLst>
           </p:cNvPr>
@@ -11105,7 +11105,7 @@
           <p:cNvPr id="15" name="">
             <a:extLst xmlns:a="http://schemas.openxmlformats.org/drawingml/2006/main">
               <a:ext uri="{FF2B5EF4-FFF2-40B4-BE49-F238E27FC236}">
-                <a16:creationId xmlns:a16="http://schemas.microsoft.com/office/drawing/2014/main" id="{56520A58-104F-47A4-AC55-DFCB44B8B7F5}"/>
+                <a16:creationId xmlns:a16="http://schemas.microsoft.com/office/drawing/2014/main" id="{84443E77-C945-47F9-9159-03A018F7EF7C}"/>
               </a:ext>
             </a:extLst>
           </p:cNvPr>
@@ -11142,7 +11142,7 @@
           <p:cNvPr id="16" name="">
             <a:extLst xmlns:a="http://schemas.openxmlformats.org/drawingml/2006/main">
               <a:ext uri="{FF2B5EF4-FFF2-40B4-BE49-F238E27FC236}">
-                <a16:creationId xmlns:a16="http://schemas.microsoft.com/office/drawing/2014/main" id="{8E40B3B8-2238-46DF-A50F-46A63066E56F}"/>
+                <a16:creationId xmlns:a16="http://schemas.microsoft.com/office/drawing/2014/main" id="{092E85CA-ECAB-4C3C-8145-559D8E30C274}"/>
               </a:ext>
             </a:extLst>
           </p:cNvPr>
@@ -11179,7 +11179,7 @@
           <p:cNvPr id="17" name="">
             <a:extLst xmlns:a="http://schemas.openxmlformats.org/drawingml/2006/main">
               <a:ext uri="{FF2B5EF4-FFF2-40B4-BE49-F238E27FC236}">
-                <a16:creationId xmlns:a16="http://schemas.microsoft.com/office/drawing/2014/main" id="{49B8B5BA-E5B5-4962-B6A1-CE364DFB3F7E}"/>
+                <a16:creationId xmlns:a16="http://schemas.microsoft.com/office/drawing/2014/main" id="{10908E7F-1CD5-46A0-9327-4A68857A41A0}"/>
               </a:ext>
             </a:extLst>
           </p:cNvPr>
@@ -11216,7 +11216,7 @@
           <p:cNvPr id="18" name="">
             <a:extLst xmlns:a="http://schemas.openxmlformats.org/drawingml/2006/main">
               <a:ext uri="{FF2B5EF4-FFF2-40B4-BE49-F238E27FC236}">
-                <a16:creationId xmlns:a16="http://schemas.microsoft.com/office/drawing/2014/main" id="{89861FEA-1121-4B11-B922-BCB32032EC4A}"/>
+                <a16:creationId xmlns:a16="http://schemas.microsoft.com/office/drawing/2014/main" id="{3EDA1364-84C6-42DF-B9E1-1DD93618A4C2}"/>
               </a:ext>
             </a:extLst>
           </p:cNvPr>
@@ -11253,7 +11253,7 @@
           <p:cNvPr id="19" name="">
             <a:extLst xmlns:a="http://schemas.openxmlformats.org/drawingml/2006/main">
               <a:ext uri="{FF2B5EF4-FFF2-40B4-BE49-F238E27FC236}">
-                <a16:creationId xmlns:a16="http://schemas.microsoft.com/office/drawing/2014/main" id="{2BCB9D50-E2D9-48E9-BCAC-E76000A5A0E4}"/>
+                <a16:creationId xmlns:a16="http://schemas.microsoft.com/office/drawing/2014/main" id="{19C86048-7C4A-4F05-8F8C-83C71B13213F}"/>
               </a:ext>
             </a:extLst>
           </p:cNvPr>
@@ -11290,7 +11290,7 @@
           <p:cNvPr id="20" name="">
             <a:extLst xmlns:a="http://schemas.openxmlformats.org/drawingml/2006/main">
               <a:ext uri="{FF2B5EF4-FFF2-40B4-BE49-F238E27FC236}">
-                <a16:creationId xmlns:a16="http://schemas.microsoft.com/office/drawing/2014/main" id="{0C63FAAD-103F-4CCC-A4D3-18FE4900B7FB}"/>
+                <a16:creationId xmlns:a16="http://schemas.microsoft.com/office/drawing/2014/main" id="{7D6EFFD8-D424-4A34-BE42-A7C6A48B4C7F}"/>
               </a:ext>
             </a:extLst>
           </p:cNvPr>
@@ -11327,7 +11327,7 @@
           <p:cNvPr id="21" name="">
             <a:extLst xmlns:a="http://schemas.openxmlformats.org/drawingml/2006/main">
               <a:ext uri="{FF2B5EF4-FFF2-40B4-BE49-F238E27FC236}">
-                <a16:creationId xmlns:a16="http://schemas.microsoft.com/office/drawing/2014/main" id="{9991703F-0F6F-4CED-84DB-24301B794975}"/>
+                <a16:creationId xmlns:a16="http://schemas.microsoft.com/office/drawing/2014/main" id="{B1BE1611-6302-48AC-AEFF-51EF139F3367}"/>
               </a:ext>
             </a:extLst>
           </p:cNvPr>
@@ -11364,7 +11364,7 @@
           <p:cNvPr id="22" name="">
             <a:extLst xmlns:a="http://schemas.openxmlformats.org/drawingml/2006/main">
               <a:ext uri="{FF2B5EF4-FFF2-40B4-BE49-F238E27FC236}">
-                <a16:creationId xmlns:a16="http://schemas.microsoft.com/office/drawing/2014/main" id="{75258FD9-2AEB-41C9-80F1-0CC049111FFA}"/>
+                <a16:creationId xmlns:a16="http://schemas.microsoft.com/office/drawing/2014/main" id="{CBD933F2-E00A-427A-9C02-01672451E2E1}"/>
               </a:ext>
             </a:extLst>
           </p:cNvPr>
@@ -11401,7 +11401,7 @@
           <p:cNvPr id="23" name="">
             <a:extLst xmlns:a="http://schemas.openxmlformats.org/drawingml/2006/main">
               <a:ext uri="{FF2B5EF4-FFF2-40B4-BE49-F238E27FC236}">
-                <a16:creationId xmlns:a16="http://schemas.microsoft.com/office/drawing/2014/main" id="{F6DDE7D4-74DD-415A-AD01-D809A1DD0242}"/>
+                <a16:creationId xmlns:a16="http://schemas.microsoft.com/office/drawing/2014/main" id="{930571BF-3FF1-447D-8278-B0207681E324}"/>
               </a:ext>
             </a:extLst>
           </p:cNvPr>
@@ -11438,7 +11438,7 @@
           <p:cNvPr id="24" name="">
             <a:extLst xmlns:a="http://schemas.openxmlformats.org/drawingml/2006/main">
               <a:ext uri="{FF2B5EF4-FFF2-40B4-BE49-F238E27FC236}">
-                <a16:creationId xmlns:a16="http://schemas.microsoft.com/office/drawing/2014/main" id="{32E7E5B5-592F-43AF-A669-3A64128CE44D}"/>
+                <a16:creationId xmlns:a16="http://schemas.microsoft.com/office/drawing/2014/main" id="{26FF242E-67B3-47A9-83FA-D46498C50885}"/>
               </a:ext>
             </a:extLst>
           </p:cNvPr>
@@ -11475,7 +11475,7 @@
           <p:cNvPr id="25" name="">
             <a:extLst xmlns:a="http://schemas.openxmlformats.org/drawingml/2006/main">
               <a:ext uri="{FF2B5EF4-FFF2-40B4-BE49-F238E27FC236}">
-                <a16:creationId xmlns:a16="http://schemas.microsoft.com/office/drawing/2014/main" id="{024D16FF-1777-4C96-890E-C56AA13F82FA}"/>
+                <a16:creationId xmlns:a16="http://schemas.microsoft.com/office/drawing/2014/main" id="{692E3A2E-5C0C-4BAE-B63D-19AAC82027D8}"/>
               </a:ext>
             </a:extLst>
           </p:cNvPr>
@@ -11512,7 +11512,7 @@
           <p:cNvPr id="26" name="">
             <a:extLst xmlns:a="http://schemas.openxmlformats.org/drawingml/2006/main">
               <a:ext uri="{FF2B5EF4-FFF2-40B4-BE49-F238E27FC236}">
-                <a16:creationId xmlns:a16="http://schemas.microsoft.com/office/drawing/2014/main" id="{95C27D5F-8754-4F32-939E-37F1EACA83C8}"/>
+                <a16:creationId xmlns:a16="http://schemas.microsoft.com/office/drawing/2014/main" id="{8AD77220-2D56-45D6-89FC-FB254713517D}"/>
               </a:ext>
             </a:extLst>
           </p:cNvPr>
@@ -11559,7 +11559,7 @@
           <p:cNvPr id="27" name="">
             <a:extLst xmlns:a="http://schemas.openxmlformats.org/drawingml/2006/main">
               <a:ext uri="{FF2B5EF4-FFF2-40B4-BE49-F238E27FC236}">
-                <a16:creationId xmlns:a16="http://schemas.microsoft.com/office/drawing/2014/main" id="{6F4324A7-690D-44D2-B3E4-D26496FC02D8}"/>
+                <a16:creationId xmlns:a16="http://schemas.microsoft.com/office/drawing/2014/main" id="{7998E602-0E22-4613-A9E7-44023367C30D}"/>
               </a:ext>
             </a:extLst>
           </p:cNvPr>
@@ -11606,7 +11606,7 @@
           <p:cNvPr id="28" name="">
             <a:extLst xmlns:a="http://schemas.openxmlformats.org/drawingml/2006/main">
               <a:ext uri="{FF2B5EF4-FFF2-40B4-BE49-F238E27FC236}">
-                <a16:creationId xmlns:a16="http://schemas.microsoft.com/office/drawing/2014/main" id="{87B79FFD-A424-47EF-B6C3-E6548D912849}"/>
+                <a16:creationId xmlns:a16="http://schemas.microsoft.com/office/drawing/2014/main" id="{7E12C2F7-99BF-4433-B391-67ADCD450106}"/>
               </a:ext>
             </a:extLst>
           </p:cNvPr>
@@ -11670,7 +11670,7 @@
           <p:cNvPr id="29" name="">
             <a:extLst xmlns:a="http://schemas.openxmlformats.org/drawingml/2006/main">
               <a:ext uri="{FF2B5EF4-FFF2-40B4-BE49-F238E27FC236}">
-                <a16:creationId xmlns:a16="http://schemas.microsoft.com/office/drawing/2014/main" id="{CBC7AAC1-7166-4ADE-988D-D20B03A32FD5}"/>
+                <a16:creationId xmlns:a16="http://schemas.microsoft.com/office/drawing/2014/main" id="{629A2BBD-168E-4F07-A898-6C0441A5A918}"/>
               </a:ext>
             </a:extLst>
           </p:cNvPr>
@@ -11734,7 +11734,7 @@
           <p:cNvPr id="30" name="">
             <a:extLst xmlns:a="http://schemas.openxmlformats.org/drawingml/2006/main">
               <a:ext uri="{FF2B5EF4-FFF2-40B4-BE49-F238E27FC236}">
-                <a16:creationId xmlns:a16="http://schemas.microsoft.com/office/drawing/2014/main" id="{4F0E6966-BB5F-4622-80F5-9C8130E0B998}"/>
+                <a16:creationId xmlns:a16="http://schemas.microsoft.com/office/drawing/2014/main" id="{6B2023AD-B7AC-4220-AFA3-505E2072D506}"/>
               </a:ext>
             </a:extLst>
           </p:cNvPr>
@@ -11798,7 +11798,7 @@
           <p:cNvPr id="31" name="">
             <a:extLst xmlns:a="http://schemas.openxmlformats.org/drawingml/2006/main">
               <a:ext uri="{FF2B5EF4-FFF2-40B4-BE49-F238E27FC236}">
-                <a16:creationId xmlns:a16="http://schemas.microsoft.com/office/drawing/2014/main" id="{408BB0C7-75A7-404B-9E2A-7F47063791CD}"/>
+                <a16:creationId xmlns:a16="http://schemas.microsoft.com/office/drawing/2014/main" id="{4410B1A7-1A7E-4A0B-B0F6-D6E028FA7D07}"/>
               </a:ext>
             </a:extLst>
           </p:cNvPr>
@@ -11862,7 +11862,7 @@
           <p:cNvPr id="32" name="">
             <a:extLst xmlns:a="http://schemas.openxmlformats.org/drawingml/2006/main">
               <a:ext uri="{FF2B5EF4-FFF2-40B4-BE49-F238E27FC236}">
-                <a16:creationId xmlns:a16="http://schemas.microsoft.com/office/drawing/2014/main" id="{698E9EA4-9587-4258-AB66-D75F98DE27C8}"/>
+                <a16:creationId xmlns:a16="http://schemas.microsoft.com/office/drawing/2014/main" id="{6F84E7B5-1D0B-4BD3-8878-B9000D1A1E2A}"/>
               </a:ext>
             </a:extLst>
           </p:cNvPr>
@@ -11903,7 +11903,7 @@
           <p:nvPr/>
         </p:nvPicPr>
         <p:blipFill>
-          <a:blip xmlns:r="http://schemas.openxmlformats.org/officeDocument/2006/relationships" xmlns:a="http://schemas.openxmlformats.org/drawingml/2006/main" r:embed="Rad22713c162f4960"/>
+          <a:blip xmlns:r="http://schemas.openxmlformats.org/officeDocument/2006/relationships" xmlns:a="http://schemas.openxmlformats.org/drawingml/2006/main" r:embed="Rc7f2bca7e9ea417e"/>
           <a:srcRect xmlns:a="http://schemas.openxmlformats.org/drawingml/2006/main" l="6910" t="0" r="6910" b="0"/>
           <a:stretch xmlns:a="http://schemas.openxmlformats.org/drawingml/2006/main">
             <a:fillRect l="0" t="0" r="0" b="0"/>
@@ -11924,7 +11924,7 @@
           <p:cNvPr id="34" name="">
             <a:extLst xmlns:a="http://schemas.openxmlformats.org/drawingml/2006/main">
               <a:ext uri="{FF2B5EF4-FFF2-40B4-BE49-F238E27FC236}">
-                <a16:creationId xmlns:a16="http://schemas.microsoft.com/office/drawing/2014/main" id="{190CEA83-6ADA-4013-A922-34E5D80AECE0}"/>
+                <a16:creationId xmlns:a16="http://schemas.microsoft.com/office/drawing/2014/main" id="{2886FCFA-8435-4CE2-83D8-882FA02F866F}"/>
               </a:ext>
             </a:extLst>
           </p:cNvPr>
@@ -11961,7 +11961,7 @@
           <p:cNvPr id="35" name="">
             <a:extLst xmlns:a="http://schemas.openxmlformats.org/drawingml/2006/main">
               <a:ext uri="{FF2B5EF4-FFF2-40B4-BE49-F238E27FC236}">
-                <a16:creationId xmlns:a16="http://schemas.microsoft.com/office/drawing/2014/main" id="{2FD03805-BE46-4D21-A321-F1CFFA69ADE5}"/>
+                <a16:creationId xmlns:a16="http://schemas.microsoft.com/office/drawing/2014/main" id="{469C282D-951F-45FF-A98C-9859813CB73A}"/>
               </a:ext>
             </a:extLst>
           </p:cNvPr>
@@ -11998,7 +11998,7 @@
           <p:cNvPr id="36" name="">
             <a:extLst xmlns:a="http://schemas.openxmlformats.org/drawingml/2006/main">
               <a:ext uri="{FF2B5EF4-FFF2-40B4-BE49-F238E27FC236}">
-                <a16:creationId xmlns:a16="http://schemas.microsoft.com/office/drawing/2014/main" id="{DE066541-831F-4863-AEB8-CB18D99B90FE}"/>
+                <a16:creationId xmlns:a16="http://schemas.microsoft.com/office/drawing/2014/main" id="{292B810A-2B96-4D31-A870-F3487896D1D8}"/>
               </a:ext>
             </a:extLst>
           </p:cNvPr>
@@ -12035,7 +12035,7 @@
           <p:cNvPr id="37" name="">
             <a:extLst xmlns:a="http://schemas.openxmlformats.org/drawingml/2006/main">
               <a:ext uri="{FF2B5EF4-FFF2-40B4-BE49-F238E27FC236}">
-                <a16:creationId xmlns:a16="http://schemas.microsoft.com/office/drawing/2014/main" id="{3BD906C3-506F-417F-A19F-954BC1FEA5D7}"/>
+                <a16:creationId xmlns:a16="http://schemas.microsoft.com/office/drawing/2014/main" id="{689E725E-9C89-430A-BF90-BE92D0C0FA71}"/>
               </a:ext>
             </a:extLst>
           </p:cNvPr>
@@ -12099,7 +12099,7 @@
           <p:cNvPr id="38" name="">
             <a:extLst xmlns:a="http://schemas.openxmlformats.org/drawingml/2006/main">
               <a:ext uri="{FF2B5EF4-FFF2-40B4-BE49-F238E27FC236}">
-                <a16:creationId xmlns:a16="http://schemas.microsoft.com/office/drawing/2014/main" id="{751B2E31-5EC6-4CCE-A4F0-F898DB27CE34}"/>
+                <a16:creationId xmlns:a16="http://schemas.microsoft.com/office/drawing/2014/main" id="{08D2482D-7511-43E7-B1D7-B9D5B9B4069E}"/>
               </a:ext>
             </a:extLst>
           </p:cNvPr>
@@ -12163,7 +12163,7 @@
           <p:cNvPr id="39" name="">
             <a:extLst xmlns:a="http://schemas.openxmlformats.org/drawingml/2006/main">
               <a:ext uri="{FF2B5EF4-FFF2-40B4-BE49-F238E27FC236}">
-                <a16:creationId xmlns:a16="http://schemas.microsoft.com/office/drawing/2014/main" id="{4FEC999A-0D33-43F1-9158-DB034D92FC7F}"/>
+                <a16:creationId xmlns:a16="http://schemas.microsoft.com/office/drawing/2014/main" id="{2A464A1F-7541-433B-B1BC-7FAB72AF0533}"/>
               </a:ext>
             </a:extLst>
           </p:cNvPr>
@@ -12227,7 +12227,7 @@
           <p:cNvPr id="40" name="">
             <a:extLst xmlns:a="http://schemas.openxmlformats.org/drawingml/2006/main">
               <a:ext uri="{FF2B5EF4-FFF2-40B4-BE49-F238E27FC236}">
-                <a16:creationId xmlns:a16="http://schemas.microsoft.com/office/drawing/2014/main" id="{CA04A68D-01BD-4ACB-8D7B-8FD3EEDC5199}"/>
+                <a16:creationId xmlns:a16="http://schemas.microsoft.com/office/drawing/2014/main" id="{8AC91DFF-D7EA-43C4-8C6A-BA6C4D3C7CD3}"/>
               </a:ext>
             </a:extLst>
           </p:cNvPr>
@@ -12264,7 +12264,7 @@
           <p:cNvPr id="41" name="">
             <a:extLst xmlns:a="http://schemas.openxmlformats.org/drawingml/2006/main">
               <a:ext uri="{FF2B5EF4-FFF2-40B4-BE49-F238E27FC236}">
-                <a16:creationId xmlns:a16="http://schemas.microsoft.com/office/drawing/2014/main" id="{D920B4E2-D63B-4254-87FA-B994029C0A30}"/>
+                <a16:creationId xmlns:a16="http://schemas.microsoft.com/office/drawing/2014/main" id="{DF4A4E62-298B-4BCD-A578-2D8BAFF8D258}"/>
               </a:ext>
             </a:extLst>
           </p:cNvPr>
@@ -12301,7 +12301,7 @@
           <p:cNvPr id="42" name="">
             <a:extLst xmlns:a="http://schemas.openxmlformats.org/drawingml/2006/main">
               <a:ext uri="{FF2B5EF4-FFF2-40B4-BE49-F238E27FC236}">
-                <a16:creationId xmlns:a16="http://schemas.microsoft.com/office/drawing/2014/main" id="{39A80C40-4266-4B92-AD95-F5D643F48CDD}"/>
+                <a16:creationId xmlns:a16="http://schemas.microsoft.com/office/drawing/2014/main" id="{716293BB-CAD6-4AE2-81C4-822ACF708E48}"/>
               </a:ext>
             </a:extLst>
           </p:cNvPr>
@@ -12338,7 +12338,7 @@
           <p:cNvPr id="43" name="">
             <a:extLst xmlns:a="http://schemas.openxmlformats.org/drawingml/2006/main">
               <a:ext uri="{FF2B5EF4-FFF2-40B4-BE49-F238E27FC236}">
-                <a16:creationId xmlns:a16="http://schemas.microsoft.com/office/drawing/2014/main" id="{EF11C603-3876-4BEA-AA5D-D77DD67E0813}"/>
+                <a16:creationId xmlns:a16="http://schemas.microsoft.com/office/drawing/2014/main" id="{6F556BCC-917D-4ABB-AAC8-4591DE1C1658}"/>
               </a:ext>
             </a:extLst>
           </p:cNvPr>
@@ -12402,7 +12402,7 @@
           <p:cNvPr id="44" name="">
             <a:extLst xmlns:a="http://schemas.openxmlformats.org/drawingml/2006/main">
               <a:ext uri="{FF2B5EF4-FFF2-40B4-BE49-F238E27FC236}">
-                <a16:creationId xmlns:a16="http://schemas.microsoft.com/office/drawing/2014/main" id="{D341B7DB-BD23-4CD4-BA86-E3B3560E8B5E}"/>
+                <a16:creationId xmlns:a16="http://schemas.microsoft.com/office/drawing/2014/main" id="{6AD6244A-358B-4207-BB3E-D48DE861B3B4}"/>
               </a:ext>
             </a:extLst>
           </p:cNvPr>
@@ -12466,7 +12466,7 @@
           <p:cNvPr id="45" name="">
             <a:extLst xmlns:a="http://schemas.openxmlformats.org/drawingml/2006/main">
               <a:ext uri="{FF2B5EF4-FFF2-40B4-BE49-F238E27FC236}">
-                <a16:creationId xmlns:a16="http://schemas.microsoft.com/office/drawing/2014/main" id="{49C9DA56-736E-4B1B-9447-E4FD77027B73}"/>
+                <a16:creationId xmlns:a16="http://schemas.microsoft.com/office/drawing/2014/main" id="{8634733E-5BE8-44BE-AB84-FEEF5888A02F}"/>
               </a:ext>
             </a:extLst>
           </p:cNvPr>
@@ -12530,7 +12530,7 @@
           <p:cNvPr id="46" name="">
             <a:extLst xmlns:a="http://schemas.openxmlformats.org/drawingml/2006/main">
               <a:ext uri="{FF2B5EF4-FFF2-40B4-BE49-F238E27FC236}">
-                <a16:creationId xmlns:a16="http://schemas.microsoft.com/office/drawing/2014/main" id="{49F52C7B-85E6-4BAE-8BB9-A42A48EF8240}"/>
+                <a16:creationId xmlns:a16="http://schemas.microsoft.com/office/drawing/2014/main" id="{1F2435A0-5B15-49F1-9255-93B99F8F6D82}"/>
               </a:ext>
             </a:extLst>
           </p:cNvPr>
@@ -12567,7 +12567,7 @@
           <p:cNvPr id="47" name="">
             <a:extLst xmlns:a="http://schemas.openxmlformats.org/drawingml/2006/main">
               <a:ext uri="{FF2B5EF4-FFF2-40B4-BE49-F238E27FC236}">
-                <a16:creationId xmlns:a16="http://schemas.microsoft.com/office/drawing/2014/main" id="{6E485721-5E70-4F0C-9599-E90D4A7570B6}"/>
+                <a16:creationId xmlns:a16="http://schemas.microsoft.com/office/drawing/2014/main" id="{F8A9C2A5-CFF6-4A6B-BDAC-C728E374713E}"/>
               </a:ext>
             </a:extLst>
           </p:cNvPr>
@@ -12604,7 +12604,7 @@
           <p:cNvPr id="48" name="">
             <a:extLst xmlns:a="http://schemas.openxmlformats.org/drawingml/2006/main">
               <a:ext uri="{FF2B5EF4-FFF2-40B4-BE49-F238E27FC236}">
-                <a16:creationId xmlns:a16="http://schemas.microsoft.com/office/drawing/2014/main" id="{15FB46C3-00F1-4B45-AC5F-EC4FD8645715}"/>
+                <a16:creationId xmlns:a16="http://schemas.microsoft.com/office/drawing/2014/main" id="{1229EA1E-2250-4437-8949-75E8655F66C6}"/>
               </a:ext>
             </a:extLst>
           </p:cNvPr>
@@ -12641,7 +12641,7 @@
           <p:cNvPr id="49" name="">
             <a:extLst xmlns:a="http://schemas.openxmlformats.org/drawingml/2006/main">
               <a:ext uri="{FF2B5EF4-FFF2-40B4-BE49-F238E27FC236}">
-                <a16:creationId xmlns:a16="http://schemas.microsoft.com/office/drawing/2014/main" id="{C453BA37-932B-481D-8116-E5BDCC1E44EF}"/>
+                <a16:creationId xmlns:a16="http://schemas.microsoft.com/office/drawing/2014/main" id="{E04889BD-4B46-4872-B982-27A37AD0068F}"/>
               </a:ext>
             </a:extLst>
           </p:cNvPr>
@@ -12705,7 +12705,7 @@
           <p:cNvPr id="50" name="">
             <a:extLst xmlns:a="http://schemas.openxmlformats.org/drawingml/2006/main">
               <a:ext uri="{FF2B5EF4-FFF2-40B4-BE49-F238E27FC236}">
-                <a16:creationId xmlns:a16="http://schemas.microsoft.com/office/drawing/2014/main" id="{11C0E8D2-1442-4642-A64E-C2C251A505F9}"/>
+                <a16:creationId xmlns:a16="http://schemas.microsoft.com/office/drawing/2014/main" id="{F8D6B262-521D-49AD-A328-558F0628F44C}"/>
               </a:ext>
             </a:extLst>
           </p:cNvPr>
@@ -12769,7 +12769,7 @@
           <p:cNvPr id="51" name="">
             <a:extLst xmlns:a="http://schemas.openxmlformats.org/drawingml/2006/main">
               <a:ext uri="{FF2B5EF4-FFF2-40B4-BE49-F238E27FC236}">
-                <a16:creationId xmlns:a16="http://schemas.microsoft.com/office/drawing/2014/main" id="{FBEAC24C-D8F5-4C25-B4D4-0173D151CE4D}"/>
+                <a16:creationId xmlns:a16="http://schemas.microsoft.com/office/drawing/2014/main" id="{69781DB2-764A-4A06-A0AA-D309D6BC25F3}"/>
               </a:ext>
             </a:extLst>
           </p:cNvPr>
@@ -12833,7 +12833,7 @@
           <p:cNvPr id="52" name="">
             <a:extLst xmlns:a="http://schemas.openxmlformats.org/drawingml/2006/main">
               <a:ext uri="{FF2B5EF4-FFF2-40B4-BE49-F238E27FC236}">
-                <a16:creationId xmlns:a16="http://schemas.microsoft.com/office/drawing/2014/main" id="{DAA61236-A831-4743-98DA-D9462E226CC3}"/>
+                <a16:creationId xmlns:a16="http://schemas.microsoft.com/office/drawing/2014/main" id="{3E9C01FE-C2A9-4D00-8656-620A5B6291C5}"/>
               </a:ext>
             </a:extLst>
           </p:cNvPr>
@@ -12870,7 +12870,7 @@
           <p:cNvPr id="53" name="">
             <a:extLst xmlns:a="http://schemas.openxmlformats.org/drawingml/2006/main">
               <a:ext uri="{FF2B5EF4-FFF2-40B4-BE49-F238E27FC236}">
-                <a16:creationId xmlns:a16="http://schemas.microsoft.com/office/drawing/2014/main" id="{8E864DAE-63B6-4BEF-8A94-E671F010066A}"/>
+                <a16:creationId xmlns:a16="http://schemas.microsoft.com/office/drawing/2014/main" id="{61FBB0BD-B1C8-4570-8559-C96F37523CC8}"/>
               </a:ext>
             </a:extLst>
           </p:cNvPr>
@@ -12934,7 +12934,7 @@
           <p:cNvPr id="54" name="">
             <a:extLst xmlns:a="http://schemas.openxmlformats.org/drawingml/2006/main">
               <a:ext uri="{FF2B5EF4-FFF2-40B4-BE49-F238E27FC236}">
-                <a16:creationId xmlns:a16="http://schemas.microsoft.com/office/drawing/2014/main" id="{4317DD81-D8FA-4AC6-9671-386EA27CD7FB}"/>
+                <a16:creationId xmlns:a16="http://schemas.microsoft.com/office/drawing/2014/main" id="{65A33FB7-0808-4796-8E24-269AFF63992B}"/>
               </a:ext>
             </a:extLst>
           </p:cNvPr>
@@ -12971,7 +12971,7 @@
           <p:cNvPr id="55" name="">
             <a:extLst xmlns:a="http://schemas.openxmlformats.org/drawingml/2006/main">
               <a:ext uri="{FF2B5EF4-FFF2-40B4-BE49-F238E27FC236}">
-                <a16:creationId xmlns:a16="http://schemas.microsoft.com/office/drawing/2014/main" id="{0994755E-0603-42F5-9060-D8A3363DA31B}"/>
+                <a16:creationId xmlns:a16="http://schemas.microsoft.com/office/drawing/2014/main" id="{62AFA7D8-06CD-4991-ABB9-E57C99F8E14E}"/>
               </a:ext>
             </a:extLst>
           </p:cNvPr>
@@ -13035,7 +13035,7 @@
           <p:cNvPr id="56" name="">
             <a:extLst xmlns:a="http://schemas.openxmlformats.org/drawingml/2006/main">
               <a:ext uri="{FF2B5EF4-FFF2-40B4-BE49-F238E27FC236}">
-                <a16:creationId xmlns:a16="http://schemas.microsoft.com/office/drawing/2014/main" id="{5B16033B-BC87-4875-96D3-297AE7CA0CB6}"/>
+                <a16:creationId xmlns:a16="http://schemas.microsoft.com/office/drawing/2014/main" id="{9886597C-0BCC-4394-B6DB-DB1B659E3FDD}"/>
               </a:ext>
             </a:extLst>
           </p:cNvPr>
@@ -13072,7 +13072,7 @@
           <p:cNvPr id="57" name="">
             <a:extLst xmlns:a="http://schemas.openxmlformats.org/drawingml/2006/main">
               <a:ext uri="{FF2B5EF4-FFF2-40B4-BE49-F238E27FC236}">
-                <a16:creationId xmlns:a16="http://schemas.microsoft.com/office/drawing/2014/main" id="{55DA3883-13E3-4BBD-85AA-968320292D3B}"/>
+                <a16:creationId xmlns:a16="http://schemas.microsoft.com/office/drawing/2014/main" id="{A7D33D53-1C2E-4FBA-BDE5-2D7EDACA3471}"/>
               </a:ext>
             </a:extLst>
           </p:cNvPr>
@@ -13109,7 +13109,7 @@
           <p:cNvPr id="58" name="">
             <a:extLst xmlns:a="http://schemas.openxmlformats.org/drawingml/2006/main">
               <a:ext uri="{FF2B5EF4-FFF2-40B4-BE49-F238E27FC236}">
-                <a16:creationId xmlns:a16="http://schemas.microsoft.com/office/drawing/2014/main" id="{5487173A-9279-4C41-AF7C-997AD6200A4F}"/>
+                <a16:creationId xmlns:a16="http://schemas.microsoft.com/office/drawing/2014/main" id="{5E2C59C3-3E24-434F-B9F9-68CC44152F17}"/>
               </a:ext>
             </a:extLst>
           </p:cNvPr>
@@ -13173,7 +13173,7 @@
           <p:cNvPr id="59" name="">
             <a:extLst xmlns:a="http://schemas.openxmlformats.org/drawingml/2006/main">
               <a:ext uri="{FF2B5EF4-FFF2-40B4-BE49-F238E27FC236}">
-                <a16:creationId xmlns:a16="http://schemas.microsoft.com/office/drawing/2014/main" id="{356E539E-FF23-4354-8859-9AA8049BD374}"/>
+                <a16:creationId xmlns:a16="http://schemas.microsoft.com/office/drawing/2014/main" id="{FE260556-B197-4891-908E-1D4DFD419265}"/>
               </a:ext>
             </a:extLst>
           </p:cNvPr>
@@ -13237,7 +13237,7 @@
           <p:cNvPr id="60" name="">
             <a:extLst xmlns:a="http://schemas.openxmlformats.org/drawingml/2006/main">
               <a:ext uri="{FF2B5EF4-FFF2-40B4-BE49-F238E27FC236}">
-                <a16:creationId xmlns:a16="http://schemas.microsoft.com/office/drawing/2014/main" id="{98CFA9EE-804A-4F16-BE07-847363A4B58A}"/>
+                <a16:creationId xmlns:a16="http://schemas.microsoft.com/office/drawing/2014/main" id="{4AEAEDB9-4935-4A94-AA33-D53652295969}"/>
               </a:ext>
             </a:extLst>
           </p:cNvPr>
@@ -13274,7 +13274,7 @@
           <p:cNvPr id="61" name="">
             <a:extLst xmlns:a="http://schemas.openxmlformats.org/drawingml/2006/main">
               <a:ext uri="{FF2B5EF4-FFF2-40B4-BE49-F238E27FC236}">
-                <a16:creationId xmlns:a16="http://schemas.microsoft.com/office/drawing/2014/main" id="{780F2DF0-9EFF-4968-95F2-36F9E2BB4DA6}"/>
+                <a16:creationId xmlns:a16="http://schemas.microsoft.com/office/drawing/2014/main" id="{8AC066E2-E189-4A42-A37F-9570DB4EB346}"/>
               </a:ext>
             </a:extLst>
           </p:cNvPr>
@@ -13311,7 +13311,7 @@
           <p:cNvPr id="62" name="">
             <a:extLst xmlns:a="http://schemas.openxmlformats.org/drawingml/2006/main">
               <a:ext uri="{FF2B5EF4-FFF2-40B4-BE49-F238E27FC236}">
-                <a16:creationId xmlns:a16="http://schemas.microsoft.com/office/drawing/2014/main" id="{C5CBB30E-BD3D-4481-AD23-29D5C2CDC924}"/>
+                <a16:creationId xmlns:a16="http://schemas.microsoft.com/office/drawing/2014/main" id="{DADC70C5-EEDE-4766-BF58-C6016AC1622C}"/>
               </a:ext>
             </a:extLst>
           </p:cNvPr>
@@ -13375,7 +13375,7 @@
           <p:cNvPr id="63" name="">
             <a:extLst xmlns:a="http://schemas.openxmlformats.org/drawingml/2006/main">
               <a:ext uri="{FF2B5EF4-FFF2-40B4-BE49-F238E27FC236}">
-                <a16:creationId xmlns:a16="http://schemas.microsoft.com/office/drawing/2014/main" id="{BC0E76E8-B3BC-44F3-BBA5-F887D2BDA68F}"/>
+                <a16:creationId xmlns:a16="http://schemas.microsoft.com/office/drawing/2014/main" id="{A50C7706-F3C6-4896-9F06-1E6992D59DF5}"/>
               </a:ext>
             </a:extLst>
           </p:cNvPr>
@@ -13439,7 +13439,7 @@
           <p:cNvPr id="64" name="">
             <a:extLst xmlns:a="http://schemas.openxmlformats.org/drawingml/2006/main">
               <a:ext uri="{FF2B5EF4-FFF2-40B4-BE49-F238E27FC236}">
-                <a16:creationId xmlns:a16="http://schemas.microsoft.com/office/drawing/2014/main" id="{B1AF0043-887C-4D99-BDDB-6718563A6100}"/>
+                <a16:creationId xmlns:a16="http://schemas.microsoft.com/office/drawing/2014/main" id="{89603D8B-DFAC-4C11-A8D2-07E25D89EF4B}"/>
               </a:ext>
             </a:extLst>
           </p:cNvPr>
@@ -13476,7 +13476,7 @@
           <p:cNvPr id="65" name="">
             <a:extLst xmlns:a="http://schemas.openxmlformats.org/drawingml/2006/main">
               <a:ext uri="{FF2B5EF4-FFF2-40B4-BE49-F238E27FC236}">
-                <a16:creationId xmlns:a16="http://schemas.microsoft.com/office/drawing/2014/main" id="{021BC341-A907-4187-972E-E953A5197B3A}"/>
+                <a16:creationId xmlns:a16="http://schemas.microsoft.com/office/drawing/2014/main" id="{0FD90429-56A8-4EC8-9E2B-4C668AF09566}"/>
               </a:ext>
             </a:extLst>
           </p:cNvPr>
@@ -13538,7 +13538,7 @@
     </p:spTree>
     <p:extLst>
       <p:ext uri="{BB962C8B-B14F-4D97-AF65-F5344CB8AC3E}">
-        <p14:creationId xmlns:p14="http://schemas.microsoft.com/office/powerpoint/2010/main" val="1836510413"/>
+        <p14:creationId xmlns:p14="http://schemas.microsoft.com/office/powerpoint/2010/main" val="1476486086"/>
       </p:ext>
     </p:extLst>
   </p:cSld>
@@ -13562,7 +13562,7 @@
           <p:cNvPr id="1" name="">
             <a:extLst xmlns:a="http://schemas.openxmlformats.org/drawingml/2006/main">
               <a:ext uri="{FF2B5EF4-FFF2-40B4-BE49-F238E27FC236}">
-                <a16:creationId xmlns:a16="http://schemas.microsoft.com/office/drawing/2014/main" id="{0F8F7274-08D6-40B1-975F-42B79B94BA96}"/>
+                <a16:creationId xmlns:a16="http://schemas.microsoft.com/office/drawing/2014/main" id="{77833FAC-2D62-49D1-8E14-BA0DA6AC7142}"/>
               </a:ext>
             </a:extLst>
           </p:cNvPr>
@@ -13597,7 +13597,7 @@
           <p:cNvPr id="2" name="">
             <a:extLst xmlns:a="http://schemas.openxmlformats.org/drawingml/2006/main">
               <a:ext uri="{FF2B5EF4-FFF2-40B4-BE49-F238E27FC236}">
-                <a16:creationId xmlns:a16="http://schemas.microsoft.com/office/drawing/2014/main" id="{10681DE2-E5AF-4614-814B-2B39D8B4DCAD}"/>
+                <a16:creationId xmlns:a16="http://schemas.microsoft.com/office/drawing/2014/main" id="{0711CDB6-A654-47DA-93DD-B4FF9ADFB40B}"/>
               </a:ext>
             </a:extLst>
           </p:cNvPr>
@@ -13643,7 +13643,7 @@
           <p:cNvPr id="3" name="">
             <a:extLst xmlns:a="http://schemas.openxmlformats.org/drawingml/2006/main">
               <a:ext uri="{FF2B5EF4-FFF2-40B4-BE49-F238E27FC236}">
-                <a16:creationId xmlns:a16="http://schemas.microsoft.com/office/drawing/2014/main" id="{719BD4B8-5F54-4742-B364-28E0163EBCCC}"/>
+                <a16:creationId xmlns:a16="http://schemas.microsoft.com/office/drawing/2014/main" id="{D30CF911-69EC-4683-AB66-B058F69ABAAD}"/>
               </a:ext>
             </a:extLst>
           </p:cNvPr>
@@ -13680,7 +13680,7 @@
           <p:cNvPr id="4" name="">
             <a:extLst xmlns:a="http://schemas.openxmlformats.org/drawingml/2006/main">
               <a:ext uri="{FF2B5EF4-FFF2-40B4-BE49-F238E27FC236}">
-                <a16:creationId xmlns:a16="http://schemas.microsoft.com/office/drawing/2014/main" id="{BB43BEC9-70B4-4007-8A02-B7D29E0BCF7F}"/>
+                <a16:creationId xmlns:a16="http://schemas.microsoft.com/office/drawing/2014/main" id="{1030ADB5-08E2-4533-8754-BE5C5400AA6A}"/>
               </a:ext>
             </a:extLst>
           </p:cNvPr>
@@ -13717,7 +13717,7 @@
           <p:cNvPr id="5" name="">
             <a:extLst xmlns:a="http://schemas.openxmlformats.org/drawingml/2006/main">
               <a:ext uri="{FF2B5EF4-FFF2-40B4-BE49-F238E27FC236}">
-                <a16:creationId xmlns:a16="http://schemas.microsoft.com/office/drawing/2014/main" id="{E431C34C-BD88-46C6-BFCD-074BA93E1718}"/>
+                <a16:creationId xmlns:a16="http://schemas.microsoft.com/office/drawing/2014/main" id="{07A0D45B-69A5-4042-A8BD-9FA9B8A1CF90}"/>
               </a:ext>
             </a:extLst>
           </p:cNvPr>
@@ -13754,7 +13754,7 @@
           <p:cNvPr id="6" name="">
             <a:extLst xmlns:a="http://schemas.openxmlformats.org/drawingml/2006/main">
               <a:ext uri="{FF2B5EF4-FFF2-40B4-BE49-F238E27FC236}">
-                <a16:creationId xmlns:a16="http://schemas.microsoft.com/office/drawing/2014/main" id="{58754451-7A2D-4398-B166-036A4DD282E5}"/>
+                <a16:creationId xmlns:a16="http://schemas.microsoft.com/office/drawing/2014/main" id="{9F0E19C0-BBE7-4318-9E4A-BC6DFC7E860E}"/>
               </a:ext>
             </a:extLst>
           </p:cNvPr>
@@ -13791,7 +13791,7 @@
           <p:cNvPr id="7" name="">
             <a:extLst xmlns:a="http://schemas.openxmlformats.org/drawingml/2006/main">
               <a:ext uri="{FF2B5EF4-FFF2-40B4-BE49-F238E27FC236}">
-                <a16:creationId xmlns:a16="http://schemas.microsoft.com/office/drawing/2014/main" id="{B622F942-2226-4B77-BAB1-01FAFE98F28F}"/>
+                <a16:creationId xmlns:a16="http://schemas.microsoft.com/office/drawing/2014/main" id="{2A27F34C-BED5-43B4-8F7D-C551696BEA63}"/>
               </a:ext>
             </a:extLst>
           </p:cNvPr>
@@ -13828,7 +13828,7 @@
           <p:cNvPr id="8" name="">
             <a:extLst xmlns:a="http://schemas.openxmlformats.org/drawingml/2006/main">
               <a:ext uri="{FF2B5EF4-FFF2-40B4-BE49-F238E27FC236}">
-                <a16:creationId xmlns:a16="http://schemas.microsoft.com/office/drawing/2014/main" id="{1D8BD82F-8F48-4ABC-977F-3877E6C877DF}"/>
+                <a16:creationId xmlns:a16="http://schemas.microsoft.com/office/drawing/2014/main" id="{6D904371-4104-4FBD-A9CA-4E5110BB3CE1}"/>
               </a:ext>
             </a:extLst>
           </p:cNvPr>
@@ -13865,7 +13865,7 @@
           <p:cNvPr id="9" name="">
             <a:extLst xmlns:a="http://schemas.openxmlformats.org/drawingml/2006/main">
               <a:ext uri="{FF2B5EF4-FFF2-40B4-BE49-F238E27FC236}">
-                <a16:creationId xmlns:a16="http://schemas.microsoft.com/office/drawing/2014/main" id="{D3198FDC-22EB-48A4-9842-00A92B9CA4BC}"/>
+                <a16:creationId xmlns:a16="http://schemas.microsoft.com/office/drawing/2014/main" id="{8EDA12EE-4800-47C6-B8EC-9901CBE11751}"/>
               </a:ext>
             </a:extLst>
           </p:cNvPr>
@@ -13902,7 +13902,7 @@
           <p:cNvPr id="10" name="">
             <a:extLst xmlns:a="http://schemas.openxmlformats.org/drawingml/2006/main">
               <a:ext uri="{FF2B5EF4-FFF2-40B4-BE49-F238E27FC236}">
-                <a16:creationId xmlns:a16="http://schemas.microsoft.com/office/drawing/2014/main" id="{5962DA4E-BCE4-4789-8AF8-D583DF56113F}"/>
+                <a16:creationId xmlns:a16="http://schemas.microsoft.com/office/drawing/2014/main" id="{E8176A76-1C48-4786-97E0-545C347C43DF}"/>
               </a:ext>
             </a:extLst>
           </p:cNvPr>
@@ -13939,7 +13939,7 @@
           <p:cNvPr id="11" name="">
             <a:extLst xmlns:a="http://schemas.openxmlformats.org/drawingml/2006/main">
               <a:ext uri="{FF2B5EF4-FFF2-40B4-BE49-F238E27FC236}">
-                <a16:creationId xmlns:a16="http://schemas.microsoft.com/office/drawing/2014/main" id="{D94CEB07-ABFC-4EF7-892E-6B76C672D9CD}"/>
+                <a16:creationId xmlns:a16="http://schemas.microsoft.com/office/drawing/2014/main" id="{549F94CE-E139-47E9-8865-C40B95CCCF6A}"/>
               </a:ext>
             </a:extLst>
           </p:cNvPr>
@@ -13976,7 +13976,7 @@
           <p:cNvPr id="12" name="">
             <a:extLst xmlns:a="http://schemas.openxmlformats.org/drawingml/2006/main">
               <a:ext uri="{FF2B5EF4-FFF2-40B4-BE49-F238E27FC236}">
-                <a16:creationId xmlns:a16="http://schemas.microsoft.com/office/drawing/2014/main" id="{BBFDD641-9A36-4E41-86C9-FEA9F8FE82DD}"/>
+                <a16:creationId xmlns:a16="http://schemas.microsoft.com/office/drawing/2014/main" id="{C84039EC-4412-4B5D-A851-9AAD61741BE6}"/>
               </a:ext>
             </a:extLst>
           </p:cNvPr>
@@ -14013,7 +14013,7 @@
           <p:cNvPr id="13" name="">
             <a:extLst xmlns:a="http://schemas.openxmlformats.org/drawingml/2006/main">
               <a:ext uri="{FF2B5EF4-FFF2-40B4-BE49-F238E27FC236}">
-                <a16:creationId xmlns:a16="http://schemas.microsoft.com/office/drawing/2014/main" id="{547759C8-706B-4122-BCEC-5E466B46CA78}"/>
+                <a16:creationId xmlns:a16="http://schemas.microsoft.com/office/drawing/2014/main" id="{F7AC6A02-6839-4217-BD76-B33B5E48ED96}"/>
               </a:ext>
             </a:extLst>
           </p:cNvPr>
@@ -14050,7 +14050,7 @@
           <p:cNvPr id="14" name="">
             <a:extLst xmlns:a="http://schemas.openxmlformats.org/drawingml/2006/main">
               <a:ext uri="{FF2B5EF4-FFF2-40B4-BE49-F238E27FC236}">
-                <a16:creationId xmlns:a16="http://schemas.microsoft.com/office/drawing/2014/main" id="{48CC7FDE-FAB4-407A-BE63-7938A0062AC3}"/>
+                <a16:creationId xmlns:a16="http://schemas.microsoft.com/office/drawing/2014/main" id="{DAECDECF-0DC0-4ACB-B01E-F7CC48080033}"/>
               </a:ext>
             </a:extLst>
           </p:cNvPr>
@@ -14087,7 +14087,7 @@
           <p:cNvPr id="15" name="">
             <a:extLst xmlns:a="http://schemas.openxmlformats.org/drawingml/2006/main">
               <a:ext uri="{FF2B5EF4-FFF2-40B4-BE49-F238E27FC236}">
-                <a16:creationId xmlns:a16="http://schemas.microsoft.com/office/drawing/2014/main" id="{E764BBC0-04E5-4024-B13F-04FBBCCE2C51}"/>
+                <a16:creationId xmlns:a16="http://schemas.microsoft.com/office/drawing/2014/main" id="{686F4117-3818-46AB-B8B6-BDDFD6F8FA4E}"/>
               </a:ext>
             </a:extLst>
           </p:cNvPr>
@@ -14124,7 +14124,7 @@
           <p:cNvPr id="16" name="">
             <a:extLst xmlns:a="http://schemas.openxmlformats.org/drawingml/2006/main">
               <a:ext uri="{FF2B5EF4-FFF2-40B4-BE49-F238E27FC236}">
-                <a16:creationId xmlns:a16="http://schemas.microsoft.com/office/drawing/2014/main" id="{7FC249CA-A1B7-4C76-BA74-1DDF9B0E81F1}"/>
+                <a16:creationId xmlns:a16="http://schemas.microsoft.com/office/drawing/2014/main" id="{6F27D122-A6CB-4D77-A6C1-24B3BB1C44BA}"/>
               </a:ext>
             </a:extLst>
           </p:cNvPr>
@@ -14161,7 +14161,7 @@
           <p:cNvPr id="17" name="">
             <a:extLst xmlns:a="http://schemas.openxmlformats.org/drawingml/2006/main">
               <a:ext uri="{FF2B5EF4-FFF2-40B4-BE49-F238E27FC236}">
-                <a16:creationId xmlns:a16="http://schemas.microsoft.com/office/drawing/2014/main" id="{FF629A53-3E75-4C8E-8788-A509F9B33367}"/>
+                <a16:creationId xmlns:a16="http://schemas.microsoft.com/office/drawing/2014/main" id="{F4A4A2CB-0297-4DD1-8526-B21975B673BB}"/>
               </a:ext>
             </a:extLst>
           </p:cNvPr>
@@ -14198,7 +14198,7 @@
           <p:cNvPr id="18" name="">
             <a:extLst xmlns:a="http://schemas.openxmlformats.org/drawingml/2006/main">
               <a:ext uri="{FF2B5EF4-FFF2-40B4-BE49-F238E27FC236}">
-                <a16:creationId xmlns:a16="http://schemas.microsoft.com/office/drawing/2014/main" id="{51DF6426-AD92-4C34-B548-F8FBD1E40953}"/>
+                <a16:creationId xmlns:a16="http://schemas.microsoft.com/office/drawing/2014/main" id="{8884DC9E-0FBE-48DA-AB5E-21A3AB090388}"/>
               </a:ext>
             </a:extLst>
           </p:cNvPr>
@@ -14235,7 +14235,7 @@
           <p:cNvPr id="19" name="">
             <a:extLst xmlns:a="http://schemas.openxmlformats.org/drawingml/2006/main">
               <a:ext uri="{FF2B5EF4-FFF2-40B4-BE49-F238E27FC236}">
-                <a16:creationId xmlns:a16="http://schemas.microsoft.com/office/drawing/2014/main" id="{15919371-808A-4CA5-93D4-E14325653C37}"/>
+                <a16:creationId xmlns:a16="http://schemas.microsoft.com/office/drawing/2014/main" id="{9B605C5D-3C91-4EE3-A6E7-B6F085B5F562}"/>
               </a:ext>
             </a:extLst>
           </p:cNvPr>
@@ -14272,7 +14272,7 @@
           <p:cNvPr id="20" name="">
             <a:extLst xmlns:a="http://schemas.openxmlformats.org/drawingml/2006/main">
               <a:ext uri="{FF2B5EF4-FFF2-40B4-BE49-F238E27FC236}">
-                <a16:creationId xmlns:a16="http://schemas.microsoft.com/office/drawing/2014/main" id="{B2A5BBAC-AF6B-41A9-8537-36785DDB43A2}"/>
+                <a16:creationId xmlns:a16="http://schemas.microsoft.com/office/drawing/2014/main" id="{E1673D7D-DB59-4037-BDC3-00880BC522EA}"/>
               </a:ext>
             </a:extLst>
           </p:cNvPr>
@@ -14309,7 +14309,7 @@
           <p:cNvPr id="21" name="">
             <a:extLst xmlns:a="http://schemas.openxmlformats.org/drawingml/2006/main">
               <a:ext uri="{FF2B5EF4-FFF2-40B4-BE49-F238E27FC236}">
-                <a16:creationId xmlns:a16="http://schemas.microsoft.com/office/drawing/2014/main" id="{701A322E-133F-4179-8644-17B7FA509635}"/>
+                <a16:creationId xmlns:a16="http://schemas.microsoft.com/office/drawing/2014/main" id="{D7E1E072-F99F-4A9B-B546-C9BF635ED1D4}"/>
               </a:ext>
             </a:extLst>
           </p:cNvPr>
@@ -14346,7 +14346,7 @@
           <p:cNvPr id="22" name="">
             <a:extLst xmlns:a="http://schemas.openxmlformats.org/drawingml/2006/main">
               <a:ext uri="{FF2B5EF4-FFF2-40B4-BE49-F238E27FC236}">
-                <a16:creationId xmlns:a16="http://schemas.microsoft.com/office/drawing/2014/main" id="{99CC9D92-E164-4A9F-AC86-168B7544B860}"/>
+                <a16:creationId xmlns:a16="http://schemas.microsoft.com/office/drawing/2014/main" id="{C9958956-4C0C-4A02-8489-80AD8DD07C1B}"/>
               </a:ext>
             </a:extLst>
           </p:cNvPr>
@@ -14383,7 +14383,7 @@
           <p:cNvPr id="23" name="">
             <a:extLst xmlns:a="http://schemas.openxmlformats.org/drawingml/2006/main">
               <a:ext uri="{FF2B5EF4-FFF2-40B4-BE49-F238E27FC236}">
-                <a16:creationId xmlns:a16="http://schemas.microsoft.com/office/drawing/2014/main" id="{F31EBA34-9758-410F-9906-EEEA15DDA031}"/>
+                <a16:creationId xmlns:a16="http://schemas.microsoft.com/office/drawing/2014/main" id="{80270FBE-C032-4004-B279-90F25197F5F6}"/>
               </a:ext>
             </a:extLst>
           </p:cNvPr>
@@ -14420,7 +14420,7 @@
           <p:cNvPr id="24" name="">
             <a:extLst xmlns:a="http://schemas.openxmlformats.org/drawingml/2006/main">
               <a:ext uri="{FF2B5EF4-FFF2-40B4-BE49-F238E27FC236}">
-                <a16:creationId xmlns:a16="http://schemas.microsoft.com/office/drawing/2014/main" id="{29455849-6417-4ECC-934B-FF18264A6430}"/>
+                <a16:creationId xmlns:a16="http://schemas.microsoft.com/office/drawing/2014/main" id="{CEAA33FF-B0DE-4F68-B2DF-C0908093C38B}"/>
               </a:ext>
             </a:extLst>
           </p:cNvPr>
@@ -14457,7 +14457,7 @@
           <p:cNvPr id="25" name="">
             <a:extLst xmlns:a="http://schemas.openxmlformats.org/drawingml/2006/main">
               <a:ext uri="{FF2B5EF4-FFF2-40B4-BE49-F238E27FC236}">
-                <a16:creationId xmlns:a16="http://schemas.microsoft.com/office/drawing/2014/main" id="{CB7F48D6-C94F-4EA1-924E-3BB517DBAEDE}"/>
+                <a16:creationId xmlns:a16="http://schemas.microsoft.com/office/drawing/2014/main" id="{F023AEB1-B052-4826-83DE-8922B54E2F3E}"/>
               </a:ext>
             </a:extLst>
           </p:cNvPr>
@@ -14494,7 +14494,7 @@
           <p:cNvPr id="26" name="">
             <a:extLst xmlns:a="http://schemas.openxmlformats.org/drawingml/2006/main">
               <a:ext uri="{FF2B5EF4-FFF2-40B4-BE49-F238E27FC236}">
-                <a16:creationId xmlns:a16="http://schemas.microsoft.com/office/drawing/2014/main" id="{41C77265-9F0C-4E68-BB7E-209F1A75837C}"/>
+                <a16:creationId xmlns:a16="http://schemas.microsoft.com/office/drawing/2014/main" id="{BCE59257-9F01-423E-87D2-B17EDD1BE5D1}"/>
               </a:ext>
             </a:extLst>
           </p:cNvPr>
@@ -14541,7 +14541,7 @@
           <p:cNvPr id="27" name="">
             <a:extLst xmlns:a="http://schemas.openxmlformats.org/drawingml/2006/main">
               <a:ext uri="{FF2B5EF4-FFF2-40B4-BE49-F238E27FC236}">
-                <a16:creationId xmlns:a16="http://schemas.microsoft.com/office/drawing/2014/main" id="{15695E47-D9FF-4C94-9676-1AE044FB4E1E}"/>
+                <a16:creationId xmlns:a16="http://schemas.microsoft.com/office/drawing/2014/main" id="{E2A88AA0-D3EA-4B30-824E-9FEB75E0332E}"/>
               </a:ext>
             </a:extLst>
           </p:cNvPr>
@@ -14588,7 +14588,7 @@
           <p:cNvPr id="28" name="">
             <a:extLst xmlns:a="http://schemas.openxmlformats.org/drawingml/2006/main">
               <a:ext uri="{FF2B5EF4-FFF2-40B4-BE49-F238E27FC236}">
-                <a16:creationId xmlns:a16="http://schemas.microsoft.com/office/drawing/2014/main" id="{588FF618-D0F1-4E6F-A2CF-89F93E063AFD}"/>
+                <a16:creationId xmlns:a16="http://schemas.microsoft.com/office/drawing/2014/main" id="{F4DC2857-0B0B-4C56-A5BB-9454821C78D2}"/>
               </a:ext>
             </a:extLst>
           </p:cNvPr>
@@ -14652,7 +14652,7 @@
           <p:cNvPr id="29" name="">
             <a:extLst xmlns:a="http://schemas.openxmlformats.org/drawingml/2006/main">
               <a:ext uri="{FF2B5EF4-FFF2-40B4-BE49-F238E27FC236}">
-                <a16:creationId xmlns:a16="http://schemas.microsoft.com/office/drawing/2014/main" id="{97CD2FE4-C033-4D80-9471-D447FAD61891}"/>
+                <a16:creationId xmlns:a16="http://schemas.microsoft.com/office/drawing/2014/main" id="{D2DECDCC-A9FD-4C80-B54A-5874048B9434}"/>
               </a:ext>
             </a:extLst>
           </p:cNvPr>
@@ -14716,7 +14716,7 @@
           <p:cNvPr id="30" name="">
             <a:extLst xmlns:a="http://schemas.openxmlformats.org/drawingml/2006/main">
               <a:ext uri="{FF2B5EF4-FFF2-40B4-BE49-F238E27FC236}">
-                <a16:creationId xmlns:a16="http://schemas.microsoft.com/office/drawing/2014/main" id="{3E45E7B2-FFE9-4396-A3CA-A2ACED709F50}"/>
+                <a16:creationId xmlns:a16="http://schemas.microsoft.com/office/drawing/2014/main" id="{D86F8A34-7558-4BD9-B60F-C0645B318533}"/>
               </a:ext>
             </a:extLst>
           </p:cNvPr>
@@ -14780,7 +14780,7 @@
           <p:cNvPr id="31" name="">
             <a:extLst xmlns:a="http://schemas.openxmlformats.org/drawingml/2006/main">
               <a:ext uri="{FF2B5EF4-FFF2-40B4-BE49-F238E27FC236}">
-                <a16:creationId xmlns:a16="http://schemas.microsoft.com/office/drawing/2014/main" id="{1072848D-EED2-4692-B95A-93FC95244E12}"/>
+                <a16:creationId xmlns:a16="http://schemas.microsoft.com/office/drawing/2014/main" id="{1AE0B81C-DD23-4BB8-81BA-A5A04CFE20F6}"/>
               </a:ext>
             </a:extLst>
           </p:cNvPr>
@@ -14844,7 +14844,7 @@
           <p:cNvPr id="32" name="">
             <a:extLst xmlns:a="http://schemas.openxmlformats.org/drawingml/2006/main">
               <a:ext uri="{FF2B5EF4-FFF2-40B4-BE49-F238E27FC236}">
-                <a16:creationId xmlns:a16="http://schemas.microsoft.com/office/drawing/2014/main" id="{F768C9BE-C313-4EC9-B702-984B77233F64}"/>
+                <a16:creationId xmlns:a16="http://schemas.microsoft.com/office/drawing/2014/main" id="{F7F1233A-8EBA-4626-B8BC-58FBB8C5D620}"/>
               </a:ext>
             </a:extLst>
           </p:cNvPr>
@@ -14881,7 +14881,7 @@
           <p:cNvPr id="33" name="">
             <a:extLst xmlns:a="http://schemas.openxmlformats.org/drawingml/2006/main">
               <a:ext uri="{FF2B5EF4-FFF2-40B4-BE49-F238E27FC236}">
-                <a16:creationId xmlns:a16="http://schemas.microsoft.com/office/drawing/2014/main" id="{67E83BC7-9BDD-48D6-BEE6-9696B89BD525}"/>
+                <a16:creationId xmlns:a16="http://schemas.microsoft.com/office/drawing/2014/main" id="{88F79B2F-552A-4437-9CAA-81D99B46946A}"/>
               </a:ext>
             </a:extLst>
           </p:cNvPr>
@@ -14918,7 +14918,7 @@
           <p:cNvPr id="34" name="">
             <a:extLst xmlns:a="http://schemas.openxmlformats.org/drawingml/2006/main">
               <a:ext uri="{FF2B5EF4-FFF2-40B4-BE49-F238E27FC236}">
-                <a16:creationId xmlns:a16="http://schemas.microsoft.com/office/drawing/2014/main" id="{6D8186E5-B197-4D9C-BC70-6CACE0D47E68}"/>
+                <a16:creationId xmlns:a16="http://schemas.microsoft.com/office/drawing/2014/main" id="{6B3453AC-7113-44AD-8400-36F8F5DC47B5}"/>
               </a:ext>
             </a:extLst>
           </p:cNvPr>
@@ -14982,7 +14982,7 @@
           <p:cNvPr id="35" name="">
             <a:extLst xmlns:a="http://schemas.openxmlformats.org/drawingml/2006/main">
               <a:ext uri="{FF2B5EF4-FFF2-40B4-BE49-F238E27FC236}">
-                <a16:creationId xmlns:a16="http://schemas.microsoft.com/office/drawing/2014/main" id="{107C6EE9-7506-4D3F-8DA3-08219E745F86}"/>
+                <a16:creationId xmlns:a16="http://schemas.microsoft.com/office/drawing/2014/main" id="{ADC3A632-08EF-4D70-8591-E26B103FD3B3}"/>
               </a:ext>
             </a:extLst>
           </p:cNvPr>
@@ -15046,7 +15046,7 @@
           <p:cNvPr id="36" name="">
             <a:extLst xmlns:a="http://schemas.openxmlformats.org/drawingml/2006/main">
               <a:ext uri="{FF2B5EF4-FFF2-40B4-BE49-F238E27FC236}">
-                <a16:creationId xmlns:a16="http://schemas.microsoft.com/office/drawing/2014/main" id="{2E045EF0-7416-403A-B04B-B4B502A2EDAF}"/>
+                <a16:creationId xmlns:a16="http://schemas.microsoft.com/office/drawing/2014/main" id="{6F7F09CB-778A-41FB-B6BF-6B15388F52BC}"/>
               </a:ext>
             </a:extLst>
           </p:cNvPr>
@@ -15083,7 +15083,7 @@
           <p:cNvPr id="37" name="">
             <a:extLst xmlns:a="http://schemas.openxmlformats.org/drawingml/2006/main">
               <a:ext uri="{FF2B5EF4-FFF2-40B4-BE49-F238E27FC236}">
-                <a16:creationId xmlns:a16="http://schemas.microsoft.com/office/drawing/2014/main" id="{C222F5D8-948B-44CB-A08F-492ED9DC2CBC}"/>
+                <a16:creationId xmlns:a16="http://schemas.microsoft.com/office/drawing/2014/main" id="{CE60FC4D-6463-4F5E-B2A2-DF077572B1C7}"/>
               </a:ext>
             </a:extLst>
           </p:cNvPr>
@@ -15120,7 +15120,7 @@
           <p:cNvPr id="38" name="">
             <a:extLst xmlns:a="http://schemas.openxmlformats.org/drawingml/2006/main">
               <a:ext uri="{FF2B5EF4-FFF2-40B4-BE49-F238E27FC236}">
-                <a16:creationId xmlns:a16="http://schemas.microsoft.com/office/drawing/2014/main" id="{0E1C3FAD-4285-4DBA-AC85-FFC3AA00B5F0}"/>
+                <a16:creationId xmlns:a16="http://schemas.microsoft.com/office/drawing/2014/main" id="{151C8114-BE20-4872-9500-4BFAC0DC2525}"/>
               </a:ext>
             </a:extLst>
           </p:cNvPr>
@@ -15184,7 +15184,7 @@
           <p:cNvPr id="39" name="">
             <a:extLst xmlns:a="http://schemas.openxmlformats.org/drawingml/2006/main">
               <a:ext uri="{FF2B5EF4-FFF2-40B4-BE49-F238E27FC236}">
-                <a16:creationId xmlns:a16="http://schemas.microsoft.com/office/drawing/2014/main" id="{D135C5F4-70F3-46BD-A990-BDBFA5ED3D8E}"/>
+                <a16:creationId xmlns:a16="http://schemas.microsoft.com/office/drawing/2014/main" id="{E5349288-5ED3-4908-ADCF-E247ABD17C6D}"/>
               </a:ext>
             </a:extLst>
           </p:cNvPr>
@@ -15248,7 +15248,7 @@
           <p:cNvPr id="40" name="">
             <a:extLst xmlns:a="http://schemas.openxmlformats.org/drawingml/2006/main">
               <a:ext uri="{FF2B5EF4-FFF2-40B4-BE49-F238E27FC236}">
-                <a16:creationId xmlns:a16="http://schemas.microsoft.com/office/drawing/2014/main" id="{C544FC2B-F102-41AE-B0F7-A3DA762C7917}"/>
+                <a16:creationId xmlns:a16="http://schemas.microsoft.com/office/drawing/2014/main" id="{FAC5BDA0-080B-4297-9348-CB73C15A3CA8}"/>
               </a:ext>
             </a:extLst>
           </p:cNvPr>
@@ -15285,7 +15285,7 @@
           <p:cNvPr id="41" name="">
             <a:extLst xmlns:a="http://schemas.openxmlformats.org/drawingml/2006/main">
               <a:ext uri="{FF2B5EF4-FFF2-40B4-BE49-F238E27FC236}">
-                <a16:creationId xmlns:a16="http://schemas.microsoft.com/office/drawing/2014/main" id="{C0205FE8-88B8-4003-9768-9ECCE44977CE}"/>
+                <a16:creationId xmlns:a16="http://schemas.microsoft.com/office/drawing/2014/main" id="{123E7F07-701C-461C-A4C4-6D2F17A435B0}"/>
               </a:ext>
             </a:extLst>
           </p:cNvPr>
@@ -15322,7 +15322,7 @@
           <p:cNvPr id="42" name="">
             <a:extLst xmlns:a="http://schemas.openxmlformats.org/drawingml/2006/main">
               <a:ext uri="{FF2B5EF4-FFF2-40B4-BE49-F238E27FC236}">
-                <a16:creationId xmlns:a16="http://schemas.microsoft.com/office/drawing/2014/main" id="{F559AB71-DBA6-4947-AE8A-5ECDA1C847F6}"/>
+                <a16:creationId xmlns:a16="http://schemas.microsoft.com/office/drawing/2014/main" id="{6DC1D25F-E6FA-464A-9DE7-2C505E31597A}"/>
               </a:ext>
             </a:extLst>
           </p:cNvPr>
@@ -15386,7 +15386,7 @@
           <p:cNvPr id="43" name="">
             <a:extLst xmlns:a="http://schemas.openxmlformats.org/drawingml/2006/main">
               <a:ext uri="{FF2B5EF4-FFF2-40B4-BE49-F238E27FC236}">
-                <a16:creationId xmlns:a16="http://schemas.microsoft.com/office/drawing/2014/main" id="{9D7E2883-EE61-4872-9D7B-79ADF0775EC6}"/>
+                <a16:creationId xmlns:a16="http://schemas.microsoft.com/office/drawing/2014/main" id="{8B32346B-B19F-4DC1-BCC4-122DD0F77A0C}"/>
               </a:ext>
             </a:extLst>
           </p:cNvPr>
@@ -15450,7 +15450,7 @@
           <p:cNvPr id="44" name="">
             <a:extLst xmlns:a="http://schemas.openxmlformats.org/drawingml/2006/main">
               <a:ext uri="{FF2B5EF4-FFF2-40B4-BE49-F238E27FC236}">
-                <a16:creationId xmlns:a16="http://schemas.microsoft.com/office/drawing/2014/main" id="{87CA8D68-E991-4611-9471-FBF56622A10E}"/>
+                <a16:creationId xmlns:a16="http://schemas.microsoft.com/office/drawing/2014/main" id="{2ABDB7DC-AA66-462A-BB36-1B97CE4BF28C}"/>
               </a:ext>
             </a:extLst>
           </p:cNvPr>
@@ -15514,7 +15514,7 @@
           <p:cNvPr id="45" name="">
             <a:extLst xmlns:a="http://schemas.openxmlformats.org/drawingml/2006/main">
               <a:ext uri="{FF2B5EF4-FFF2-40B4-BE49-F238E27FC236}">
-                <a16:creationId xmlns:a16="http://schemas.microsoft.com/office/drawing/2014/main" id="{4B875BD6-BAEE-458A-836D-0BB995AA27D4}"/>
+                <a16:creationId xmlns:a16="http://schemas.microsoft.com/office/drawing/2014/main" id="{902B1689-2661-489C-AA55-52C20FD18FD3}"/>
               </a:ext>
             </a:extLst>
           </p:cNvPr>
@@ -15551,7 +15551,7 @@
           <p:cNvPr id="46" name="">
             <a:extLst xmlns:a="http://schemas.openxmlformats.org/drawingml/2006/main">
               <a:ext uri="{FF2B5EF4-FFF2-40B4-BE49-F238E27FC236}">
-                <a16:creationId xmlns:a16="http://schemas.microsoft.com/office/drawing/2014/main" id="{3CB2EBFD-B0FA-4B65-B7AC-3CC8F6EC416C}"/>
+                <a16:creationId xmlns:a16="http://schemas.microsoft.com/office/drawing/2014/main" id="{CC417690-C642-4BBF-AC52-5DDC5687DAAC}"/>
               </a:ext>
             </a:extLst>
           </p:cNvPr>
@@ -15613,7 +15613,7 @@
     </p:spTree>
     <p:extLst>
       <p:ext uri="{BB962C8B-B14F-4D97-AF65-F5344CB8AC3E}">
-        <p14:creationId xmlns:p14="http://schemas.microsoft.com/office/powerpoint/2010/main" val="672303384"/>
+        <p14:creationId xmlns:p14="http://schemas.microsoft.com/office/powerpoint/2010/main" val="986623763"/>
       </p:ext>
     </p:extLst>
   </p:cSld>
@@ -15637,7 +15637,7 @@
           <p:cNvPr id="1" name="">
             <a:extLst xmlns:a="http://schemas.openxmlformats.org/drawingml/2006/main">
               <a:ext uri="{FF2B5EF4-FFF2-40B4-BE49-F238E27FC236}">
-                <a16:creationId xmlns:a16="http://schemas.microsoft.com/office/drawing/2014/main" id="{B915E92D-04CB-4422-AA59-973DEB670B1E}"/>
+                <a16:creationId xmlns:a16="http://schemas.microsoft.com/office/drawing/2014/main" id="{545A4EB7-C70D-4DCE-A58A-66785908F594}"/>
               </a:ext>
             </a:extLst>
           </p:cNvPr>
@@ -15672,7 +15672,7 @@
           <p:cNvPr id="2" name="">
             <a:extLst xmlns:a="http://schemas.openxmlformats.org/drawingml/2006/main">
               <a:ext uri="{FF2B5EF4-FFF2-40B4-BE49-F238E27FC236}">
-                <a16:creationId xmlns:a16="http://schemas.microsoft.com/office/drawing/2014/main" id="{F17E9006-5F84-4972-9EAF-9BDD0DC2E4FD}"/>
+                <a16:creationId xmlns:a16="http://schemas.microsoft.com/office/drawing/2014/main" id="{EE37E49C-784A-4CC6-9B0B-F91DF036B4FF}"/>
               </a:ext>
             </a:extLst>
           </p:cNvPr>
@@ -15718,7 +15718,7 @@
           <p:cNvPr id="3" name="">
             <a:extLst xmlns:a="http://schemas.openxmlformats.org/drawingml/2006/main">
               <a:ext uri="{FF2B5EF4-FFF2-40B4-BE49-F238E27FC236}">
-                <a16:creationId xmlns:a16="http://schemas.microsoft.com/office/drawing/2014/main" id="{4EBE3334-568E-4EDC-A33D-D14382A91581}"/>
+                <a16:creationId xmlns:a16="http://schemas.microsoft.com/office/drawing/2014/main" id="{7CC94FC4-851A-408A-9E24-67461C9C9F80}"/>
               </a:ext>
             </a:extLst>
           </p:cNvPr>
@@ -15755,7 +15755,7 @@
           <p:cNvPr id="4" name="">
             <a:extLst xmlns:a="http://schemas.openxmlformats.org/drawingml/2006/main">
               <a:ext uri="{FF2B5EF4-FFF2-40B4-BE49-F238E27FC236}">
-                <a16:creationId xmlns:a16="http://schemas.microsoft.com/office/drawing/2014/main" id="{82FE8EDF-7002-44CE-B8CD-897263AC68ED}"/>
+                <a16:creationId xmlns:a16="http://schemas.microsoft.com/office/drawing/2014/main" id="{D003C519-8C5B-453B-897B-6099DE1A3415}"/>
               </a:ext>
             </a:extLst>
           </p:cNvPr>
@@ -15792,7 +15792,7 @@
           <p:cNvPr id="5" name="">
             <a:extLst xmlns:a="http://schemas.openxmlformats.org/drawingml/2006/main">
               <a:ext uri="{FF2B5EF4-FFF2-40B4-BE49-F238E27FC236}">
-                <a16:creationId xmlns:a16="http://schemas.microsoft.com/office/drawing/2014/main" id="{D675E708-C8EB-4799-B5CC-5E3045FF1A67}"/>
+                <a16:creationId xmlns:a16="http://schemas.microsoft.com/office/drawing/2014/main" id="{B4C07633-0744-47E7-ACB8-32586D5BFAA7}"/>
               </a:ext>
             </a:extLst>
           </p:cNvPr>
@@ -15829,7 +15829,7 @@
           <p:cNvPr id="6" name="">
             <a:extLst xmlns:a="http://schemas.openxmlformats.org/drawingml/2006/main">
               <a:ext uri="{FF2B5EF4-FFF2-40B4-BE49-F238E27FC236}">
-                <a16:creationId xmlns:a16="http://schemas.microsoft.com/office/drawing/2014/main" id="{EEDC0742-BD5E-4E61-95F9-7AD702B4577F}"/>
+                <a16:creationId xmlns:a16="http://schemas.microsoft.com/office/drawing/2014/main" id="{6B6A59A9-16FC-44DB-9E37-57F76F135880}"/>
               </a:ext>
             </a:extLst>
           </p:cNvPr>
@@ -15866,7 +15866,7 @@
           <p:cNvPr id="7" name="">
             <a:extLst xmlns:a="http://schemas.openxmlformats.org/drawingml/2006/main">
               <a:ext uri="{FF2B5EF4-FFF2-40B4-BE49-F238E27FC236}">
-                <a16:creationId xmlns:a16="http://schemas.microsoft.com/office/drawing/2014/main" id="{895A5413-D659-4779-AD43-1034927CE50B}"/>
+                <a16:creationId xmlns:a16="http://schemas.microsoft.com/office/drawing/2014/main" id="{4256FC4A-ADFE-4D44-91C2-9090DD6DD9D4}"/>
               </a:ext>
             </a:extLst>
           </p:cNvPr>
@@ -15903,7 +15903,7 @@
           <p:cNvPr id="8" name="">
             <a:extLst xmlns:a="http://schemas.openxmlformats.org/drawingml/2006/main">
               <a:ext uri="{FF2B5EF4-FFF2-40B4-BE49-F238E27FC236}">
-                <a16:creationId xmlns:a16="http://schemas.microsoft.com/office/drawing/2014/main" id="{CE0D8CD1-0E19-4894-8792-1F4588A46AC8}"/>
+                <a16:creationId xmlns:a16="http://schemas.microsoft.com/office/drawing/2014/main" id="{758866BF-E934-4B26-A52A-1738FCCF1659}"/>
               </a:ext>
             </a:extLst>
           </p:cNvPr>
@@ -15940,7 +15940,7 @@
           <p:cNvPr id="9" name="">
             <a:extLst xmlns:a="http://schemas.openxmlformats.org/drawingml/2006/main">
               <a:ext uri="{FF2B5EF4-FFF2-40B4-BE49-F238E27FC236}">
-                <a16:creationId xmlns:a16="http://schemas.microsoft.com/office/drawing/2014/main" id="{077CFF4D-AF7C-4AD6-8168-C9D471AC035F}"/>
+                <a16:creationId xmlns:a16="http://schemas.microsoft.com/office/drawing/2014/main" id="{3F8F831D-59FB-4CD2-A5BA-87E0D24A4407}"/>
               </a:ext>
             </a:extLst>
           </p:cNvPr>
@@ -15977,7 +15977,7 @@
           <p:cNvPr id="10" name="">
             <a:extLst xmlns:a="http://schemas.openxmlformats.org/drawingml/2006/main">
               <a:ext uri="{FF2B5EF4-FFF2-40B4-BE49-F238E27FC236}">
-                <a16:creationId xmlns:a16="http://schemas.microsoft.com/office/drawing/2014/main" id="{7CAD8C63-C412-4AC5-9138-4BFF5DB87539}"/>
+                <a16:creationId xmlns:a16="http://schemas.microsoft.com/office/drawing/2014/main" id="{E1FE0C8C-38EF-4A46-BE80-0FC4D946364A}"/>
               </a:ext>
             </a:extLst>
           </p:cNvPr>
@@ -16014,7 +16014,7 @@
           <p:cNvPr id="11" name="">
             <a:extLst xmlns:a="http://schemas.openxmlformats.org/drawingml/2006/main">
               <a:ext uri="{FF2B5EF4-FFF2-40B4-BE49-F238E27FC236}">
-                <a16:creationId xmlns:a16="http://schemas.microsoft.com/office/drawing/2014/main" id="{6917F7F2-9F81-49E3-AC1C-C805E13C34DC}"/>
+                <a16:creationId xmlns:a16="http://schemas.microsoft.com/office/drawing/2014/main" id="{1744504C-1453-45DA-8577-68D4390265A0}"/>
               </a:ext>
             </a:extLst>
           </p:cNvPr>
@@ -16051,7 +16051,7 @@
           <p:cNvPr id="12" name="">
             <a:extLst xmlns:a="http://schemas.openxmlformats.org/drawingml/2006/main">
               <a:ext uri="{FF2B5EF4-FFF2-40B4-BE49-F238E27FC236}">
-                <a16:creationId xmlns:a16="http://schemas.microsoft.com/office/drawing/2014/main" id="{AE362306-0053-429F-B9AF-02350C23EF92}"/>
+                <a16:creationId xmlns:a16="http://schemas.microsoft.com/office/drawing/2014/main" id="{073C0005-E9DE-4E70-AAC1-F2E1F000F874}"/>
               </a:ext>
             </a:extLst>
           </p:cNvPr>
@@ -16088,7 +16088,7 @@
           <p:cNvPr id="13" name="">
             <a:extLst xmlns:a="http://schemas.openxmlformats.org/drawingml/2006/main">
               <a:ext uri="{FF2B5EF4-FFF2-40B4-BE49-F238E27FC236}">
-                <a16:creationId xmlns:a16="http://schemas.microsoft.com/office/drawing/2014/main" id="{45B43A46-6D40-48F5-BDC0-5564AE0347FF}"/>
+                <a16:creationId xmlns:a16="http://schemas.microsoft.com/office/drawing/2014/main" id="{F2E49841-DB93-4011-BA5E-8E202AB5CE12}"/>
               </a:ext>
             </a:extLst>
           </p:cNvPr>
@@ -16125,7 +16125,7 @@
           <p:cNvPr id="14" name="">
             <a:extLst xmlns:a="http://schemas.openxmlformats.org/drawingml/2006/main">
               <a:ext uri="{FF2B5EF4-FFF2-40B4-BE49-F238E27FC236}">
-                <a16:creationId xmlns:a16="http://schemas.microsoft.com/office/drawing/2014/main" id="{3D23943E-FB54-44E4-8A34-41B99305338A}"/>
+                <a16:creationId xmlns:a16="http://schemas.microsoft.com/office/drawing/2014/main" id="{6A044C7D-E7A1-4223-A22A-34E66FDC6A99}"/>
               </a:ext>
             </a:extLst>
           </p:cNvPr>
@@ -16162,7 +16162,7 @@
           <p:cNvPr id="15" name="">
             <a:extLst xmlns:a="http://schemas.openxmlformats.org/drawingml/2006/main">
               <a:ext uri="{FF2B5EF4-FFF2-40B4-BE49-F238E27FC236}">
-                <a16:creationId xmlns:a16="http://schemas.microsoft.com/office/drawing/2014/main" id="{1F0A7BEF-29C2-4707-8E93-23397A83AC8A}"/>
+                <a16:creationId xmlns:a16="http://schemas.microsoft.com/office/drawing/2014/main" id="{E1132869-787F-4DFA-A5F0-5CF6B0EBE84A}"/>
               </a:ext>
             </a:extLst>
           </p:cNvPr>
@@ -16199,7 +16199,7 @@
           <p:cNvPr id="16" name="">
             <a:extLst xmlns:a="http://schemas.openxmlformats.org/drawingml/2006/main">
               <a:ext uri="{FF2B5EF4-FFF2-40B4-BE49-F238E27FC236}">
-                <a16:creationId xmlns:a16="http://schemas.microsoft.com/office/drawing/2014/main" id="{28AE0AA6-1BFA-4547-A067-29EEA98A09A6}"/>
+                <a16:creationId xmlns:a16="http://schemas.microsoft.com/office/drawing/2014/main" id="{642069CE-D19D-44B5-8B18-60B63D45681C}"/>
               </a:ext>
             </a:extLst>
           </p:cNvPr>
@@ -16236,7 +16236,7 @@
           <p:cNvPr id="17" name="">
             <a:extLst xmlns:a="http://schemas.openxmlformats.org/drawingml/2006/main">
               <a:ext uri="{FF2B5EF4-FFF2-40B4-BE49-F238E27FC236}">
-                <a16:creationId xmlns:a16="http://schemas.microsoft.com/office/drawing/2014/main" id="{172F0E4D-6720-4098-9DC0-D4A5A4CA4A51}"/>
+                <a16:creationId xmlns:a16="http://schemas.microsoft.com/office/drawing/2014/main" id="{84E0DEB6-657B-49DB-8B66-97E8EA098BA9}"/>
               </a:ext>
             </a:extLst>
           </p:cNvPr>
@@ -16273,7 +16273,7 @@
           <p:cNvPr id="18" name="">
             <a:extLst xmlns:a="http://schemas.openxmlformats.org/drawingml/2006/main">
               <a:ext uri="{FF2B5EF4-FFF2-40B4-BE49-F238E27FC236}">
-                <a16:creationId xmlns:a16="http://schemas.microsoft.com/office/drawing/2014/main" id="{5340B3E7-FC9B-42E2-B211-5DE637C2DD62}"/>
+                <a16:creationId xmlns:a16="http://schemas.microsoft.com/office/drawing/2014/main" id="{4499CCA2-669B-45CB-8A79-C9E28264433E}"/>
               </a:ext>
             </a:extLst>
           </p:cNvPr>
@@ -16310,7 +16310,7 @@
           <p:cNvPr id="19" name="">
             <a:extLst xmlns:a="http://schemas.openxmlformats.org/drawingml/2006/main">
               <a:ext uri="{FF2B5EF4-FFF2-40B4-BE49-F238E27FC236}">
-                <a16:creationId xmlns:a16="http://schemas.microsoft.com/office/drawing/2014/main" id="{9674CC12-7F64-4082-A15D-45BCB9ADFB35}"/>
+                <a16:creationId xmlns:a16="http://schemas.microsoft.com/office/drawing/2014/main" id="{5FB4CD38-AF71-4908-966E-F3785F9C536D}"/>
               </a:ext>
             </a:extLst>
           </p:cNvPr>
@@ -16347,7 +16347,7 @@
           <p:cNvPr id="20" name="">
             <a:extLst xmlns:a="http://schemas.openxmlformats.org/drawingml/2006/main">
               <a:ext uri="{FF2B5EF4-FFF2-40B4-BE49-F238E27FC236}">
-                <a16:creationId xmlns:a16="http://schemas.microsoft.com/office/drawing/2014/main" id="{454EA7D5-3AA9-4F1A-937C-9D491B55BC25}"/>
+                <a16:creationId xmlns:a16="http://schemas.microsoft.com/office/drawing/2014/main" id="{C223F743-712A-4ADC-BDD1-2D01459A99AC}"/>
               </a:ext>
             </a:extLst>
           </p:cNvPr>
@@ -16384,7 +16384,7 @@
           <p:cNvPr id="21" name="">
             <a:extLst xmlns:a="http://schemas.openxmlformats.org/drawingml/2006/main">
               <a:ext uri="{FF2B5EF4-FFF2-40B4-BE49-F238E27FC236}">
-                <a16:creationId xmlns:a16="http://schemas.microsoft.com/office/drawing/2014/main" id="{0B023ACE-ED08-4D32-A310-5F6EC2E0C135}"/>
+                <a16:creationId xmlns:a16="http://schemas.microsoft.com/office/drawing/2014/main" id="{9252F73B-9F3E-447A-B661-FE59BD3473DA}"/>
               </a:ext>
             </a:extLst>
           </p:cNvPr>
@@ -16421,7 +16421,7 @@
           <p:cNvPr id="22" name="">
             <a:extLst xmlns:a="http://schemas.openxmlformats.org/drawingml/2006/main">
               <a:ext uri="{FF2B5EF4-FFF2-40B4-BE49-F238E27FC236}">
-                <a16:creationId xmlns:a16="http://schemas.microsoft.com/office/drawing/2014/main" id="{DE0D25F7-7F62-48F1-8AFC-02E02EA7B740}"/>
+                <a16:creationId xmlns:a16="http://schemas.microsoft.com/office/drawing/2014/main" id="{6365DAA4-5B2C-4C51-B9BB-16BA18807EEB}"/>
               </a:ext>
             </a:extLst>
           </p:cNvPr>
@@ -16458,7 +16458,7 @@
           <p:cNvPr id="23" name="">
             <a:extLst xmlns:a="http://schemas.openxmlformats.org/drawingml/2006/main">
               <a:ext uri="{FF2B5EF4-FFF2-40B4-BE49-F238E27FC236}">
-                <a16:creationId xmlns:a16="http://schemas.microsoft.com/office/drawing/2014/main" id="{679E6397-FF68-4353-A41B-705DBA87CF40}"/>
+                <a16:creationId xmlns:a16="http://schemas.microsoft.com/office/drawing/2014/main" id="{6F173220-0CD6-4C90-B146-01075200FE99}"/>
               </a:ext>
             </a:extLst>
           </p:cNvPr>
@@ -16495,7 +16495,7 @@
           <p:cNvPr id="24" name="">
             <a:extLst xmlns:a="http://schemas.openxmlformats.org/drawingml/2006/main">
               <a:ext uri="{FF2B5EF4-FFF2-40B4-BE49-F238E27FC236}">
-                <a16:creationId xmlns:a16="http://schemas.microsoft.com/office/drawing/2014/main" id="{AEE8324F-71C0-4BD6-8885-5E40ADE82C73}"/>
+                <a16:creationId xmlns:a16="http://schemas.microsoft.com/office/drawing/2014/main" id="{DFAB1648-7031-424C-8B58-F1BE993B663D}"/>
               </a:ext>
             </a:extLst>
           </p:cNvPr>
@@ -16532,7 +16532,7 @@
           <p:cNvPr id="25" name="">
             <a:extLst xmlns:a="http://schemas.openxmlformats.org/drawingml/2006/main">
               <a:ext uri="{FF2B5EF4-FFF2-40B4-BE49-F238E27FC236}">
-                <a16:creationId xmlns:a16="http://schemas.microsoft.com/office/drawing/2014/main" id="{1D53CF8A-5AF1-4C3B-96B7-D74AFFA434E6}"/>
+                <a16:creationId xmlns:a16="http://schemas.microsoft.com/office/drawing/2014/main" id="{CED76606-ED97-4A65-95B0-39438525D0B5}"/>
               </a:ext>
             </a:extLst>
           </p:cNvPr>
@@ -16569,7 +16569,7 @@
           <p:cNvPr id="26" name="">
             <a:extLst xmlns:a="http://schemas.openxmlformats.org/drawingml/2006/main">
               <a:ext uri="{FF2B5EF4-FFF2-40B4-BE49-F238E27FC236}">
-                <a16:creationId xmlns:a16="http://schemas.microsoft.com/office/drawing/2014/main" id="{2EFA8117-F2C1-420E-A64D-F05EA887D34F}"/>
+                <a16:creationId xmlns:a16="http://schemas.microsoft.com/office/drawing/2014/main" id="{875B7DD8-02DB-4568-8A32-5DA400AD3ACF}"/>
               </a:ext>
             </a:extLst>
           </p:cNvPr>
@@ -16616,7 +16616,7 @@
           <p:cNvPr id="27" name="">
             <a:extLst xmlns:a="http://schemas.openxmlformats.org/drawingml/2006/main">
               <a:ext uri="{FF2B5EF4-FFF2-40B4-BE49-F238E27FC236}">
-                <a16:creationId xmlns:a16="http://schemas.microsoft.com/office/drawing/2014/main" id="{C5B2CE0D-828C-4C86-BE9A-6F84FBA8FBF2}"/>
+                <a16:creationId xmlns:a16="http://schemas.microsoft.com/office/drawing/2014/main" id="{3E590A85-6399-463F-9C6B-FCD90B447984}"/>
               </a:ext>
             </a:extLst>
           </p:cNvPr>
@@ -16663,7 +16663,7 @@
           <p:cNvPr id="28" name="">
             <a:extLst xmlns:a="http://schemas.openxmlformats.org/drawingml/2006/main">
               <a:ext uri="{FF2B5EF4-FFF2-40B4-BE49-F238E27FC236}">
-                <a16:creationId xmlns:a16="http://schemas.microsoft.com/office/drawing/2014/main" id="{DE4BD984-1295-4642-952F-EFF4AACBB732}"/>
+                <a16:creationId xmlns:a16="http://schemas.microsoft.com/office/drawing/2014/main" id="{AE86D513-BC03-403C-B3AA-C43795048B3D}"/>
               </a:ext>
             </a:extLst>
           </p:cNvPr>
@@ -16727,7 +16727,7 @@
           <p:cNvPr id="29" name="">
             <a:extLst xmlns:a="http://schemas.openxmlformats.org/drawingml/2006/main">
               <a:ext uri="{FF2B5EF4-FFF2-40B4-BE49-F238E27FC236}">
-                <a16:creationId xmlns:a16="http://schemas.microsoft.com/office/drawing/2014/main" id="{A52988AC-B7B5-40ED-BE32-579252D53982}"/>
+                <a16:creationId xmlns:a16="http://schemas.microsoft.com/office/drawing/2014/main" id="{19370C2A-CF26-4C62-8414-EA9CA2169D0C}"/>
               </a:ext>
             </a:extLst>
           </p:cNvPr>
@@ -16791,7 +16791,7 @@
           <p:cNvPr id="30" name="">
             <a:extLst xmlns:a="http://schemas.openxmlformats.org/drawingml/2006/main">
               <a:ext uri="{FF2B5EF4-FFF2-40B4-BE49-F238E27FC236}">
-                <a16:creationId xmlns:a16="http://schemas.microsoft.com/office/drawing/2014/main" id="{60A74B36-E132-4C6A-8064-C9B51E231EAD}"/>
+                <a16:creationId xmlns:a16="http://schemas.microsoft.com/office/drawing/2014/main" id="{7342FAAB-C370-4DEB-9F33-05C026436C33}"/>
               </a:ext>
             </a:extLst>
           </p:cNvPr>
@@ -16855,7 +16855,7 @@
           <p:cNvPr id="31" name="">
             <a:extLst xmlns:a="http://schemas.openxmlformats.org/drawingml/2006/main">
               <a:ext uri="{FF2B5EF4-FFF2-40B4-BE49-F238E27FC236}">
-                <a16:creationId xmlns:a16="http://schemas.microsoft.com/office/drawing/2014/main" id="{4172B89D-BF74-414E-8384-66854228EDC0}"/>
+                <a16:creationId xmlns:a16="http://schemas.microsoft.com/office/drawing/2014/main" id="{92553F44-3D59-45CF-B4CE-69692FAA13F4}"/>
               </a:ext>
             </a:extLst>
           </p:cNvPr>
@@ -16919,7 +16919,7 @@
           <p:cNvPr id="32" name="">
             <a:extLst xmlns:a="http://schemas.openxmlformats.org/drawingml/2006/main">
               <a:ext uri="{FF2B5EF4-FFF2-40B4-BE49-F238E27FC236}">
-                <a16:creationId xmlns:a16="http://schemas.microsoft.com/office/drawing/2014/main" id="{CDAF7916-474A-425A-AA84-D0624CE97402}"/>
+                <a16:creationId xmlns:a16="http://schemas.microsoft.com/office/drawing/2014/main" id="{707667A0-CEDC-4FE5-85F4-1F767B13FB46}"/>
               </a:ext>
             </a:extLst>
           </p:cNvPr>
@@ -16956,7 +16956,7 @@
           <p:cNvPr id="33" name="">
             <a:extLst xmlns:a="http://schemas.openxmlformats.org/drawingml/2006/main">
               <a:ext uri="{FF2B5EF4-FFF2-40B4-BE49-F238E27FC236}">
-                <a16:creationId xmlns:a16="http://schemas.microsoft.com/office/drawing/2014/main" id="{88CE9603-C56C-4B79-928A-01F478DB2444}"/>
+                <a16:creationId xmlns:a16="http://schemas.microsoft.com/office/drawing/2014/main" id="{38B876D8-F413-43BA-BF6E-C66472518FE4}"/>
               </a:ext>
             </a:extLst>
           </p:cNvPr>
@@ -16993,7 +16993,7 @@
           <p:cNvPr id="34" name="">
             <a:extLst xmlns:a="http://schemas.openxmlformats.org/drawingml/2006/main">
               <a:ext uri="{FF2B5EF4-FFF2-40B4-BE49-F238E27FC236}">
-                <a16:creationId xmlns:a16="http://schemas.microsoft.com/office/drawing/2014/main" id="{3726252F-4B38-4B43-A892-60696A382865}"/>
+                <a16:creationId xmlns:a16="http://schemas.microsoft.com/office/drawing/2014/main" id="{1D153F32-044B-437A-82D3-D2DFFE241CAC}"/>
               </a:ext>
             </a:extLst>
           </p:cNvPr>
@@ -17030,7 +17030,7 @@
           <p:cNvPr id="35" name="">
             <a:extLst xmlns:a="http://schemas.openxmlformats.org/drawingml/2006/main">
               <a:ext uri="{FF2B5EF4-FFF2-40B4-BE49-F238E27FC236}">
-                <a16:creationId xmlns:a16="http://schemas.microsoft.com/office/drawing/2014/main" id="{DB81D8A9-ECA1-4025-8519-59FEDE8F3040}"/>
+                <a16:creationId xmlns:a16="http://schemas.microsoft.com/office/drawing/2014/main" id="{721F58FB-65C2-485D-AEFA-6B9B10709DF6}"/>
               </a:ext>
             </a:extLst>
           </p:cNvPr>
@@ -17094,7 +17094,7 @@
           <p:cNvPr id="36" name="">
             <a:extLst xmlns:a="http://schemas.openxmlformats.org/drawingml/2006/main">
               <a:ext uri="{FF2B5EF4-FFF2-40B4-BE49-F238E27FC236}">
-                <a16:creationId xmlns:a16="http://schemas.microsoft.com/office/drawing/2014/main" id="{8C98F5E1-8DCD-4F40-A9E9-ADD593B4AF89}"/>
+                <a16:creationId xmlns:a16="http://schemas.microsoft.com/office/drawing/2014/main" id="{C69C0B70-5D6D-4EDE-AE86-A18A42B9886E}"/>
               </a:ext>
             </a:extLst>
           </p:cNvPr>
@@ -17158,7 +17158,7 @@
           <p:cNvPr id="37" name="">
             <a:extLst xmlns:a="http://schemas.openxmlformats.org/drawingml/2006/main">
               <a:ext uri="{FF2B5EF4-FFF2-40B4-BE49-F238E27FC236}">
-                <a16:creationId xmlns:a16="http://schemas.microsoft.com/office/drawing/2014/main" id="{E6237E73-5E0D-4198-9EB8-20A0746EDF29}"/>
+                <a16:creationId xmlns:a16="http://schemas.microsoft.com/office/drawing/2014/main" id="{67D8A553-0321-4C61-8B35-E22F4C946CD8}"/>
               </a:ext>
             </a:extLst>
           </p:cNvPr>
@@ -17222,7 +17222,7 @@
           <p:cNvPr id="38" name="">
             <a:extLst xmlns:a="http://schemas.openxmlformats.org/drawingml/2006/main">
               <a:ext uri="{FF2B5EF4-FFF2-40B4-BE49-F238E27FC236}">
-                <a16:creationId xmlns:a16="http://schemas.microsoft.com/office/drawing/2014/main" id="{26376A60-E4CC-49DA-9569-A50405A6A041}"/>
+                <a16:creationId xmlns:a16="http://schemas.microsoft.com/office/drawing/2014/main" id="{D96E325E-9549-4C4C-AAEC-C928B5D7F6A9}"/>
               </a:ext>
             </a:extLst>
           </p:cNvPr>
@@ -17259,7 +17259,7 @@
           <p:cNvPr id="39" name="">
             <a:extLst xmlns:a="http://schemas.openxmlformats.org/drawingml/2006/main">
               <a:ext uri="{FF2B5EF4-FFF2-40B4-BE49-F238E27FC236}">
-                <a16:creationId xmlns:a16="http://schemas.microsoft.com/office/drawing/2014/main" id="{D5B1470F-9011-4C40-AED3-271406847872}"/>
+                <a16:creationId xmlns:a16="http://schemas.microsoft.com/office/drawing/2014/main" id="{4626EEA1-427A-4017-BBF6-B32A9C387FB0}"/>
               </a:ext>
             </a:extLst>
           </p:cNvPr>
@@ -17296,7 +17296,7 @@
           <p:cNvPr id="40" name="">
             <a:extLst xmlns:a="http://schemas.openxmlformats.org/drawingml/2006/main">
               <a:ext uri="{FF2B5EF4-FFF2-40B4-BE49-F238E27FC236}">
-                <a16:creationId xmlns:a16="http://schemas.microsoft.com/office/drawing/2014/main" id="{810D5373-DDA6-445D-AD11-62B97FD41613}"/>
+                <a16:creationId xmlns:a16="http://schemas.microsoft.com/office/drawing/2014/main" id="{43C91622-D5A7-4991-BD2F-882F2E2879C9}"/>
               </a:ext>
             </a:extLst>
           </p:cNvPr>
@@ -17333,7 +17333,7 @@
           <p:cNvPr id="41" name="">
             <a:extLst xmlns:a="http://schemas.openxmlformats.org/drawingml/2006/main">
               <a:ext uri="{FF2B5EF4-FFF2-40B4-BE49-F238E27FC236}">
-                <a16:creationId xmlns:a16="http://schemas.microsoft.com/office/drawing/2014/main" id="{BBD6C5B3-ED8E-43F6-94C8-60B4165D93A3}"/>
+                <a16:creationId xmlns:a16="http://schemas.microsoft.com/office/drawing/2014/main" id="{CE3E46DC-18EF-4FD2-BDC0-8DB9059D745E}"/>
               </a:ext>
             </a:extLst>
           </p:cNvPr>
@@ -17397,7 +17397,7 @@
           <p:cNvPr id="42" name="">
             <a:extLst xmlns:a="http://schemas.openxmlformats.org/drawingml/2006/main">
               <a:ext uri="{FF2B5EF4-FFF2-40B4-BE49-F238E27FC236}">
-                <a16:creationId xmlns:a16="http://schemas.microsoft.com/office/drawing/2014/main" id="{6941AB41-3F02-42F6-BED6-D915D4D62E01}"/>
+                <a16:creationId xmlns:a16="http://schemas.microsoft.com/office/drawing/2014/main" id="{48319813-E354-4894-9A93-6725B538E2DB}"/>
               </a:ext>
             </a:extLst>
           </p:cNvPr>
@@ -17461,7 +17461,7 @@
           <p:cNvPr id="43" name="">
             <a:extLst xmlns:a="http://schemas.openxmlformats.org/drawingml/2006/main">
               <a:ext uri="{FF2B5EF4-FFF2-40B4-BE49-F238E27FC236}">
-                <a16:creationId xmlns:a16="http://schemas.microsoft.com/office/drawing/2014/main" id="{54AC730A-CDBA-4B64-86CD-2AA148B7745D}"/>
+                <a16:creationId xmlns:a16="http://schemas.microsoft.com/office/drawing/2014/main" id="{DED157C2-A789-4A99-BC89-86BD07C92CF9}"/>
               </a:ext>
             </a:extLst>
           </p:cNvPr>
@@ -17525,7 +17525,7 @@
           <p:cNvPr id="44" name="">
             <a:extLst xmlns:a="http://schemas.openxmlformats.org/drawingml/2006/main">
               <a:ext uri="{FF2B5EF4-FFF2-40B4-BE49-F238E27FC236}">
-                <a16:creationId xmlns:a16="http://schemas.microsoft.com/office/drawing/2014/main" id="{C66319CB-92FB-4989-8F9A-DA8844FD9AAD}"/>
+                <a16:creationId xmlns:a16="http://schemas.microsoft.com/office/drawing/2014/main" id="{108A5A82-3D56-46F7-8647-B495E3465A3A}"/>
               </a:ext>
             </a:extLst>
           </p:cNvPr>
@@ -17562,7 +17562,7 @@
           <p:cNvPr id="45" name="">
             <a:extLst xmlns:a="http://schemas.openxmlformats.org/drawingml/2006/main">
               <a:ext uri="{FF2B5EF4-FFF2-40B4-BE49-F238E27FC236}">
-                <a16:creationId xmlns:a16="http://schemas.microsoft.com/office/drawing/2014/main" id="{6F115E19-589B-46CE-865B-441616CCA9A5}"/>
+                <a16:creationId xmlns:a16="http://schemas.microsoft.com/office/drawing/2014/main" id="{4BB06A7A-7B5A-48F1-9B02-EC89084B03D3}"/>
               </a:ext>
             </a:extLst>
           </p:cNvPr>
@@ -17599,7 +17599,7 @@
           <p:cNvPr id="46" name="">
             <a:extLst xmlns:a="http://schemas.openxmlformats.org/drawingml/2006/main">
               <a:ext uri="{FF2B5EF4-FFF2-40B4-BE49-F238E27FC236}">
-                <a16:creationId xmlns:a16="http://schemas.microsoft.com/office/drawing/2014/main" id="{D30EB2E2-2AC3-4372-AF2D-F724872160C2}"/>
+                <a16:creationId xmlns:a16="http://schemas.microsoft.com/office/drawing/2014/main" id="{5E423543-26AC-4B2A-B226-62B540AAD476}"/>
               </a:ext>
             </a:extLst>
           </p:cNvPr>
@@ -17636,7 +17636,7 @@
           <p:cNvPr id="47" name="">
             <a:extLst xmlns:a="http://schemas.openxmlformats.org/drawingml/2006/main">
               <a:ext uri="{FF2B5EF4-FFF2-40B4-BE49-F238E27FC236}">
-                <a16:creationId xmlns:a16="http://schemas.microsoft.com/office/drawing/2014/main" id="{1918A62B-B960-4E10-8A8F-EFD639034545}"/>
+                <a16:creationId xmlns:a16="http://schemas.microsoft.com/office/drawing/2014/main" id="{0B94CDCD-42D1-4CF8-B518-E1340D272C07}"/>
               </a:ext>
             </a:extLst>
           </p:cNvPr>
@@ -17700,7 +17700,7 @@
           <p:cNvPr id="48" name="">
             <a:extLst xmlns:a="http://schemas.openxmlformats.org/drawingml/2006/main">
               <a:ext uri="{FF2B5EF4-FFF2-40B4-BE49-F238E27FC236}">
-                <a16:creationId xmlns:a16="http://schemas.microsoft.com/office/drawing/2014/main" id="{D1517EBB-1175-45D8-8BAA-B8DF816489FE}"/>
+                <a16:creationId xmlns:a16="http://schemas.microsoft.com/office/drawing/2014/main" id="{B1F7492E-7B34-47D2-A3B4-B9D9BD88AF4A}"/>
               </a:ext>
             </a:extLst>
           </p:cNvPr>
@@ -17764,7 +17764,7 @@
           <p:cNvPr id="49" name="">
             <a:extLst xmlns:a="http://schemas.openxmlformats.org/drawingml/2006/main">
               <a:ext uri="{FF2B5EF4-FFF2-40B4-BE49-F238E27FC236}">
-                <a16:creationId xmlns:a16="http://schemas.microsoft.com/office/drawing/2014/main" id="{0B681D5C-3687-4DC4-91FA-629A441AF499}"/>
+                <a16:creationId xmlns:a16="http://schemas.microsoft.com/office/drawing/2014/main" id="{E8A78646-EBEC-4CB0-83D7-BACE8BE923C3}"/>
               </a:ext>
             </a:extLst>
           </p:cNvPr>
@@ -17828,7 +17828,7 @@
           <p:cNvPr id="50" name="">
             <a:extLst xmlns:a="http://schemas.openxmlformats.org/drawingml/2006/main">
               <a:ext uri="{FF2B5EF4-FFF2-40B4-BE49-F238E27FC236}">
-                <a16:creationId xmlns:a16="http://schemas.microsoft.com/office/drawing/2014/main" id="{F0AE81F9-DA15-4936-909F-64DF37BE47A2}"/>
+                <a16:creationId xmlns:a16="http://schemas.microsoft.com/office/drawing/2014/main" id="{3810F89B-7D63-483B-AC61-7134140FA03B}"/>
               </a:ext>
             </a:extLst>
           </p:cNvPr>
@@ -17865,7 +17865,7 @@
           <p:cNvPr id="51" name="">
             <a:extLst xmlns:a="http://schemas.openxmlformats.org/drawingml/2006/main">
               <a:ext uri="{FF2B5EF4-FFF2-40B4-BE49-F238E27FC236}">
-                <a16:creationId xmlns:a16="http://schemas.microsoft.com/office/drawing/2014/main" id="{0195F73D-C2E6-43B6-AB46-F528043DAB13}"/>
+                <a16:creationId xmlns:a16="http://schemas.microsoft.com/office/drawing/2014/main" id="{23726E91-6CE5-4B33-86F9-40C8DE57D6B6}"/>
               </a:ext>
             </a:extLst>
           </p:cNvPr>
@@ -17902,7 +17902,7 @@
           <p:cNvPr id="52" name="">
             <a:extLst xmlns:a="http://schemas.openxmlformats.org/drawingml/2006/main">
               <a:ext uri="{FF2B5EF4-FFF2-40B4-BE49-F238E27FC236}">
-                <a16:creationId xmlns:a16="http://schemas.microsoft.com/office/drawing/2014/main" id="{4E2CC7A6-1342-4150-B70E-B854B4E94FE3}"/>
+                <a16:creationId xmlns:a16="http://schemas.microsoft.com/office/drawing/2014/main" id="{15FF35B7-34FC-49FB-B8B5-26CF7B70C6E3}"/>
               </a:ext>
             </a:extLst>
           </p:cNvPr>
@@ -17939,7 +17939,7 @@
           <p:cNvPr id="53" name="">
             <a:extLst xmlns:a="http://schemas.openxmlformats.org/drawingml/2006/main">
               <a:ext uri="{FF2B5EF4-FFF2-40B4-BE49-F238E27FC236}">
-                <a16:creationId xmlns:a16="http://schemas.microsoft.com/office/drawing/2014/main" id="{795272BD-6274-4D49-BC58-6EC8B7475EAB}"/>
+                <a16:creationId xmlns:a16="http://schemas.microsoft.com/office/drawing/2014/main" id="{DC174A2E-4642-4A81-B6F7-385EAAD9F066}"/>
               </a:ext>
             </a:extLst>
           </p:cNvPr>
@@ -18003,7 +18003,7 @@
           <p:cNvPr id="54" name="">
             <a:extLst xmlns:a="http://schemas.openxmlformats.org/drawingml/2006/main">
               <a:ext uri="{FF2B5EF4-FFF2-40B4-BE49-F238E27FC236}">
-                <a16:creationId xmlns:a16="http://schemas.microsoft.com/office/drawing/2014/main" id="{AE26958D-954E-459E-B5B9-A9430F714563}"/>
+                <a16:creationId xmlns:a16="http://schemas.microsoft.com/office/drawing/2014/main" id="{2637837E-7DD2-47A9-AC14-B142542E7867}"/>
               </a:ext>
             </a:extLst>
           </p:cNvPr>
@@ -18067,7 +18067,7 @@
           <p:cNvPr id="55" name="">
             <a:extLst xmlns:a="http://schemas.openxmlformats.org/drawingml/2006/main">
               <a:ext uri="{FF2B5EF4-FFF2-40B4-BE49-F238E27FC236}">
-                <a16:creationId xmlns:a16="http://schemas.microsoft.com/office/drawing/2014/main" id="{A17DA8B3-8122-462A-A5C2-A679D923CA82}"/>
+                <a16:creationId xmlns:a16="http://schemas.microsoft.com/office/drawing/2014/main" id="{F98561C4-5128-4D9F-822C-2E9D3ED3490C}"/>
               </a:ext>
             </a:extLst>
           </p:cNvPr>
@@ -18131,7 +18131,7 @@
           <p:cNvPr id="56" name="">
             <a:extLst xmlns:a="http://schemas.openxmlformats.org/drawingml/2006/main">
               <a:ext uri="{FF2B5EF4-FFF2-40B4-BE49-F238E27FC236}">
-                <a16:creationId xmlns:a16="http://schemas.microsoft.com/office/drawing/2014/main" id="{151313DA-656D-4043-9278-CE1929253E36}"/>
+                <a16:creationId xmlns:a16="http://schemas.microsoft.com/office/drawing/2014/main" id="{D4F57A49-AD38-407D-9CC3-DD5E3B928333}"/>
               </a:ext>
             </a:extLst>
           </p:cNvPr>
@@ -18168,7 +18168,7 @@
           <p:cNvPr id="57" name="">
             <a:extLst xmlns:a="http://schemas.openxmlformats.org/drawingml/2006/main">
               <a:ext uri="{FF2B5EF4-FFF2-40B4-BE49-F238E27FC236}">
-                <a16:creationId xmlns:a16="http://schemas.microsoft.com/office/drawing/2014/main" id="{8A5A105E-D1E5-4F35-AD00-7C1B262B0FF1}"/>
+                <a16:creationId xmlns:a16="http://schemas.microsoft.com/office/drawing/2014/main" id="{3427877F-FA49-444B-AABA-1EE1081AE350}"/>
               </a:ext>
             </a:extLst>
           </p:cNvPr>
@@ -18205,7 +18205,7 @@
           <p:cNvPr id="58" name="">
             <a:extLst xmlns:a="http://schemas.openxmlformats.org/drawingml/2006/main">
               <a:ext uri="{FF2B5EF4-FFF2-40B4-BE49-F238E27FC236}">
-                <a16:creationId xmlns:a16="http://schemas.microsoft.com/office/drawing/2014/main" id="{872FCF29-E219-4703-8FC3-C06346BE96A0}"/>
+                <a16:creationId xmlns:a16="http://schemas.microsoft.com/office/drawing/2014/main" id="{AB889BFD-7CA0-4360-8A56-8AE6EE1BC981}"/>
               </a:ext>
             </a:extLst>
           </p:cNvPr>
@@ -18242,7 +18242,7 @@
           <p:cNvPr id="59" name="">
             <a:extLst xmlns:a="http://schemas.openxmlformats.org/drawingml/2006/main">
               <a:ext uri="{FF2B5EF4-FFF2-40B4-BE49-F238E27FC236}">
-                <a16:creationId xmlns:a16="http://schemas.microsoft.com/office/drawing/2014/main" id="{343B8318-A615-40DC-91A2-E2CBB8531BA8}"/>
+                <a16:creationId xmlns:a16="http://schemas.microsoft.com/office/drawing/2014/main" id="{F92BA6D3-5763-4181-AAE9-8F3A1293D2D6}"/>
               </a:ext>
             </a:extLst>
           </p:cNvPr>
@@ -18306,7 +18306,7 @@
           <p:cNvPr id="60" name="">
             <a:extLst xmlns:a="http://schemas.openxmlformats.org/drawingml/2006/main">
               <a:ext uri="{FF2B5EF4-FFF2-40B4-BE49-F238E27FC236}">
-                <a16:creationId xmlns:a16="http://schemas.microsoft.com/office/drawing/2014/main" id="{4289D354-9188-40F1-9381-F8456A466DB5}"/>
+                <a16:creationId xmlns:a16="http://schemas.microsoft.com/office/drawing/2014/main" id="{07B53FF7-30CB-4271-9117-2E30EFEF46D1}"/>
               </a:ext>
             </a:extLst>
           </p:cNvPr>
@@ -18370,7 +18370,7 @@
           <p:cNvPr id="61" name="">
             <a:extLst xmlns:a="http://schemas.openxmlformats.org/drawingml/2006/main">
               <a:ext uri="{FF2B5EF4-FFF2-40B4-BE49-F238E27FC236}">
-                <a16:creationId xmlns:a16="http://schemas.microsoft.com/office/drawing/2014/main" id="{E0A0AAEB-120B-4056-BF17-FA7CE828CFAB}"/>
+                <a16:creationId xmlns:a16="http://schemas.microsoft.com/office/drawing/2014/main" id="{04917656-9158-425F-8F4D-1E42A91BC1FB}"/>
               </a:ext>
             </a:extLst>
           </p:cNvPr>
@@ -18434,7 +18434,7 @@
           <p:cNvPr id="62" name="">
             <a:extLst xmlns:a="http://schemas.openxmlformats.org/drawingml/2006/main">
               <a:ext uri="{FF2B5EF4-FFF2-40B4-BE49-F238E27FC236}">
-                <a16:creationId xmlns:a16="http://schemas.microsoft.com/office/drawing/2014/main" id="{8D6FED34-BDD7-4D17-960E-348E70761513}"/>
+                <a16:creationId xmlns:a16="http://schemas.microsoft.com/office/drawing/2014/main" id="{EF8457B5-78D8-41C5-A294-ABD8D2D6F1B2}"/>
               </a:ext>
             </a:extLst>
           </p:cNvPr>
@@ -18471,7 +18471,7 @@
           <p:cNvPr id="63" name="">
             <a:extLst xmlns:a="http://schemas.openxmlformats.org/drawingml/2006/main">
               <a:ext uri="{FF2B5EF4-FFF2-40B4-BE49-F238E27FC236}">
-                <a16:creationId xmlns:a16="http://schemas.microsoft.com/office/drawing/2014/main" id="{6BCB5814-6629-41F0-9775-5F1DA994C8B4}"/>
+                <a16:creationId xmlns:a16="http://schemas.microsoft.com/office/drawing/2014/main" id="{EBC14B0F-7BAC-478D-B0CB-1C036F90EE5A}"/>
               </a:ext>
             </a:extLst>
           </p:cNvPr>
@@ -18535,7 +18535,7 @@
           <p:cNvPr id="64" name="">
             <a:extLst xmlns:a="http://schemas.openxmlformats.org/drawingml/2006/main">
               <a:ext uri="{FF2B5EF4-FFF2-40B4-BE49-F238E27FC236}">
-                <a16:creationId xmlns:a16="http://schemas.microsoft.com/office/drawing/2014/main" id="{02C21975-1710-42C6-8C8D-D39246A7157D}"/>
+                <a16:creationId xmlns:a16="http://schemas.microsoft.com/office/drawing/2014/main" id="{12051723-600C-4DA3-90F1-3B6D71731423}"/>
               </a:ext>
             </a:extLst>
           </p:cNvPr>
@@ -18572,7 +18572,7 @@
           <p:cNvPr id="65" name="">
             <a:extLst xmlns:a="http://schemas.openxmlformats.org/drawingml/2006/main">
               <a:ext uri="{FF2B5EF4-FFF2-40B4-BE49-F238E27FC236}">
-                <a16:creationId xmlns:a16="http://schemas.microsoft.com/office/drawing/2014/main" id="{E3C38A78-C0DD-4EBD-BC2A-E63892F18D12}"/>
+                <a16:creationId xmlns:a16="http://schemas.microsoft.com/office/drawing/2014/main" id="{6B1886DA-86FE-4014-82AB-587F2EC148D3}"/>
               </a:ext>
             </a:extLst>
           </p:cNvPr>
@@ -18636,7 +18636,7 @@
           <p:cNvPr id="66" name="">
             <a:extLst xmlns:a="http://schemas.openxmlformats.org/drawingml/2006/main">
               <a:ext uri="{FF2B5EF4-FFF2-40B4-BE49-F238E27FC236}">
-                <a16:creationId xmlns:a16="http://schemas.microsoft.com/office/drawing/2014/main" id="{51FF10C0-F0FD-4F6B-A923-A0B019CC98F7}"/>
+                <a16:creationId xmlns:a16="http://schemas.microsoft.com/office/drawing/2014/main" id="{BE3F9BED-FBDD-4A6C-912C-4526DE1A91E3}"/>
               </a:ext>
             </a:extLst>
           </p:cNvPr>
@@ -18673,7 +18673,7 @@
           <p:cNvPr id="67" name="">
             <a:extLst xmlns:a="http://schemas.openxmlformats.org/drawingml/2006/main">
               <a:ext uri="{FF2B5EF4-FFF2-40B4-BE49-F238E27FC236}">
-                <a16:creationId xmlns:a16="http://schemas.microsoft.com/office/drawing/2014/main" id="{D3802641-2847-46F9-8FCA-502935EBADCE}"/>
+                <a16:creationId xmlns:a16="http://schemas.microsoft.com/office/drawing/2014/main" id="{6CE13061-61E0-4FF0-8FC3-1639C55DFA93}"/>
               </a:ext>
             </a:extLst>
           </p:cNvPr>
@@ -18737,7 +18737,7 @@
           <p:cNvPr id="68" name="">
             <a:extLst xmlns:a="http://schemas.openxmlformats.org/drawingml/2006/main">
               <a:ext uri="{FF2B5EF4-FFF2-40B4-BE49-F238E27FC236}">
-                <a16:creationId xmlns:a16="http://schemas.microsoft.com/office/drawing/2014/main" id="{62D44A16-951C-4875-981F-4762AA79F96D}"/>
+                <a16:creationId xmlns:a16="http://schemas.microsoft.com/office/drawing/2014/main" id="{CBC1FD9A-EB8C-4526-A396-59AF33B18F4C}"/>
               </a:ext>
             </a:extLst>
           </p:cNvPr>
@@ -18774,7 +18774,7 @@
           <p:cNvPr id="69" name="">
             <a:extLst xmlns:a="http://schemas.openxmlformats.org/drawingml/2006/main">
               <a:ext uri="{FF2B5EF4-FFF2-40B4-BE49-F238E27FC236}">
-                <a16:creationId xmlns:a16="http://schemas.microsoft.com/office/drawing/2014/main" id="{73CA96BE-0EAC-4BEE-9B76-8F2EC9F5505A}"/>
+                <a16:creationId xmlns:a16="http://schemas.microsoft.com/office/drawing/2014/main" id="{16C08B3C-BC50-4740-AA7F-5BA25CB0F042}"/>
               </a:ext>
             </a:extLst>
           </p:cNvPr>
@@ -18838,7 +18838,7 @@
           <p:cNvPr id="70" name="">
             <a:extLst xmlns:a="http://schemas.openxmlformats.org/drawingml/2006/main">
               <a:ext uri="{FF2B5EF4-FFF2-40B4-BE49-F238E27FC236}">
-                <a16:creationId xmlns:a16="http://schemas.microsoft.com/office/drawing/2014/main" id="{3B131674-D6FE-41B1-9F1C-51996D15C4CC}"/>
+                <a16:creationId xmlns:a16="http://schemas.microsoft.com/office/drawing/2014/main" id="{39F65976-54E0-46DE-90E0-E0DE8FAE2642}"/>
               </a:ext>
             </a:extLst>
           </p:cNvPr>
@@ -18902,7 +18902,7 @@
           <p:cNvPr id="71" name="">
             <a:extLst xmlns:a="http://schemas.openxmlformats.org/drawingml/2006/main">
               <a:ext uri="{FF2B5EF4-FFF2-40B4-BE49-F238E27FC236}">
-                <a16:creationId xmlns:a16="http://schemas.microsoft.com/office/drawing/2014/main" id="{66C09818-114A-4D65-9CCC-772928D3A29F}"/>
+                <a16:creationId xmlns:a16="http://schemas.microsoft.com/office/drawing/2014/main" id="{0021FC30-B3CF-45D1-98B5-7FCA629C82BF}"/>
               </a:ext>
             </a:extLst>
           </p:cNvPr>
@@ -18939,7 +18939,7 @@
           <p:cNvPr id="72" name="">
             <a:extLst xmlns:a="http://schemas.openxmlformats.org/drawingml/2006/main">
               <a:ext uri="{FF2B5EF4-FFF2-40B4-BE49-F238E27FC236}">
-                <a16:creationId xmlns:a16="http://schemas.microsoft.com/office/drawing/2014/main" id="{AFF0CD9D-9102-4DDA-AAA4-FF60F0E0565C}"/>
+                <a16:creationId xmlns:a16="http://schemas.microsoft.com/office/drawing/2014/main" id="{38892DC2-464E-47E1-AC7D-CD930D3A56E8}"/>
               </a:ext>
             </a:extLst>
           </p:cNvPr>
@@ -19001,7 +19001,7 @@
     </p:spTree>
     <p:extLst>
       <p:ext uri="{BB962C8B-B14F-4D97-AF65-F5344CB8AC3E}">
-        <p14:creationId xmlns:p14="http://schemas.microsoft.com/office/powerpoint/2010/main" val="729825245"/>
+        <p14:creationId xmlns:p14="http://schemas.microsoft.com/office/powerpoint/2010/main" val="12457668"/>
       </p:ext>
     </p:extLst>
   </p:cSld>
@@ -19025,7 +19025,7 @@
           <p:cNvPr id="1" name="">
             <a:extLst xmlns:a="http://schemas.openxmlformats.org/drawingml/2006/main">
               <a:ext uri="{FF2B5EF4-FFF2-40B4-BE49-F238E27FC236}">
-                <a16:creationId xmlns:a16="http://schemas.microsoft.com/office/drawing/2014/main" id="{4AD02C4B-6B06-4449-BE47-AE5055C8D943}"/>
+                <a16:creationId xmlns:a16="http://schemas.microsoft.com/office/drawing/2014/main" id="{BFABB6C8-6154-47DC-9EF8-4240013E018B}"/>
               </a:ext>
             </a:extLst>
           </p:cNvPr>
@@ -19060,7 +19060,7 @@
           <p:cNvPr id="2" name="">
             <a:extLst xmlns:a="http://schemas.openxmlformats.org/drawingml/2006/main">
               <a:ext uri="{FF2B5EF4-FFF2-40B4-BE49-F238E27FC236}">
-                <a16:creationId xmlns:a16="http://schemas.microsoft.com/office/drawing/2014/main" id="{BE88EB12-5D06-4199-85D5-AA1F30992824}"/>
+                <a16:creationId xmlns:a16="http://schemas.microsoft.com/office/drawing/2014/main" id="{70465291-A119-4CC1-AA2A-3185BC9307F0}"/>
               </a:ext>
             </a:extLst>
           </p:cNvPr>
@@ -19106,7 +19106,7 @@
           <p:cNvPr id="3" name="">
             <a:extLst xmlns:a="http://schemas.openxmlformats.org/drawingml/2006/main">
               <a:ext uri="{FF2B5EF4-FFF2-40B4-BE49-F238E27FC236}">
-                <a16:creationId xmlns:a16="http://schemas.microsoft.com/office/drawing/2014/main" id="{BBD9A7E4-25E3-4EE0-A415-B02E32DE1012}"/>
+                <a16:creationId xmlns:a16="http://schemas.microsoft.com/office/drawing/2014/main" id="{05B6BBA9-3A3A-4423-A307-94CAB3ED002B}"/>
               </a:ext>
             </a:extLst>
           </p:cNvPr>
@@ -19143,7 +19143,7 @@
           <p:cNvPr id="4" name="">
             <a:extLst xmlns:a="http://schemas.openxmlformats.org/drawingml/2006/main">
               <a:ext uri="{FF2B5EF4-FFF2-40B4-BE49-F238E27FC236}">
-                <a16:creationId xmlns:a16="http://schemas.microsoft.com/office/drawing/2014/main" id="{631C8D22-D2BB-47D6-B9BB-1091020798C7}"/>
+                <a16:creationId xmlns:a16="http://schemas.microsoft.com/office/drawing/2014/main" id="{EED47C9C-765A-4AC4-BF40-F01CC02E176E}"/>
               </a:ext>
             </a:extLst>
           </p:cNvPr>
@@ -19180,7 +19180,7 @@
           <p:cNvPr id="5" name="">
             <a:extLst xmlns:a="http://schemas.openxmlformats.org/drawingml/2006/main">
               <a:ext uri="{FF2B5EF4-FFF2-40B4-BE49-F238E27FC236}">
-                <a16:creationId xmlns:a16="http://schemas.microsoft.com/office/drawing/2014/main" id="{31AAAA9C-B8AA-4A03-8318-BCBB9E3D0EB3}"/>
+                <a16:creationId xmlns:a16="http://schemas.microsoft.com/office/drawing/2014/main" id="{B9A3A3D5-6219-4F9E-9A72-597E52B98C98}"/>
               </a:ext>
             </a:extLst>
           </p:cNvPr>
@@ -19217,7 +19217,7 @@
           <p:cNvPr id="6" name="">
             <a:extLst xmlns:a="http://schemas.openxmlformats.org/drawingml/2006/main">
               <a:ext uri="{FF2B5EF4-FFF2-40B4-BE49-F238E27FC236}">
-                <a16:creationId xmlns:a16="http://schemas.microsoft.com/office/drawing/2014/main" id="{D97D8D5F-7E25-4045-965A-4C9258DEEA65}"/>
+                <a16:creationId xmlns:a16="http://schemas.microsoft.com/office/drawing/2014/main" id="{C40E5C0A-B844-493F-9463-8BD973E7C3CD}"/>
               </a:ext>
             </a:extLst>
           </p:cNvPr>
@@ -19254,7 +19254,7 @@
           <p:cNvPr id="7" name="">
             <a:extLst xmlns:a="http://schemas.openxmlformats.org/drawingml/2006/main">
               <a:ext uri="{FF2B5EF4-FFF2-40B4-BE49-F238E27FC236}">
-                <a16:creationId xmlns:a16="http://schemas.microsoft.com/office/drawing/2014/main" id="{8D1EB019-0832-4E32-ABC6-54FE5175DE92}"/>
+                <a16:creationId xmlns:a16="http://schemas.microsoft.com/office/drawing/2014/main" id="{6E9EAD99-884C-4218-9B29-A7945C533E21}"/>
               </a:ext>
             </a:extLst>
           </p:cNvPr>
@@ -19291,7 +19291,7 @@
           <p:cNvPr id="8" name="">
             <a:extLst xmlns:a="http://schemas.openxmlformats.org/drawingml/2006/main">
               <a:ext uri="{FF2B5EF4-FFF2-40B4-BE49-F238E27FC236}">
-                <a16:creationId xmlns:a16="http://schemas.microsoft.com/office/drawing/2014/main" id="{0E29A33D-1C14-4ACC-A250-0BE46655A78E}"/>
+                <a16:creationId xmlns:a16="http://schemas.microsoft.com/office/drawing/2014/main" id="{FD699190-2E00-4D29-B066-BA370C2BCDEF}"/>
               </a:ext>
             </a:extLst>
           </p:cNvPr>
@@ -19328,7 +19328,7 @@
           <p:cNvPr id="9" name="">
             <a:extLst xmlns:a="http://schemas.openxmlformats.org/drawingml/2006/main">
               <a:ext uri="{FF2B5EF4-FFF2-40B4-BE49-F238E27FC236}">
-                <a16:creationId xmlns:a16="http://schemas.microsoft.com/office/drawing/2014/main" id="{276D33A7-FCE5-4C77-AB78-9A29E0B6BBFF}"/>
+                <a16:creationId xmlns:a16="http://schemas.microsoft.com/office/drawing/2014/main" id="{1CB71EDC-0A4C-4E96-9818-669D41EFDF9F}"/>
               </a:ext>
             </a:extLst>
           </p:cNvPr>
@@ -19365,7 +19365,7 @@
           <p:cNvPr id="10" name="">
             <a:extLst xmlns:a="http://schemas.openxmlformats.org/drawingml/2006/main">
               <a:ext uri="{FF2B5EF4-FFF2-40B4-BE49-F238E27FC236}">
-                <a16:creationId xmlns:a16="http://schemas.microsoft.com/office/drawing/2014/main" id="{E304DDD6-0DE0-4FBE-B706-68BDA16A71D5}"/>
+                <a16:creationId xmlns:a16="http://schemas.microsoft.com/office/drawing/2014/main" id="{A35A1ABE-0BE6-4640-9471-1B194C1DE677}"/>
               </a:ext>
             </a:extLst>
           </p:cNvPr>
@@ -19402,7 +19402,7 @@
           <p:cNvPr id="11" name="">
             <a:extLst xmlns:a="http://schemas.openxmlformats.org/drawingml/2006/main">
               <a:ext uri="{FF2B5EF4-FFF2-40B4-BE49-F238E27FC236}">
-                <a16:creationId xmlns:a16="http://schemas.microsoft.com/office/drawing/2014/main" id="{CBD425E0-FB79-4492-9938-4E18A81C8BC4}"/>
+                <a16:creationId xmlns:a16="http://schemas.microsoft.com/office/drawing/2014/main" id="{27F60A28-57D3-4222-B37C-FDF2AE54C775}"/>
               </a:ext>
             </a:extLst>
           </p:cNvPr>
@@ -19439,7 +19439,7 @@
           <p:cNvPr id="12" name="">
             <a:extLst xmlns:a="http://schemas.openxmlformats.org/drawingml/2006/main">
               <a:ext uri="{FF2B5EF4-FFF2-40B4-BE49-F238E27FC236}">
-                <a16:creationId xmlns:a16="http://schemas.microsoft.com/office/drawing/2014/main" id="{797FBAF0-F488-4410-9718-58A8E7093238}"/>
+                <a16:creationId xmlns:a16="http://schemas.microsoft.com/office/drawing/2014/main" id="{7C67A6DC-8A7A-4784-8FD3-6C9C87CB5130}"/>
               </a:ext>
             </a:extLst>
           </p:cNvPr>
@@ -19476,7 +19476,7 @@
           <p:cNvPr id="13" name="">
             <a:extLst xmlns:a="http://schemas.openxmlformats.org/drawingml/2006/main">
               <a:ext uri="{FF2B5EF4-FFF2-40B4-BE49-F238E27FC236}">
-                <a16:creationId xmlns:a16="http://schemas.microsoft.com/office/drawing/2014/main" id="{5267B893-4D23-4ACF-B1B9-FB03496E71EC}"/>
+                <a16:creationId xmlns:a16="http://schemas.microsoft.com/office/drawing/2014/main" id="{CEAA13BC-7333-48CB-AC94-7A26DACFDF2F}"/>
               </a:ext>
             </a:extLst>
           </p:cNvPr>
@@ -19513,7 +19513,7 @@
           <p:cNvPr id="14" name="">
             <a:extLst xmlns:a="http://schemas.openxmlformats.org/drawingml/2006/main">
               <a:ext uri="{FF2B5EF4-FFF2-40B4-BE49-F238E27FC236}">
-                <a16:creationId xmlns:a16="http://schemas.microsoft.com/office/drawing/2014/main" id="{2FF132C3-FFB3-47DB-BCE2-9D7043D6E7F2}"/>
+                <a16:creationId xmlns:a16="http://schemas.microsoft.com/office/drawing/2014/main" id="{5215729B-F397-4B4C-9382-ADBBF4BFB6F8}"/>
               </a:ext>
             </a:extLst>
           </p:cNvPr>
@@ -19550,7 +19550,7 @@
           <p:cNvPr id="15" name="">
             <a:extLst xmlns:a="http://schemas.openxmlformats.org/drawingml/2006/main">
               <a:ext uri="{FF2B5EF4-FFF2-40B4-BE49-F238E27FC236}">
-                <a16:creationId xmlns:a16="http://schemas.microsoft.com/office/drawing/2014/main" id="{3AAD43AF-93DB-4581-9ACF-830BA42A1BFC}"/>
+                <a16:creationId xmlns:a16="http://schemas.microsoft.com/office/drawing/2014/main" id="{D5F441B8-0862-42DC-81CD-446FF8798FE8}"/>
               </a:ext>
             </a:extLst>
           </p:cNvPr>
@@ -19587,7 +19587,7 @@
           <p:cNvPr id="16" name="">
             <a:extLst xmlns:a="http://schemas.openxmlformats.org/drawingml/2006/main">
               <a:ext uri="{FF2B5EF4-FFF2-40B4-BE49-F238E27FC236}">
-                <a16:creationId xmlns:a16="http://schemas.microsoft.com/office/drawing/2014/main" id="{106658A3-B4E8-461F-889E-6ED825C58EBD}"/>
+                <a16:creationId xmlns:a16="http://schemas.microsoft.com/office/drawing/2014/main" id="{DF252FBD-F8A8-46C0-8854-87D87E7D2819}"/>
               </a:ext>
             </a:extLst>
           </p:cNvPr>
@@ -19624,7 +19624,7 @@
           <p:cNvPr id="17" name="">
             <a:extLst xmlns:a="http://schemas.openxmlformats.org/drawingml/2006/main">
               <a:ext uri="{FF2B5EF4-FFF2-40B4-BE49-F238E27FC236}">
-                <a16:creationId xmlns:a16="http://schemas.microsoft.com/office/drawing/2014/main" id="{D5851C38-3685-417C-A071-876FB0FEBEDB}"/>
+                <a16:creationId xmlns:a16="http://schemas.microsoft.com/office/drawing/2014/main" id="{3152FE54-D5F6-4183-9B19-9E810BE35973}"/>
               </a:ext>
             </a:extLst>
           </p:cNvPr>
@@ -19661,7 +19661,7 @@
           <p:cNvPr id="18" name="">
             <a:extLst xmlns:a="http://schemas.openxmlformats.org/drawingml/2006/main">
               <a:ext uri="{FF2B5EF4-FFF2-40B4-BE49-F238E27FC236}">
-                <a16:creationId xmlns:a16="http://schemas.microsoft.com/office/drawing/2014/main" id="{6FE6AB01-42F5-46E5-ADEE-F14476898F0A}"/>
+                <a16:creationId xmlns:a16="http://schemas.microsoft.com/office/drawing/2014/main" id="{2712D577-E769-4DA5-9982-0CC4713B8150}"/>
               </a:ext>
             </a:extLst>
           </p:cNvPr>
@@ -19698,7 +19698,7 @@
           <p:cNvPr id="19" name="">
             <a:extLst xmlns:a="http://schemas.openxmlformats.org/drawingml/2006/main">
               <a:ext uri="{FF2B5EF4-FFF2-40B4-BE49-F238E27FC236}">
-                <a16:creationId xmlns:a16="http://schemas.microsoft.com/office/drawing/2014/main" id="{3BA2B147-0A98-4E30-93AD-E73972119774}"/>
+                <a16:creationId xmlns:a16="http://schemas.microsoft.com/office/drawing/2014/main" id="{5DB548CF-C5CF-4DA7-8082-0A974F861D84}"/>
               </a:ext>
             </a:extLst>
           </p:cNvPr>
@@ -19735,7 +19735,7 @@
           <p:cNvPr id="20" name="">
             <a:extLst xmlns:a="http://schemas.openxmlformats.org/drawingml/2006/main">
               <a:ext uri="{FF2B5EF4-FFF2-40B4-BE49-F238E27FC236}">
-                <a16:creationId xmlns:a16="http://schemas.microsoft.com/office/drawing/2014/main" id="{B5E45B06-189C-4392-95D4-BA50AE17E7F3}"/>
+                <a16:creationId xmlns:a16="http://schemas.microsoft.com/office/drawing/2014/main" id="{B551590D-BBC5-4AA8-995C-E70F34D5A1D6}"/>
               </a:ext>
             </a:extLst>
           </p:cNvPr>
@@ -19772,7 +19772,7 @@
           <p:cNvPr id="21" name="">
             <a:extLst xmlns:a="http://schemas.openxmlformats.org/drawingml/2006/main">
               <a:ext uri="{FF2B5EF4-FFF2-40B4-BE49-F238E27FC236}">
-                <a16:creationId xmlns:a16="http://schemas.microsoft.com/office/drawing/2014/main" id="{812FA8B3-1099-44FD-8891-5581DED11FF7}"/>
+                <a16:creationId xmlns:a16="http://schemas.microsoft.com/office/drawing/2014/main" id="{E9DDB060-B145-42EC-97B1-C45A5F9FC124}"/>
               </a:ext>
             </a:extLst>
           </p:cNvPr>
@@ -19809,7 +19809,7 @@
           <p:cNvPr id="22" name="">
             <a:extLst xmlns:a="http://schemas.openxmlformats.org/drawingml/2006/main">
               <a:ext uri="{FF2B5EF4-FFF2-40B4-BE49-F238E27FC236}">
-                <a16:creationId xmlns:a16="http://schemas.microsoft.com/office/drawing/2014/main" id="{C55FBCE2-F4CD-425A-9FD3-FA211B5BEC09}"/>
+                <a16:creationId xmlns:a16="http://schemas.microsoft.com/office/drawing/2014/main" id="{C04656B7-6BB3-4D6A-9C83-0D5F241D99F7}"/>
               </a:ext>
             </a:extLst>
           </p:cNvPr>
@@ -19846,7 +19846,7 @@
           <p:cNvPr id="23" name="">
             <a:extLst xmlns:a="http://schemas.openxmlformats.org/drawingml/2006/main">
               <a:ext uri="{FF2B5EF4-FFF2-40B4-BE49-F238E27FC236}">
-                <a16:creationId xmlns:a16="http://schemas.microsoft.com/office/drawing/2014/main" id="{3A172E79-5F53-469B-AAE7-8E2763698D32}"/>
+                <a16:creationId xmlns:a16="http://schemas.microsoft.com/office/drawing/2014/main" id="{EC76BF4D-FAA8-48F3-A341-567B88A341F5}"/>
               </a:ext>
             </a:extLst>
           </p:cNvPr>
@@ -19883,7 +19883,7 @@
           <p:cNvPr id="24" name="">
             <a:extLst xmlns:a="http://schemas.openxmlformats.org/drawingml/2006/main">
               <a:ext uri="{FF2B5EF4-FFF2-40B4-BE49-F238E27FC236}">
-                <a16:creationId xmlns:a16="http://schemas.microsoft.com/office/drawing/2014/main" id="{7780A121-CD9C-4F6D-8E74-6DD6DB21B348}"/>
+                <a16:creationId xmlns:a16="http://schemas.microsoft.com/office/drawing/2014/main" id="{5BFFCF83-F6BA-497B-B0E3-4BA889198040}"/>
               </a:ext>
             </a:extLst>
           </p:cNvPr>
@@ -19920,7 +19920,7 @@
           <p:cNvPr id="25" name="">
             <a:extLst xmlns:a="http://schemas.openxmlformats.org/drawingml/2006/main">
               <a:ext uri="{FF2B5EF4-FFF2-40B4-BE49-F238E27FC236}">
-                <a16:creationId xmlns:a16="http://schemas.microsoft.com/office/drawing/2014/main" id="{2853D320-DC99-41A6-9721-AE3CA988FDFF}"/>
+                <a16:creationId xmlns:a16="http://schemas.microsoft.com/office/drawing/2014/main" id="{58B774D3-2CF1-4BC8-8C18-B9606491F39E}"/>
               </a:ext>
             </a:extLst>
           </p:cNvPr>
@@ -19957,7 +19957,7 @@
           <p:cNvPr id="26" name="">
             <a:extLst xmlns:a="http://schemas.openxmlformats.org/drawingml/2006/main">
               <a:ext uri="{FF2B5EF4-FFF2-40B4-BE49-F238E27FC236}">
-                <a16:creationId xmlns:a16="http://schemas.microsoft.com/office/drawing/2014/main" id="{57D7B959-15D5-4A81-944B-18A294F1732D}"/>
+                <a16:creationId xmlns:a16="http://schemas.microsoft.com/office/drawing/2014/main" id="{F818A59C-3A18-4F9E-8970-0CECE67A408A}"/>
               </a:ext>
             </a:extLst>
           </p:cNvPr>
@@ -20004,7 +20004,7 @@
           <p:cNvPr id="27" name="">
             <a:extLst xmlns:a="http://schemas.openxmlformats.org/drawingml/2006/main">
               <a:ext uri="{FF2B5EF4-FFF2-40B4-BE49-F238E27FC236}">
-                <a16:creationId xmlns:a16="http://schemas.microsoft.com/office/drawing/2014/main" id="{59185876-94FA-4043-8280-6A635EE25DAD}"/>
+                <a16:creationId xmlns:a16="http://schemas.microsoft.com/office/drawing/2014/main" id="{8E4E79C9-7C57-4449-B539-E046C1F34038}"/>
               </a:ext>
             </a:extLst>
           </p:cNvPr>
@@ -20051,7 +20051,7 @@
           <p:cNvPr id="28" name="">
             <a:extLst xmlns:a="http://schemas.openxmlformats.org/drawingml/2006/main">
               <a:ext uri="{FF2B5EF4-FFF2-40B4-BE49-F238E27FC236}">
-                <a16:creationId xmlns:a16="http://schemas.microsoft.com/office/drawing/2014/main" id="{40CA16ED-5D68-4E67-A5ED-304042893A59}"/>
+                <a16:creationId xmlns:a16="http://schemas.microsoft.com/office/drawing/2014/main" id="{7B81EA1E-6FA6-4E01-9EA6-FE7AD3BC5DB7}"/>
               </a:ext>
             </a:extLst>
           </p:cNvPr>
@@ -20115,7 +20115,7 @@
           <p:cNvPr id="29" name="">
             <a:extLst xmlns:a="http://schemas.openxmlformats.org/drawingml/2006/main">
               <a:ext uri="{FF2B5EF4-FFF2-40B4-BE49-F238E27FC236}">
-                <a16:creationId xmlns:a16="http://schemas.microsoft.com/office/drawing/2014/main" id="{637783BF-53C8-4239-B02C-423E56B91822}"/>
+                <a16:creationId xmlns:a16="http://schemas.microsoft.com/office/drawing/2014/main" id="{C76E6CEC-CE39-46C7-9BC5-2A0DD1738B59}"/>
               </a:ext>
             </a:extLst>
           </p:cNvPr>
@@ -20179,7 +20179,7 @@
           <p:cNvPr id="30" name="">
             <a:extLst xmlns:a="http://schemas.openxmlformats.org/drawingml/2006/main">
               <a:ext uri="{FF2B5EF4-FFF2-40B4-BE49-F238E27FC236}">
-                <a16:creationId xmlns:a16="http://schemas.microsoft.com/office/drawing/2014/main" id="{03FF7C66-A80F-426D-B3AA-E759B6078018}"/>
+                <a16:creationId xmlns:a16="http://schemas.microsoft.com/office/drawing/2014/main" id="{612BD5D0-419F-4EBE-AF4C-EA8EEBCA4DC9}"/>
               </a:ext>
             </a:extLst>
           </p:cNvPr>
@@ -20243,7 +20243,7 @@
           <p:cNvPr id="31" name="">
             <a:extLst xmlns:a="http://schemas.openxmlformats.org/drawingml/2006/main">
               <a:ext uri="{FF2B5EF4-FFF2-40B4-BE49-F238E27FC236}">
-                <a16:creationId xmlns:a16="http://schemas.microsoft.com/office/drawing/2014/main" id="{13FBB9C5-F0AA-4853-A4E4-0FF728C24A93}"/>
+                <a16:creationId xmlns:a16="http://schemas.microsoft.com/office/drawing/2014/main" id="{1618FA3D-4C8A-4771-8231-04A4B90523DC}"/>
               </a:ext>
             </a:extLst>
           </p:cNvPr>
@@ -20307,7 +20307,7 @@
           <p:cNvPr id="32" name="">
             <a:extLst xmlns:a="http://schemas.openxmlformats.org/drawingml/2006/main">
               <a:ext uri="{FF2B5EF4-FFF2-40B4-BE49-F238E27FC236}">
-                <a16:creationId xmlns:a16="http://schemas.microsoft.com/office/drawing/2014/main" id="{59D7ABEC-6132-443D-9664-07526C494823}"/>
+                <a16:creationId xmlns:a16="http://schemas.microsoft.com/office/drawing/2014/main" id="{B524C7F2-006B-4D5E-BEE0-D443BE378AFC}"/>
               </a:ext>
             </a:extLst>
           </p:cNvPr>
@@ -20344,7 +20344,7 @@
           <p:cNvPr id="33" name="">
             <a:extLst xmlns:a="http://schemas.openxmlformats.org/drawingml/2006/main">
               <a:ext uri="{FF2B5EF4-FFF2-40B4-BE49-F238E27FC236}">
-                <a16:creationId xmlns:a16="http://schemas.microsoft.com/office/drawing/2014/main" id="{033425F2-7E3B-4E7F-A3B7-7CE18EE5B007}"/>
+                <a16:creationId xmlns:a16="http://schemas.microsoft.com/office/drawing/2014/main" id="{EB7D30ED-2FBE-4B6E-87DA-84CA448E4A6D}"/>
               </a:ext>
             </a:extLst>
           </p:cNvPr>
@@ -20381,7 +20381,7 @@
           <p:cNvPr id="34" name="">
             <a:extLst xmlns:a="http://schemas.openxmlformats.org/drawingml/2006/main">
               <a:ext uri="{FF2B5EF4-FFF2-40B4-BE49-F238E27FC236}">
-                <a16:creationId xmlns:a16="http://schemas.microsoft.com/office/drawing/2014/main" id="{656E0E1C-34A2-40CA-B1CB-EDF547E7B76A}"/>
+                <a16:creationId xmlns:a16="http://schemas.microsoft.com/office/drawing/2014/main" id="{51F799D8-3B01-43FB-AE92-66D4BB08198F}"/>
               </a:ext>
             </a:extLst>
           </p:cNvPr>
@@ -20445,7 +20445,7 @@
           <p:cNvPr id="35" name="">
             <a:extLst xmlns:a="http://schemas.openxmlformats.org/drawingml/2006/main">
               <a:ext uri="{FF2B5EF4-FFF2-40B4-BE49-F238E27FC236}">
-                <a16:creationId xmlns:a16="http://schemas.microsoft.com/office/drawing/2014/main" id="{57D921CB-C44D-4B56-92C9-C83AD84C99E4}"/>
+                <a16:creationId xmlns:a16="http://schemas.microsoft.com/office/drawing/2014/main" id="{2A2ED492-54DD-4E2F-825D-12C2A1B34FB1}"/>
               </a:ext>
             </a:extLst>
           </p:cNvPr>
@@ -20601,7 +20601,7 @@
           <p:cNvPr id="36" name="">
             <a:extLst xmlns:a="http://schemas.openxmlformats.org/drawingml/2006/main">
               <a:ext uri="{FF2B5EF4-FFF2-40B4-BE49-F238E27FC236}">
-                <a16:creationId xmlns:a16="http://schemas.microsoft.com/office/drawing/2014/main" id="{59DFD7CC-40F5-4E6F-963E-9D94A29691E4}"/>
+                <a16:creationId xmlns:a16="http://schemas.microsoft.com/office/drawing/2014/main" id="{E7675CB8-0E18-48F0-9506-77B6D2B9F4F2}"/>
               </a:ext>
             </a:extLst>
           </p:cNvPr>
@@ -20638,7 +20638,7 @@
           <p:cNvPr id="37" name="">
             <a:extLst xmlns:a="http://schemas.openxmlformats.org/drawingml/2006/main">
               <a:ext uri="{FF2B5EF4-FFF2-40B4-BE49-F238E27FC236}">
-                <a16:creationId xmlns:a16="http://schemas.microsoft.com/office/drawing/2014/main" id="{43257364-B04F-4F90-BD61-38D7D56496CA}"/>
+                <a16:creationId xmlns:a16="http://schemas.microsoft.com/office/drawing/2014/main" id="{D4DA5E11-61A9-410D-AE6A-4243C2F6121A}"/>
               </a:ext>
             </a:extLst>
           </p:cNvPr>
@@ -20675,7 +20675,7 @@
           <p:cNvPr id="38" name="">
             <a:extLst xmlns:a="http://schemas.openxmlformats.org/drawingml/2006/main">
               <a:ext uri="{FF2B5EF4-FFF2-40B4-BE49-F238E27FC236}">
-                <a16:creationId xmlns:a16="http://schemas.microsoft.com/office/drawing/2014/main" id="{317167BE-5B84-474A-9F1A-BCC799153CD5}"/>
+                <a16:creationId xmlns:a16="http://schemas.microsoft.com/office/drawing/2014/main" id="{189EB24A-182C-4D18-8F12-D461FEAD1CA2}"/>
               </a:ext>
             </a:extLst>
           </p:cNvPr>
@@ -20739,7 +20739,7 @@
           <p:cNvPr id="39" name="">
             <a:extLst xmlns:a="http://schemas.openxmlformats.org/drawingml/2006/main">
               <a:ext uri="{FF2B5EF4-FFF2-40B4-BE49-F238E27FC236}">
-                <a16:creationId xmlns:a16="http://schemas.microsoft.com/office/drawing/2014/main" id="{6131BBA1-D93F-44B8-A3EB-62A4C8ED041D}"/>
+                <a16:creationId xmlns:a16="http://schemas.microsoft.com/office/drawing/2014/main" id="{6B3195EC-2EC6-443E-A79A-E3A0BFDB484C}"/>
               </a:ext>
             </a:extLst>
           </p:cNvPr>
@@ -20918,7 +20918,7 @@
           <p:cNvPr id="40" name="">
             <a:extLst xmlns:a="http://schemas.openxmlformats.org/drawingml/2006/main">
               <a:ext uri="{FF2B5EF4-FFF2-40B4-BE49-F238E27FC236}">
-                <a16:creationId xmlns:a16="http://schemas.microsoft.com/office/drawing/2014/main" id="{EB850FC7-1E35-4580-9B1F-519B9AF7349A}"/>
+                <a16:creationId xmlns:a16="http://schemas.microsoft.com/office/drawing/2014/main" id="{31B789B3-25CF-476D-8791-68C795E1D521}"/>
               </a:ext>
             </a:extLst>
           </p:cNvPr>
@@ -20982,7 +20982,7 @@
           <p:cNvPr id="41" name="">
             <a:extLst xmlns:a="http://schemas.openxmlformats.org/drawingml/2006/main">
               <a:ext uri="{FF2B5EF4-FFF2-40B4-BE49-F238E27FC236}">
-                <a16:creationId xmlns:a16="http://schemas.microsoft.com/office/drawing/2014/main" id="{CAD6254B-AFA3-410B-8ACE-6BF13147657C}"/>
+                <a16:creationId xmlns:a16="http://schemas.microsoft.com/office/drawing/2014/main" id="{F0E000D8-A4A3-477C-9C90-35043FE63F5A}"/>
               </a:ext>
             </a:extLst>
           </p:cNvPr>
@@ -21019,7 +21019,7 @@
           <p:cNvPr id="42" name="">
             <a:extLst xmlns:a="http://schemas.openxmlformats.org/drawingml/2006/main">
               <a:ext uri="{FF2B5EF4-FFF2-40B4-BE49-F238E27FC236}">
-                <a16:creationId xmlns:a16="http://schemas.microsoft.com/office/drawing/2014/main" id="{E4C80350-9405-49EB-BBAB-251387B5D2D6}"/>
+                <a16:creationId xmlns:a16="http://schemas.microsoft.com/office/drawing/2014/main" id="{E985F1F1-B2CA-4D7E-9E45-5027B50C4D92}"/>
               </a:ext>
             </a:extLst>
           </p:cNvPr>
@@ -21081,7 +21081,7 @@
     </p:spTree>
     <p:extLst>
       <p:ext uri="{BB962C8B-B14F-4D97-AF65-F5344CB8AC3E}">
-        <p14:creationId xmlns:p14="http://schemas.microsoft.com/office/powerpoint/2010/main" val="1418156778"/>
+        <p14:creationId xmlns:p14="http://schemas.microsoft.com/office/powerpoint/2010/main" val="162201353"/>
       </p:ext>
     </p:extLst>
   </p:cSld>
@@ -21105,7 +21105,7 @@
           <p:cNvPr id="1" name="">
             <a:extLst xmlns:a="http://schemas.openxmlformats.org/drawingml/2006/main">
               <a:ext uri="{FF2B5EF4-FFF2-40B4-BE49-F238E27FC236}">
-                <a16:creationId xmlns:a16="http://schemas.microsoft.com/office/drawing/2014/main" id="{0B2BE207-EE3A-4EF0-A069-28F6B34F7C10}"/>
+                <a16:creationId xmlns:a16="http://schemas.microsoft.com/office/drawing/2014/main" id="{C8A22734-E016-45E9-B3B0-51CB29DECA8C}"/>
               </a:ext>
             </a:extLst>
           </p:cNvPr>
@@ -21140,7 +21140,7 @@
           <p:cNvPr id="2" name="">
             <a:extLst xmlns:a="http://schemas.openxmlformats.org/drawingml/2006/main">
               <a:ext uri="{FF2B5EF4-FFF2-40B4-BE49-F238E27FC236}">
-                <a16:creationId xmlns:a16="http://schemas.microsoft.com/office/drawing/2014/main" id="{5CA677EE-7A41-4919-BA9C-48F590331C76}"/>
+                <a16:creationId xmlns:a16="http://schemas.microsoft.com/office/drawing/2014/main" id="{B192BEE6-8F4F-43A6-A704-CAF6F89F39EE}"/>
               </a:ext>
             </a:extLst>
           </p:cNvPr>
@@ -21186,7 +21186,7 @@
           <p:cNvPr id="3" name="">
             <a:extLst xmlns:a="http://schemas.openxmlformats.org/drawingml/2006/main">
               <a:ext uri="{FF2B5EF4-FFF2-40B4-BE49-F238E27FC236}">
-                <a16:creationId xmlns:a16="http://schemas.microsoft.com/office/drawing/2014/main" id="{CCCE2424-E25B-45DE-A1A3-DD127AF3652A}"/>
+                <a16:creationId xmlns:a16="http://schemas.microsoft.com/office/drawing/2014/main" id="{90B5A2CD-0682-4021-8DB8-FE92AC7EE6F7}"/>
               </a:ext>
             </a:extLst>
           </p:cNvPr>
@@ -21223,7 +21223,7 @@
           <p:cNvPr id="4" name="">
             <a:extLst xmlns:a="http://schemas.openxmlformats.org/drawingml/2006/main">
               <a:ext uri="{FF2B5EF4-FFF2-40B4-BE49-F238E27FC236}">
-                <a16:creationId xmlns:a16="http://schemas.microsoft.com/office/drawing/2014/main" id="{2AB7821C-A36D-4FCD-87EB-4B1C9BEA1025}"/>
+                <a16:creationId xmlns:a16="http://schemas.microsoft.com/office/drawing/2014/main" id="{FE5CCD25-AFFA-4B39-A28B-1548C8E7D83A}"/>
               </a:ext>
             </a:extLst>
           </p:cNvPr>
@@ -21260,7 +21260,7 @@
           <p:cNvPr id="5" name="">
             <a:extLst xmlns:a="http://schemas.openxmlformats.org/drawingml/2006/main">
               <a:ext uri="{FF2B5EF4-FFF2-40B4-BE49-F238E27FC236}">
-                <a16:creationId xmlns:a16="http://schemas.microsoft.com/office/drawing/2014/main" id="{33E4DE52-8FD4-4B6B-B4B1-307149A3DF06}"/>
+                <a16:creationId xmlns:a16="http://schemas.microsoft.com/office/drawing/2014/main" id="{6CEBDCDC-91C8-417F-8225-2B2EC0340D2A}"/>
               </a:ext>
             </a:extLst>
           </p:cNvPr>
@@ -21297,7 +21297,7 @@
           <p:cNvPr id="6" name="">
             <a:extLst xmlns:a="http://schemas.openxmlformats.org/drawingml/2006/main">
               <a:ext uri="{FF2B5EF4-FFF2-40B4-BE49-F238E27FC236}">
-                <a16:creationId xmlns:a16="http://schemas.microsoft.com/office/drawing/2014/main" id="{C8E081B5-3AB3-4E7E-A716-0452C46E5024}"/>
+                <a16:creationId xmlns:a16="http://schemas.microsoft.com/office/drawing/2014/main" id="{8C84F370-801F-4B08-8911-FC724A45B11E}"/>
               </a:ext>
             </a:extLst>
           </p:cNvPr>
@@ -21334,7 +21334,7 @@
           <p:cNvPr id="7" name="">
             <a:extLst xmlns:a="http://schemas.openxmlformats.org/drawingml/2006/main">
               <a:ext uri="{FF2B5EF4-FFF2-40B4-BE49-F238E27FC236}">
-                <a16:creationId xmlns:a16="http://schemas.microsoft.com/office/drawing/2014/main" id="{26C21E8A-539E-4BF9-B365-87A9E770B4E1}"/>
+                <a16:creationId xmlns:a16="http://schemas.microsoft.com/office/drawing/2014/main" id="{F41A4323-C233-45EF-BE64-3FC5B3AD83B3}"/>
               </a:ext>
             </a:extLst>
           </p:cNvPr>
@@ -21371,7 +21371,7 @@
           <p:cNvPr id="8" name="">
             <a:extLst xmlns:a="http://schemas.openxmlformats.org/drawingml/2006/main">
               <a:ext uri="{FF2B5EF4-FFF2-40B4-BE49-F238E27FC236}">
-                <a16:creationId xmlns:a16="http://schemas.microsoft.com/office/drawing/2014/main" id="{E98A0F7A-FF9A-40D2-9784-CF5E84F987E8}"/>
+                <a16:creationId xmlns:a16="http://schemas.microsoft.com/office/drawing/2014/main" id="{0AFF3265-AA3F-494C-B850-403744D9C788}"/>
               </a:ext>
             </a:extLst>
           </p:cNvPr>
@@ -21408,7 +21408,7 @@
           <p:cNvPr id="9" name="">
             <a:extLst xmlns:a="http://schemas.openxmlformats.org/drawingml/2006/main">
               <a:ext uri="{FF2B5EF4-FFF2-40B4-BE49-F238E27FC236}">
-                <a16:creationId xmlns:a16="http://schemas.microsoft.com/office/drawing/2014/main" id="{F9BF843A-F4FE-41C4-8C0B-7248B2B57A51}"/>
+                <a16:creationId xmlns:a16="http://schemas.microsoft.com/office/drawing/2014/main" id="{E63C42F5-2D78-4D3F-972A-6F6DA5D18474}"/>
               </a:ext>
             </a:extLst>
           </p:cNvPr>
@@ -21445,7 +21445,7 @@
           <p:cNvPr id="10" name="">
             <a:extLst xmlns:a="http://schemas.openxmlformats.org/drawingml/2006/main">
               <a:ext uri="{FF2B5EF4-FFF2-40B4-BE49-F238E27FC236}">
-                <a16:creationId xmlns:a16="http://schemas.microsoft.com/office/drawing/2014/main" id="{0F266DCF-33C6-4E20-B4F6-D17B90757487}"/>
+                <a16:creationId xmlns:a16="http://schemas.microsoft.com/office/drawing/2014/main" id="{AAB37151-0C76-4920-97CD-1ACD42C13E66}"/>
               </a:ext>
             </a:extLst>
           </p:cNvPr>
@@ -21482,7 +21482,7 @@
           <p:cNvPr id="11" name="">
             <a:extLst xmlns:a="http://schemas.openxmlformats.org/drawingml/2006/main">
               <a:ext uri="{FF2B5EF4-FFF2-40B4-BE49-F238E27FC236}">
-                <a16:creationId xmlns:a16="http://schemas.microsoft.com/office/drawing/2014/main" id="{07547F42-390F-4B05-8C83-13AC3B6EE556}"/>
+                <a16:creationId xmlns:a16="http://schemas.microsoft.com/office/drawing/2014/main" id="{70517AB0-5FE2-4726-82DB-618FF6DA13C6}"/>
               </a:ext>
             </a:extLst>
           </p:cNvPr>
@@ -21519,7 +21519,7 @@
           <p:cNvPr id="12" name="">
             <a:extLst xmlns:a="http://schemas.openxmlformats.org/drawingml/2006/main">
               <a:ext uri="{FF2B5EF4-FFF2-40B4-BE49-F238E27FC236}">
-                <a16:creationId xmlns:a16="http://schemas.microsoft.com/office/drawing/2014/main" id="{CB197D96-2BFA-4345-A156-D50D657713B7}"/>
+                <a16:creationId xmlns:a16="http://schemas.microsoft.com/office/drawing/2014/main" id="{6725D4B5-2C80-47A2-99DD-D731AEC90684}"/>
               </a:ext>
             </a:extLst>
           </p:cNvPr>
@@ -21556,7 +21556,7 @@
           <p:cNvPr id="13" name="">
             <a:extLst xmlns:a="http://schemas.openxmlformats.org/drawingml/2006/main">
               <a:ext uri="{FF2B5EF4-FFF2-40B4-BE49-F238E27FC236}">
-                <a16:creationId xmlns:a16="http://schemas.microsoft.com/office/drawing/2014/main" id="{122F6AFE-9232-4847-8A69-8DCFC3074A79}"/>
+                <a16:creationId xmlns:a16="http://schemas.microsoft.com/office/drawing/2014/main" id="{93BEBC4E-A292-4505-B5C0-F24D383B8A87}"/>
               </a:ext>
             </a:extLst>
           </p:cNvPr>
@@ -21593,7 +21593,7 @@
           <p:cNvPr id="14" name="">
             <a:extLst xmlns:a="http://schemas.openxmlformats.org/drawingml/2006/main">
               <a:ext uri="{FF2B5EF4-FFF2-40B4-BE49-F238E27FC236}">
-                <a16:creationId xmlns:a16="http://schemas.microsoft.com/office/drawing/2014/main" id="{794F8900-F402-4B1A-9888-225DC9C424C4}"/>
+                <a16:creationId xmlns:a16="http://schemas.microsoft.com/office/drawing/2014/main" id="{94F946E4-FAFB-4B4A-8CC5-D3D6EFAE3548}"/>
               </a:ext>
             </a:extLst>
           </p:cNvPr>
@@ -21630,7 +21630,7 @@
           <p:cNvPr id="15" name="">
             <a:extLst xmlns:a="http://schemas.openxmlformats.org/drawingml/2006/main">
               <a:ext uri="{FF2B5EF4-FFF2-40B4-BE49-F238E27FC236}">
-                <a16:creationId xmlns:a16="http://schemas.microsoft.com/office/drawing/2014/main" id="{FC799C40-AD45-4B8D-9B20-4C1D043D9BBA}"/>
+                <a16:creationId xmlns:a16="http://schemas.microsoft.com/office/drawing/2014/main" id="{294EF2E9-A15D-45D1-9B69-6BBFA3CB5D9E}"/>
               </a:ext>
             </a:extLst>
           </p:cNvPr>
@@ -21667,7 +21667,7 @@
           <p:cNvPr id="16" name="">
             <a:extLst xmlns:a="http://schemas.openxmlformats.org/drawingml/2006/main">
               <a:ext uri="{FF2B5EF4-FFF2-40B4-BE49-F238E27FC236}">
-                <a16:creationId xmlns:a16="http://schemas.microsoft.com/office/drawing/2014/main" id="{E0D87C4E-76B3-4676-A4D0-14745894E6C3}"/>
+                <a16:creationId xmlns:a16="http://schemas.microsoft.com/office/drawing/2014/main" id="{1515EBF8-C10E-4D8E-A4F2-053A9D8E1FB0}"/>
               </a:ext>
             </a:extLst>
           </p:cNvPr>
@@ -21704,7 +21704,7 @@
           <p:cNvPr id="17" name="">
             <a:extLst xmlns:a="http://schemas.openxmlformats.org/drawingml/2006/main">
               <a:ext uri="{FF2B5EF4-FFF2-40B4-BE49-F238E27FC236}">
-                <a16:creationId xmlns:a16="http://schemas.microsoft.com/office/drawing/2014/main" id="{E8251552-31F1-4524-A46A-EC561828CA4A}"/>
+                <a16:creationId xmlns:a16="http://schemas.microsoft.com/office/drawing/2014/main" id="{F9C8BF5F-DD01-4391-9153-1F8F88A9617F}"/>
               </a:ext>
             </a:extLst>
           </p:cNvPr>
@@ -21741,7 +21741,7 @@
           <p:cNvPr id="18" name="">
             <a:extLst xmlns:a="http://schemas.openxmlformats.org/drawingml/2006/main">
               <a:ext uri="{FF2B5EF4-FFF2-40B4-BE49-F238E27FC236}">
-                <a16:creationId xmlns:a16="http://schemas.microsoft.com/office/drawing/2014/main" id="{6C53E503-BDCD-484C-B0F0-90A7ACB9AB62}"/>
+                <a16:creationId xmlns:a16="http://schemas.microsoft.com/office/drawing/2014/main" id="{7F584BD0-1506-4503-B695-4DBBE90FB43A}"/>
               </a:ext>
             </a:extLst>
           </p:cNvPr>
@@ -21778,7 +21778,7 @@
           <p:cNvPr id="19" name="">
             <a:extLst xmlns:a="http://schemas.openxmlformats.org/drawingml/2006/main">
               <a:ext uri="{FF2B5EF4-FFF2-40B4-BE49-F238E27FC236}">
-                <a16:creationId xmlns:a16="http://schemas.microsoft.com/office/drawing/2014/main" id="{66657534-4F71-4633-858E-A70593027432}"/>
+                <a16:creationId xmlns:a16="http://schemas.microsoft.com/office/drawing/2014/main" id="{87FB7C29-3E0A-419C-B7A0-63955BD1CD5A}"/>
               </a:ext>
             </a:extLst>
           </p:cNvPr>
@@ -21815,7 +21815,7 @@
           <p:cNvPr id="20" name="">
             <a:extLst xmlns:a="http://schemas.openxmlformats.org/drawingml/2006/main">
               <a:ext uri="{FF2B5EF4-FFF2-40B4-BE49-F238E27FC236}">
-                <a16:creationId xmlns:a16="http://schemas.microsoft.com/office/drawing/2014/main" id="{2FC074EA-F0F3-4E0D-B2BF-9380E15544F9}"/>
+                <a16:creationId xmlns:a16="http://schemas.microsoft.com/office/drawing/2014/main" id="{BCE0B3E8-51A4-4CA4-BBB3-4046539F2D1A}"/>
               </a:ext>
             </a:extLst>
           </p:cNvPr>
@@ -21852,7 +21852,7 @@
           <p:cNvPr id="21" name="">
             <a:extLst xmlns:a="http://schemas.openxmlformats.org/drawingml/2006/main">
               <a:ext uri="{FF2B5EF4-FFF2-40B4-BE49-F238E27FC236}">
-                <a16:creationId xmlns:a16="http://schemas.microsoft.com/office/drawing/2014/main" id="{BB80A4BE-F1EF-4AA9-A47C-53A8BB4C101F}"/>
+                <a16:creationId xmlns:a16="http://schemas.microsoft.com/office/drawing/2014/main" id="{B19EE16E-BDFC-47A2-BAA4-F42C2F43B9A8}"/>
               </a:ext>
             </a:extLst>
           </p:cNvPr>
@@ -21889,7 +21889,7 @@
           <p:cNvPr id="22" name="">
             <a:extLst xmlns:a="http://schemas.openxmlformats.org/drawingml/2006/main">
               <a:ext uri="{FF2B5EF4-FFF2-40B4-BE49-F238E27FC236}">
-                <a16:creationId xmlns:a16="http://schemas.microsoft.com/office/drawing/2014/main" id="{31F51099-2C3D-470B-A25D-B38F958028CB}"/>
+                <a16:creationId xmlns:a16="http://schemas.microsoft.com/office/drawing/2014/main" id="{A671CA1A-FA52-4D64-98A5-D64341FC196A}"/>
               </a:ext>
             </a:extLst>
           </p:cNvPr>
@@ -21926,7 +21926,7 @@
           <p:cNvPr id="23" name="">
             <a:extLst xmlns:a="http://schemas.openxmlformats.org/drawingml/2006/main">
               <a:ext uri="{FF2B5EF4-FFF2-40B4-BE49-F238E27FC236}">
-                <a16:creationId xmlns:a16="http://schemas.microsoft.com/office/drawing/2014/main" id="{BF53C1E5-740F-4B48-9A50-CCD3C8C6E179}"/>
+                <a16:creationId xmlns:a16="http://schemas.microsoft.com/office/drawing/2014/main" id="{742899DD-AA92-4AA0-A6A1-50797F9EC5FA}"/>
               </a:ext>
             </a:extLst>
           </p:cNvPr>
@@ -21963,7 +21963,7 @@
           <p:cNvPr id="24" name="">
             <a:extLst xmlns:a="http://schemas.openxmlformats.org/drawingml/2006/main">
               <a:ext uri="{FF2B5EF4-FFF2-40B4-BE49-F238E27FC236}">
-                <a16:creationId xmlns:a16="http://schemas.microsoft.com/office/drawing/2014/main" id="{83A5A186-8BC6-41D8-A689-4F3DFEFA822A}"/>
+                <a16:creationId xmlns:a16="http://schemas.microsoft.com/office/drawing/2014/main" id="{36E7AC79-284F-4AA5-8233-24C525CBBDA2}"/>
               </a:ext>
             </a:extLst>
           </p:cNvPr>
@@ -22000,7 +22000,7 @@
           <p:cNvPr id="25" name="">
             <a:extLst xmlns:a="http://schemas.openxmlformats.org/drawingml/2006/main">
               <a:ext uri="{FF2B5EF4-FFF2-40B4-BE49-F238E27FC236}">
-                <a16:creationId xmlns:a16="http://schemas.microsoft.com/office/drawing/2014/main" id="{6930211B-9B77-44BD-9491-5F4FCA3E822A}"/>
+                <a16:creationId xmlns:a16="http://schemas.microsoft.com/office/drawing/2014/main" id="{01E80E76-4B02-48CD-869D-DFB8BE5EAAB4}"/>
               </a:ext>
             </a:extLst>
           </p:cNvPr>
@@ -22037,7 +22037,7 @@
           <p:cNvPr id="26" name="">
             <a:extLst xmlns:a="http://schemas.openxmlformats.org/drawingml/2006/main">
               <a:ext uri="{FF2B5EF4-FFF2-40B4-BE49-F238E27FC236}">
-                <a16:creationId xmlns:a16="http://schemas.microsoft.com/office/drawing/2014/main" id="{989B72C3-5F7D-42C9-BE55-573AD634C3C4}"/>
+                <a16:creationId xmlns:a16="http://schemas.microsoft.com/office/drawing/2014/main" id="{9538D453-7E2A-46CD-AAD6-6E46695522EA}"/>
               </a:ext>
             </a:extLst>
           </p:cNvPr>
@@ -22084,7 +22084,7 @@
           <p:cNvPr id="27" name="">
             <a:extLst xmlns:a="http://schemas.openxmlformats.org/drawingml/2006/main">
               <a:ext uri="{FF2B5EF4-FFF2-40B4-BE49-F238E27FC236}">
-                <a16:creationId xmlns:a16="http://schemas.microsoft.com/office/drawing/2014/main" id="{05BAAACE-C82A-4B6B-B58C-25921F652C53}"/>
+                <a16:creationId xmlns:a16="http://schemas.microsoft.com/office/drawing/2014/main" id="{E7658DDB-8183-4488-AE61-3D574A07D3E6}"/>
               </a:ext>
             </a:extLst>
           </p:cNvPr>
@@ -22131,7 +22131,7 @@
           <p:cNvPr id="28" name="">
             <a:extLst xmlns:a="http://schemas.openxmlformats.org/drawingml/2006/main">
               <a:ext uri="{FF2B5EF4-FFF2-40B4-BE49-F238E27FC236}">
-                <a16:creationId xmlns:a16="http://schemas.microsoft.com/office/drawing/2014/main" id="{856C9E27-0739-4563-9952-5B19E7A15BF8}"/>
+                <a16:creationId xmlns:a16="http://schemas.microsoft.com/office/drawing/2014/main" id="{3B13341B-84D5-4FF7-BA82-632903D32978}"/>
               </a:ext>
             </a:extLst>
           </p:cNvPr>
@@ -22195,7 +22195,7 @@
           <p:cNvPr id="29" name="">
             <a:extLst xmlns:a="http://schemas.openxmlformats.org/drawingml/2006/main">
               <a:ext uri="{FF2B5EF4-FFF2-40B4-BE49-F238E27FC236}">
-                <a16:creationId xmlns:a16="http://schemas.microsoft.com/office/drawing/2014/main" id="{4E8F4D71-65E0-4680-B27E-F6BDF09C471B}"/>
+                <a16:creationId xmlns:a16="http://schemas.microsoft.com/office/drawing/2014/main" id="{C1D54B26-E16C-4E74-AC4E-08C6D8E9A4EC}"/>
               </a:ext>
             </a:extLst>
           </p:cNvPr>
@@ -22259,7 +22259,7 @@
           <p:cNvPr id="30" name="">
             <a:extLst xmlns:a="http://schemas.openxmlformats.org/drawingml/2006/main">
               <a:ext uri="{FF2B5EF4-FFF2-40B4-BE49-F238E27FC236}">
-                <a16:creationId xmlns:a16="http://schemas.microsoft.com/office/drawing/2014/main" id="{02691906-B00D-4D55-ADF2-058D04C40B45}"/>
+                <a16:creationId xmlns:a16="http://schemas.microsoft.com/office/drawing/2014/main" id="{8DD019BC-C8B6-4839-A8C3-520B3813D81B}"/>
               </a:ext>
             </a:extLst>
           </p:cNvPr>
@@ -22323,7 +22323,7 @@
           <p:cNvPr id="31" name="">
             <a:extLst xmlns:a="http://schemas.openxmlformats.org/drawingml/2006/main">
               <a:ext uri="{FF2B5EF4-FFF2-40B4-BE49-F238E27FC236}">
-                <a16:creationId xmlns:a16="http://schemas.microsoft.com/office/drawing/2014/main" id="{DA07680C-39AB-42F8-98A1-F9D9EC914EA7}"/>
+                <a16:creationId xmlns:a16="http://schemas.microsoft.com/office/drawing/2014/main" id="{D3CA03CB-382C-44E8-BF6C-CB581656B4F7}"/>
               </a:ext>
             </a:extLst>
           </p:cNvPr>
@@ -22387,7 +22387,7 @@
           <p:cNvPr id="32" name="">
             <a:extLst xmlns:a="http://schemas.openxmlformats.org/drawingml/2006/main">
               <a:ext uri="{FF2B5EF4-FFF2-40B4-BE49-F238E27FC236}">
-                <a16:creationId xmlns:a16="http://schemas.microsoft.com/office/drawing/2014/main" id="{4648F59E-7CBC-40AE-80BC-AA4EFF61B6E5}"/>
+                <a16:creationId xmlns:a16="http://schemas.microsoft.com/office/drawing/2014/main" id="{C1A3BBA3-8562-4FDA-828C-E14B1F547899}"/>
               </a:ext>
             </a:extLst>
           </p:cNvPr>
@@ -22428,7 +22428,7 @@
           <p:nvPr/>
         </p:nvPicPr>
         <p:blipFill>
-          <a:blip xmlns:r="http://schemas.openxmlformats.org/officeDocument/2006/relationships" xmlns:a="http://schemas.openxmlformats.org/drawingml/2006/main" r:embed="R5a550876642b4c33"/>
+          <a:blip xmlns:r="http://schemas.openxmlformats.org/officeDocument/2006/relationships" xmlns:a="http://schemas.openxmlformats.org/drawingml/2006/main" r:embed="Rc47559d5584c4c2e"/>
           <a:stretch xmlns:a="http://schemas.openxmlformats.org/drawingml/2006/main"/>
         </p:blipFill>
         <p:spPr>
@@ -22446,7 +22446,7 @@
           <p:cNvPr id="34" name="">
             <a:extLst xmlns:a="http://schemas.openxmlformats.org/drawingml/2006/main">
               <a:ext uri="{FF2B5EF4-FFF2-40B4-BE49-F238E27FC236}">
-                <a16:creationId xmlns:a16="http://schemas.microsoft.com/office/drawing/2014/main" id="{C4AE2462-5B93-4E21-8962-F50920A21D6D}"/>
+                <a16:creationId xmlns:a16="http://schemas.microsoft.com/office/drawing/2014/main" id="{4B71C270-3563-4856-9BE3-3808DDA5F0AA}"/>
               </a:ext>
             </a:extLst>
           </p:cNvPr>
@@ -22483,7 +22483,7 @@
           <p:cNvPr id="35" name="">
             <a:extLst xmlns:a="http://schemas.openxmlformats.org/drawingml/2006/main">
               <a:ext uri="{FF2B5EF4-FFF2-40B4-BE49-F238E27FC236}">
-                <a16:creationId xmlns:a16="http://schemas.microsoft.com/office/drawing/2014/main" id="{0DA14D63-0145-40B8-AB42-E40B80E8203C}"/>
+                <a16:creationId xmlns:a16="http://schemas.microsoft.com/office/drawing/2014/main" id="{5C6A1017-3836-41BB-88C0-6B408A55354A}"/>
               </a:ext>
             </a:extLst>
           </p:cNvPr>
@@ -22520,7 +22520,7 @@
           <p:cNvPr id="36" name="">
             <a:extLst xmlns:a="http://schemas.openxmlformats.org/drawingml/2006/main">
               <a:ext uri="{FF2B5EF4-FFF2-40B4-BE49-F238E27FC236}">
-                <a16:creationId xmlns:a16="http://schemas.microsoft.com/office/drawing/2014/main" id="{7FD3448F-107A-4760-B0CC-EC3ABBAE7E4D}"/>
+                <a16:creationId xmlns:a16="http://schemas.microsoft.com/office/drawing/2014/main" id="{3388D9DE-771C-4912-911E-FFE22A8E247B}"/>
               </a:ext>
             </a:extLst>
           </p:cNvPr>
@@ -22584,7 +22584,7 @@
           <p:cNvPr id="37" name="">
             <a:extLst xmlns:a="http://schemas.openxmlformats.org/drawingml/2006/main">
               <a:ext uri="{FF2B5EF4-FFF2-40B4-BE49-F238E27FC236}">
-                <a16:creationId xmlns:a16="http://schemas.microsoft.com/office/drawing/2014/main" id="{29B6AE42-C4B6-44F0-99FB-131A3238B04D}"/>
+                <a16:creationId xmlns:a16="http://schemas.microsoft.com/office/drawing/2014/main" id="{AED935E6-7AC2-47BD-A6EC-AF5DE653F9A7}"/>
               </a:ext>
             </a:extLst>
           </p:cNvPr>
@@ -22648,7 +22648,7 @@
           <p:cNvPr id="38" name="">
             <a:extLst xmlns:a="http://schemas.openxmlformats.org/drawingml/2006/main">
               <a:ext uri="{FF2B5EF4-FFF2-40B4-BE49-F238E27FC236}">
-                <a16:creationId xmlns:a16="http://schemas.microsoft.com/office/drawing/2014/main" id="{843D5F30-1217-4867-BD19-BAC25ACD920F}"/>
+                <a16:creationId xmlns:a16="http://schemas.microsoft.com/office/drawing/2014/main" id="{E83C2783-1B74-49CF-B2B7-7DDDAE36C718}"/>
               </a:ext>
             </a:extLst>
           </p:cNvPr>
@@ -22685,7 +22685,7 @@
           <p:cNvPr id="39" name="">
             <a:extLst xmlns:a="http://schemas.openxmlformats.org/drawingml/2006/main">
               <a:ext uri="{FF2B5EF4-FFF2-40B4-BE49-F238E27FC236}">
-                <a16:creationId xmlns:a16="http://schemas.microsoft.com/office/drawing/2014/main" id="{1219A045-67A7-4CF2-81CB-86F4DB04DBFF}"/>
+                <a16:creationId xmlns:a16="http://schemas.microsoft.com/office/drawing/2014/main" id="{B611EC36-0F3F-4D61-A55B-FB2F37BD369F}"/>
               </a:ext>
             </a:extLst>
           </p:cNvPr>
@@ -22722,7 +22722,7 @@
           <p:cNvPr id="40" name="">
             <a:extLst xmlns:a="http://schemas.openxmlformats.org/drawingml/2006/main">
               <a:ext uri="{FF2B5EF4-FFF2-40B4-BE49-F238E27FC236}">
-                <a16:creationId xmlns:a16="http://schemas.microsoft.com/office/drawing/2014/main" id="{B69CA247-220E-476D-9A96-EED1EBB2DAFF}"/>
+                <a16:creationId xmlns:a16="http://schemas.microsoft.com/office/drawing/2014/main" id="{C54D1072-A723-4E3F-8F01-46F584C3A907}"/>
               </a:ext>
             </a:extLst>
           </p:cNvPr>
@@ -22786,7 +22786,7 @@
           <p:cNvPr id="41" name="">
             <a:extLst xmlns:a="http://schemas.openxmlformats.org/drawingml/2006/main">
               <a:ext uri="{FF2B5EF4-FFF2-40B4-BE49-F238E27FC236}">
-                <a16:creationId xmlns:a16="http://schemas.microsoft.com/office/drawing/2014/main" id="{941401C6-2159-4FF8-A2B7-BF3E10800C6F}"/>
+                <a16:creationId xmlns:a16="http://schemas.microsoft.com/office/drawing/2014/main" id="{94495B2F-3B1F-4632-9588-9BDE8651E901}"/>
               </a:ext>
             </a:extLst>
           </p:cNvPr>
@@ -22850,7 +22850,7 @@
           <p:cNvPr id="42" name="">
             <a:extLst xmlns:a="http://schemas.openxmlformats.org/drawingml/2006/main">
               <a:ext uri="{FF2B5EF4-FFF2-40B4-BE49-F238E27FC236}">
-                <a16:creationId xmlns:a16="http://schemas.microsoft.com/office/drawing/2014/main" id="{4B23BEEF-E189-4C3E-8F22-4F16844A5467}"/>
+                <a16:creationId xmlns:a16="http://schemas.microsoft.com/office/drawing/2014/main" id="{77782743-1C6B-41A5-AEAA-B1753F7D7BB7}"/>
               </a:ext>
             </a:extLst>
           </p:cNvPr>
@@ -22887,7 +22887,7 @@
           <p:cNvPr id="43" name="">
             <a:extLst xmlns:a="http://schemas.openxmlformats.org/drawingml/2006/main">
               <a:ext uri="{FF2B5EF4-FFF2-40B4-BE49-F238E27FC236}">
-                <a16:creationId xmlns:a16="http://schemas.microsoft.com/office/drawing/2014/main" id="{605606E6-C14E-466C-B392-F5D549E8CE33}"/>
+                <a16:creationId xmlns:a16="http://schemas.microsoft.com/office/drawing/2014/main" id="{A27C8CAF-E827-46F7-A1E4-593A4B91BA89}"/>
               </a:ext>
             </a:extLst>
           </p:cNvPr>
@@ -22924,7 +22924,7 @@
           <p:cNvPr id="44" name="">
             <a:extLst xmlns:a="http://schemas.openxmlformats.org/drawingml/2006/main">
               <a:ext uri="{FF2B5EF4-FFF2-40B4-BE49-F238E27FC236}">
-                <a16:creationId xmlns:a16="http://schemas.microsoft.com/office/drawing/2014/main" id="{B1E9544B-271D-485A-9A21-B9BDDC85681E}"/>
+                <a16:creationId xmlns:a16="http://schemas.microsoft.com/office/drawing/2014/main" id="{F3A5D75D-C580-4EDB-BDF6-2856BF1E46E0}"/>
               </a:ext>
             </a:extLst>
           </p:cNvPr>
@@ -22988,7 +22988,7 @@
           <p:cNvPr id="45" name="">
             <a:extLst xmlns:a="http://schemas.openxmlformats.org/drawingml/2006/main">
               <a:ext uri="{FF2B5EF4-FFF2-40B4-BE49-F238E27FC236}">
-                <a16:creationId xmlns:a16="http://schemas.microsoft.com/office/drawing/2014/main" id="{FC1FA9CC-EF0B-4045-B7B5-E40C73B50EC5}"/>
+                <a16:creationId xmlns:a16="http://schemas.microsoft.com/office/drawing/2014/main" id="{1648FE32-454E-4BC5-BABC-DBFAFEAFDA63}"/>
               </a:ext>
             </a:extLst>
           </p:cNvPr>
@@ -23052,7 +23052,7 @@
           <p:cNvPr id="46" name="">
             <a:extLst xmlns:a="http://schemas.openxmlformats.org/drawingml/2006/main">
               <a:ext uri="{FF2B5EF4-FFF2-40B4-BE49-F238E27FC236}">
-                <a16:creationId xmlns:a16="http://schemas.microsoft.com/office/drawing/2014/main" id="{9248A1AF-5C5C-4228-B792-C76356E10596}"/>
+                <a16:creationId xmlns:a16="http://schemas.microsoft.com/office/drawing/2014/main" id="{66D4C7BC-D547-4665-89F4-EA4088D2F074}"/>
               </a:ext>
             </a:extLst>
           </p:cNvPr>
@@ -23089,7 +23089,7 @@
           <p:cNvPr id="47" name="">
             <a:extLst xmlns:a="http://schemas.openxmlformats.org/drawingml/2006/main">
               <a:ext uri="{FF2B5EF4-FFF2-40B4-BE49-F238E27FC236}">
-                <a16:creationId xmlns:a16="http://schemas.microsoft.com/office/drawing/2014/main" id="{D7774BE2-5A3D-4D9F-99FB-0C9A9834B737}"/>
+                <a16:creationId xmlns:a16="http://schemas.microsoft.com/office/drawing/2014/main" id="{0AF533B6-FE72-4FAE-8660-902CD1F505F4}"/>
               </a:ext>
             </a:extLst>
           </p:cNvPr>
@@ -23126,7 +23126,7 @@
           <p:cNvPr id="48" name="">
             <a:extLst xmlns:a="http://schemas.openxmlformats.org/drawingml/2006/main">
               <a:ext uri="{FF2B5EF4-FFF2-40B4-BE49-F238E27FC236}">
-                <a16:creationId xmlns:a16="http://schemas.microsoft.com/office/drawing/2014/main" id="{B9DEC402-1D5D-4C98-BD38-189BFE81EE0D}"/>
+                <a16:creationId xmlns:a16="http://schemas.microsoft.com/office/drawing/2014/main" id="{C9548F3A-96D2-4724-A9BF-0D440B02AD7A}"/>
               </a:ext>
             </a:extLst>
           </p:cNvPr>
@@ -23190,7 +23190,7 @@
           <p:cNvPr id="49" name="">
             <a:extLst xmlns:a="http://schemas.openxmlformats.org/drawingml/2006/main">
               <a:ext uri="{FF2B5EF4-FFF2-40B4-BE49-F238E27FC236}">
-                <a16:creationId xmlns:a16="http://schemas.microsoft.com/office/drawing/2014/main" id="{CB9716E6-B4FC-4824-A908-EA99BEB54813}"/>
+                <a16:creationId xmlns:a16="http://schemas.microsoft.com/office/drawing/2014/main" id="{1D48BC3E-137F-4F84-92D6-B0653D2068B8}"/>
               </a:ext>
             </a:extLst>
           </p:cNvPr>
@@ -23254,7 +23254,7 @@
           <p:cNvPr id="50" name="">
             <a:extLst xmlns:a="http://schemas.openxmlformats.org/drawingml/2006/main">
               <a:ext uri="{FF2B5EF4-FFF2-40B4-BE49-F238E27FC236}">
-                <a16:creationId xmlns:a16="http://schemas.microsoft.com/office/drawing/2014/main" id="{0F81C554-82B2-4D2B-BF6C-4226F978EED3}"/>
+                <a16:creationId xmlns:a16="http://schemas.microsoft.com/office/drawing/2014/main" id="{3DC30DC9-C982-4ABD-B05C-CD6423CE4567}"/>
               </a:ext>
             </a:extLst>
           </p:cNvPr>
@@ -23291,7 +23291,7 @@
           <p:cNvPr id="51" name="">
             <a:extLst xmlns:a="http://schemas.openxmlformats.org/drawingml/2006/main">
               <a:ext uri="{FF2B5EF4-FFF2-40B4-BE49-F238E27FC236}">
-                <a16:creationId xmlns:a16="http://schemas.microsoft.com/office/drawing/2014/main" id="{381D9187-017A-4AA7-B6DD-FE3DBE049903}"/>
+                <a16:creationId xmlns:a16="http://schemas.microsoft.com/office/drawing/2014/main" id="{8A9ADC6B-3EF6-44B4-8CC0-05800D7363C3}"/>
               </a:ext>
             </a:extLst>
           </p:cNvPr>
@@ -23353,7 +23353,7 @@
     </p:spTree>
     <p:extLst>
       <p:ext uri="{BB962C8B-B14F-4D97-AF65-F5344CB8AC3E}">
-        <p14:creationId xmlns:p14="http://schemas.microsoft.com/office/powerpoint/2010/main" val="1437018074"/>
+        <p14:creationId xmlns:p14="http://schemas.microsoft.com/office/powerpoint/2010/main" val="1446801733"/>
       </p:ext>
     </p:extLst>
   </p:cSld>
@@ -23377,7 +23377,7 @@
           <p:cNvPr id="1" name="">
             <a:extLst xmlns:a="http://schemas.openxmlformats.org/drawingml/2006/main">
               <a:ext uri="{FF2B5EF4-FFF2-40B4-BE49-F238E27FC236}">
-                <a16:creationId xmlns:a16="http://schemas.microsoft.com/office/drawing/2014/main" id="{6ECD9B30-237E-4DF0-9F4C-ACD3396CEB09}"/>
+                <a16:creationId xmlns:a16="http://schemas.microsoft.com/office/drawing/2014/main" id="{5A1B89C1-0182-4D6E-9EF9-94E3F3BF7740}"/>
               </a:ext>
             </a:extLst>
           </p:cNvPr>
@@ -23412,7 +23412,7 @@
           <p:cNvPr id="2" name="">
             <a:extLst xmlns:a="http://schemas.openxmlformats.org/drawingml/2006/main">
               <a:ext uri="{FF2B5EF4-FFF2-40B4-BE49-F238E27FC236}">
-                <a16:creationId xmlns:a16="http://schemas.microsoft.com/office/drawing/2014/main" id="{EF8F7064-25A6-4775-84D8-198C38DCE73C}"/>
+                <a16:creationId xmlns:a16="http://schemas.microsoft.com/office/drawing/2014/main" id="{7886C6B2-08BC-446D-A931-F662A4BE8653}"/>
               </a:ext>
             </a:extLst>
           </p:cNvPr>
@@ -23458,7 +23458,7 @@
           <p:cNvPr id="3" name="">
             <a:extLst xmlns:a="http://schemas.openxmlformats.org/drawingml/2006/main">
               <a:ext uri="{FF2B5EF4-FFF2-40B4-BE49-F238E27FC236}">
-                <a16:creationId xmlns:a16="http://schemas.microsoft.com/office/drawing/2014/main" id="{EDA96307-C73E-4E67-A069-113EA42D4605}"/>
+                <a16:creationId xmlns:a16="http://schemas.microsoft.com/office/drawing/2014/main" id="{84F44AEC-26ED-4DA5-9145-C9CAFCCCD0B5}"/>
               </a:ext>
             </a:extLst>
           </p:cNvPr>
@@ -23495,7 +23495,7 @@
           <p:cNvPr id="4" name="">
             <a:extLst xmlns:a="http://schemas.openxmlformats.org/drawingml/2006/main">
               <a:ext uri="{FF2B5EF4-FFF2-40B4-BE49-F238E27FC236}">
-                <a16:creationId xmlns:a16="http://schemas.microsoft.com/office/drawing/2014/main" id="{23E85D7D-5757-414E-A3B7-70077C070F08}"/>
+                <a16:creationId xmlns:a16="http://schemas.microsoft.com/office/drawing/2014/main" id="{8A6FBB2A-D326-4F8B-BCD3-409BFCB2F0ED}"/>
               </a:ext>
             </a:extLst>
           </p:cNvPr>
@@ -23532,7 +23532,7 @@
           <p:cNvPr id="5" name="">
             <a:extLst xmlns:a="http://schemas.openxmlformats.org/drawingml/2006/main">
               <a:ext uri="{FF2B5EF4-FFF2-40B4-BE49-F238E27FC236}">
-                <a16:creationId xmlns:a16="http://schemas.microsoft.com/office/drawing/2014/main" id="{F4AC9F58-BB56-42D7-9A92-2FA278186CF8}"/>
+                <a16:creationId xmlns:a16="http://schemas.microsoft.com/office/drawing/2014/main" id="{D3C82736-28E6-43CB-98F2-01C77300BE28}"/>
               </a:ext>
             </a:extLst>
           </p:cNvPr>
@@ -23569,7 +23569,7 @@
           <p:cNvPr id="6" name="">
             <a:extLst xmlns:a="http://schemas.openxmlformats.org/drawingml/2006/main">
               <a:ext uri="{FF2B5EF4-FFF2-40B4-BE49-F238E27FC236}">
-                <a16:creationId xmlns:a16="http://schemas.microsoft.com/office/drawing/2014/main" id="{F328ABA9-D0AC-4A02-A6CD-74B988DF1B24}"/>
+                <a16:creationId xmlns:a16="http://schemas.microsoft.com/office/drawing/2014/main" id="{53A73B73-27DF-4AD1-B13B-A5D664F135A6}"/>
               </a:ext>
             </a:extLst>
           </p:cNvPr>
@@ -23606,7 +23606,7 @@
           <p:cNvPr id="7" name="">
             <a:extLst xmlns:a="http://schemas.openxmlformats.org/drawingml/2006/main">
               <a:ext uri="{FF2B5EF4-FFF2-40B4-BE49-F238E27FC236}">
-                <a16:creationId xmlns:a16="http://schemas.microsoft.com/office/drawing/2014/main" id="{728D6203-1701-4CF9-99B8-579A2E4E8682}"/>
+                <a16:creationId xmlns:a16="http://schemas.microsoft.com/office/drawing/2014/main" id="{34DAD135-3092-4B45-9D2B-6B525A37C6AC}"/>
               </a:ext>
             </a:extLst>
           </p:cNvPr>
@@ -23643,7 +23643,7 @@
           <p:cNvPr id="8" name="">
             <a:extLst xmlns:a="http://schemas.openxmlformats.org/drawingml/2006/main">
               <a:ext uri="{FF2B5EF4-FFF2-40B4-BE49-F238E27FC236}">
-                <a16:creationId xmlns:a16="http://schemas.microsoft.com/office/drawing/2014/main" id="{EABB4E1C-6562-421A-B9A1-01D8F9A57D46}"/>
+                <a16:creationId xmlns:a16="http://schemas.microsoft.com/office/drawing/2014/main" id="{D2A940AA-B647-4026-A9A3-52871A2BBDE2}"/>
               </a:ext>
             </a:extLst>
           </p:cNvPr>
@@ -23680,7 +23680,7 @@
           <p:cNvPr id="9" name="">
             <a:extLst xmlns:a="http://schemas.openxmlformats.org/drawingml/2006/main">
               <a:ext uri="{FF2B5EF4-FFF2-40B4-BE49-F238E27FC236}">
-                <a16:creationId xmlns:a16="http://schemas.microsoft.com/office/drawing/2014/main" id="{744DFF10-50E1-4A66-8DD8-42D09E6309C9}"/>
+                <a16:creationId xmlns:a16="http://schemas.microsoft.com/office/drawing/2014/main" id="{9E2E87E7-4B80-4E47-A115-3AF58B66BAFC}"/>
               </a:ext>
             </a:extLst>
           </p:cNvPr>
@@ -23717,7 +23717,7 @@
           <p:cNvPr id="10" name="">
             <a:extLst xmlns:a="http://schemas.openxmlformats.org/drawingml/2006/main">
               <a:ext uri="{FF2B5EF4-FFF2-40B4-BE49-F238E27FC236}">
-                <a16:creationId xmlns:a16="http://schemas.microsoft.com/office/drawing/2014/main" id="{B2301995-74F2-45EF-9D74-AC98DA90E4FF}"/>
+                <a16:creationId xmlns:a16="http://schemas.microsoft.com/office/drawing/2014/main" id="{D6096F04-4734-4C82-B39B-741EF2C48274}"/>
               </a:ext>
             </a:extLst>
           </p:cNvPr>
@@ -23754,7 +23754,7 @@
           <p:cNvPr id="11" name="">
             <a:extLst xmlns:a="http://schemas.openxmlformats.org/drawingml/2006/main">
               <a:ext uri="{FF2B5EF4-FFF2-40B4-BE49-F238E27FC236}">
-                <a16:creationId xmlns:a16="http://schemas.microsoft.com/office/drawing/2014/main" id="{BAD3FDDB-A5C0-4BCE-B91E-E0421189A455}"/>
+                <a16:creationId xmlns:a16="http://schemas.microsoft.com/office/drawing/2014/main" id="{8CB3F210-F2E9-4EB8-B7EA-9E3148E5BBD3}"/>
               </a:ext>
             </a:extLst>
           </p:cNvPr>
@@ -23791,7 +23791,7 @@
           <p:cNvPr id="12" name="">
             <a:extLst xmlns:a="http://schemas.openxmlformats.org/drawingml/2006/main">
               <a:ext uri="{FF2B5EF4-FFF2-40B4-BE49-F238E27FC236}">
-                <a16:creationId xmlns:a16="http://schemas.microsoft.com/office/drawing/2014/main" id="{6FB0C377-C7E7-40E3-945F-9D44273601EE}"/>
+                <a16:creationId xmlns:a16="http://schemas.microsoft.com/office/drawing/2014/main" id="{B43D3A99-7CB8-4D0B-836C-909AC3D00F73}"/>
               </a:ext>
             </a:extLst>
           </p:cNvPr>
@@ -23828,7 +23828,7 @@
           <p:cNvPr id="13" name="">
             <a:extLst xmlns:a="http://schemas.openxmlformats.org/drawingml/2006/main">
               <a:ext uri="{FF2B5EF4-FFF2-40B4-BE49-F238E27FC236}">
-                <a16:creationId xmlns:a16="http://schemas.microsoft.com/office/drawing/2014/main" id="{DF2909C2-3B1C-41F5-AAAD-3B3D0329320F}"/>
+                <a16:creationId xmlns:a16="http://schemas.microsoft.com/office/drawing/2014/main" id="{062169F4-1C33-49D0-AA19-FFBAEAB1BD3D}"/>
               </a:ext>
             </a:extLst>
           </p:cNvPr>
@@ -23865,7 +23865,7 @@
           <p:cNvPr id="14" name="">
             <a:extLst xmlns:a="http://schemas.openxmlformats.org/drawingml/2006/main">
               <a:ext uri="{FF2B5EF4-FFF2-40B4-BE49-F238E27FC236}">
-                <a16:creationId xmlns:a16="http://schemas.microsoft.com/office/drawing/2014/main" id="{A674BE10-18F4-4722-A499-9E69BE70293C}"/>
+                <a16:creationId xmlns:a16="http://schemas.microsoft.com/office/drawing/2014/main" id="{8DA75A3D-B86E-4D34-A4BB-170A93879155}"/>
               </a:ext>
             </a:extLst>
           </p:cNvPr>
@@ -23902,7 +23902,7 @@
           <p:cNvPr id="15" name="">
             <a:extLst xmlns:a="http://schemas.openxmlformats.org/drawingml/2006/main">
               <a:ext uri="{FF2B5EF4-FFF2-40B4-BE49-F238E27FC236}">
-                <a16:creationId xmlns:a16="http://schemas.microsoft.com/office/drawing/2014/main" id="{9BF8F04E-D4E4-4EEF-AF30-F7D76C4355BC}"/>
+                <a16:creationId xmlns:a16="http://schemas.microsoft.com/office/drawing/2014/main" id="{D69E94E6-EB8E-42B5-A121-D45E17300D4A}"/>
               </a:ext>
             </a:extLst>
           </p:cNvPr>
@@ -23939,7 +23939,7 @@
           <p:cNvPr id="16" name="">
             <a:extLst xmlns:a="http://schemas.openxmlformats.org/drawingml/2006/main">
               <a:ext uri="{FF2B5EF4-FFF2-40B4-BE49-F238E27FC236}">
-                <a16:creationId xmlns:a16="http://schemas.microsoft.com/office/drawing/2014/main" id="{EBD2ACB9-B27D-4D16-8398-06F423756187}"/>
+                <a16:creationId xmlns:a16="http://schemas.microsoft.com/office/drawing/2014/main" id="{A149010D-3C40-4F6E-90A9-58895DDDC9F3}"/>
               </a:ext>
             </a:extLst>
           </p:cNvPr>
@@ -23976,7 +23976,7 @@
           <p:cNvPr id="17" name="">
             <a:extLst xmlns:a="http://schemas.openxmlformats.org/drawingml/2006/main">
               <a:ext uri="{FF2B5EF4-FFF2-40B4-BE49-F238E27FC236}">
-                <a16:creationId xmlns:a16="http://schemas.microsoft.com/office/drawing/2014/main" id="{3FBA8732-AD7B-4EAB-8D74-267271FFD533}"/>
+                <a16:creationId xmlns:a16="http://schemas.microsoft.com/office/drawing/2014/main" id="{1D772511-0EA3-4DD3-9B23-70BC286F1F6C}"/>
               </a:ext>
             </a:extLst>
           </p:cNvPr>
@@ -24013,7 +24013,7 @@
           <p:cNvPr id="18" name="">
             <a:extLst xmlns:a="http://schemas.openxmlformats.org/drawingml/2006/main">
               <a:ext uri="{FF2B5EF4-FFF2-40B4-BE49-F238E27FC236}">
-                <a16:creationId xmlns:a16="http://schemas.microsoft.com/office/drawing/2014/main" id="{E5FB1BA9-8D43-4266-8050-B212A9620CA4}"/>
+                <a16:creationId xmlns:a16="http://schemas.microsoft.com/office/drawing/2014/main" id="{250B551D-40CE-4590-919A-C8B95919F86D}"/>
               </a:ext>
             </a:extLst>
           </p:cNvPr>
@@ -24050,7 +24050,7 @@
           <p:cNvPr id="19" name="">
             <a:extLst xmlns:a="http://schemas.openxmlformats.org/drawingml/2006/main">
               <a:ext uri="{FF2B5EF4-FFF2-40B4-BE49-F238E27FC236}">
-                <a16:creationId xmlns:a16="http://schemas.microsoft.com/office/drawing/2014/main" id="{214276E8-9AB3-4216-8FCE-EB120314BDBC}"/>
+                <a16:creationId xmlns:a16="http://schemas.microsoft.com/office/drawing/2014/main" id="{0879A1A6-2FBC-4665-9A98-56EB653657EA}"/>
               </a:ext>
             </a:extLst>
           </p:cNvPr>
@@ -24087,7 +24087,7 @@
           <p:cNvPr id="20" name="">
             <a:extLst xmlns:a="http://schemas.openxmlformats.org/drawingml/2006/main">
               <a:ext uri="{FF2B5EF4-FFF2-40B4-BE49-F238E27FC236}">
-                <a16:creationId xmlns:a16="http://schemas.microsoft.com/office/drawing/2014/main" id="{5C74761C-4B40-4E3A-BE8C-2B4FAD9B0D57}"/>
+                <a16:creationId xmlns:a16="http://schemas.microsoft.com/office/drawing/2014/main" id="{0A293892-071F-48E0-8120-83D2793FE36B}"/>
               </a:ext>
             </a:extLst>
           </p:cNvPr>
@@ -24124,7 +24124,7 @@
           <p:cNvPr id="21" name="">
             <a:extLst xmlns:a="http://schemas.openxmlformats.org/drawingml/2006/main">
               <a:ext uri="{FF2B5EF4-FFF2-40B4-BE49-F238E27FC236}">
-                <a16:creationId xmlns:a16="http://schemas.microsoft.com/office/drawing/2014/main" id="{A2C7B0D3-7171-4234-B718-EC4CED77796F}"/>
+                <a16:creationId xmlns:a16="http://schemas.microsoft.com/office/drawing/2014/main" id="{A6E456B1-5ABF-4193-95F7-5F413F263D3A}"/>
               </a:ext>
             </a:extLst>
           </p:cNvPr>
@@ -24161,7 +24161,7 @@
           <p:cNvPr id="22" name="">
             <a:extLst xmlns:a="http://schemas.openxmlformats.org/drawingml/2006/main">
               <a:ext uri="{FF2B5EF4-FFF2-40B4-BE49-F238E27FC236}">
-                <a16:creationId xmlns:a16="http://schemas.microsoft.com/office/drawing/2014/main" id="{D80BD513-4C0E-49F3-BB21-D9D261227CF4}"/>
+                <a16:creationId xmlns:a16="http://schemas.microsoft.com/office/drawing/2014/main" id="{792337A8-7C27-412B-9B2A-B59E5E702308}"/>
               </a:ext>
             </a:extLst>
           </p:cNvPr>
@@ -24198,7 +24198,7 @@
           <p:cNvPr id="23" name="">
             <a:extLst xmlns:a="http://schemas.openxmlformats.org/drawingml/2006/main">
               <a:ext uri="{FF2B5EF4-FFF2-40B4-BE49-F238E27FC236}">
-                <a16:creationId xmlns:a16="http://schemas.microsoft.com/office/drawing/2014/main" id="{92203124-446F-41B7-9264-E81823D28736}"/>
+                <a16:creationId xmlns:a16="http://schemas.microsoft.com/office/drawing/2014/main" id="{8AAB6A03-FDC5-45F0-8BC2-AAE159812C55}"/>
               </a:ext>
             </a:extLst>
           </p:cNvPr>
@@ -24235,7 +24235,7 @@
           <p:cNvPr id="24" name="">
             <a:extLst xmlns:a="http://schemas.openxmlformats.org/drawingml/2006/main">
               <a:ext uri="{FF2B5EF4-FFF2-40B4-BE49-F238E27FC236}">
-                <a16:creationId xmlns:a16="http://schemas.microsoft.com/office/drawing/2014/main" id="{C888CE50-4589-4FDA-BAB8-97115C3394FB}"/>
+                <a16:creationId xmlns:a16="http://schemas.microsoft.com/office/drawing/2014/main" id="{86F3BE29-0CBF-42F6-8F0F-EAD70B7578E7}"/>
               </a:ext>
             </a:extLst>
           </p:cNvPr>
@@ -24272,7 +24272,7 @@
           <p:cNvPr id="25" name="">
             <a:extLst xmlns:a="http://schemas.openxmlformats.org/drawingml/2006/main">
               <a:ext uri="{FF2B5EF4-FFF2-40B4-BE49-F238E27FC236}">
-                <a16:creationId xmlns:a16="http://schemas.microsoft.com/office/drawing/2014/main" id="{D479AA16-1377-4725-9AA7-516C79E571B8}"/>
+                <a16:creationId xmlns:a16="http://schemas.microsoft.com/office/drawing/2014/main" id="{1C533907-6129-4CF5-A8EC-CAB9F3E15BBC}"/>
               </a:ext>
             </a:extLst>
           </p:cNvPr>
@@ -24309,7 +24309,7 @@
           <p:cNvPr id="26" name="">
             <a:extLst xmlns:a="http://schemas.openxmlformats.org/drawingml/2006/main">
               <a:ext uri="{FF2B5EF4-FFF2-40B4-BE49-F238E27FC236}">
-                <a16:creationId xmlns:a16="http://schemas.microsoft.com/office/drawing/2014/main" id="{749C4BE8-E90A-4439-8900-E3BB3EC6F2D4}"/>
+                <a16:creationId xmlns:a16="http://schemas.microsoft.com/office/drawing/2014/main" id="{7DF9AEDF-992C-4239-AFBF-F7F270C560CC}"/>
               </a:ext>
             </a:extLst>
           </p:cNvPr>
@@ -24356,7 +24356,7 @@
           <p:cNvPr id="27" name="">
             <a:extLst xmlns:a="http://schemas.openxmlformats.org/drawingml/2006/main">
               <a:ext uri="{FF2B5EF4-FFF2-40B4-BE49-F238E27FC236}">
-                <a16:creationId xmlns:a16="http://schemas.microsoft.com/office/drawing/2014/main" id="{22EDB2A4-99BF-4AEC-BED7-F67A25FEC3BC}"/>
+                <a16:creationId xmlns:a16="http://schemas.microsoft.com/office/drawing/2014/main" id="{00107E1A-ECA5-4B53-881A-BEAD5FB1EDD9}"/>
               </a:ext>
             </a:extLst>
           </p:cNvPr>
@@ -24403,7 +24403,7 @@
           <p:cNvPr id="28" name="">
             <a:extLst xmlns:a="http://schemas.openxmlformats.org/drawingml/2006/main">
               <a:ext uri="{FF2B5EF4-FFF2-40B4-BE49-F238E27FC236}">
-                <a16:creationId xmlns:a16="http://schemas.microsoft.com/office/drawing/2014/main" id="{4E845D8A-6298-4316-9885-B55A866DE330}"/>
+                <a16:creationId xmlns:a16="http://schemas.microsoft.com/office/drawing/2014/main" id="{9A406CA3-155D-45B1-A71E-C2090BC7D9C6}"/>
               </a:ext>
             </a:extLst>
           </p:cNvPr>
@@ -24467,7 +24467,7 @@
           <p:cNvPr id="29" name="">
             <a:extLst xmlns:a="http://schemas.openxmlformats.org/drawingml/2006/main">
               <a:ext uri="{FF2B5EF4-FFF2-40B4-BE49-F238E27FC236}">
-                <a16:creationId xmlns:a16="http://schemas.microsoft.com/office/drawing/2014/main" id="{D73F64F7-A4A9-478F-A969-66C3F8051879}"/>
+                <a16:creationId xmlns:a16="http://schemas.microsoft.com/office/drawing/2014/main" id="{1737BCC9-5214-406F-AF68-29FD2C33F91E}"/>
               </a:ext>
             </a:extLst>
           </p:cNvPr>
@@ -24531,7 +24531,7 @@
           <p:cNvPr id="30" name="">
             <a:extLst xmlns:a="http://schemas.openxmlformats.org/drawingml/2006/main">
               <a:ext uri="{FF2B5EF4-FFF2-40B4-BE49-F238E27FC236}">
-                <a16:creationId xmlns:a16="http://schemas.microsoft.com/office/drawing/2014/main" id="{7C5C0ED7-8058-4A0D-8A9A-E50EC3449E1B}"/>
+                <a16:creationId xmlns:a16="http://schemas.microsoft.com/office/drawing/2014/main" id="{DAA329CD-422A-4E18-88EE-3F449C15D2EE}"/>
               </a:ext>
             </a:extLst>
           </p:cNvPr>
@@ -24595,7 +24595,7 @@
           <p:cNvPr id="31" name="">
             <a:extLst xmlns:a="http://schemas.openxmlformats.org/drawingml/2006/main">
               <a:ext uri="{FF2B5EF4-FFF2-40B4-BE49-F238E27FC236}">
-                <a16:creationId xmlns:a16="http://schemas.microsoft.com/office/drawing/2014/main" id="{7DA24489-3465-4721-965B-7DF460AAE774}"/>
+                <a16:creationId xmlns:a16="http://schemas.microsoft.com/office/drawing/2014/main" id="{8CBEF5F4-BE99-47AD-A253-5B52FE125CE8}"/>
               </a:ext>
             </a:extLst>
           </p:cNvPr>
@@ -24659,7 +24659,7 @@
           <p:cNvPr id="32" name="">
             <a:extLst xmlns:a="http://schemas.openxmlformats.org/drawingml/2006/main">
               <a:ext uri="{FF2B5EF4-FFF2-40B4-BE49-F238E27FC236}">
-                <a16:creationId xmlns:a16="http://schemas.microsoft.com/office/drawing/2014/main" id="{FA6F919A-80EE-4A36-B05C-4248A0BAA8CA}"/>
+                <a16:creationId xmlns:a16="http://schemas.microsoft.com/office/drawing/2014/main" id="{3352E1B1-CA29-44E0-ACC1-2CE1F91DEDF4}"/>
               </a:ext>
             </a:extLst>
           </p:cNvPr>
@@ -24696,7 +24696,7 @@
           <p:cNvPr id="33" name="">
             <a:extLst xmlns:a="http://schemas.openxmlformats.org/drawingml/2006/main">
               <a:ext uri="{FF2B5EF4-FFF2-40B4-BE49-F238E27FC236}">
-                <a16:creationId xmlns:a16="http://schemas.microsoft.com/office/drawing/2014/main" id="{B77A6169-490F-4736-B545-C5615051EA71}"/>
+                <a16:creationId xmlns:a16="http://schemas.microsoft.com/office/drawing/2014/main" id="{E0BEC0FF-EB16-4830-9844-DC9034756657}"/>
               </a:ext>
             </a:extLst>
           </p:cNvPr>
@@ -24733,7 +24733,7 @@
           <p:cNvPr id="34" name="">
             <a:extLst xmlns:a="http://schemas.openxmlformats.org/drawingml/2006/main">
               <a:ext uri="{FF2B5EF4-FFF2-40B4-BE49-F238E27FC236}">
-                <a16:creationId xmlns:a16="http://schemas.microsoft.com/office/drawing/2014/main" id="{4D346A52-63F3-486B-B406-B459EECDBEA7}"/>
+                <a16:creationId xmlns:a16="http://schemas.microsoft.com/office/drawing/2014/main" id="{391B2A95-55AA-4954-B112-DE130D215A07}"/>
               </a:ext>
             </a:extLst>
           </p:cNvPr>
@@ -24770,7 +24770,7 @@
           <p:cNvPr id="35" name="">
             <a:extLst xmlns:a="http://schemas.openxmlformats.org/drawingml/2006/main">
               <a:ext uri="{FF2B5EF4-FFF2-40B4-BE49-F238E27FC236}">
-                <a16:creationId xmlns:a16="http://schemas.microsoft.com/office/drawing/2014/main" id="{48B05C88-7276-4630-ACF9-2A794E238E11}"/>
+                <a16:creationId xmlns:a16="http://schemas.microsoft.com/office/drawing/2014/main" id="{7C978C4C-8093-44B0-84A4-65A3E6E27868}"/>
               </a:ext>
             </a:extLst>
           </p:cNvPr>
@@ -24834,7 +24834,7 @@
           <p:cNvPr id="36" name="">
             <a:extLst xmlns:a="http://schemas.openxmlformats.org/drawingml/2006/main">
               <a:ext uri="{FF2B5EF4-FFF2-40B4-BE49-F238E27FC236}">
-                <a16:creationId xmlns:a16="http://schemas.microsoft.com/office/drawing/2014/main" id="{F7948ECF-0BFC-4A0A-A78E-1D59E6F2806E}"/>
+                <a16:creationId xmlns:a16="http://schemas.microsoft.com/office/drawing/2014/main" id="{C7774E0D-EAAC-4039-B293-A61F06E28C76}"/>
               </a:ext>
             </a:extLst>
           </p:cNvPr>
@@ -24898,7 +24898,7 @@
           <p:cNvPr id="37" name="">
             <a:extLst xmlns:a="http://schemas.openxmlformats.org/drawingml/2006/main">
               <a:ext uri="{FF2B5EF4-FFF2-40B4-BE49-F238E27FC236}">
-                <a16:creationId xmlns:a16="http://schemas.microsoft.com/office/drawing/2014/main" id="{BE37A1FF-5F3C-4AFB-9D70-8746209DF28F}"/>
+                <a16:creationId xmlns:a16="http://schemas.microsoft.com/office/drawing/2014/main" id="{3E040CC5-7503-45DF-A2C1-3A7A13D25A9B}"/>
               </a:ext>
             </a:extLst>
           </p:cNvPr>
@@ -24962,7 +24962,7 @@
           <p:cNvPr id="38" name="">
             <a:extLst xmlns:a="http://schemas.openxmlformats.org/drawingml/2006/main">
               <a:ext uri="{FF2B5EF4-FFF2-40B4-BE49-F238E27FC236}">
-                <a16:creationId xmlns:a16="http://schemas.microsoft.com/office/drawing/2014/main" id="{912E434B-430B-4F02-931F-9B1101FAE97D}"/>
+                <a16:creationId xmlns:a16="http://schemas.microsoft.com/office/drawing/2014/main" id="{80F66DE8-4E19-4599-A300-98F1DEC68397}"/>
               </a:ext>
             </a:extLst>
           </p:cNvPr>
@@ -24999,7 +24999,7 @@
           <p:cNvPr id="39" name="">
             <a:extLst xmlns:a="http://schemas.openxmlformats.org/drawingml/2006/main">
               <a:ext uri="{FF2B5EF4-FFF2-40B4-BE49-F238E27FC236}">
-                <a16:creationId xmlns:a16="http://schemas.microsoft.com/office/drawing/2014/main" id="{17D329DD-BEE5-4509-B505-E88138E8EB5E}"/>
+                <a16:creationId xmlns:a16="http://schemas.microsoft.com/office/drawing/2014/main" id="{74860E97-3EA2-4792-B07C-D222954352C9}"/>
               </a:ext>
             </a:extLst>
           </p:cNvPr>
@@ -25036,7 +25036,7 @@
           <p:cNvPr id="40" name="">
             <a:extLst xmlns:a="http://schemas.openxmlformats.org/drawingml/2006/main">
               <a:ext uri="{FF2B5EF4-FFF2-40B4-BE49-F238E27FC236}">
-                <a16:creationId xmlns:a16="http://schemas.microsoft.com/office/drawing/2014/main" id="{0988AE07-8D8B-441B-A0CB-BC3354F243BE}"/>
+                <a16:creationId xmlns:a16="http://schemas.microsoft.com/office/drawing/2014/main" id="{3BAA7D12-B80F-4C1A-8E16-0F5777A8FA3C}"/>
               </a:ext>
             </a:extLst>
           </p:cNvPr>
@@ -25073,7 +25073,7 @@
           <p:cNvPr id="41" name="">
             <a:extLst xmlns:a="http://schemas.openxmlformats.org/drawingml/2006/main">
               <a:ext uri="{FF2B5EF4-FFF2-40B4-BE49-F238E27FC236}">
-                <a16:creationId xmlns:a16="http://schemas.microsoft.com/office/drawing/2014/main" id="{DB0F02D2-611C-44D8-9100-72336B9B0F2B}"/>
+                <a16:creationId xmlns:a16="http://schemas.microsoft.com/office/drawing/2014/main" id="{1B15D8DA-CC07-4576-9D8C-0289E6A08BAD}"/>
               </a:ext>
             </a:extLst>
           </p:cNvPr>
@@ -25137,7 +25137,7 @@
           <p:cNvPr id="42" name="">
             <a:extLst xmlns:a="http://schemas.openxmlformats.org/drawingml/2006/main">
               <a:ext uri="{FF2B5EF4-FFF2-40B4-BE49-F238E27FC236}">
-                <a16:creationId xmlns:a16="http://schemas.microsoft.com/office/drawing/2014/main" id="{48C459BE-7334-4EF0-B324-032EA4F592D9}"/>
+                <a16:creationId xmlns:a16="http://schemas.microsoft.com/office/drawing/2014/main" id="{837C6920-9911-48FC-9EED-3EF9C4A6EE1F}"/>
               </a:ext>
             </a:extLst>
           </p:cNvPr>
@@ -25201,7 +25201,7 @@
           <p:cNvPr id="43" name="">
             <a:extLst xmlns:a="http://schemas.openxmlformats.org/drawingml/2006/main">
               <a:ext uri="{FF2B5EF4-FFF2-40B4-BE49-F238E27FC236}">
-                <a16:creationId xmlns:a16="http://schemas.microsoft.com/office/drawing/2014/main" id="{3A1FB33B-C02A-4BC3-A376-9F1307EFAD1B}"/>
+                <a16:creationId xmlns:a16="http://schemas.microsoft.com/office/drawing/2014/main" id="{F6236743-7A43-4FB5-9501-D9A0E916BB5F}"/>
               </a:ext>
             </a:extLst>
           </p:cNvPr>
@@ -25265,7 +25265,7 @@
           <p:cNvPr id="44" name="">
             <a:extLst xmlns:a="http://schemas.openxmlformats.org/drawingml/2006/main">
               <a:ext uri="{FF2B5EF4-FFF2-40B4-BE49-F238E27FC236}">
-                <a16:creationId xmlns:a16="http://schemas.microsoft.com/office/drawing/2014/main" id="{5AF87BDE-6776-480D-98FE-E4F5CD65D391}"/>
+                <a16:creationId xmlns:a16="http://schemas.microsoft.com/office/drawing/2014/main" id="{2FDF8FA9-412A-4EA9-B410-0896FA8DB098}"/>
               </a:ext>
             </a:extLst>
           </p:cNvPr>
@@ -25302,7 +25302,7 @@
           <p:cNvPr id="45" name="">
             <a:extLst xmlns:a="http://schemas.openxmlformats.org/drawingml/2006/main">
               <a:ext uri="{FF2B5EF4-FFF2-40B4-BE49-F238E27FC236}">
-                <a16:creationId xmlns:a16="http://schemas.microsoft.com/office/drawing/2014/main" id="{85C1359E-20A4-4C4E-9731-93CBE4CE00F3}"/>
+                <a16:creationId xmlns:a16="http://schemas.microsoft.com/office/drawing/2014/main" id="{B1846C15-C640-43D8-BBF5-74F2EB9AC538}"/>
               </a:ext>
             </a:extLst>
           </p:cNvPr>
@@ -25339,7 +25339,7 @@
           <p:cNvPr id="46" name="">
             <a:extLst xmlns:a="http://schemas.openxmlformats.org/drawingml/2006/main">
               <a:ext uri="{FF2B5EF4-FFF2-40B4-BE49-F238E27FC236}">
-                <a16:creationId xmlns:a16="http://schemas.microsoft.com/office/drawing/2014/main" id="{BAACBB3C-CB18-41F9-9188-406C0226D461}"/>
+                <a16:creationId xmlns:a16="http://schemas.microsoft.com/office/drawing/2014/main" id="{6583F8C4-3878-44DA-A389-1CA9232C7CDE}"/>
               </a:ext>
             </a:extLst>
           </p:cNvPr>
@@ -25376,7 +25376,7 @@
           <p:cNvPr id="47" name="">
             <a:extLst xmlns:a="http://schemas.openxmlformats.org/drawingml/2006/main">
               <a:ext uri="{FF2B5EF4-FFF2-40B4-BE49-F238E27FC236}">
-                <a16:creationId xmlns:a16="http://schemas.microsoft.com/office/drawing/2014/main" id="{D3D6612F-1CEE-4177-89B1-A4B98DDE40BC}"/>
+                <a16:creationId xmlns:a16="http://schemas.microsoft.com/office/drawing/2014/main" id="{3B3526AB-EED6-48C4-BC7B-C7E31834EBAB}"/>
               </a:ext>
             </a:extLst>
           </p:cNvPr>
@@ -25440,7 +25440,7 @@
           <p:cNvPr id="48" name="">
             <a:extLst xmlns:a="http://schemas.openxmlformats.org/drawingml/2006/main">
               <a:ext uri="{FF2B5EF4-FFF2-40B4-BE49-F238E27FC236}">
-                <a16:creationId xmlns:a16="http://schemas.microsoft.com/office/drawing/2014/main" id="{605D5D42-1DB4-4E1F-88ED-855CA2A17896}"/>
+                <a16:creationId xmlns:a16="http://schemas.microsoft.com/office/drawing/2014/main" id="{C6474420-99BB-44D0-8866-93EACB7FEF0B}"/>
               </a:ext>
             </a:extLst>
           </p:cNvPr>
@@ -25504,7 +25504,7 @@
           <p:cNvPr id="49" name="">
             <a:extLst xmlns:a="http://schemas.openxmlformats.org/drawingml/2006/main">
               <a:ext uri="{FF2B5EF4-FFF2-40B4-BE49-F238E27FC236}">
-                <a16:creationId xmlns:a16="http://schemas.microsoft.com/office/drawing/2014/main" id="{4D142A54-BCCE-449B-A742-68A10B0A1680}"/>
+                <a16:creationId xmlns:a16="http://schemas.microsoft.com/office/drawing/2014/main" id="{DA9EBB85-2A94-4998-8123-E62DF3B1F236}"/>
               </a:ext>
             </a:extLst>
           </p:cNvPr>
@@ -25568,7 +25568,7 @@
           <p:cNvPr id="50" name="">
             <a:extLst xmlns:a="http://schemas.openxmlformats.org/drawingml/2006/main">
               <a:ext uri="{FF2B5EF4-FFF2-40B4-BE49-F238E27FC236}">
-                <a16:creationId xmlns:a16="http://schemas.microsoft.com/office/drawing/2014/main" id="{3ECBB9F5-B500-483D-8BC9-083F29A72365}"/>
+                <a16:creationId xmlns:a16="http://schemas.microsoft.com/office/drawing/2014/main" id="{507A1628-DBB0-4B01-A973-9F08124E1A75}"/>
               </a:ext>
             </a:extLst>
           </p:cNvPr>
@@ -25605,7 +25605,7 @@
           <p:cNvPr id="51" name="">
             <a:extLst xmlns:a="http://schemas.openxmlformats.org/drawingml/2006/main">
               <a:ext uri="{FF2B5EF4-FFF2-40B4-BE49-F238E27FC236}">
-                <a16:creationId xmlns:a16="http://schemas.microsoft.com/office/drawing/2014/main" id="{0B6AA227-56E4-4B2D-96FF-F86B4BE226B9}"/>
+                <a16:creationId xmlns:a16="http://schemas.microsoft.com/office/drawing/2014/main" id="{9757BE20-2369-4974-90D9-9DE2B039D3E9}"/>
               </a:ext>
             </a:extLst>
           </p:cNvPr>
@@ -25642,7 +25642,7 @@
           <p:cNvPr id="52" name="">
             <a:extLst xmlns:a="http://schemas.openxmlformats.org/drawingml/2006/main">
               <a:ext uri="{FF2B5EF4-FFF2-40B4-BE49-F238E27FC236}">
-                <a16:creationId xmlns:a16="http://schemas.microsoft.com/office/drawing/2014/main" id="{DE00A0CE-61F6-473E-AF73-F1D893C03563}"/>
+                <a16:creationId xmlns:a16="http://schemas.microsoft.com/office/drawing/2014/main" id="{69865493-8C26-4C2E-B1DC-1D5DDB97B5A5}"/>
               </a:ext>
             </a:extLst>
           </p:cNvPr>
@@ -25679,7 +25679,7 @@
           <p:cNvPr id="53" name="">
             <a:extLst xmlns:a="http://schemas.openxmlformats.org/drawingml/2006/main">
               <a:ext uri="{FF2B5EF4-FFF2-40B4-BE49-F238E27FC236}">
-                <a16:creationId xmlns:a16="http://schemas.microsoft.com/office/drawing/2014/main" id="{36EEE402-662D-446F-BF9C-2F30980E299C}"/>
+                <a16:creationId xmlns:a16="http://schemas.microsoft.com/office/drawing/2014/main" id="{174A5192-BA4B-49C8-B174-8CD28257C9F3}"/>
               </a:ext>
             </a:extLst>
           </p:cNvPr>
@@ -25743,7 +25743,7 @@
           <p:cNvPr id="54" name="">
             <a:extLst xmlns:a="http://schemas.openxmlformats.org/drawingml/2006/main">
               <a:ext uri="{FF2B5EF4-FFF2-40B4-BE49-F238E27FC236}">
-                <a16:creationId xmlns:a16="http://schemas.microsoft.com/office/drawing/2014/main" id="{3C46D389-FC16-4796-BFA3-F5FFF620CE5C}"/>
+                <a16:creationId xmlns:a16="http://schemas.microsoft.com/office/drawing/2014/main" id="{F720F3EA-0911-4185-A8D0-9F679BFACEB3}"/>
               </a:ext>
             </a:extLst>
           </p:cNvPr>
@@ -25807,7 +25807,7 @@
           <p:cNvPr id="55" name="">
             <a:extLst xmlns:a="http://schemas.openxmlformats.org/drawingml/2006/main">
               <a:ext uri="{FF2B5EF4-FFF2-40B4-BE49-F238E27FC236}">
-                <a16:creationId xmlns:a16="http://schemas.microsoft.com/office/drawing/2014/main" id="{8A29A474-48E9-427D-A062-E24B7958EA8C}"/>
+                <a16:creationId xmlns:a16="http://schemas.microsoft.com/office/drawing/2014/main" id="{BF193640-B406-47FD-AF56-8CD8DBF7A403}"/>
               </a:ext>
             </a:extLst>
           </p:cNvPr>
@@ -25871,7 +25871,7 @@
           <p:cNvPr id="56" name="">
             <a:extLst xmlns:a="http://schemas.openxmlformats.org/drawingml/2006/main">
               <a:ext uri="{FF2B5EF4-FFF2-40B4-BE49-F238E27FC236}">
-                <a16:creationId xmlns:a16="http://schemas.microsoft.com/office/drawing/2014/main" id="{B87525FA-87E5-48FC-A4D0-9068536DB67B}"/>
+                <a16:creationId xmlns:a16="http://schemas.microsoft.com/office/drawing/2014/main" id="{C0211BAC-10A6-4914-B257-F4B80724244B}"/>
               </a:ext>
             </a:extLst>
           </p:cNvPr>
@@ -25908,7 +25908,7 @@
           <p:cNvPr id="57" name="">
             <a:extLst xmlns:a="http://schemas.openxmlformats.org/drawingml/2006/main">
               <a:ext uri="{FF2B5EF4-FFF2-40B4-BE49-F238E27FC236}">
-                <a16:creationId xmlns:a16="http://schemas.microsoft.com/office/drawing/2014/main" id="{AD6477F1-5300-4324-86DD-6A1C28A2857E}"/>
+                <a16:creationId xmlns:a16="http://schemas.microsoft.com/office/drawing/2014/main" id="{AD60CA99-9088-4E3B-9FFB-82F7B1A21AE0}"/>
               </a:ext>
             </a:extLst>
           </p:cNvPr>
@@ -25972,7 +25972,7 @@
           <p:cNvPr id="58" name="">
             <a:extLst xmlns:a="http://schemas.openxmlformats.org/drawingml/2006/main">
               <a:ext uri="{FF2B5EF4-FFF2-40B4-BE49-F238E27FC236}">
-                <a16:creationId xmlns:a16="http://schemas.microsoft.com/office/drawing/2014/main" id="{6594C204-286D-4D10-B527-B9C65C220390}"/>
+                <a16:creationId xmlns:a16="http://schemas.microsoft.com/office/drawing/2014/main" id="{B5FD3ABD-5245-47E6-B381-58F5E9931F96}"/>
               </a:ext>
             </a:extLst>
           </p:cNvPr>
@@ -26009,7 +26009,7 @@
           <p:cNvPr id="59" name="">
             <a:extLst xmlns:a="http://schemas.openxmlformats.org/drawingml/2006/main">
               <a:ext uri="{FF2B5EF4-FFF2-40B4-BE49-F238E27FC236}">
-                <a16:creationId xmlns:a16="http://schemas.microsoft.com/office/drawing/2014/main" id="{53CA2D6C-ED7E-43CE-8AC8-822A46C525AD}"/>
+                <a16:creationId xmlns:a16="http://schemas.microsoft.com/office/drawing/2014/main" id="{2D0A6D3C-75F9-4A60-9681-F1EB8A4FC17D}"/>
               </a:ext>
             </a:extLst>
           </p:cNvPr>
@@ -26073,7 +26073,7 @@
           <p:cNvPr id="60" name="">
             <a:extLst xmlns:a="http://schemas.openxmlformats.org/drawingml/2006/main">
               <a:ext uri="{FF2B5EF4-FFF2-40B4-BE49-F238E27FC236}">
-                <a16:creationId xmlns:a16="http://schemas.microsoft.com/office/drawing/2014/main" id="{7CEC2CEB-E1C2-4518-B314-389C441B5A8C}"/>
+                <a16:creationId xmlns:a16="http://schemas.microsoft.com/office/drawing/2014/main" id="{71C6B2EF-B9F9-4AE7-A7E9-E4047B85770C}"/>
               </a:ext>
             </a:extLst>
           </p:cNvPr>
@@ -26110,7 +26110,7 @@
           <p:cNvPr id="61" name="">
             <a:extLst xmlns:a="http://schemas.openxmlformats.org/drawingml/2006/main">
               <a:ext uri="{FF2B5EF4-FFF2-40B4-BE49-F238E27FC236}">
-                <a16:creationId xmlns:a16="http://schemas.microsoft.com/office/drawing/2014/main" id="{D6F2AFBE-8FD9-4EC2-92C8-461B2B92C844}"/>
+                <a16:creationId xmlns:a16="http://schemas.microsoft.com/office/drawing/2014/main" id="{435921A8-C8E5-4D8A-A4BD-D3494A37E82F}"/>
               </a:ext>
             </a:extLst>
           </p:cNvPr>
@@ -26174,7 +26174,7 @@
           <p:cNvPr id="62" name="">
             <a:extLst xmlns:a="http://schemas.openxmlformats.org/drawingml/2006/main">
               <a:ext uri="{FF2B5EF4-FFF2-40B4-BE49-F238E27FC236}">
-                <a16:creationId xmlns:a16="http://schemas.microsoft.com/office/drawing/2014/main" id="{A5928A2A-E278-4B95-9FBA-811653D23F0A}"/>
+                <a16:creationId xmlns:a16="http://schemas.microsoft.com/office/drawing/2014/main" id="{CF99D874-DA42-4CCA-9FB1-26F4FAD21A0D}"/>
               </a:ext>
             </a:extLst>
           </p:cNvPr>
@@ -26211,7 +26211,7 @@
           <p:cNvPr id="63" name="">
             <a:extLst xmlns:a="http://schemas.openxmlformats.org/drawingml/2006/main">
               <a:ext uri="{FF2B5EF4-FFF2-40B4-BE49-F238E27FC236}">
-                <a16:creationId xmlns:a16="http://schemas.microsoft.com/office/drawing/2014/main" id="{49EB49A5-5E0B-40F3-9AE5-B0AF994F5F66}"/>
+                <a16:creationId xmlns:a16="http://schemas.microsoft.com/office/drawing/2014/main" id="{F31197F9-821C-45C8-B95B-4AD9DEB9985F}"/>
               </a:ext>
             </a:extLst>
           </p:cNvPr>
@@ -26248,7 +26248,7 @@
           <p:cNvPr id="64" name="">
             <a:extLst xmlns:a="http://schemas.openxmlformats.org/drawingml/2006/main">
               <a:ext uri="{FF2B5EF4-FFF2-40B4-BE49-F238E27FC236}">
-                <a16:creationId xmlns:a16="http://schemas.microsoft.com/office/drawing/2014/main" id="{6133D2A0-B2CF-4C2E-9AB2-57E8DE99B8E7}"/>
+                <a16:creationId xmlns:a16="http://schemas.microsoft.com/office/drawing/2014/main" id="{5DE7726E-888E-4840-BE93-F809A8F91221}"/>
               </a:ext>
             </a:extLst>
           </p:cNvPr>
@@ -26312,7 +26312,7 @@
           <p:cNvPr id="65" name="">
             <a:extLst xmlns:a="http://schemas.openxmlformats.org/drawingml/2006/main">
               <a:ext uri="{FF2B5EF4-FFF2-40B4-BE49-F238E27FC236}">
-                <a16:creationId xmlns:a16="http://schemas.microsoft.com/office/drawing/2014/main" id="{F66A1263-41B0-4AC0-84A8-F799899F5BAF}"/>
+                <a16:creationId xmlns:a16="http://schemas.microsoft.com/office/drawing/2014/main" id="{FF35627F-E019-4A7C-A394-DA2EB8F8711C}"/>
               </a:ext>
             </a:extLst>
           </p:cNvPr>
@@ -26376,7 +26376,7 @@
           <p:cNvPr id="66" name="">
             <a:extLst xmlns:a="http://schemas.openxmlformats.org/drawingml/2006/main">
               <a:ext uri="{FF2B5EF4-FFF2-40B4-BE49-F238E27FC236}">
-                <a16:creationId xmlns:a16="http://schemas.microsoft.com/office/drawing/2014/main" id="{8FFD9BCD-90BF-49E3-BCC7-8C5BA769A7DF}"/>
+                <a16:creationId xmlns:a16="http://schemas.microsoft.com/office/drawing/2014/main" id="{C1FAC29E-3BAB-41F9-BF0F-7FFF6CD9B99D}"/>
               </a:ext>
             </a:extLst>
           </p:cNvPr>
@@ -26413,7 +26413,7 @@
           <p:cNvPr id="67" name="">
             <a:extLst xmlns:a="http://schemas.openxmlformats.org/drawingml/2006/main">
               <a:ext uri="{FF2B5EF4-FFF2-40B4-BE49-F238E27FC236}">
-                <a16:creationId xmlns:a16="http://schemas.microsoft.com/office/drawing/2014/main" id="{D56F0329-8980-4D13-99D9-FEADF20DA38C}"/>
+                <a16:creationId xmlns:a16="http://schemas.microsoft.com/office/drawing/2014/main" id="{DEEC94D9-53FD-4BA9-A754-4C093AEE521D}"/>
               </a:ext>
             </a:extLst>
           </p:cNvPr>
@@ -26450,7 +26450,7 @@
           <p:cNvPr id="68" name="">
             <a:extLst xmlns:a="http://schemas.openxmlformats.org/drawingml/2006/main">
               <a:ext uri="{FF2B5EF4-FFF2-40B4-BE49-F238E27FC236}">
-                <a16:creationId xmlns:a16="http://schemas.microsoft.com/office/drawing/2014/main" id="{9E8863D1-B60C-4F3F-AEED-B36B28B58A24}"/>
+                <a16:creationId xmlns:a16="http://schemas.microsoft.com/office/drawing/2014/main" id="{0CA0DEE5-B907-4291-B953-9BDB18DF84EE}"/>
               </a:ext>
             </a:extLst>
           </p:cNvPr>
@@ -26514,7 +26514,7 @@
           <p:cNvPr id="69" name="">
             <a:extLst xmlns:a="http://schemas.openxmlformats.org/drawingml/2006/main">
               <a:ext uri="{FF2B5EF4-FFF2-40B4-BE49-F238E27FC236}">
-                <a16:creationId xmlns:a16="http://schemas.microsoft.com/office/drawing/2014/main" id="{3E6EC8FB-B5B5-4E01-B932-C9D0F3745616}"/>
+                <a16:creationId xmlns:a16="http://schemas.microsoft.com/office/drawing/2014/main" id="{CA6D0C4F-0628-4816-B0C8-51B4FB0903EB}"/>
               </a:ext>
             </a:extLst>
           </p:cNvPr>
@@ -26578,7 +26578,7 @@
           <p:cNvPr id="70" name="">
             <a:extLst xmlns:a="http://schemas.openxmlformats.org/drawingml/2006/main">
               <a:ext uri="{FF2B5EF4-FFF2-40B4-BE49-F238E27FC236}">
-                <a16:creationId xmlns:a16="http://schemas.microsoft.com/office/drawing/2014/main" id="{FF4DD560-80A3-49A0-9DCC-4F5FA3C5ED77}"/>
+                <a16:creationId xmlns:a16="http://schemas.microsoft.com/office/drawing/2014/main" id="{E002490E-5FBE-45F0-93DF-E158169AC0A3}"/>
               </a:ext>
             </a:extLst>
           </p:cNvPr>
@@ -26615,7 +26615,7 @@
           <p:cNvPr id="71" name="">
             <a:extLst xmlns:a="http://schemas.openxmlformats.org/drawingml/2006/main">
               <a:ext uri="{FF2B5EF4-FFF2-40B4-BE49-F238E27FC236}">
-                <a16:creationId xmlns:a16="http://schemas.microsoft.com/office/drawing/2014/main" id="{758B0CBE-A162-4ED4-A7EB-F147803AB91A}"/>
+                <a16:creationId xmlns:a16="http://schemas.microsoft.com/office/drawing/2014/main" id="{491FE5AC-DB74-477B-8A38-B61C5EB3BF42}"/>
               </a:ext>
             </a:extLst>
           </p:cNvPr>
@@ -26652,7 +26652,7 @@
           <p:cNvPr id="72" name="">
             <a:extLst xmlns:a="http://schemas.openxmlformats.org/drawingml/2006/main">
               <a:ext uri="{FF2B5EF4-FFF2-40B4-BE49-F238E27FC236}">
-                <a16:creationId xmlns:a16="http://schemas.microsoft.com/office/drawing/2014/main" id="{C61F6DC5-1592-4727-979D-1FBE4330F21C}"/>
+                <a16:creationId xmlns:a16="http://schemas.microsoft.com/office/drawing/2014/main" id="{7658CF06-05D8-4745-ADE5-EAEC12A62CD4}"/>
               </a:ext>
             </a:extLst>
           </p:cNvPr>
@@ -26716,7 +26716,7 @@
           <p:cNvPr id="73" name="">
             <a:extLst xmlns:a="http://schemas.openxmlformats.org/drawingml/2006/main">
               <a:ext uri="{FF2B5EF4-FFF2-40B4-BE49-F238E27FC236}">
-                <a16:creationId xmlns:a16="http://schemas.microsoft.com/office/drawing/2014/main" id="{B0767A3F-645E-4B92-A7CB-6D77FCA9BB97}"/>
+                <a16:creationId xmlns:a16="http://schemas.microsoft.com/office/drawing/2014/main" id="{AF3737F9-3A27-4086-823C-804B877D13D0}"/>
               </a:ext>
             </a:extLst>
           </p:cNvPr>
@@ -26780,7 +26780,7 @@
           <p:cNvPr id="74" name="">
             <a:extLst xmlns:a="http://schemas.openxmlformats.org/drawingml/2006/main">
               <a:ext uri="{FF2B5EF4-FFF2-40B4-BE49-F238E27FC236}">
-                <a16:creationId xmlns:a16="http://schemas.microsoft.com/office/drawing/2014/main" id="{40ABCC0E-B77E-4588-A35D-6595323067B5}"/>
+                <a16:creationId xmlns:a16="http://schemas.microsoft.com/office/drawing/2014/main" id="{D9F9382C-4304-41E1-91FA-3C7EFA711F99}"/>
               </a:ext>
             </a:extLst>
           </p:cNvPr>
@@ -26817,7 +26817,7 @@
           <p:cNvPr id="75" name="">
             <a:extLst xmlns:a="http://schemas.openxmlformats.org/drawingml/2006/main">
               <a:ext uri="{FF2B5EF4-FFF2-40B4-BE49-F238E27FC236}">
-                <a16:creationId xmlns:a16="http://schemas.microsoft.com/office/drawing/2014/main" id="{FB865832-D4E1-4318-873B-8BB0F943E99D}"/>
+                <a16:creationId xmlns:a16="http://schemas.microsoft.com/office/drawing/2014/main" id="{100A8F9D-9E8A-42AF-B6E7-CA4963F9F559}"/>
               </a:ext>
             </a:extLst>
           </p:cNvPr>
@@ -26854,7 +26854,7 @@
           <p:cNvPr id="76" name="">
             <a:extLst xmlns:a="http://schemas.openxmlformats.org/drawingml/2006/main">
               <a:ext uri="{FF2B5EF4-FFF2-40B4-BE49-F238E27FC236}">
-                <a16:creationId xmlns:a16="http://schemas.microsoft.com/office/drawing/2014/main" id="{9955F15B-E3DF-4148-AFBB-A3C0F65BD5CC}"/>
+                <a16:creationId xmlns:a16="http://schemas.microsoft.com/office/drawing/2014/main" id="{589D8BD0-8E94-4B6F-8DF4-0BE86572AED8}"/>
               </a:ext>
             </a:extLst>
           </p:cNvPr>
@@ -26918,7 +26918,7 @@
           <p:cNvPr id="77" name="">
             <a:extLst xmlns:a="http://schemas.openxmlformats.org/drawingml/2006/main">
               <a:ext uri="{FF2B5EF4-FFF2-40B4-BE49-F238E27FC236}">
-                <a16:creationId xmlns:a16="http://schemas.microsoft.com/office/drawing/2014/main" id="{1D63C5B2-D157-4ED3-94D4-66D52961A9E0}"/>
+                <a16:creationId xmlns:a16="http://schemas.microsoft.com/office/drawing/2014/main" id="{5A41088E-08FC-4CB7-95EB-58FE7D5DEE08}"/>
               </a:ext>
             </a:extLst>
           </p:cNvPr>
@@ -26982,7 +26982,7 @@
           <p:cNvPr id="78" name="">
             <a:extLst xmlns:a="http://schemas.openxmlformats.org/drawingml/2006/main">
               <a:ext uri="{FF2B5EF4-FFF2-40B4-BE49-F238E27FC236}">
-                <a16:creationId xmlns:a16="http://schemas.microsoft.com/office/drawing/2014/main" id="{665BEB01-8614-4240-83F3-F9496B06D95B}"/>
+                <a16:creationId xmlns:a16="http://schemas.microsoft.com/office/drawing/2014/main" id="{EDF8A56F-658C-41D5-AFB1-F49BEA14A978}"/>
               </a:ext>
             </a:extLst>
           </p:cNvPr>
@@ -27019,7 +27019,7 @@
           <p:cNvPr id="79" name="">
             <a:extLst xmlns:a="http://schemas.openxmlformats.org/drawingml/2006/main">
               <a:ext uri="{FF2B5EF4-FFF2-40B4-BE49-F238E27FC236}">
-                <a16:creationId xmlns:a16="http://schemas.microsoft.com/office/drawing/2014/main" id="{D8F5B9B8-293C-488A-A06F-D9A576092139}"/>
+                <a16:creationId xmlns:a16="http://schemas.microsoft.com/office/drawing/2014/main" id="{074FC583-72E2-4792-9F79-08198140DBCF}"/>
               </a:ext>
             </a:extLst>
           </p:cNvPr>
@@ -27081,7 +27081,7 @@
     </p:spTree>
     <p:extLst>
       <p:ext uri="{BB962C8B-B14F-4D97-AF65-F5344CB8AC3E}">
-        <p14:creationId xmlns:p14="http://schemas.microsoft.com/office/powerpoint/2010/main" val="1830710143"/>
+        <p14:creationId xmlns:p14="http://schemas.microsoft.com/office/powerpoint/2010/main" val="1034949687"/>
       </p:ext>
     </p:extLst>
   </p:cSld>
@@ -27105,7 +27105,7 @@
           <p:cNvPr id="1" name="">
             <a:extLst xmlns:a="http://schemas.openxmlformats.org/drawingml/2006/main">
               <a:ext uri="{FF2B5EF4-FFF2-40B4-BE49-F238E27FC236}">
-                <a16:creationId xmlns:a16="http://schemas.microsoft.com/office/drawing/2014/main" id="{9C6370F1-9DC0-45E8-A6A8-C7C403AE65A4}"/>
+                <a16:creationId xmlns:a16="http://schemas.microsoft.com/office/drawing/2014/main" id="{751553C4-C565-49FC-A6C1-19F0A3F4AE0B}"/>
               </a:ext>
             </a:extLst>
           </p:cNvPr>
@@ -27140,7 +27140,7 @@
           <p:cNvPr id="2" name="">
             <a:extLst xmlns:a="http://schemas.openxmlformats.org/drawingml/2006/main">
               <a:ext uri="{FF2B5EF4-FFF2-40B4-BE49-F238E27FC236}">
-                <a16:creationId xmlns:a16="http://schemas.microsoft.com/office/drawing/2014/main" id="{D8390BB9-7F4F-4986-A09E-7E632B4CB4B1}"/>
+                <a16:creationId xmlns:a16="http://schemas.microsoft.com/office/drawing/2014/main" id="{0F5EC9E1-00E4-4955-9E53-43E8224AA2FF}"/>
               </a:ext>
             </a:extLst>
           </p:cNvPr>
@@ -27186,7 +27186,7 @@
           <p:cNvPr id="3" name="">
             <a:extLst xmlns:a="http://schemas.openxmlformats.org/drawingml/2006/main">
               <a:ext uri="{FF2B5EF4-FFF2-40B4-BE49-F238E27FC236}">
-                <a16:creationId xmlns:a16="http://schemas.microsoft.com/office/drawing/2014/main" id="{8CFC32AD-60FB-481D-8103-B2504983A602}"/>
+                <a16:creationId xmlns:a16="http://schemas.microsoft.com/office/drawing/2014/main" id="{FA6754D0-7891-4529-8F00-6390C4A0168E}"/>
               </a:ext>
             </a:extLst>
           </p:cNvPr>
@@ -27223,7 +27223,7 @@
           <p:cNvPr id="4" name="">
             <a:extLst xmlns:a="http://schemas.openxmlformats.org/drawingml/2006/main">
               <a:ext uri="{FF2B5EF4-FFF2-40B4-BE49-F238E27FC236}">
-                <a16:creationId xmlns:a16="http://schemas.microsoft.com/office/drawing/2014/main" id="{B55D552F-2312-4604-904E-70C9A0CBB232}"/>
+                <a16:creationId xmlns:a16="http://schemas.microsoft.com/office/drawing/2014/main" id="{D964137D-3914-4B15-973A-0B3179BBDCF1}"/>
               </a:ext>
             </a:extLst>
           </p:cNvPr>
@@ -27260,7 +27260,7 @@
           <p:cNvPr id="5" name="">
             <a:extLst xmlns:a="http://schemas.openxmlformats.org/drawingml/2006/main">
               <a:ext uri="{FF2B5EF4-FFF2-40B4-BE49-F238E27FC236}">
-                <a16:creationId xmlns:a16="http://schemas.microsoft.com/office/drawing/2014/main" id="{29CF7255-E80C-4ABE-BF6B-57CCBC626E1B}"/>
+                <a16:creationId xmlns:a16="http://schemas.microsoft.com/office/drawing/2014/main" id="{FE0A7234-BDAC-4E3E-AA4E-9DA71344A681}"/>
               </a:ext>
             </a:extLst>
           </p:cNvPr>
@@ -27297,7 +27297,7 @@
           <p:cNvPr id="6" name="">
             <a:extLst xmlns:a="http://schemas.openxmlformats.org/drawingml/2006/main">
               <a:ext uri="{FF2B5EF4-FFF2-40B4-BE49-F238E27FC236}">
-                <a16:creationId xmlns:a16="http://schemas.microsoft.com/office/drawing/2014/main" id="{D61DADDC-F0BC-4CEE-B6FD-8883B83DC35F}"/>
+                <a16:creationId xmlns:a16="http://schemas.microsoft.com/office/drawing/2014/main" id="{A38FE16B-9D91-404C-9C20-8AACEAED24CA}"/>
               </a:ext>
             </a:extLst>
           </p:cNvPr>
@@ -27334,7 +27334,7 @@
           <p:cNvPr id="7" name="">
             <a:extLst xmlns:a="http://schemas.openxmlformats.org/drawingml/2006/main">
               <a:ext uri="{FF2B5EF4-FFF2-40B4-BE49-F238E27FC236}">
-                <a16:creationId xmlns:a16="http://schemas.microsoft.com/office/drawing/2014/main" id="{72460867-B3F7-4F78-82B8-1278023534AA}"/>
+                <a16:creationId xmlns:a16="http://schemas.microsoft.com/office/drawing/2014/main" id="{68C13679-58A5-4248-A180-11A8EACF8E0C}"/>
               </a:ext>
             </a:extLst>
           </p:cNvPr>
@@ -27371,7 +27371,7 @@
           <p:cNvPr id="8" name="">
             <a:extLst xmlns:a="http://schemas.openxmlformats.org/drawingml/2006/main">
               <a:ext uri="{FF2B5EF4-FFF2-40B4-BE49-F238E27FC236}">
-                <a16:creationId xmlns:a16="http://schemas.microsoft.com/office/drawing/2014/main" id="{9F2BBE74-AD1C-4E89-BCB9-B1C21C07A044}"/>
+                <a16:creationId xmlns:a16="http://schemas.microsoft.com/office/drawing/2014/main" id="{95A92317-E832-4BD8-8184-015117F39292}"/>
               </a:ext>
             </a:extLst>
           </p:cNvPr>
@@ -27408,7 +27408,7 @@
           <p:cNvPr id="9" name="">
             <a:extLst xmlns:a="http://schemas.openxmlformats.org/drawingml/2006/main">
               <a:ext uri="{FF2B5EF4-FFF2-40B4-BE49-F238E27FC236}">
-                <a16:creationId xmlns:a16="http://schemas.microsoft.com/office/drawing/2014/main" id="{6D117E33-0343-41A7-98AF-79D1523B6959}"/>
+                <a16:creationId xmlns:a16="http://schemas.microsoft.com/office/drawing/2014/main" id="{0645C02E-4A44-4377-845C-B2D75624DE87}"/>
               </a:ext>
             </a:extLst>
           </p:cNvPr>
@@ -27445,7 +27445,7 @@
           <p:cNvPr id="10" name="">
             <a:extLst xmlns:a="http://schemas.openxmlformats.org/drawingml/2006/main">
               <a:ext uri="{FF2B5EF4-FFF2-40B4-BE49-F238E27FC236}">
-                <a16:creationId xmlns:a16="http://schemas.microsoft.com/office/drawing/2014/main" id="{C91CA4D6-CC2F-47F7-9CF2-4937222A5E85}"/>
+                <a16:creationId xmlns:a16="http://schemas.microsoft.com/office/drawing/2014/main" id="{8F796D4D-3BEF-4C6C-95B9-343DF1DECDE2}"/>
               </a:ext>
             </a:extLst>
           </p:cNvPr>
@@ -27482,7 +27482,7 @@
           <p:cNvPr id="11" name="">
             <a:extLst xmlns:a="http://schemas.openxmlformats.org/drawingml/2006/main">
               <a:ext uri="{FF2B5EF4-FFF2-40B4-BE49-F238E27FC236}">
-                <a16:creationId xmlns:a16="http://schemas.microsoft.com/office/drawing/2014/main" id="{B9ED6BFB-C4FA-444D-BCF7-16F308C1AFEF}"/>
+                <a16:creationId xmlns:a16="http://schemas.microsoft.com/office/drawing/2014/main" id="{DA5417A2-3F3B-4604-A4FF-090DB9A12F46}"/>
               </a:ext>
             </a:extLst>
           </p:cNvPr>
@@ -27519,7 +27519,7 @@
           <p:cNvPr id="12" name="">
             <a:extLst xmlns:a="http://schemas.openxmlformats.org/drawingml/2006/main">
               <a:ext uri="{FF2B5EF4-FFF2-40B4-BE49-F238E27FC236}">
-                <a16:creationId xmlns:a16="http://schemas.microsoft.com/office/drawing/2014/main" id="{0D8456AF-757F-4833-BF44-E79488D7C028}"/>
+                <a16:creationId xmlns:a16="http://schemas.microsoft.com/office/drawing/2014/main" id="{94F12C8D-B88F-4C9E-8113-5FC5342E6363}"/>
               </a:ext>
             </a:extLst>
           </p:cNvPr>
@@ -27556,7 +27556,7 @@
           <p:cNvPr id="13" name="">
             <a:extLst xmlns:a="http://schemas.openxmlformats.org/drawingml/2006/main">
               <a:ext uri="{FF2B5EF4-FFF2-40B4-BE49-F238E27FC236}">
-                <a16:creationId xmlns:a16="http://schemas.microsoft.com/office/drawing/2014/main" id="{79863592-7F55-4C22-B920-980533469B5C}"/>
+                <a16:creationId xmlns:a16="http://schemas.microsoft.com/office/drawing/2014/main" id="{D3B4D569-567B-4C37-BB2F-D7E4FFCC80FD}"/>
               </a:ext>
             </a:extLst>
           </p:cNvPr>
@@ -27593,7 +27593,7 @@
           <p:cNvPr id="14" name="">
             <a:extLst xmlns:a="http://schemas.openxmlformats.org/drawingml/2006/main">
               <a:ext uri="{FF2B5EF4-FFF2-40B4-BE49-F238E27FC236}">
-                <a16:creationId xmlns:a16="http://schemas.microsoft.com/office/drawing/2014/main" id="{F619A10D-44B1-4F31-A3A7-7AF151B1D3EE}"/>
+                <a16:creationId xmlns:a16="http://schemas.microsoft.com/office/drawing/2014/main" id="{388F12C7-79C4-443F-9C3E-39D0C391EA8D}"/>
               </a:ext>
             </a:extLst>
           </p:cNvPr>
@@ -27630,7 +27630,7 @@
           <p:cNvPr id="15" name="">
             <a:extLst xmlns:a="http://schemas.openxmlformats.org/drawingml/2006/main">
               <a:ext uri="{FF2B5EF4-FFF2-40B4-BE49-F238E27FC236}">
-                <a16:creationId xmlns:a16="http://schemas.microsoft.com/office/drawing/2014/main" id="{F1E9C1F6-F0FD-4BA6-84D8-ACED607B4579}"/>
+                <a16:creationId xmlns:a16="http://schemas.microsoft.com/office/drawing/2014/main" id="{7B28F53E-ECAD-473E-A255-CCBCD943DA7B}"/>
               </a:ext>
             </a:extLst>
           </p:cNvPr>
@@ -27667,7 +27667,7 @@
           <p:cNvPr id="16" name="">
             <a:extLst xmlns:a="http://schemas.openxmlformats.org/drawingml/2006/main">
               <a:ext uri="{FF2B5EF4-FFF2-40B4-BE49-F238E27FC236}">
-                <a16:creationId xmlns:a16="http://schemas.microsoft.com/office/drawing/2014/main" id="{8AC64676-3735-477F-A7BF-CC0860A98A5C}"/>
+                <a16:creationId xmlns:a16="http://schemas.microsoft.com/office/drawing/2014/main" id="{72F6AA0B-75B7-4489-9DF8-2FF2194C8EFF}"/>
               </a:ext>
             </a:extLst>
           </p:cNvPr>
@@ -27704,7 +27704,7 @@
           <p:cNvPr id="17" name="">
             <a:extLst xmlns:a="http://schemas.openxmlformats.org/drawingml/2006/main">
               <a:ext uri="{FF2B5EF4-FFF2-40B4-BE49-F238E27FC236}">
-                <a16:creationId xmlns:a16="http://schemas.microsoft.com/office/drawing/2014/main" id="{2D0AA689-A08F-48BE-9E1A-B3B430D489CE}"/>
+                <a16:creationId xmlns:a16="http://schemas.microsoft.com/office/drawing/2014/main" id="{7A504F4D-438D-45A4-8622-3190CE890DFF}"/>
               </a:ext>
             </a:extLst>
           </p:cNvPr>
@@ -27741,7 +27741,7 @@
           <p:cNvPr id="18" name="">
             <a:extLst xmlns:a="http://schemas.openxmlformats.org/drawingml/2006/main">
               <a:ext uri="{FF2B5EF4-FFF2-40B4-BE49-F238E27FC236}">
-                <a16:creationId xmlns:a16="http://schemas.microsoft.com/office/drawing/2014/main" id="{AF1EF9EB-3870-49FB-B64D-3E9711B04A97}"/>
+                <a16:creationId xmlns:a16="http://schemas.microsoft.com/office/drawing/2014/main" id="{F9653B40-0B79-43ED-B421-232B0C69CC87}"/>
               </a:ext>
             </a:extLst>
           </p:cNvPr>
@@ -27778,7 +27778,7 @@
           <p:cNvPr id="19" name="">
             <a:extLst xmlns:a="http://schemas.openxmlformats.org/drawingml/2006/main">
               <a:ext uri="{FF2B5EF4-FFF2-40B4-BE49-F238E27FC236}">
-                <a16:creationId xmlns:a16="http://schemas.microsoft.com/office/drawing/2014/main" id="{064C73D8-FAFE-4B37-B846-BBF0A8ED19A7}"/>
+                <a16:creationId xmlns:a16="http://schemas.microsoft.com/office/drawing/2014/main" id="{386167FB-5D5C-4D8D-8AF7-51FDEF6EACBD}"/>
               </a:ext>
             </a:extLst>
           </p:cNvPr>
@@ -27815,7 +27815,7 @@
           <p:cNvPr id="20" name="">
             <a:extLst xmlns:a="http://schemas.openxmlformats.org/drawingml/2006/main">
               <a:ext uri="{FF2B5EF4-FFF2-40B4-BE49-F238E27FC236}">
-                <a16:creationId xmlns:a16="http://schemas.microsoft.com/office/drawing/2014/main" id="{489FA666-4388-4887-9BD8-3753FDC65017}"/>
+                <a16:creationId xmlns:a16="http://schemas.microsoft.com/office/drawing/2014/main" id="{E6217CF9-D1FA-4651-B2F4-24BC005B5256}"/>
               </a:ext>
             </a:extLst>
           </p:cNvPr>
@@ -27852,7 +27852,7 @@
           <p:cNvPr id="21" name="">
             <a:extLst xmlns:a="http://schemas.openxmlformats.org/drawingml/2006/main">
               <a:ext uri="{FF2B5EF4-FFF2-40B4-BE49-F238E27FC236}">
-                <a16:creationId xmlns:a16="http://schemas.microsoft.com/office/drawing/2014/main" id="{9A75DE07-8C80-400B-A067-D2956E771EA2}"/>
+                <a16:creationId xmlns:a16="http://schemas.microsoft.com/office/drawing/2014/main" id="{26EBE61D-E4E8-4784-A100-A1C0027EBF9A}"/>
               </a:ext>
             </a:extLst>
           </p:cNvPr>
@@ -27889,7 +27889,7 @@
           <p:cNvPr id="22" name="">
             <a:extLst xmlns:a="http://schemas.openxmlformats.org/drawingml/2006/main">
               <a:ext uri="{FF2B5EF4-FFF2-40B4-BE49-F238E27FC236}">
-                <a16:creationId xmlns:a16="http://schemas.microsoft.com/office/drawing/2014/main" id="{ADB93E57-57D0-4C63-AA0A-B0994626E397}"/>
+                <a16:creationId xmlns:a16="http://schemas.microsoft.com/office/drawing/2014/main" id="{004AAAAC-1376-4B16-916D-1D337444CCE8}"/>
               </a:ext>
             </a:extLst>
           </p:cNvPr>
@@ -27926,7 +27926,7 @@
           <p:cNvPr id="23" name="">
             <a:extLst xmlns:a="http://schemas.openxmlformats.org/drawingml/2006/main">
               <a:ext uri="{FF2B5EF4-FFF2-40B4-BE49-F238E27FC236}">
-                <a16:creationId xmlns:a16="http://schemas.microsoft.com/office/drawing/2014/main" id="{F65F7C5F-B1B9-4B4B-AAB4-F151D0168F95}"/>
+                <a16:creationId xmlns:a16="http://schemas.microsoft.com/office/drawing/2014/main" id="{37DA2786-05CE-4C77-9374-2C857CC0ACED}"/>
               </a:ext>
             </a:extLst>
           </p:cNvPr>
@@ -27963,7 +27963,7 @@
           <p:cNvPr id="24" name="">
             <a:extLst xmlns:a="http://schemas.openxmlformats.org/drawingml/2006/main">
               <a:ext uri="{FF2B5EF4-FFF2-40B4-BE49-F238E27FC236}">
-                <a16:creationId xmlns:a16="http://schemas.microsoft.com/office/drawing/2014/main" id="{EEC2E0C1-32C9-4503-97B5-62204B6642C1}"/>
+                <a16:creationId xmlns:a16="http://schemas.microsoft.com/office/drawing/2014/main" id="{C8B6AFAE-9F95-4682-ABAB-78DB061133BE}"/>
               </a:ext>
             </a:extLst>
           </p:cNvPr>
@@ -28000,7 +28000,7 @@
           <p:cNvPr id="25" name="">
             <a:extLst xmlns:a="http://schemas.openxmlformats.org/drawingml/2006/main">
               <a:ext uri="{FF2B5EF4-FFF2-40B4-BE49-F238E27FC236}">
-                <a16:creationId xmlns:a16="http://schemas.microsoft.com/office/drawing/2014/main" id="{6158075F-F738-450B-89F1-18AADA3852FC}"/>
+                <a16:creationId xmlns:a16="http://schemas.microsoft.com/office/drawing/2014/main" id="{46F43561-9C2A-452F-BF11-867C1C93E394}"/>
               </a:ext>
             </a:extLst>
           </p:cNvPr>
@@ -28037,7 +28037,7 @@
           <p:cNvPr id="26" name="">
             <a:extLst xmlns:a="http://schemas.openxmlformats.org/drawingml/2006/main">
               <a:ext uri="{FF2B5EF4-FFF2-40B4-BE49-F238E27FC236}">
-                <a16:creationId xmlns:a16="http://schemas.microsoft.com/office/drawing/2014/main" id="{AEFF7115-B546-4262-9107-9757BAD7DA2C}"/>
+                <a16:creationId xmlns:a16="http://schemas.microsoft.com/office/drawing/2014/main" id="{5352E412-47A8-4C1C-8144-F7AA00DA3917}"/>
               </a:ext>
             </a:extLst>
           </p:cNvPr>
@@ -28084,7 +28084,7 @@
           <p:cNvPr id="27" name="">
             <a:extLst xmlns:a="http://schemas.openxmlformats.org/drawingml/2006/main">
               <a:ext uri="{FF2B5EF4-FFF2-40B4-BE49-F238E27FC236}">
-                <a16:creationId xmlns:a16="http://schemas.microsoft.com/office/drawing/2014/main" id="{E643EC66-BDA5-48EB-BDBF-346AA65AE5E0}"/>
+                <a16:creationId xmlns:a16="http://schemas.microsoft.com/office/drawing/2014/main" id="{BFF5EB57-4BB2-4F64-92E6-561FE7810144}"/>
               </a:ext>
             </a:extLst>
           </p:cNvPr>
@@ -28131,7 +28131,7 @@
           <p:cNvPr id="28" name="">
             <a:extLst xmlns:a="http://schemas.openxmlformats.org/drawingml/2006/main">
               <a:ext uri="{FF2B5EF4-FFF2-40B4-BE49-F238E27FC236}">
-                <a16:creationId xmlns:a16="http://schemas.microsoft.com/office/drawing/2014/main" id="{89243CBB-9B71-4DEA-9282-B0F4FC8FAFF3}"/>
+                <a16:creationId xmlns:a16="http://schemas.microsoft.com/office/drawing/2014/main" id="{3D7FB9FC-CCFA-4294-83AA-8477936F3A3C}"/>
               </a:ext>
             </a:extLst>
           </p:cNvPr>
@@ -28195,7 +28195,7 @@
           <p:cNvPr id="29" name="">
             <a:extLst xmlns:a="http://schemas.openxmlformats.org/drawingml/2006/main">
               <a:ext uri="{FF2B5EF4-FFF2-40B4-BE49-F238E27FC236}">
-                <a16:creationId xmlns:a16="http://schemas.microsoft.com/office/drawing/2014/main" id="{582F58C8-EE57-45FE-9C3C-B9A750D59221}"/>
+                <a16:creationId xmlns:a16="http://schemas.microsoft.com/office/drawing/2014/main" id="{1E055B2E-5E34-4D35-8620-A02BD99D47CF}"/>
               </a:ext>
             </a:extLst>
           </p:cNvPr>
@@ -28259,7 +28259,7 @@
           <p:cNvPr id="30" name="">
             <a:extLst xmlns:a="http://schemas.openxmlformats.org/drawingml/2006/main">
               <a:ext uri="{FF2B5EF4-FFF2-40B4-BE49-F238E27FC236}">
-                <a16:creationId xmlns:a16="http://schemas.microsoft.com/office/drawing/2014/main" id="{CCA9AEE8-2F53-44AD-AB5E-D78796EB3CDA}"/>
+                <a16:creationId xmlns:a16="http://schemas.microsoft.com/office/drawing/2014/main" id="{9CDBB59B-9D68-48A2-97DC-472F4A29DB91}"/>
               </a:ext>
             </a:extLst>
           </p:cNvPr>
@@ -28323,7 +28323,7 @@
           <p:cNvPr id="31" name="">
             <a:extLst xmlns:a="http://schemas.openxmlformats.org/drawingml/2006/main">
               <a:ext uri="{FF2B5EF4-FFF2-40B4-BE49-F238E27FC236}">
-                <a16:creationId xmlns:a16="http://schemas.microsoft.com/office/drawing/2014/main" id="{681AEFBC-D549-417A-9B5C-797400A1FA9D}"/>
+                <a16:creationId xmlns:a16="http://schemas.microsoft.com/office/drawing/2014/main" id="{EB323A75-DDAD-45BF-A92D-9AD2DEAD5720}"/>
               </a:ext>
             </a:extLst>
           </p:cNvPr>
@@ -28387,7 +28387,7 @@
           <p:cNvPr id="32" name="">
             <a:extLst xmlns:a="http://schemas.openxmlformats.org/drawingml/2006/main">
               <a:ext uri="{FF2B5EF4-FFF2-40B4-BE49-F238E27FC236}">
-                <a16:creationId xmlns:a16="http://schemas.microsoft.com/office/drawing/2014/main" id="{3D03D277-7B25-4AE7-8808-0EA9ED42092D}"/>
+                <a16:creationId xmlns:a16="http://schemas.microsoft.com/office/drawing/2014/main" id="{50E6E922-F515-4E62-AA96-42CB215AD9CF}"/>
               </a:ext>
             </a:extLst>
           </p:cNvPr>
@@ -28424,7 +28424,7 @@
           <p:cNvPr id="33" name="">
             <a:extLst xmlns:a="http://schemas.openxmlformats.org/drawingml/2006/main">
               <a:ext uri="{FF2B5EF4-FFF2-40B4-BE49-F238E27FC236}">
-                <a16:creationId xmlns:a16="http://schemas.microsoft.com/office/drawing/2014/main" id="{F200F7CF-EEA9-4EF8-B402-1102423771E1}"/>
+                <a16:creationId xmlns:a16="http://schemas.microsoft.com/office/drawing/2014/main" id="{FBE3967E-7590-49F9-8691-4EB9959DEFEC}"/>
               </a:ext>
             </a:extLst>
           </p:cNvPr>
@@ -28461,7 +28461,7 @@
           <p:cNvPr id="34" name="">
             <a:extLst xmlns:a="http://schemas.openxmlformats.org/drawingml/2006/main">
               <a:ext uri="{FF2B5EF4-FFF2-40B4-BE49-F238E27FC236}">
-                <a16:creationId xmlns:a16="http://schemas.microsoft.com/office/drawing/2014/main" id="{D07F4549-DA57-4930-980B-7849A4F428CD}"/>
+                <a16:creationId xmlns:a16="http://schemas.microsoft.com/office/drawing/2014/main" id="{0CDAA4B9-5E2A-412A-8887-A76FB8E91FDB}"/>
               </a:ext>
             </a:extLst>
           </p:cNvPr>
@@ -28498,7 +28498,7 @@
           <p:cNvPr id="35" name="">
             <a:extLst xmlns:a="http://schemas.openxmlformats.org/drawingml/2006/main">
               <a:ext uri="{FF2B5EF4-FFF2-40B4-BE49-F238E27FC236}">
-                <a16:creationId xmlns:a16="http://schemas.microsoft.com/office/drawing/2014/main" id="{19F09577-D5C9-49BA-9355-93A671C7B018}"/>
+                <a16:creationId xmlns:a16="http://schemas.microsoft.com/office/drawing/2014/main" id="{FCC03B45-3BCE-42F1-AB39-E4BA14672BF2}"/>
               </a:ext>
             </a:extLst>
           </p:cNvPr>
@@ -28562,7 +28562,7 @@
           <p:cNvPr id="36" name="">
             <a:extLst xmlns:a="http://schemas.openxmlformats.org/drawingml/2006/main">
               <a:ext uri="{FF2B5EF4-FFF2-40B4-BE49-F238E27FC236}">
-                <a16:creationId xmlns:a16="http://schemas.microsoft.com/office/drawing/2014/main" id="{8250B4CB-CF76-4137-80D9-8D1D7E75495B}"/>
+                <a16:creationId xmlns:a16="http://schemas.microsoft.com/office/drawing/2014/main" id="{6D53E942-A0E9-4AD6-9342-AA9D2604752E}"/>
               </a:ext>
             </a:extLst>
           </p:cNvPr>
@@ -28626,7 +28626,7 @@
           <p:cNvPr id="37" name="">
             <a:extLst xmlns:a="http://schemas.openxmlformats.org/drawingml/2006/main">
               <a:ext uri="{FF2B5EF4-FFF2-40B4-BE49-F238E27FC236}">
-                <a16:creationId xmlns:a16="http://schemas.microsoft.com/office/drawing/2014/main" id="{0189C594-C99E-4508-8F46-F55B260316D7}"/>
+                <a16:creationId xmlns:a16="http://schemas.microsoft.com/office/drawing/2014/main" id="{0B69EAA1-16E4-4371-9DAA-612710ABAA1D}"/>
               </a:ext>
             </a:extLst>
           </p:cNvPr>
@@ -28759,7 +28759,7 @@
           <p:cNvPr id="38" name="">
             <a:extLst xmlns:a="http://schemas.openxmlformats.org/drawingml/2006/main">
               <a:ext uri="{FF2B5EF4-FFF2-40B4-BE49-F238E27FC236}">
-                <a16:creationId xmlns:a16="http://schemas.microsoft.com/office/drawing/2014/main" id="{4F20ABAC-81FE-4126-AD23-E8FE0EC7128F}"/>
+                <a16:creationId xmlns:a16="http://schemas.microsoft.com/office/drawing/2014/main" id="{C9BC2D01-EEB9-49CE-BC7C-22EDAE5E014F}"/>
               </a:ext>
             </a:extLst>
           </p:cNvPr>
@@ -28796,7 +28796,7 @@
           <p:cNvPr id="39" name="">
             <a:extLst xmlns:a="http://schemas.openxmlformats.org/drawingml/2006/main">
               <a:ext uri="{FF2B5EF4-FFF2-40B4-BE49-F238E27FC236}">
-                <a16:creationId xmlns:a16="http://schemas.microsoft.com/office/drawing/2014/main" id="{46C18673-D6B3-468A-9F57-58226521F3D0}"/>
+                <a16:creationId xmlns:a16="http://schemas.microsoft.com/office/drawing/2014/main" id="{4A0BD3AE-62A2-4798-ADF1-5D7451E3CD23}"/>
               </a:ext>
             </a:extLst>
           </p:cNvPr>
@@ -28833,7 +28833,7 @@
           <p:cNvPr id="40" name="">
             <a:extLst xmlns:a="http://schemas.openxmlformats.org/drawingml/2006/main">
               <a:ext uri="{FF2B5EF4-FFF2-40B4-BE49-F238E27FC236}">
-                <a16:creationId xmlns:a16="http://schemas.microsoft.com/office/drawing/2014/main" id="{7E3CBD52-93BA-432D-BD61-9E39996AC22A}"/>
+                <a16:creationId xmlns:a16="http://schemas.microsoft.com/office/drawing/2014/main" id="{9BF0B644-6FAF-44B5-8E9E-6F273ACA119F}"/>
               </a:ext>
             </a:extLst>
           </p:cNvPr>
@@ -28870,7 +28870,7 @@
           <p:cNvPr id="41" name="">
             <a:extLst xmlns:a="http://schemas.openxmlformats.org/drawingml/2006/main">
               <a:ext uri="{FF2B5EF4-FFF2-40B4-BE49-F238E27FC236}">
-                <a16:creationId xmlns:a16="http://schemas.microsoft.com/office/drawing/2014/main" id="{9803B77E-0052-4F55-9A86-D5501F9C0929}"/>
+                <a16:creationId xmlns:a16="http://schemas.microsoft.com/office/drawing/2014/main" id="{EAA8FB96-750D-4CFF-A195-3D0A76371D01}"/>
               </a:ext>
             </a:extLst>
           </p:cNvPr>
@@ -28934,7 +28934,7 @@
           <p:cNvPr id="42" name="">
             <a:extLst xmlns:a="http://schemas.openxmlformats.org/drawingml/2006/main">
               <a:ext uri="{FF2B5EF4-FFF2-40B4-BE49-F238E27FC236}">
-                <a16:creationId xmlns:a16="http://schemas.microsoft.com/office/drawing/2014/main" id="{236B0408-2F52-455B-B22B-2A815D9CF179}"/>
+                <a16:creationId xmlns:a16="http://schemas.microsoft.com/office/drawing/2014/main" id="{FAC97603-4700-4025-867E-8300919C3CE6}"/>
               </a:ext>
             </a:extLst>
           </p:cNvPr>
@@ -28998,7 +28998,7 @@
           <p:cNvPr id="43" name="">
             <a:extLst xmlns:a="http://schemas.openxmlformats.org/drawingml/2006/main">
               <a:ext uri="{FF2B5EF4-FFF2-40B4-BE49-F238E27FC236}">
-                <a16:creationId xmlns:a16="http://schemas.microsoft.com/office/drawing/2014/main" id="{5C10D180-384C-49B4-8100-F8C10A1E2530}"/>
+                <a16:creationId xmlns:a16="http://schemas.microsoft.com/office/drawing/2014/main" id="{1E23D80C-13EC-4A12-BB56-E7870CCAC68B}"/>
               </a:ext>
             </a:extLst>
           </p:cNvPr>
@@ -29131,7 +29131,7 @@
           <p:cNvPr id="44" name="">
             <a:extLst xmlns:a="http://schemas.openxmlformats.org/drawingml/2006/main">
               <a:ext uri="{FF2B5EF4-FFF2-40B4-BE49-F238E27FC236}">
-                <a16:creationId xmlns:a16="http://schemas.microsoft.com/office/drawing/2014/main" id="{09F129A1-E97C-40DB-AA11-D404BE501508}"/>
+                <a16:creationId xmlns:a16="http://schemas.microsoft.com/office/drawing/2014/main" id="{CA8A8183-8FF6-4300-B8CE-5A14BB4A943B}"/>
               </a:ext>
             </a:extLst>
           </p:cNvPr>
@@ -29168,7 +29168,7 @@
           <p:cNvPr id="45" name="">
             <a:extLst xmlns:a="http://schemas.openxmlformats.org/drawingml/2006/main">
               <a:ext uri="{FF2B5EF4-FFF2-40B4-BE49-F238E27FC236}">
-                <a16:creationId xmlns:a16="http://schemas.microsoft.com/office/drawing/2014/main" id="{1E866D5A-205C-4389-B673-792B6C897599}"/>
+                <a16:creationId xmlns:a16="http://schemas.microsoft.com/office/drawing/2014/main" id="{DC7BEA4B-42C1-43C0-8367-EF579A4F0553}"/>
               </a:ext>
             </a:extLst>
           </p:cNvPr>
@@ -29205,7 +29205,7 @@
           <p:cNvPr id="46" name="">
             <a:extLst xmlns:a="http://schemas.openxmlformats.org/drawingml/2006/main">
               <a:ext uri="{FF2B5EF4-FFF2-40B4-BE49-F238E27FC236}">
-                <a16:creationId xmlns:a16="http://schemas.microsoft.com/office/drawing/2014/main" id="{4F8BCCD6-6928-4569-9CED-1CB789469781}"/>
+                <a16:creationId xmlns:a16="http://schemas.microsoft.com/office/drawing/2014/main" id="{2954B521-FC81-4A23-A8E7-60054B74DD7C}"/>
               </a:ext>
             </a:extLst>
           </p:cNvPr>
@@ -29242,7 +29242,7 @@
           <p:cNvPr id="47" name="">
             <a:extLst xmlns:a="http://schemas.openxmlformats.org/drawingml/2006/main">
               <a:ext uri="{FF2B5EF4-FFF2-40B4-BE49-F238E27FC236}">
-                <a16:creationId xmlns:a16="http://schemas.microsoft.com/office/drawing/2014/main" id="{221AEC12-5FFF-46C9-9683-D32E5C91AB4A}"/>
+                <a16:creationId xmlns:a16="http://schemas.microsoft.com/office/drawing/2014/main" id="{89A61940-2893-4FC2-A495-40B2880729E5}"/>
               </a:ext>
             </a:extLst>
           </p:cNvPr>
@@ -29306,7 +29306,7 @@
           <p:cNvPr id="48" name="">
             <a:extLst xmlns:a="http://schemas.openxmlformats.org/drawingml/2006/main">
               <a:ext uri="{FF2B5EF4-FFF2-40B4-BE49-F238E27FC236}">
-                <a16:creationId xmlns:a16="http://schemas.microsoft.com/office/drawing/2014/main" id="{455353B5-BA77-4257-955D-96709F7CC043}"/>
+                <a16:creationId xmlns:a16="http://schemas.microsoft.com/office/drawing/2014/main" id="{E620E102-127E-4B2B-A720-5DFE50AC5555}"/>
               </a:ext>
             </a:extLst>
           </p:cNvPr>
@@ -29370,7 +29370,7 @@
           <p:cNvPr id="49" name="">
             <a:extLst xmlns:a="http://schemas.openxmlformats.org/drawingml/2006/main">
               <a:ext uri="{FF2B5EF4-FFF2-40B4-BE49-F238E27FC236}">
-                <a16:creationId xmlns:a16="http://schemas.microsoft.com/office/drawing/2014/main" id="{4C5638E2-BD7C-48B9-BF4F-B309F1ED1BCC}"/>
+                <a16:creationId xmlns:a16="http://schemas.microsoft.com/office/drawing/2014/main" id="{D167FF92-87F8-4CEF-8470-A5F4AF549A56}"/>
               </a:ext>
             </a:extLst>
           </p:cNvPr>
@@ -29503,7 +29503,7 @@
           <p:cNvPr id="50" name="">
             <a:extLst xmlns:a="http://schemas.openxmlformats.org/drawingml/2006/main">
               <a:ext uri="{FF2B5EF4-FFF2-40B4-BE49-F238E27FC236}">
-                <a16:creationId xmlns:a16="http://schemas.microsoft.com/office/drawing/2014/main" id="{4ED872E9-5DF7-4C2C-ADF8-11C1B483C5F5}"/>
+                <a16:creationId xmlns:a16="http://schemas.microsoft.com/office/drawing/2014/main" id="{4F12F860-81DD-4302-A881-CD6C5C4C75F8}"/>
               </a:ext>
             </a:extLst>
           </p:cNvPr>
@@ -29540,7 +29540,7 @@
           <p:cNvPr id="51" name="">
             <a:extLst xmlns:a="http://schemas.openxmlformats.org/drawingml/2006/main">
               <a:ext uri="{FF2B5EF4-FFF2-40B4-BE49-F238E27FC236}">
-                <a16:creationId xmlns:a16="http://schemas.microsoft.com/office/drawing/2014/main" id="{8106B022-AFB4-43C2-9260-A38871A6186B}"/>
+                <a16:creationId xmlns:a16="http://schemas.microsoft.com/office/drawing/2014/main" id="{88C3F27E-2D4E-4C34-BB74-1CC5A47FD3DA}"/>
               </a:ext>
             </a:extLst>
           </p:cNvPr>
@@ -29577,7 +29577,7 @@
           <p:cNvPr id="52" name="">
             <a:extLst xmlns:a="http://schemas.openxmlformats.org/drawingml/2006/main">
               <a:ext uri="{FF2B5EF4-FFF2-40B4-BE49-F238E27FC236}">
-                <a16:creationId xmlns:a16="http://schemas.microsoft.com/office/drawing/2014/main" id="{89311472-4A69-4474-912D-9C6A89F61040}"/>
+                <a16:creationId xmlns:a16="http://schemas.microsoft.com/office/drawing/2014/main" id="{577FBBF4-EB9E-4C6F-9A80-3240754A3E35}"/>
               </a:ext>
             </a:extLst>
           </p:cNvPr>
@@ -29614,7 +29614,7 @@
           <p:cNvPr id="53" name="">
             <a:extLst xmlns:a="http://schemas.openxmlformats.org/drawingml/2006/main">
               <a:ext uri="{FF2B5EF4-FFF2-40B4-BE49-F238E27FC236}">
-                <a16:creationId xmlns:a16="http://schemas.microsoft.com/office/drawing/2014/main" id="{6F0300FE-0EE1-45E8-9D0A-710644F0ACB8}"/>
+                <a16:creationId xmlns:a16="http://schemas.microsoft.com/office/drawing/2014/main" id="{DA87A9AC-D618-41C8-A6D9-B1F80B707AFC}"/>
               </a:ext>
             </a:extLst>
           </p:cNvPr>
@@ -29678,7 +29678,7 @@
           <p:cNvPr id="54" name="">
             <a:extLst xmlns:a="http://schemas.openxmlformats.org/drawingml/2006/main">
               <a:ext uri="{FF2B5EF4-FFF2-40B4-BE49-F238E27FC236}">
-                <a16:creationId xmlns:a16="http://schemas.microsoft.com/office/drawing/2014/main" id="{B0C07ACD-6F8C-404E-829C-AF235201F921}"/>
+                <a16:creationId xmlns:a16="http://schemas.microsoft.com/office/drawing/2014/main" id="{7383B75C-4F28-4648-9C0A-A465A6A0A5AB}"/>
               </a:ext>
             </a:extLst>
           </p:cNvPr>
@@ -29742,7 +29742,7 @@
           <p:cNvPr id="55" name="">
             <a:extLst xmlns:a="http://schemas.openxmlformats.org/drawingml/2006/main">
               <a:ext uri="{FF2B5EF4-FFF2-40B4-BE49-F238E27FC236}">
-                <a16:creationId xmlns:a16="http://schemas.microsoft.com/office/drawing/2014/main" id="{0AF1FC47-F8FC-400E-A5FF-12A7433D8599}"/>
+                <a16:creationId xmlns:a16="http://schemas.microsoft.com/office/drawing/2014/main" id="{9E31AD21-8FB2-48EF-96F9-7CED62724A72}"/>
               </a:ext>
             </a:extLst>
           </p:cNvPr>
@@ -29875,7 +29875,7 @@
           <p:cNvPr id="56" name="">
             <a:extLst xmlns:a="http://schemas.openxmlformats.org/drawingml/2006/main">
               <a:ext uri="{FF2B5EF4-FFF2-40B4-BE49-F238E27FC236}">
-                <a16:creationId xmlns:a16="http://schemas.microsoft.com/office/drawing/2014/main" id="{A04D6709-F44F-4FF8-A836-E97C26AFEBC5}"/>
+                <a16:creationId xmlns:a16="http://schemas.microsoft.com/office/drawing/2014/main" id="{0D4E51A9-E03F-47E9-9992-D7AD238A1CFB}"/>
               </a:ext>
             </a:extLst>
           </p:cNvPr>
@@ -29912,7 +29912,7 @@
           <p:cNvPr id="57" name="">
             <a:extLst xmlns:a="http://schemas.openxmlformats.org/drawingml/2006/main">
               <a:ext uri="{FF2B5EF4-FFF2-40B4-BE49-F238E27FC236}">
-                <a16:creationId xmlns:a16="http://schemas.microsoft.com/office/drawing/2014/main" id="{39C253BF-E774-49CD-90DA-2D1D76444B9F}"/>
+                <a16:creationId xmlns:a16="http://schemas.microsoft.com/office/drawing/2014/main" id="{5756E614-DDCC-4260-9E66-08F60FA631EF}"/>
               </a:ext>
             </a:extLst>
           </p:cNvPr>
@@ -29976,7 +29976,7 @@
           <p:cNvPr id="58" name="">
             <a:extLst xmlns:a="http://schemas.openxmlformats.org/drawingml/2006/main">
               <a:ext uri="{FF2B5EF4-FFF2-40B4-BE49-F238E27FC236}">
-                <a16:creationId xmlns:a16="http://schemas.microsoft.com/office/drawing/2014/main" id="{18312BC6-98E4-47FA-B1AC-0C68DBFF03E0}"/>
+                <a16:creationId xmlns:a16="http://schemas.microsoft.com/office/drawing/2014/main" id="{9D7E308F-F41B-468C-8C65-DDD5D997EF6C}"/>
               </a:ext>
             </a:extLst>
           </p:cNvPr>
@@ -30013,7 +30013,7 @@
           <p:cNvPr id="59" name="">
             <a:extLst xmlns:a="http://schemas.openxmlformats.org/drawingml/2006/main">
               <a:ext uri="{FF2B5EF4-FFF2-40B4-BE49-F238E27FC236}">
-                <a16:creationId xmlns:a16="http://schemas.microsoft.com/office/drawing/2014/main" id="{C148384A-40F2-4BF4-940D-E8797D5DED3B}"/>
+                <a16:creationId xmlns:a16="http://schemas.microsoft.com/office/drawing/2014/main" id="{59CFC6CA-0EE6-4707-98D9-4063964D1B41}"/>
               </a:ext>
             </a:extLst>
           </p:cNvPr>
@@ -30077,7 +30077,7 @@
           <p:cNvPr id="60" name="">
             <a:extLst xmlns:a="http://schemas.openxmlformats.org/drawingml/2006/main">
               <a:ext uri="{FF2B5EF4-FFF2-40B4-BE49-F238E27FC236}">
-                <a16:creationId xmlns:a16="http://schemas.microsoft.com/office/drawing/2014/main" id="{F1963182-122C-49DC-8C93-3898EEE5080C}"/>
+                <a16:creationId xmlns:a16="http://schemas.microsoft.com/office/drawing/2014/main" id="{F2808644-50BE-405E-908A-3288ED3E84B6}"/>
               </a:ext>
             </a:extLst>
           </p:cNvPr>
@@ -30114,7 +30114,7 @@
           <p:cNvPr id="61" name="">
             <a:extLst xmlns:a="http://schemas.openxmlformats.org/drawingml/2006/main">
               <a:ext uri="{FF2B5EF4-FFF2-40B4-BE49-F238E27FC236}">
-                <a16:creationId xmlns:a16="http://schemas.microsoft.com/office/drawing/2014/main" id="{21AD5FD1-0FF9-44E2-B5A7-8CD0F1DFA0B3}"/>
+                <a16:creationId xmlns:a16="http://schemas.microsoft.com/office/drawing/2014/main" id="{53EEA434-89D7-47FD-9ACC-5D6BED3B0015}"/>
               </a:ext>
             </a:extLst>
           </p:cNvPr>
@@ -30178,7 +30178,7 @@
           <p:cNvPr id="62" name="">
             <a:extLst xmlns:a="http://schemas.openxmlformats.org/drawingml/2006/main">
               <a:ext uri="{FF2B5EF4-FFF2-40B4-BE49-F238E27FC236}">
-                <a16:creationId xmlns:a16="http://schemas.microsoft.com/office/drawing/2014/main" id="{28D38711-BF74-4A91-BF27-1C9CC18AF902}"/>
+                <a16:creationId xmlns:a16="http://schemas.microsoft.com/office/drawing/2014/main" id="{E6BCD9D6-55A7-4A3F-8ED9-EAE8C0F5A54A}"/>
               </a:ext>
             </a:extLst>
           </p:cNvPr>
@@ -30242,7 +30242,7 @@
           <p:cNvPr id="63" name="">
             <a:extLst xmlns:a="http://schemas.openxmlformats.org/drawingml/2006/main">
               <a:ext uri="{FF2B5EF4-FFF2-40B4-BE49-F238E27FC236}">
-                <a16:creationId xmlns:a16="http://schemas.microsoft.com/office/drawing/2014/main" id="{4000A653-D9CD-4977-B024-F0D6213FF69E}"/>
+                <a16:creationId xmlns:a16="http://schemas.microsoft.com/office/drawing/2014/main" id="{46A4E94C-C8F3-4151-8559-40001D42778F}"/>
               </a:ext>
             </a:extLst>
           </p:cNvPr>
@@ -30279,7 +30279,7 @@
           <p:cNvPr id="64" name="">
             <a:extLst xmlns:a="http://schemas.openxmlformats.org/drawingml/2006/main">
               <a:ext uri="{FF2B5EF4-FFF2-40B4-BE49-F238E27FC236}">
-                <a16:creationId xmlns:a16="http://schemas.microsoft.com/office/drawing/2014/main" id="{C435D8C9-03A1-4858-82DB-7EBD9F65D0E3}"/>
+                <a16:creationId xmlns:a16="http://schemas.microsoft.com/office/drawing/2014/main" id="{00953E04-6A57-42F2-B386-A3D5C2D31DCA}"/>
               </a:ext>
             </a:extLst>
           </p:cNvPr>
@@ -30341,7 +30341,7 @@
     </p:spTree>
     <p:extLst>
       <p:ext uri="{BB962C8B-B14F-4D97-AF65-F5344CB8AC3E}">
-        <p14:creationId xmlns:p14="http://schemas.microsoft.com/office/powerpoint/2010/main" val="1400597974"/>
+        <p14:creationId xmlns:p14="http://schemas.microsoft.com/office/powerpoint/2010/main" val="828155829"/>
       </p:ext>
     </p:extLst>
   </p:cSld>
@@ -30365,7 +30365,7 @@
           <p:cNvPr id="1" name="">
             <a:extLst xmlns:a="http://schemas.openxmlformats.org/drawingml/2006/main">
               <a:ext uri="{FF2B5EF4-FFF2-40B4-BE49-F238E27FC236}">
-                <a16:creationId xmlns:a16="http://schemas.microsoft.com/office/drawing/2014/main" id="{72FF9230-0EC0-47FA-BE4B-BD594FADCB0D}"/>
+                <a16:creationId xmlns:a16="http://schemas.microsoft.com/office/drawing/2014/main" id="{B33F5828-D7FA-4157-99E1-69485D961A0C}"/>
               </a:ext>
             </a:extLst>
           </p:cNvPr>
@@ -30400,7 +30400,7 @@
           <p:cNvPr id="2" name="">
             <a:extLst xmlns:a="http://schemas.openxmlformats.org/drawingml/2006/main">
               <a:ext uri="{FF2B5EF4-FFF2-40B4-BE49-F238E27FC236}">
-                <a16:creationId xmlns:a16="http://schemas.microsoft.com/office/drawing/2014/main" id="{279D403F-42FF-4147-A3E0-10960020F444}"/>
+                <a16:creationId xmlns:a16="http://schemas.microsoft.com/office/drawing/2014/main" id="{5CF4EA91-5D95-4B48-98D3-0ABE0CD9C394}"/>
               </a:ext>
             </a:extLst>
           </p:cNvPr>
@@ -30446,7 +30446,7 @@
           <p:cNvPr id="3" name="">
             <a:extLst xmlns:a="http://schemas.openxmlformats.org/drawingml/2006/main">
               <a:ext uri="{FF2B5EF4-FFF2-40B4-BE49-F238E27FC236}">
-                <a16:creationId xmlns:a16="http://schemas.microsoft.com/office/drawing/2014/main" id="{8117B9AC-7474-4B1E-BFEF-6EFEBAAAB7AA}"/>
+                <a16:creationId xmlns:a16="http://schemas.microsoft.com/office/drawing/2014/main" id="{8EEAF70D-8009-436B-8ADF-73FB90CD58B8}"/>
               </a:ext>
             </a:extLst>
           </p:cNvPr>
@@ -30483,7 +30483,7 @@
           <p:cNvPr id="4" name="">
             <a:extLst xmlns:a="http://schemas.openxmlformats.org/drawingml/2006/main">
               <a:ext uri="{FF2B5EF4-FFF2-40B4-BE49-F238E27FC236}">
-                <a16:creationId xmlns:a16="http://schemas.microsoft.com/office/drawing/2014/main" id="{8D487759-9253-40BB-ABA5-6C36022EFA78}"/>
+                <a16:creationId xmlns:a16="http://schemas.microsoft.com/office/drawing/2014/main" id="{CBA84F0A-6AAD-4DD4-9CC4-3F2399FD95EE}"/>
               </a:ext>
             </a:extLst>
           </p:cNvPr>
@@ -30520,7 +30520,7 @@
           <p:cNvPr id="5" name="">
             <a:extLst xmlns:a="http://schemas.openxmlformats.org/drawingml/2006/main">
               <a:ext uri="{FF2B5EF4-FFF2-40B4-BE49-F238E27FC236}">
-                <a16:creationId xmlns:a16="http://schemas.microsoft.com/office/drawing/2014/main" id="{88D9B413-8726-40D9-996A-F6978877C15B}"/>
+                <a16:creationId xmlns:a16="http://schemas.microsoft.com/office/drawing/2014/main" id="{42121F38-8CE7-4721-880D-E0F4BFBB816D}"/>
               </a:ext>
             </a:extLst>
           </p:cNvPr>
@@ -30557,7 +30557,7 @@
           <p:cNvPr id="6" name="">
             <a:extLst xmlns:a="http://schemas.openxmlformats.org/drawingml/2006/main">
               <a:ext uri="{FF2B5EF4-FFF2-40B4-BE49-F238E27FC236}">
-                <a16:creationId xmlns:a16="http://schemas.microsoft.com/office/drawing/2014/main" id="{4CFA9DED-12E6-45FE-A00F-E10C33699EE3}"/>
+                <a16:creationId xmlns:a16="http://schemas.microsoft.com/office/drawing/2014/main" id="{C17D802F-136C-49B1-9738-F88A08EDDD7D}"/>
               </a:ext>
             </a:extLst>
           </p:cNvPr>
@@ -30594,7 +30594,7 @@
           <p:cNvPr id="7" name="">
             <a:extLst xmlns:a="http://schemas.openxmlformats.org/drawingml/2006/main">
               <a:ext uri="{FF2B5EF4-FFF2-40B4-BE49-F238E27FC236}">
-                <a16:creationId xmlns:a16="http://schemas.microsoft.com/office/drawing/2014/main" id="{FC729D87-B552-4EF4-8BB6-90ECDF724364}"/>
+                <a16:creationId xmlns:a16="http://schemas.microsoft.com/office/drawing/2014/main" id="{0BA85D63-692D-4F60-97C7-BAABD5C45DF1}"/>
               </a:ext>
             </a:extLst>
           </p:cNvPr>
@@ -30631,7 +30631,7 @@
           <p:cNvPr id="8" name="">
             <a:extLst xmlns:a="http://schemas.openxmlformats.org/drawingml/2006/main">
               <a:ext uri="{FF2B5EF4-FFF2-40B4-BE49-F238E27FC236}">
-                <a16:creationId xmlns:a16="http://schemas.microsoft.com/office/drawing/2014/main" id="{ECD6C6D2-E134-41A6-8951-7F29763C53E3}"/>
+                <a16:creationId xmlns:a16="http://schemas.microsoft.com/office/drawing/2014/main" id="{4D4F6CB5-F246-4C8D-BD2C-A780A7D8188E}"/>
               </a:ext>
             </a:extLst>
           </p:cNvPr>
@@ -30668,7 +30668,7 @@
           <p:cNvPr id="9" name="">
             <a:extLst xmlns:a="http://schemas.openxmlformats.org/drawingml/2006/main">
               <a:ext uri="{FF2B5EF4-FFF2-40B4-BE49-F238E27FC236}">
-                <a16:creationId xmlns:a16="http://schemas.microsoft.com/office/drawing/2014/main" id="{E6834A29-71CF-41A8-BE48-AF00300AEFC5}"/>
+                <a16:creationId xmlns:a16="http://schemas.microsoft.com/office/drawing/2014/main" id="{92FA05B0-4E1D-4AB3-B5D5-57C10D76FFAA}"/>
               </a:ext>
             </a:extLst>
           </p:cNvPr>
@@ -30705,7 +30705,7 @@
           <p:cNvPr id="10" name="">
             <a:extLst xmlns:a="http://schemas.openxmlformats.org/drawingml/2006/main">
               <a:ext uri="{FF2B5EF4-FFF2-40B4-BE49-F238E27FC236}">
-                <a16:creationId xmlns:a16="http://schemas.microsoft.com/office/drawing/2014/main" id="{B17B1917-DEEE-4C24-A18C-1A9E341E72F7}"/>
+                <a16:creationId xmlns:a16="http://schemas.microsoft.com/office/drawing/2014/main" id="{326D1F5C-CF1F-449A-9363-C52AD91837A4}"/>
               </a:ext>
             </a:extLst>
           </p:cNvPr>
@@ -30742,7 +30742,7 @@
           <p:cNvPr id="11" name="">
             <a:extLst xmlns:a="http://schemas.openxmlformats.org/drawingml/2006/main">
               <a:ext uri="{FF2B5EF4-FFF2-40B4-BE49-F238E27FC236}">
-                <a16:creationId xmlns:a16="http://schemas.microsoft.com/office/drawing/2014/main" id="{5B432552-AD1E-4E15-ABB1-BCEAEC66BBD1}"/>
+                <a16:creationId xmlns:a16="http://schemas.microsoft.com/office/drawing/2014/main" id="{F9CB046A-4D8C-434B-80D8-E6D95522F5B1}"/>
               </a:ext>
             </a:extLst>
           </p:cNvPr>
@@ -30779,7 +30779,7 @@
           <p:cNvPr id="12" name="">
             <a:extLst xmlns:a="http://schemas.openxmlformats.org/drawingml/2006/main">
               <a:ext uri="{FF2B5EF4-FFF2-40B4-BE49-F238E27FC236}">
-                <a16:creationId xmlns:a16="http://schemas.microsoft.com/office/drawing/2014/main" id="{53441020-E82C-4D3B-A2EB-7D17ED902DA9}"/>
+                <a16:creationId xmlns:a16="http://schemas.microsoft.com/office/drawing/2014/main" id="{2645708B-37E1-44F6-AD13-3814C3691967}"/>
               </a:ext>
             </a:extLst>
           </p:cNvPr>
@@ -30816,7 +30816,7 @@
           <p:cNvPr id="13" name="">
             <a:extLst xmlns:a="http://schemas.openxmlformats.org/drawingml/2006/main">
               <a:ext uri="{FF2B5EF4-FFF2-40B4-BE49-F238E27FC236}">
-                <a16:creationId xmlns:a16="http://schemas.microsoft.com/office/drawing/2014/main" id="{0E4040B9-025F-434C-B5D4-666FD5E4963A}"/>
+                <a16:creationId xmlns:a16="http://schemas.microsoft.com/office/drawing/2014/main" id="{9FB086BF-C242-4ADC-AF40-DF69192343C2}"/>
               </a:ext>
             </a:extLst>
           </p:cNvPr>
@@ -30853,7 +30853,7 @@
           <p:cNvPr id="14" name="">
             <a:extLst xmlns:a="http://schemas.openxmlformats.org/drawingml/2006/main">
               <a:ext uri="{FF2B5EF4-FFF2-40B4-BE49-F238E27FC236}">
-                <a16:creationId xmlns:a16="http://schemas.microsoft.com/office/drawing/2014/main" id="{5A8497A2-FC15-4138-BC72-336C0A4A2EAE}"/>
+                <a16:creationId xmlns:a16="http://schemas.microsoft.com/office/drawing/2014/main" id="{F656323B-7E25-4DA0-BC33-E2D2F614F381}"/>
               </a:ext>
             </a:extLst>
           </p:cNvPr>
@@ -30890,7 +30890,7 @@
           <p:cNvPr id="15" name="">
             <a:extLst xmlns:a="http://schemas.openxmlformats.org/drawingml/2006/main">
               <a:ext uri="{FF2B5EF4-FFF2-40B4-BE49-F238E27FC236}">
-                <a16:creationId xmlns:a16="http://schemas.microsoft.com/office/drawing/2014/main" id="{8459AB6B-D343-4635-A128-92C086B4EFD7}"/>
+                <a16:creationId xmlns:a16="http://schemas.microsoft.com/office/drawing/2014/main" id="{88DA85E6-8F31-4235-8178-1F52D97BFC68}"/>
               </a:ext>
             </a:extLst>
           </p:cNvPr>
@@ -30927,7 +30927,7 @@
           <p:cNvPr id="16" name="">
             <a:extLst xmlns:a="http://schemas.openxmlformats.org/drawingml/2006/main">
               <a:ext uri="{FF2B5EF4-FFF2-40B4-BE49-F238E27FC236}">
-                <a16:creationId xmlns:a16="http://schemas.microsoft.com/office/drawing/2014/main" id="{27EAC33E-DBA4-42D5-95C1-1158716FD28E}"/>
+                <a16:creationId xmlns:a16="http://schemas.microsoft.com/office/drawing/2014/main" id="{21D0260F-162B-443B-B053-54E72332B161}"/>
               </a:ext>
             </a:extLst>
           </p:cNvPr>
@@ -30964,7 +30964,7 @@
           <p:cNvPr id="17" name="">
             <a:extLst xmlns:a="http://schemas.openxmlformats.org/drawingml/2006/main">
               <a:ext uri="{FF2B5EF4-FFF2-40B4-BE49-F238E27FC236}">
-                <a16:creationId xmlns:a16="http://schemas.microsoft.com/office/drawing/2014/main" id="{E1BC071A-F5EB-4FF0-AE80-9602470F00E7}"/>
+                <a16:creationId xmlns:a16="http://schemas.microsoft.com/office/drawing/2014/main" id="{845F0FC2-6C29-47AE-B568-29545EF5EED8}"/>
               </a:ext>
             </a:extLst>
           </p:cNvPr>
@@ -31001,7 +31001,7 @@
           <p:cNvPr id="18" name="">
             <a:extLst xmlns:a="http://schemas.openxmlformats.org/drawingml/2006/main">
               <a:ext uri="{FF2B5EF4-FFF2-40B4-BE49-F238E27FC236}">
-                <a16:creationId xmlns:a16="http://schemas.microsoft.com/office/drawing/2014/main" id="{4C5C3A04-09B0-416C-A60E-CB0697FC4209}"/>
+                <a16:creationId xmlns:a16="http://schemas.microsoft.com/office/drawing/2014/main" id="{2F334840-A016-40DE-8023-49D56E951C9C}"/>
               </a:ext>
             </a:extLst>
           </p:cNvPr>
@@ -31038,7 +31038,7 @@
           <p:cNvPr id="19" name="">
             <a:extLst xmlns:a="http://schemas.openxmlformats.org/drawingml/2006/main">
               <a:ext uri="{FF2B5EF4-FFF2-40B4-BE49-F238E27FC236}">
-                <a16:creationId xmlns:a16="http://schemas.microsoft.com/office/drawing/2014/main" id="{CD15C37A-F15F-4314-B3FC-A8AD8794EE2A}"/>
+                <a16:creationId xmlns:a16="http://schemas.microsoft.com/office/drawing/2014/main" id="{2D2C1CC8-7367-41BF-B497-FD7633CEF4D5}"/>
               </a:ext>
             </a:extLst>
           </p:cNvPr>
@@ -31075,7 +31075,7 @@
           <p:cNvPr id="20" name="">
             <a:extLst xmlns:a="http://schemas.openxmlformats.org/drawingml/2006/main">
               <a:ext uri="{FF2B5EF4-FFF2-40B4-BE49-F238E27FC236}">
-                <a16:creationId xmlns:a16="http://schemas.microsoft.com/office/drawing/2014/main" id="{B4C4D256-8E4D-42AD-981F-A2E84AA39B62}"/>
+                <a16:creationId xmlns:a16="http://schemas.microsoft.com/office/drawing/2014/main" id="{B3EC8F00-E3AB-4030-A852-EE356FD69645}"/>
               </a:ext>
             </a:extLst>
           </p:cNvPr>
@@ -31112,7 +31112,7 @@
           <p:cNvPr id="21" name="">
             <a:extLst xmlns:a="http://schemas.openxmlformats.org/drawingml/2006/main">
               <a:ext uri="{FF2B5EF4-FFF2-40B4-BE49-F238E27FC236}">
-                <a16:creationId xmlns:a16="http://schemas.microsoft.com/office/drawing/2014/main" id="{A707F8A5-B89F-443E-BAE2-02B814DB1C92}"/>
+                <a16:creationId xmlns:a16="http://schemas.microsoft.com/office/drawing/2014/main" id="{694718AB-5C66-4AF0-8034-9F283A8CF582}"/>
               </a:ext>
             </a:extLst>
           </p:cNvPr>
@@ -31149,7 +31149,7 @@
           <p:cNvPr id="22" name="">
             <a:extLst xmlns:a="http://schemas.openxmlformats.org/drawingml/2006/main">
               <a:ext uri="{FF2B5EF4-FFF2-40B4-BE49-F238E27FC236}">
-                <a16:creationId xmlns:a16="http://schemas.microsoft.com/office/drawing/2014/main" id="{DC17407C-8594-42AE-A792-F4C76543DC23}"/>
+                <a16:creationId xmlns:a16="http://schemas.microsoft.com/office/drawing/2014/main" id="{D5EBA21E-061C-40AD-BA6F-93E49E35B514}"/>
               </a:ext>
             </a:extLst>
           </p:cNvPr>
@@ -31186,7 +31186,7 @@
           <p:cNvPr id="23" name="">
             <a:extLst xmlns:a="http://schemas.openxmlformats.org/drawingml/2006/main">
               <a:ext uri="{FF2B5EF4-FFF2-40B4-BE49-F238E27FC236}">
-                <a16:creationId xmlns:a16="http://schemas.microsoft.com/office/drawing/2014/main" id="{F68446A3-189C-45D1-962D-04E87911117A}"/>
+                <a16:creationId xmlns:a16="http://schemas.microsoft.com/office/drawing/2014/main" id="{360A39C7-6212-4506-804E-4459658F8EA0}"/>
               </a:ext>
             </a:extLst>
           </p:cNvPr>
@@ -31223,7 +31223,7 @@
           <p:cNvPr id="24" name="">
             <a:extLst xmlns:a="http://schemas.openxmlformats.org/drawingml/2006/main">
               <a:ext uri="{FF2B5EF4-FFF2-40B4-BE49-F238E27FC236}">
-                <a16:creationId xmlns:a16="http://schemas.microsoft.com/office/drawing/2014/main" id="{00B17CAE-AC20-411F-BA47-2243E19818B4}"/>
+                <a16:creationId xmlns:a16="http://schemas.microsoft.com/office/drawing/2014/main" id="{9C7C4DDE-86F6-45C1-ACFF-FA3E32BB1B63}"/>
               </a:ext>
             </a:extLst>
           </p:cNvPr>
@@ -31260,7 +31260,7 @@
           <p:cNvPr id="25" name="">
             <a:extLst xmlns:a="http://schemas.openxmlformats.org/drawingml/2006/main">
               <a:ext uri="{FF2B5EF4-FFF2-40B4-BE49-F238E27FC236}">
-                <a16:creationId xmlns:a16="http://schemas.microsoft.com/office/drawing/2014/main" id="{1F71DF55-8953-424C-8764-541F75013EE8}"/>
+                <a16:creationId xmlns:a16="http://schemas.microsoft.com/office/drawing/2014/main" id="{40FBE4D1-E80B-4E55-9773-E50E0DC25ED6}"/>
               </a:ext>
             </a:extLst>
           </p:cNvPr>
@@ -31297,7 +31297,7 @@
           <p:cNvPr id="26" name="">
             <a:extLst xmlns:a="http://schemas.openxmlformats.org/drawingml/2006/main">
               <a:ext uri="{FF2B5EF4-FFF2-40B4-BE49-F238E27FC236}">
-                <a16:creationId xmlns:a16="http://schemas.microsoft.com/office/drawing/2014/main" id="{F50AEDD1-C1E9-40D3-87A9-804687AD3426}"/>
+                <a16:creationId xmlns:a16="http://schemas.microsoft.com/office/drawing/2014/main" id="{AD2BACDB-2F12-4E4B-A44D-C435D6FE9116}"/>
               </a:ext>
             </a:extLst>
           </p:cNvPr>
@@ -31344,7 +31344,7 @@
           <p:cNvPr id="27" name="">
             <a:extLst xmlns:a="http://schemas.openxmlformats.org/drawingml/2006/main">
               <a:ext uri="{FF2B5EF4-FFF2-40B4-BE49-F238E27FC236}">
-                <a16:creationId xmlns:a16="http://schemas.microsoft.com/office/drawing/2014/main" id="{37FDEFE1-8B7B-46D0-81B4-BB16C2E5F9C1}"/>
+                <a16:creationId xmlns:a16="http://schemas.microsoft.com/office/drawing/2014/main" id="{872A9183-E54C-4957-AC19-B5346406AD98}"/>
               </a:ext>
             </a:extLst>
           </p:cNvPr>
@@ -31391,7 +31391,7 @@
           <p:cNvPr id="28" name="">
             <a:extLst xmlns:a="http://schemas.openxmlformats.org/drawingml/2006/main">
               <a:ext uri="{FF2B5EF4-FFF2-40B4-BE49-F238E27FC236}">
-                <a16:creationId xmlns:a16="http://schemas.microsoft.com/office/drawing/2014/main" id="{843FC846-43A6-4D00-BB1E-17E4B31A2E80}"/>
+                <a16:creationId xmlns:a16="http://schemas.microsoft.com/office/drawing/2014/main" id="{EBCE93BD-3E14-4996-A57A-1880A95AF6C8}"/>
               </a:ext>
             </a:extLst>
           </p:cNvPr>
@@ -31455,7 +31455,7 @@
           <p:cNvPr id="29" name="">
             <a:extLst xmlns:a="http://schemas.openxmlformats.org/drawingml/2006/main">
               <a:ext uri="{FF2B5EF4-FFF2-40B4-BE49-F238E27FC236}">
-                <a16:creationId xmlns:a16="http://schemas.microsoft.com/office/drawing/2014/main" id="{97E38300-8E75-4251-ABAD-89A00D56AB82}"/>
+                <a16:creationId xmlns:a16="http://schemas.microsoft.com/office/drawing/2014/main" id="{96F85743-2F20-497B-A117-21F13DA5C367}"/>
               </a:ext>
             </a:extLst>
           </p:cNvPr>
@@ -31519,7 +31519,7 @@
           <p:cNvPr id="30" name="">
             <a:extLst xmlns:a="http://schemas.openxmlformats.org/drawingml/2006/main">
               <a:ext uri="{FF2B5EF4-FFF2-40B4-BE49-F238E27FC236}">
-                <a16:creationId xmlns:a16="http://schemas.microsoft.com/office/drawing/2014/main" id="{10BD119A-E56D-4074-B97C-EECE8170DF48}"/>
+                <a16:creationId xmlns:a16="http://schemas.microsoft.com/office/drawing/2014/main" id="{7443C49A-61E0-41DE-A5F5-94EB497E1C62}"/>
               </a:ext>
             </a:extLst>
           </p:cNvPr>
@@ -31583,7 +31583,7 @@
           <p:cNvPr id="31" name="">
             <a:extLst xmlns:a="http://schemas.openxmlformats.org/drawingml/2006/main">
               <a:ext uri="{FF2B5EF4-FFF2-40B4-BE49-F238E27FC236}">
-                <a16:creationId xmlns:a16="http://schemas.microsoft.com/office/drawing/2014/main" id="{5F9FD20B-A6B0-4B68-BC9C-790A2A5E9314}"/>
+                <a16:creationId xmlns:a16="http://schemas.microsoft.com/office/drawing/2014/main" id="{D82976E4-0053-47F3-B8EF-B41BCC0B5938}"/>
               </a:ext>
             </a:extLst>
           </p:cNvPr>
@@ -31647,7 +31647,7 @@
           <p:cNvPr id="32" name="">
             <a:extLst xmlns:a="http://schemas.openxmlformats.org/drawingml/2006/main">
               <a:ext uri="{FF2B5EF4-FFF2-40B4-BE49-F238E27FC236}">
-                <a16:creationId xmlns:a16="http://schemas.microsoft.com/office/drawing/2014/main" id="{5DACB906-6744-4505-85D1-972B13292347}"/>
+                <a16:creationId xmlns:a16="http://schemas.microsoft.com/office/drawing/2014/main" id="{C48F22F3-19D3-4D0C-AC96-F4AEA616D1F4}"/>
               </a:ext>
             </a:extLst>
           </p:cNvPr>
@@ -31684,7 +31684,7 @@
           <p:cNvPr id="33" name="">
             <a:extLst xmlns:a="http://schemas.openxmlformats.org/drawingml/2006/main">
               <a:ext uri="{FF2B5EF4-FFF2-40B4-BE49-F238E27FC236}">
-                <a16:creationId xmlns:a16="http://schemas.microsoft.com/office/drawing/2014/main" id="{D4FDC96E-741F-416B-9297-14DD44C173B9}"/>
+                <a16:creationId xmlns:a16="http://schemas.microsoft.com/office/drawing/2014/main" id="{C58CEF58-0E7F-40E0-904A-1A5880D1149A}"/>
               </a:ext>
             </a:extLst>
           </p:cNvPr>
@@ -31721,7 +31721,7 @@
           <p:cNvPr id="34" name="">
             <a:extLst xmlns:a="http://schemas.openxmlformats.org/drawingml/2006/main">
               <a:ext uri="{FF2B5EF4-FFF2-40B4-BE49-F238E27FC236}">
-                <a16:creationId xmlns:a16="http://schemas.microsoft.com/office/drawing/2014/main" id="{157FCDEC-1749-490F-BB32-1B9B71597C8E}"/>
+                <a16:creationId xmlns:a16="http://schemas.microsoft.com/office/drawing/2014/main" id="{4D1326BF-E646-4FDB-8A23-AE3819B2BD16}"/>
               </a:ext>
             </a:extLst>
           </p:cNvPr>
@@ -31785,7 +31785,7 @@
           <p:cNvPr id="35" name="">
             <a:extLst xmlns:a="http://schemas.openxmlformats.org/drawingml/2006/main">
               <a:ext uri="{FF2B5EF4-FFF2-40B4-BE49-F238E27FC236}">
-                <a16:creationId xmlns:a16="http://schemas.microsoft.com/office/drawing/2014/main" id="{9D88AF02-F133-44EB-96DB-B0CD00EB8270}"/>
+                <a16:creationId xmlns:a16="http://schemas.microsoft.com/office/drawing/2014/main" id="{35984751-DB6E-45AE-A6D4-BCC11CA8209A}"/>
               </a:ext>
             </a:extLst>
           </p:cNvPr>
@@ -31964,7 +31964,7 @@
           <p:cNvPr id="36" name="">
             <a:extLst xmlns:a="http://schemas.openxmlformats.org/drawingml/2006/main">
               <a:ext uri="{FF2B5EF4-FFF2-40B4-BE49-F238E27FC236}">
-                <a16:creationId xmlns:a16="http://schemas.microsoft.com/office/drawing/2014/main" id="{1BCBE813-B92F-4DE0-821F-968B4E58C393}"/>
+                <a16:creationId xmlns:a16="http://schemas.microsoft.com/office/drawing/2014/main" id="{29E63E22-C725-43CE-A1E1-870628D3AE86}"/>
               </a:ext>
             </a:extLst>
           </p:cNvPr>
@@ -32001,7 +32001,7 @@
           <p:cNvPr id="37" name="">
             <a:extLst xmlns:a="http://schemas.openxmlformats.org/drawingml/2006/main">
               <a:ext uri="{FF2B5EF4-FFF2-40B4-BE49-F238E27FC236}">
-                <a16:creationId xmlns:a16="http://schemas.microsoft.com/office/drawing/2014/main" id="{DD476269-FE0C-4A24-86EB-101505E1BDF9}"/>
+                <a16:creationId xmlns:a16="http://schemas.microsoft.com/office/drawing/2014/main" id="{42AB9284-A2FA-4DDC-9B9B-3C2813822E92}"/>
               </a:ext>
             </a:extLst>
           </p:cNvPr>
@@ -32038,7 +32038,7 @@
           <p:cNvPr id="38" name="">
             <a:extLst xmlns:a="http://schemas.openxmlformats.org/drawingml/2006/main">
               <a:ext uri="{FF2B5EF4-FFF2-40B4-BE49-F238E27FC236}">
-                <a16:creationId xmlns:a16="http://schemas.microsoft.com/office/drawing/2014/main" id="{B51FCD62-0481-423E-B1E3-AB704F8F43E4}"/>
+                <a16:creationId xmlns:a16="http://schemas.microsoft.com/office/drawing/2014/main" id="{C89E978F-FA4A-416D-A435-CDC95E27FFB1}"/>
               </a:ext>
             </a:extLst>
           </p:cNvPr>
@@ -32102,7 +32102,7 @@
           <p:cNvPr id="39" name="">
             <a:extLst xmlns:a="http://schemas.openxmlformats.org/drawingml/2006/main">
               <a:ext uri="{FF2B5EF4-FFF2-40B4-BE49-F238E27FC236}">
-                <a16:creationId xmlns:a16="http://schemas.microsoft.com/office/drawing/2014/main" id="{BE333146-AF4C-4396-BABB-87879906681C}"/>
+                <a16:creationId xmlns:a16="http://schemas.microsoft.com/office/drawing/2014/main" id="{CF69F495-51F8-48AE-BD84-206A0019834E}"/>
               </a:ext>
             </a:extLst>
           </p:cNvPr>
@@ -32281,7 +32281,7 @@
           <p:cNvPr id="40" name="">
             <a:extLst xmlns:a="http://schemas.openxmlformats.org/drawingml/2006/main">
               <a:ext uri="{FF2B5EF4-FFF2-40B4-BE49-F238E27FC236}">
-                <a16:creationId xmlns:a16="http://schemas.microsoft.com/office/drawing/2014/main" id="{C5570B35-A0A0-482A-AD8B-C779F038BE1F}"/>
+                <a16:creationId xmlns:a16="http://schemas.microsoft.com/office/drawing/2014/main" id="{D4116889-FC56-4D27-A3D5-B87B705437ED}"/>
               </a:ext>
             </a:extLst>
           </p:cNvPr>
@@ -32318,7 +32318,7 @@
           <p:cNvPr id="41" name="">
             <a:extLst xmlns:a="http://schemas.openxmlformats.org/drawingml/2006/main">
               <a:ext uri="{FF2B5EF4-FFF2-40B4-BE49-F238E27FC236}">
-                <a16:creationId xmlns:a16="http://schemas.microsoft.com/office/drawing/2014/main" id="{82C2554A-A01A-43D2-8574-051D42085663}"/>
+                <a16:creationId xmlns:a16="http://schemas.microsoft.com/office/drawing/2014/main" id="{9CEBD2F3-94BB-4AA3-BA54-783EF4AC5381}"/>
               </a:ext>
             </a:extLst>
           </p:cNvPr>
@@ -32355,7 +32355,7 @@
           <p:cNvPr id="42" name="">
             <a:extLst xmlns:a="http://schemas.openxmlformats.org/drawingml/2006/main">
               <a:ext uri="{FF2B5EF4-FFF2-40B4-BE49-F238E27FC236}">
-                <a16:creationId xmlns:a16="http://schemas.microsoft.com/office/drawing/2014/main" id="{CFBE8343-E2BA-4ADC-9F63-5195CF4A6AE0}"/>
+                <a16:creationId xmlns:a16="http://schemas.microsoft.com/office/drawing/2014/main" id="{BCBCB682-FFFA-455A-B02A-052BDAA97CF4}"/>
               </a:ext>
             </a:extLst>
           </p:cNvPr>
@@ -32419,7 +32419,7 @@
           <p:cNvPr id="43" name="">
             <a:extLst xmlns:a="http://schemas.openxmlformats.org/drawingml/2006/main">
               <a:ext uri="{FF2B5EF4-FFF2-40B4-BE49-F238E27FC236}">
-                <a16:creationId xmlns:a16="http://schemas.microsoft.com/office/drawing/2014/main" id="{C07B2AAA-B80A-4F49-9AA3-C4C6E390541B}"/>
+                <a16:creationId xmlns:a16="http://schemas.microsoft.com/office/drawing/2014/main" id="{6E61B60E-2556-4C22-BFE8-730C84916C9F}"/>
               </a:ext>
             </a:extLst>
           </p:cNvPr>
@@ -32552,7 +32552,7 @@
           <p:cNvPr id="44" name="">
             <a:extLst xmlns:a="http://schemas.openxmlformats.org/drawingml/2006/main">
               <a:ext uri="{FF2B5EF4-FFF2-40B4-BE49-F238E27FC236}">
-                <a16:creationId xmlns:a16="http://schemas.microsoft.com/office/drawing/2014/main" id="{F4D973F8-49B8-4B89-975B-C06B0F68E4E9}"/>
+                <a16:creationId xmlns:a16="http://schemas.microsoft.com/office/drawing/2014/main" id="{822FD7B9-ED39-4778-B03A-95C5F61083BE}"/>
               </a:ext>
             </a:extLst>
           </p:cNvPr>
@@ -32589,7 +32589,7 @@
           <p:cNvPr id="45" name="">
             <a:extLst xmlns:a="http://schemas.openxmlformats.org/drawingml/2006/main">
               <a:ext uri="{FF2B5EF4-FFF2-40B4-BE49-F238E27FC236}">
-                <a16:creationId xmlns:a16="http://schemas.microsoft.com/office/drawing/2014/main" id="{1BCC3E81-FE56-441B-A517-158F5512366E}"/>
+                <a16:creationId xmlns:a16="http://schemas.microsoft.com/office/drawing/2014/main" id="{7405806A-13AC-4E13-BC98-D079CF433988}"/>
               </a:ext>
             </a:extLst>
           </p:cNvPr>
@@ -32653,7 +32653,7 @@
           <p:cNvPr id="46" name="">
             <a:extLst xmlns:a="http://schemas.openxmlformats.org/drawingml/2006/main">
               <a:ext uri="{FF2B5EF4-FFF2-40B4-BE49-F238E27FC236}">
-                <a16:creationId xmlns:a16="http://schemas.microsoft.com/office/drawing/2014/main" id="{953F4F4C-CF88-4F33-8412-AE20C71F0170}"/>
+                <a16:creationId xmlns:a16="http://schemas.microsoft.com/office/drawing/2014/main" id="{89C61D7E-6AF7-42D9-8030-7B2729F3B07C}"/>
               </a:ext>
             </a:extLst>
           </p:cNvPr>
@@ -32717,7 +32717,7 @@
           <p:cNvPr id="47" name="">
             <a:extLst xmlns:a="http://schemas.openxmlformats.org/drawingml/2006/main">
               <a:ext uri="{FF2B5EF4-FFF2-40B4-BE49-F238E27FC236}">
-                <a16:creationId xmlns:a16="http://schemas.microsoft.com/office/drawing/2014/main" id="{F866B38E-3BD1-456E-825A-2EAAB729697C}"/>
+                <a16:creationId xmlns:a16="http://schemas.microsoft.com/office/drawing/2014/main" id="{AA225E68-0184-4149-B46F-5EDBD8CCF774}"/>
               </a:ext>
             </a:extLst>
           </p:cNvPr>
@@ -32754,7 +32754,7 @@
           <p:cNvPr id="48" name="">
             <a:extLst xmlns:a="http://schemas.openxmlformats.org/drawingml/2006/main">
               <a:ext uri="{FF2B5EF4-FFF2-40B4-BE49-F238E27FC236}">
-                <a16:creationId xmlns:a16="http://schemas.microsoft.com/office/drawing/2014/main" id="{43E10B44-2D43-4BA1-96B6-FB0F42735801}"/>
+                <a16:creationId xmlns:a16="http://schemas.microsoft.com/office/drawing/2014/main" id="{95CF34E5-E556-490C-98A3-4AADC3C7DAE5}"/>
               </a:ext>
             </a:extLst>
           </p:cNvPr>
@@ -32816,7 +32816,7 @@
     </p:spTree>
     <p:extLst>
       <p:ext uri="{BB962C8B-B14F-4D97-AF65-F5344CB8AC3E}">
-        <p14:creationId xmlns:p14="http://schemas.microsoft.com/office/powerpoint/2010/main" val="1180543215"/>
+        <p14:creationId xmlns:p14="http://schemas.microsoft.com/office/powerpoint/2010/main" val="1862504647"/>
       </p:ext>
     </p:extLst>
   </p:cSld>
@@ -32840,7 +32840,7 @@
           <p:cNvPr id="1" name="">
             <a:extLst xmlns:a="http://schemas.openxmlformats.org/drawingml/2006/main">
               <a:ext uri="{FF2B5EF4-FFF2-40B4-BE49-F238E27FC236}">
-                <a16:creationId xmlns:a16="http://schemas.microsoft.com/office/drawing/2014/main" id="{CCE96250-E2E4-4BCE-91F5-86C1AE9F3E0B}"/>
+                <a16:creationId xmlns:a16="http://schemas.microsoft.com/office/drawing/2014/main" id="{8CE7717C-7AF8-49A1-9F4F-5D7A390ACD12}"/>
               </a:ext>
             </a:extLst>
           </p:cNvPr>
@@ -32875,7 +32875,7 @@
           <p:cNvPr id="2" name="">
             <a:extLst xmlns:a="http://schemas.openxmlformats.org/drawingml/2006/main">
               <a:ext uri="{FF2B5EF4-FFF2-40B4-BE49-F238E27FC236}">
-                <a16:creationId xmlns:a16="http://schemas.microsoft.com/office/drawing/2014/main" id="{5148576D-75DE-4D7B-BE34-27431BFEE574}"/>
+                <a16:creationId xmlns:a16="http://schemas.microsoft.com/office/drawing/2014/main" id="{62B96458-8491-4948-A157-4CD8DBEA0C34}"/>
               </a:ext>
             </a:extLst>
           </p:cNvPr>
@@ -32921,7 +32921,7 @@
           <p:cNvPr id="3" name="">
             <a:extLst xmlns:a="http://schemas.openxmlformats.org/drawingml/2006/main">
               <a:ext uri="{FF2B5EF4-FFF2-40B4-BE49-F238E27FC236}">
-                <a16:creationId xmlns:a16="http://schemas.microsoft.com/office/drawing/2014/main" id="{DDEFE0D5-109F-424E-AE5F-B3BA3800196F}"/>
+                <a16:creationId xmlns:a16="http://schemas.microsoft.com/office/drawing/2014/main" id="{12106AD7-1A56-40DC-9D0A-375430E1D8BC}"/>
               </a:ext>
             </a:extLst>
           </p:cNvPr>
@@ -32958,7 +32958,7 @@
           <p:cNvPr id="4" name="">
             <a:extLst xmlns:a="http://schemas.openxmlformats.org/drawingml/2006/main">
               <a:ext uri="{FF2B5EF4-FFF2-40B4-BE49-F238E27FC236}">
-                <a16:creationId xmlns:a16="http://schemas.microsoft.com/office/drawing/2014/main" id="{53C5A5BA-2F13-461B-A25C-45FC2E1575A1}"/>
+                <a16:creationId xmlns:a16="http://schemas.microsoft.com/office/drawing/2014/main" id="{A9ED04A8-D552-4671-B859-762F2CB0C4A1}"/>
               </a:ext>
             </a:extLst>
           </p:cNvPr>
@@ -32995,7 +32995,7 @@
           <p:cNvPr id="5" name="">
             <a:extLst xmlns:a="http://schemas.openxmlformats.org/drawingml/2006/main">
               <a:ext uri="{FF2B5EF4-FFF2-40B4-BE49-F238E27FC236}">
-                <a16:creationId xmlns:a16="http://schemas.microsoft.com/office/drawing/2014/main" id="{5204AADA-ABBF-4D1A-97A0-80CC7D6A4382}"/>
+                <a16:creationId xmlns:a16="http://schemas.microsoft.com/office/drawing/2014/main" id="{32AC0196-5399-4AA9-8BE2-C9BA93866C2C}"/>
               </a:ext>
             </a:extLst>
           </p:cNvPr>
@@ -33032,7 +33032,7 @@
           <p:cNvPr id="6" name="">
             <a:extLst xmlns:a="http://schemas.openxmlformats.org/drawingml/2006/main">
               <a:ext uri="{FF2B5EF4-FFF2-40B4-BE49-F238E27FC236}">
-                <a16:creationId xmlns:a16="http://schemas.microsoft.com/office/drawing/2014/main" id="{DF83F828-4485-4063-AEC1-37397609BC5A}"/>
+                <a16:creationId xmlns:a16="http://schemas.microsoft.com/office/drawing/2014/main" id="{75B512E0-D650-4143-B9DE-DAEC420FDFAC}"/>
               </a:ext>
             </a:extLst>
           </p:cNvPr>
@@ -33069,7 +33069,7 @@
           <p:cNvPr id="7" name="">
             <a:extLst xmlns:a="http://schemas.openxmlformats.org/drawingml/2006/main">
               <a:ext uri="{FF2B5EF4-FFF2-40B4-BE49-F238E27FC236}">
-                <a16:creationId xmlns:a16="http://schemas.microsoft.com/office/drawing/2014/main" id="{FF6D26DF-8F5D-4249-A2D6-CE3937CE19AE}"/>
+                <a16:creationId xmlns:a16="http://schemas.microsoft.com/office/drawing/2014/main" id="{72E07747-9DFD-4C9F-B3EE-39AE19170040}"/>
               </a:ext>
             </a:extLst>
           </p:cNvPr>
@@ -33106,7 +33106,7 @@
           <p:cNvPr id="8" name="">
             <a:extLst xmlns:a="http://schemas.openxmlformats.org/drawingml/2006/main">
               <a:ext uri="{FF2B5EF4-FFF2-40B4-BE49-F238E27FC236}">
-                <a16:creationId xmlns:a16="http://schemas.microsoft.com/office/drawing/2014/main" id="{2ECD18BF-50F4-49E1-A87F-8A058CC91BC2}"/>
+                <a16:creationId xmlns:a16="http://schemas.microsoft.com/office/drawing/2014/main" id="{15F64463-C397-44E4-98DE-B286319126C9}"/>
               </a:ext>
             </a:extLst>
           </p:cNvPr>
@@ -33143,7 +33143,7 @@
           <p:cNvPr id="9" name="">
             <a:extLst xmlns:a="http://schemas.openxmlformats.org/drawingml/2006/main">
               <a:ext uri="{FF2B5EF4-FFF2-40B4-BE49-F238E27FC236}">
-                <a16:creationId xmlns:a16="http://schemas.microsoft.com/office/drawing/2014/main" id="{F34936F4-BA81-4AD2-AF2C-2A48C0AF6642}"/>
+                <a16:creationId xmlns:a16="http://schemas.microsoft.com/office/drawing/2014/main" id="{9536A430-6930-4C24-8291-D59EA0B2B5CA}"/>
               </a:ext>
             </a:extLst>
           </p:cNvPr>
@@ -33180,7 +33180,7 @@
           <p:cNvPr id="10" name="">
             <a:extLst xmlns:a="http://schemas.openxmlformats.org/drawingml/2006/main">
               <a:ext uri="{FF2B5EF4-FFF2-40B4-BE49-F238E27FC236}">
-                <a16:creationId xmlns:a16="http://schemas.microsoft.com/office/drawing/2014/main" id="{25A0E8BB-9718-4CD9-A8EC-23D0EC493A5E}"/>
+                <a16:creationId xmlns:a16="http://schemas.microsoft.com/office/drawing/2014/main" id="{EC733AA6-2B20-4647-9A48-24C902C4D9E6}"/>
               </a:ext>
             </a:extLst>
           </p:cNvPr>
@@ -33217,7 +33217,7 @@
           <p:cNvPr id="11" name="">
             <a:extLst xmlns:a="http://schemas.openxmlformats.org/drawingml/2006/main">
               <a:ext uri="{FF2B5EF4-FFF2-40B4-BE49-F238E27FC236}">
-                <a16:creationId xmlns:a16="http://schemas.microsoft.com/office/drawing/2014/main" id="{F1AAA747-383C-43FC-8967-A1C898551835}"/>
+                <a16:creationId xmlns:a16="http://schemas.microsoft.com/office/drawing/2014/main" id="{0B9A0C9B-4191-4354-B187-96781A00B5D7}"/>
               </a:ext>
             </a:extLst>
           </p:cNvPr>
@@ -33254,7 +33254,7 @@
           <p:cNvPr id="12" name="">
             <a:extLst xmlns:a="http://schemas.openxmlformats.org/drawingml/2006/main">
               <a:ext uri="{FF2B5EF4-FFF2-40B4-BE49-F238E27FC236}">
-                <a16:creationId xmlns:a16="http://schemas.microsoft.com/office/drawing/2014/main" id="{7207DE5A-091E-4DED-81D6-FF7C29130C5C}"/>
+                <a16:creationId xmlns:a16="http://schemas.microsoft.com/office/drawing/2014/main" id="{25DD7514-D7EA-4A61-8013-5EAF8A2262CD}"/>
               </a:ext>
             </a:extLst>
           </p:cNvPr>
@@ -33291,7 +33291,7 @@
           <p:cNvPr id="13" name="">
             <a:extLst xmlns:a="http://schemas.openxmlformats.org/drawingml/2006/main">
               <a:ext uri="{FF2B5EF4-FFF2-40B4-BE49-F238E27FC236}">
-                <a16:creationId xmlns:a16="http://schemas.microsoft.com/office/drawing/2014/main" id="{7E5CDF8F-A267-4C97-84F6-36BA26C9E0CD}"/>
+                <a16:creationId xmlns:a16="http://schemas.microsoft.com/office/drawing/2014/main" id="{5C21CC06-77FA-4F19-ADC3-64FEEDB1D481}"/>
               </a:ext>
             </a:extLst>
           </p:cNvPr>
@@ -33328,7 +33328,7 @@
           <p:cNvPr id="14" name="">
             <a:extLst xmlns:a="http://schemas.openxmlformats.org/drawingml/2006/main">
               <a:ext uri="{FF2B5EF4-FFF2-40B4-BE49-F238E27FC236}">
-                <a16:creationId xmlns:a16="http://schemas.microsoft.com/office/drawing/2014/main" id="{B9EB3092-3FEC-4078-AFE0-222A6C84E703}"/>
+                <a16:creationId xmlns:a16="http://schemas.microsoft.com/office/drawing/2014/main" id="{1B739930-849E-43BB-AEC1-A7947EC8A684}"/>
               </a:ext>
             </a:extLst>
           </p:cNvPr>
@@ -33365,7 +33365,7 @@
           <p:cNvPr id="15" name="">
             <a:extLst xmlns:a="http://schemas.openxmlformats.org/drawingml/2006/main">
               <a:ext uri="{FF2B5EF4-FFF2-40B4-BE49-F238E27FC236}">
-                <a16:creationId xmlns:a16="http://schemas.microsoft.com/office/drawing/2014/main" id="{746CDFD6-CC27-487F-9E2A-0BFB37086D45}"/>
+                <a16:creationId xmlns:a16="http://schemas.microsoft.com/office/drawing/2014/main" id="{8E98D874-7A9D-4753-B415-1B3BDFBE8E17}"/>
               </a:ext>
             </a:extLst>
           </p:cNvPr>
@@ -33402,7 +33402,7 @@
           <p:cNvPr id="16" name="">
             <a:extLst xmlns:a="http://schemas.openxmlformats.org/drawingml/2006/main">
               <a:ext uri="{FF2B5EF4-FFF2-40B4-BE49-F238E27FC236}">
-                <a16:creationId xmlns:a16="http://schemas.microsoft.com/office/drawing/2014/main" id="{9A1490C8-2056-4234-91F3-E8EA7A6239B3}"/>
+                <a16:creationId xmlns:a16="http://schemas.microsoft.com/office/drawing/2014/main" id="{33B9E2A9-01E8-4164-A55D-62D46115CCF3}"/>
               </a:ext>
             </a:extLst>
           </p:cNvPr>
@@ -33439,7 +33439,7 @@
           <p:cNvPr id="17" name="">
             <a:extLst xmlns:a="http://schemas.openxmlformats.org/drawingml/2006/main">
               <a:ext uri="{FF2B5EF4-FFF2-40B4-BE49-F238E27FC236}">
-                <a16:creationId xmlns:a16="http://schemas.microsoft.com/office/drawing/2014/main" id="{16BCA6E9-3EC8-48EC-AC3D-ABB5C8F8A1B0}"/>
+                <a16:creationId xmlns:a16="http://schemas.microsoft.com/office/drawing/2014/main" id="{166528D4-99E7-4D94-AE34-60CFACE65530}"/>
               </a:ext>
             </a:extLst>
           </p:cNvPr>
@@ -33476,7 +33476,7 @@
           <p:cNvPr id="18" name="">
             <a:extLst xmlns:a="http://schemas.openxmlformats.org/drawingml/2006/main">
               <a:ext uri="{FF2B5EF4-FFF2-40B4-BE49-F238E27FC236}">
-                <a16:creationId xmlns:a16="http://schemas.microsoft.com/office/drawing/2014/main" id="{FCDC819C-5B34-4762-BADA-AA6A92EE63A1}"/>
+                <a16:creationId xmlns:a16="http://schemas.microsoft.com/office/drawing/2014/main" id="{DA19E88D-EAD3-424A-A341-E6AC76B38F0D}"/>
               </a:ext>
             </a:extLst>
           </p:cNvPr>
@@ -33513,7 +33513,7 @@
           <p:cNvPr id="19" name="">
             <a:extLst xmlns:a="http://schemas.openxmlformats.org/drawingml/2006/main">
               <a:ext uri="{FF2B5EF4-FFF2-40B4-BE49-F238E27FC236}">
-                <a16:creationId xmlns:a16="http://schemas.microsoft.com/office/drawing/2014/main" id="{2656A065-C73A-4BD2-ABE7-89FDE227BAB1}"/>
+                <a16:creationId xmlns:a16="http://schemas.microsoft.com/office/drawing/2014/main" id="{89D341EF-9A64-45A5-B438-6DB6D1B2E3CE}"/>
               </a:ext>
             </a:extLst>
           </p:cNvPr>
@@ -33550,7 +33550,7 @@
           <p:cNvPr id="20" name="">
             <a:extLst xmlns:a="http://schemas.openxmlformats.org/drawingml/2006/main">
               <a:ext uri="{FF2B5EF4-FFF2-40B4-BE49-F238E27FC236}">
-                <a16:creationId xmlns:a16="http://schemas.microsoft.com/office/drawing/2014/main" id="{691B7C71-DAAB-46D6-A61D-225A112E5772}"/>
+                <a16:creationId xmlns:a16="http://schemas.microsoft.com/office/drawing/2014/main" id="{2BDD2A72-3B40-4F06-8178-B50B6419ED31}"/>
               </a:ext>
             </a:extLst>
           </p:cNvPr>
@@ -33587,7 +33587,7 @@
           <p:cNvPr id="21" name="">
             <a:extLst xmlns:a="http://schemas.openxmlformats.org/drawingml/2006/main">
               <a:ext uri="{FF2B5EF4-FFF2-40B4-BE49-F238E27FC236}">
-                <a16:creationId xmlns:a16="http://schemas.microsoft.com/office/drawing/2014/main" id="{4CB418D2-113B-45C9-AB91-7BC9C24A6F54}"/>
+                <a16:creationId xmlns:a16="http://schemas.microsoft.com/office/drawing/2014/main" id="{BB7C0F78-EE58-4A70-97A2-07AB39DC201F}"/>
               </a:ext>
             </a:extLst>
           </p:cNvPr>
@@ -33624,7 +33624,7 @@
           <p:cNvPr id="22" name="">
             <a:extLst xmlns:a="http://schemas.openxmlformats.org/drawingml/2006/main">
               <a:ext uri="{FF2B5EF4-FFF2-40B4-BE49-F238E27FC236}">
-                <a16:creationId xmlns:a16="http://schemas.microsoft.com/office/drawing/2014/main" id="{AF47C1B2-0101-44FD-864E-8CB272DF4879}"/>
+                <a16:creationId xmlns:a16="http://schemas.microsoft.com/office/drawing/2014/main" id="{652C3CCD-BBA7-412D-AD47-79962780DABA}"/>
               </a:ext>
             </a:extLst>
           </p:cNvPr>
@@ -33661,7 +33661,7 @@
           <p:cNvPr id="23" name="">
             <a:extLst xmlns:a="http://schemas.openxmlformats.org/drawingml/2006/main">
               <a:ext uri="{FF2B5EF4-FFF2-40B4-BE49-F238E27FC236}">
-                <a16:creationId xmlns:a16="http://schemas.microsoft.com/office/drawing/2014/main" id="{FAF8CACE-397C-4499-A49D-7B02AA1EBCAB}"/>
+                <a16:creationId xmlns:a16="http://schemas.microsoft.com/office/drawing/2014/main" id="{4087D4F7-8F8B-44A6-BA92-8AB23D3D2562}"/>
               </a:ext>
             </a:extLst>
           </p:cNvPr>
@@ -33698,7 +33698,7 @@
           <p:cNvPr id="24" name="">
             <a:extLst xmlns:a="http://schemas.openxmlformats.org/drawingml/2006/main">
               <a:ext uri="{FF2B5EF4-FFF2-40B4-BE49-F238E27FC236}">
-                <a16:creationId xmlns:a16="http://schemas.microsoft.com/office/drawing/2014/main" id="{6450575F-AE66-493F-8321-A8EE99E4A91F}"/>
+                <a16:creationId xmlns:a16="http://schemas.microsoft.com/office/drawing/2014/main" id="{24C7E844-A91A-4A02-AAA3-977AA8D783C2}"/>
               </a:ext>
             </a:extLst>
           </p:cNvPr>
@@ -33735,7 +33735,7 @@
           <p:cNvPr id="25" name="">
             <a:extLst xmlns:a="http://schemas.openxmlformats.org/drawingml/2006/main">
               <a:ext uri="{FF2B5EF4-FFF2-40B4-BE49-F238E27FC236}">
-                <a16:creationId xmlns:a16="http://schemas.microsoft.com/office/drawing/2014/main" id="{01B17425-4300-43A3-9BF0-A4C9A1787782}"/>
+                <a16:creationId xmlns:a16="http://schemas.microsoft.com/office/drawing/2014/main" id="{70488270-BC09-4E15-B418-348C1DFBD6FC}"/>
               </a:ext>
             </a:extLst>
           </p:cNvPr>
@@ -33772,7 +33772,7 @@
           <p:cNvPr id="26" name="">
             <a:extLst xmlns:a="http://schemas.openxmlformats.org/drawingml/2006/main">
               <a:ext uri="{FF2B5EF4-FFF2-40B4-BE49-F238E27FC236}">
-                <a16:creationId xmlns:a16="http://schemas.microsoft.com/office/drawing/2014/main" id="{CEF993C3-F5B5-48C3-A0D2-A7A791CCD18F}"/>
+                <a16:creationId xmlns:a16="http://schemas.microsoft.com/office/drawing/2014/main" id="{F8685577-7E8D-4C99-8087-EEFF232E340C}"/>
               </a:ext>
             </a:extLst>
           </p:cNvPr>
@@ -33819,7 +33819,7 @@
           <p:cNvPr id="27" name="">
             <a:extLst xmlns:a="http://schemas.openxmlformats.org/drawingml/2006/main">
               <a:ext uri="{FF2B5EF4-FFF2-40B4-BE49-F238E27FC236}">
-                <a16:creationId xmlns:a16="http://schemas.microsoft.com/office/drawing/2014/main" id="{02513FCA-BC64-4827-B46C-0A4445158E9F}"/>
+                <a16:creationId xmlns:a16="http://schemas.microsoft.com/office/drawing/2014/main" id="{BE0BB6D0-4424-41F7-8679-937EA4831402}"/>
               </a:ext>
             </a:extLst>
           </p:cNvPr>
@@ -33866,7 +33866,7 @@
           <p:cNvPr id="28" name="">
             <a:extLst xmlns:a="http://schemas.openxmlformats.org/drawingml/2006/main">
               <a:ext uri="{FF2B5EF4-FFF2-40B4-BE49-F238E27FC236}">
-                <a16:creationId xmlns:a16="http://schemas.microsoft.com/office/drawing/2014/main" id="{1954B26E-51D6-4DED-A3AF-A387B6C68096}"/>
+                <a16:creationId xmlns:a16="http://schemas.microsoft.com/office/drawing/2014/main" id="{78BBBC66-F6CA-4D16-BAE1-1B9CF8A10025}"/>
               </a:ext>
             </a:extLst>
           </p:cNvPr>
@@ -33930,7 +33930,7 @@
           <p:cNvPr id="29" name="">
             <a:extLst xmlns:a="http://schemas.openxmlformats.org/drawingml/2006/main">
               <a:ext uri="{FF2B5EF4-FFF2-40B4-BE49-F238E27FC236}">
-                <a16:creationId xmlns:a16="http://schemas.microsoft.com/office/drawing/2014/main" id="{A9B0EE8E-D9C0-4391-8981-C8DE0164B69D}"/>
+                <a16:creationId xmlns:a16="http://schemas.microsoft.com/office/drawing/2014/main" id="{82764690-6509-434B-8D5E-0B02368A3FBE}"/>
               </a:ext>
             </a:extLst>
           </p:cNvPr>
@@ -33994,7 +33994,7 @@
           <p:cNvPr id="30" name="">
             <a:extLst xmlns:a="http://schemas.openxmlformats.org/drawingml/2006/main">
               <a:ext uri="{FF2B5EF4-FFF2-40B4-BE49-F238E27FC236}">
-                <a16:creationId xmlns:a16="http://schemas.microsoft.com/office/drawing/2014/main" id="{1908E0CC-0595-4D4B-87DB-27028D260B70}"/>
+                <a16:creationId xmlns:a16="http://schemas.microsoft.com/office/drawing/2014/main" id="{E3F8A6A3-D853-4F07-A6D2-0284E79B52C4}"/>
               </a:ext>
             </a:extLst>
           </p:cNvPr>
@@ -34058,7 +34058,7 @@
           <p:cNvPr id="31" name="">
             <a:extLst xmlns:a="http://schemas.openxmlformats.org/drawingml/2006/main">
               <a:ext uri="{FF2B5EF4-FFF2-40B4-BE49-F238E27FC236}">
-                <a16:creationId xmlns:a16="http://schemas.microsoft.com/office/drawing/2014/main" id="{3DB0F405-2F99-48B3-8146-6D4BC6D5F83D}"/>
+                <a16:creationId xmlns:a16="http://schemas.microsoft.com/office/drawing/2014/main" id="{00DC80E5-EBD2-409D-B0EB-638DA6D72851}"/>
               </a:ext>
             </a:extLst>
           </p:cNvPr>
@@ -34122,7 +34122,7 @@
           <p:cNvPr id="32" name="">
             <a:extLst xmlns:a="http://schemas.openxmlformats.org/drawingml/2006/main">
               <a:ext uri="{FF2B5EF4-FFF2-40B4-BE49-F238E27FC236}">
-                <a16:creationId xmlns:a16="http://schemas.microsoft.com/office/drawing/2014/main" id="{9972C4C3-80E0-4648-826F-23BB3C25806F}"/>
+                <a16:creationId xmlns:a16="http://schemas.microsoft.com/office/drawing/2014/main" id="{777A7154-CE78-4B7F-8FDD-EE15A7F28CC3}"/>
               </a:ext>
             </a:extLst>
           </p:cNvPr>
@@ -34159,7 +34159,7 @@
           <p:cNvPr id="33" name="">
             <a:extLst xmlns:a="http://schemas.openxmlformats.org/drawingml/2006/main">
               <a:ext uri="{FF2B5EF4-FFF2-40B4-BE49-F238E27FC236}">
-                <a16:creationId xmlns:a16="http://schemas.microsoft.com/office/drawing/2014/main" id="{043DA205-8B8B-49C7-9CCF-DBD4367994D2}"/>
+                <a16:creationId xmlns:a16="http://schemas.microsoft.com/office/drawing/2014/main" id="{A418B97E-30FF-4C5D-BA8F-6D9C7676A71E}"/>
               </a:ext>
             </a:extLst>
           </p:cNvPr>
@@ -34223,7 +34223,7 @@
           <p:cNvPr id="34" name="">
             <a:extLst xmlns:a="http://schemas.openxmlformats.org/drawingml/2006/main">
               <a:ext uri="{FF2B5EF4-FFF2-40B4-BE49-F238E27FC236}">
-                <a16:creationId xmlns:a16="http://schemas.microsoft.com/office/drawing/2014/main" id="{343DFA35-674B-4EA6-BDF8-04E89B90B2FC}"/>
+                <a16:creationId xmlns:a16="http://schemas.microsoft.com/office/drawing/2014/main" id="{E4A2B198-BF3E-4D8E-A288-7B83BAA5693C}"/>
               </a:ext>
             </a:extLst>
           </p:cNvPr>
@@ -34287,7 +34287,7 @@
           <p:cNvPr id="35" name="">
             <a:extLst xmlns:a="http://schemas.openxmlformats.org/drawingml/2006/main">
               <a:ext uri="{FF2B5EF4-FFF2-40B4-BE49-F238E27FC236}">
-                <a16:creationId xmlns:a16="http://schemas.microsoft.com/office/drawing/2014/main" id="{3104ADEB-F9DA-48FE-B6E5-ACA09D253A62}"/>
+                <a16:creationId xmlns:a16="http://schemas.microsoft.com/office/drawing/2014/main" id="{291D7B14-BD13-44A9-B7E0-2E523998C4E5}"/>
               </a:ext>
             </a:extLst>
           </p:cNvPr>
@@ -34324,7 +34324,7 @@
           <p:cNvPr id="36" name="">
             <a:extLst xmlns:a="http://schemas.openxmlformats.org/drawingml/2006/main">
               <a:ext uri="{FF2B5EF4-FFF2-40B4-BE49-F238E27FC236}">
-                <a16:creationId xmlns:a16="http://schemas.microsoft.com/office/drawing/2014/main" id="{D72FB23E-B8BC-4427-A5DB-71B97DD83FDC}"/>
+                <a16:creationId xmlns:a16="http://schemas.microsoft.com/office/drawing/2014/main" id="{8D963E8B-059F-4E5C-9F2B-3B728FA4E96F}"/>
               </a:ext>
             </a:extLst>
           </p:cNvPr>
@@ -34388,7 +34388,7 @@
           <p:cNvPr id="37" name="">
             <a:extLst xmlns:a="http://schemas.openxmlformats.org/drawingml/2006/main">
               <a:ext uri="{FF2B5EF4-FFF2-40B4-BE49-F238E27FC236}">
-                <a16:creationId xmlns:a16="http://schemas.microsoft.com/office/drawing/2014/main" id="{C7CE552A-5289-4FDE-A2B3-CADCBA3DDB0A}"/>
+                <a16:creationId xmlns:a16="http://schemas.microsoft.com/office/drawing/2014/main" id="{2FA9F0DE-BC7A-4645-AB6E-F349756A49AC}"/>
               </a:ext>
             </a:extLst>
           </p:cNvPr>
@@ -34452,7 +34452,7 @@
           <p:cNvPr id="38" name="">
             <a:extLst xmlns:a="http://schemas.openxmlformats.org/drawingml/2006/main">
               <a:ext uri="{FF2B5EF4-FFF2-40B4-BE49-F238E27FC236}">
-                <a16:creationId xmlns:a16="http://schemas.microsoft.com/office/drawing/2014/main" id="{F1DFB9A5-DD95-4EF6-8BCE-C0284621B079}"/>
+                <a16:creationId xmlns:a16="http://schemas.microsoft.com/office/drawing/2014/main" id="{370BED39-9F73-4F80-BF40-FE4E2E8955D8}"/>
               </a:ext>
             </a:extLst>
           </p:cNvPr>
@@ -34489,7 +34489,7 @@
           <p:cNvPr id="39" name="">
             <a:extLst xmlns:a="http://schemas.openxmlformats.org/drawingml/2006/main">
               <a:ext uri="{FF2B5EF4-FFF2-40B4-BE49-F238E27FC236}">
-                <a16:creationId xmlns:a16="http://schemas.microsoft.com/office/drawing/2014/main" id="{66AFA2AA-1E1F-4F56-A913-739AB62430B6}"/>
+                <a16:creationId xmlns:a16="http://schemas.microsoft.com/office/drawing/2014/main" id="{0C098697-1B40-4476-80FE-BE6B006CFE68}"/>
               </a:ext>
             </a:extLst>
           </p:cNvPr>
@@ -34553,7 +34553,7 @@
           <p:cNvPr id="40" name="">
             <a:extLst xmlns:a="http://schemas.openxmlformats.org/drawingml/2006/main">
               <a:ext uri="{FF2B5EF4-FFF2-40B4-BE49-F238E27FC236}">
-                <a16:creationId xmlns:a16="http://schemas.microsoft.com/office/drawing/2014/main" id="{3CD673EE-B19A-4611-9D95-B84442442B8C}"/>
+                <a16:creationId xmlns:a16="http://schemas.microsoft.com/office/drawing/2014/main" id="{F7EF722C-4112-4F2D-9E8C-65A0661CF32E}"/>
               </a:ext>
             </a:extLst>
           </p:cNvPr>
@@ -34617,7 +34617,7 @@
           <p:cNvPr id="41" name="">
             <a:extLst xmlns:a="http://schemas.openxmlformats.org/drawingml/2006/main">
               <a:ext uri="{FF2B5EF4-FFF2-40B4-BE49-F238E27FC236}">
-                <a16:creationId xmlns:a16="http://schemas.microsoft.com/office/drawing/2014/main" id="{D8F2606E-1185-4868-A143-3BC6BB55882C}"/>
+                <a16:creationId xmlns:a16="http://schemas.microsoft.com/office/drawing/2014/main" id="{38ADE4C6-706E-4B60-AD96-2D2D746C8FF9}"/>
               </a:ext>
             </a:extLst>
           </p:cNvPr>
@@ -34654,7 +34654,7 @@
           <p:cNvPr id="42" name="">
             <a:extLst xmlns:a="http://schemas.openxmlformats.org/drawingml/2006/main">
               <a:ext uri="{FF2B5EF4-FFF2-40B4-BE49-F238E27FC236}">
-                <a16:creationId xmlns:a16="http://schemas.microsoft.com/office/drawing/2014/main" id="{1BDDE02E-A047-4DE2-A8BC-E5A82AF8C3B7}"/>
+                <a16:creationId xmlns:a16="http://schemas.microsoft.com/office/drawing/2014/main" id="{E9F1FB1D-C46E-48CF-8CCC-2774B213E92E}"/>
               </a:ext>
             </a:extLst>
           </p:cNvPr>
@@ -34718,7 +34718,7 @@
           <p:cNvPr id="43" name="">
             <a:extLst xmlns:a="http://schemas.openxmlformats.org/drawingml/2006/main">
               <a:ext uri="{FF2B5EF4-FFF2-40B4-BE49-F238E27FC236}">
-                <a16:creationId xmlns:a16="http://schemas.microsoft.com/office/drawing/2014/main" id="{8AD9C5C4-2F9B-46BD-9660-932D9163B20F}"/>
+                <a16:creationId xmlns:a16="http://schemas.microsoft.com/office/drawing/2014/main" id="{C9F1B43F-2201-4E07-B2D4-00906C95B725}"/>
               </a:ext>
             </a:extLst>
           </p:cNvPr>
@@ -34782,7 +34782,7 @@
           <p:cNvPr id="44" name="">
             <a:extLst xmlns:a="http://schemas.openxmlformats.org/drawingml/2006/main">
               <a:ext uri="{FF2B5EF4-FFF2-40B4-BE49-F238E27FC236}">
-                <a16:creationId xmlns:a16="http://schemas.microsoft.com/office/drawing/2014/main" id="{F96F2734-3341-4897-B0EE-A22904E68636}"/>
+                <a16:creationId xmlns:a16="http://schemas.microsoft.com/office/drawing/2014/main" id="{941CA44C-EB9D-4012-B347-2AF0DB85B2BE}"/>
               </a:ext>
             </a:extLst>
           </p:cNvPr>
@@ -34819,7 +34819,7 @@
           <p:cNvPr id="45" name="">
             <a:extLst xmlns:a="http://schemas.openxmlformats.org/drawingml/2006/main">
               <a:ext uri="{FF2B5EF4-FFF2-40B4-BE49-F238E27FC236}">
-                <a16:creationId xmlns:a16="http://schemas.microsoft.com/office/drawing/2014/main" id="{25B804F2-F098-4394-ACD7-BF5B6FC56FA2}"/>
+                <a16:creationId xmlns:a16="http://schemas.microsoft.com/office/drawing/2014/main" id="{A68CE92E-B0B0-4695-B845-688A864E7292}"/>
               </a:ext>
             </a:extLst>
           </p:cNvPr>
@@ -34883,7 +34883,7 @@
           <p:cNvPr id="46" name="">
             <a:extLst xmlns:a="http://schemas.openxmlformats.org/drawingml/2006/main">
               <a:ext uri="{FF2B5EF4-FFF2-40B4-BE49-F238E27FC236}">
-                <a16:creationId xmlns:a16="http://schemas.microsoft.com/office/drawing/2014/main" id="{5F0ED1C6-573D-4085-99FD-B0D213695DFD}"/>
+                <a16:creationId xmlns:a16="http://schemas.microsoft.com/office/drawing/2014/main" id="{0CFEF4D3-59E5-4306-93A6-5DD49B63369B}"/>
               </a:ext>
             </a:extLst>
           </p:cNvPr>
@@ -34947,7 +34947,7 @@
           <p:cNvPr id="47" name="">
             <a:extLst xmlns:a="http://schemas.openxmlformats.org/drawingml/2006/main">
               <a:ext uri="{FF2B5EF4-FFF2-40B4-BE49-F238E27FC236}">
-                <a16:creationId xmlns:a16="http://schemas.microsoft.com/office/drawing/2014/main" id="{091047D0-2099-4654-AAAD-E34A3E7ADD93}"/>
+                <a16:creationId xmlns:a16="http://schemas.microsoft.com/office/drawing/2014/main" id="{AB35468A-1A8A-4A47-B3FB-0E459FADD898}"/>
               </a:ext>
             </a:extLst>
           </p:cNvPr>
@@ -34984,7 +34984,7 @@
           <p:cNvPr id="48" name="">
             <a:extLst xmlns:a="http://schemas.openxmlformats.org/drawingml/2006/main">
               <a:ext uri="{FF2B5EF4-FFF2-40B4-BE49-F238E27FC236}">
-                <a16:creationId xmlns:a16="http://schemas.microsoft.com/office/drawing/2014/main" id="{D9ABEA6F-DB36-4558-A452-D695AE09C954}"/>
+                <a16:creationId xmlns:a16="http://schemas.microsoft.com/office/drawing/2014/main" id="{7AD66158-1EFE-4554-ABDC-258B7FD3A914}"/>
               </a:ext>
             </a:extLst>
           </p:cNvPr>
@@ -35048,7 +35048,7 @@
           <p:cNvPr id="49" name="">
             <a:extLst xmlns:a="http://schemas.openxmlformats.org/drawingml/2006/main">
               <a:ext uri="{FF2B5EF4-FFF2-40B4-BE49-F238E27FC236}">
-                <a16:creationId xmlns:a16="http://schemas.microsoft.com/office/drawing/2014/main" id="{0BEE9B33-C189-4877-97FB-78E6C3633AEF}"/>
+                <a16:creationId xmlns:a16="http://schemas.microsoft.com/office/drawing/2014/main" id="{D093C774-CF23-43F9-BF21-C29B8FDBEB3C}"/>
               </a:ext>
             </a:extLst>
           </p:cNvPr>
@@ -35112,7 +35112,7 @@
           <p:cNvPr id="50" name="">
             <a:extLst xmlns:a="http://schemas.openxmlformats.org/drawingml/2006/main">
               <a:ext uri="{FF2B5EF4-FFF2-40B4-BE49-F238E27FC236}">
-                <a16:creationId xmlns:a16="http://schemas.microsoft.com/office/drawing/2014/main" id="{A8F7B241-C5CF-4F2E-93D8-A1D8B2E2E50E}"/>
+                <a16:creationId xmlns:a16="http://schemas.microsoft.com/office/drawing/2014/main" id="{03375FAD-3D92-4B77-87AC-916D44149904}"/>
               </a:ext>
             </a:extLst>
           </p:cNvPr>
@@ -35149,7 +35149,7 @@
           <p:cNvPr id="51" name="">
             <a:extLst xmlns:a="http://schemas.openxmlformats.org/drawingml/2006/main">
               <a:ext uri="{FF2B5EF4-FFF2-40B4-BE49-F238E27FC236}">
-                <a16:creationId xmlns:a16="http://schemas.microsoft.com/office/drawing/2014/main" id="{5C2F204D-1BC2-4456-B0F7-220F24F1450B}"/>
+                <a16:creationId xmlns:a16="http://schemas.microsoft.com/office/drawing/2014/main" id="{B14748AF-837B-4841-8B4F-86E8FDB437EB}"/>
               </a:ext>
             </a:extLst>
           </p:cNvPr>
@@ -35213,7 +35213,7 @@
           <p:cNvPr id="52" name="">
             <a:extLst xmlns:a="http://schemas.openxmlformats.org/drawingml/2006/main">
               <a:ext uri="{FF2B5EF4-FFF2-40B4-BE49-F238E27FC236}">
-                <a16:creationId xmlns:a16="http://schemas.microsoft.com/office/drawing/2014/main" id="{6EFE2070-599E-4236-A585-E1420331341B}"/>
+                <a16:creationId xmlns:a16="http://schemas.microsoft.com/office/drawing/2014/main" id="{F4B4B1D6-C7A1-4363-B533-7FDBF72EA0F0}"/>
               </a:ext>
             </a:extLst>
           </p:cNvPr>
@@ -35277,7 +35277,7 @@
           <p:cNvPr id="53" name="">
             <a:extLst xmlns:a="http://schemas.openxmlformats.org/drawingml/2006/main">
               <a:ext uri="{FF2B5EF4-FFF2-40B4-BE49-F238E27FC236}">
-                <a16:creationId xmlns:a16="http://schemas.microsoft.com/office/drawing/2014/main" id="{0DB7730B-7CE5-4A41-A7B2-0A3B3F2CAEAA}"/>
+                <a16:creationId xmlns:a16="http://schemas.microsoft.com/office/drawing/2014/main" id="{721F6A51-5F5A-4060-8DA8-C80719E49D9B}"/>
               </a:ext>
             </a:extLst>
           </p:cNvPr>
@@ -35314,7 +35314,7 @@
           <p:cNvPr id="54" name="">
             <a:extLst xmlns:a="http://schemas.openxmlformats.org/drawingml/2006/main">
               <a:ext uri="{FF2B5EF4-FFF2-40B4-BE49-F238E27FC236}">
-                <a16:creationId xmlns:a16="http://schemas.microsoft.com/office/drawing/2014/main" id="{EE68200D-6C60-4A60-B27F-7DBB9D2ECE4B}"/>
+                <a16:creationId xmlns:a16="http://schemas.microsoft.com/office/drawing/2014/main" id="{87835DA2-E727-4472-AE87-674EF7501D7B}"/>
               </a:ext>
             </a:extLst>
           </p:cNvPr>
@@ -35378,7 +35378,7 @@
           <p:cNvPr id="55" name="">
             <a:extLst xmlns:a="http://schemas.openxmlformats.org/drawingml/2006/main">
               <a:ext uri="{FF2B5EF4-FFF2-40B4-BE49-F238E27FC236}">
-                <a16:creationId xmlns:a16="http://schemas.microsoft.com/office/drawing/2014/main" id="{32796C4E-0562-463C-BC18-5CF350E22E74}"/>
+                <a16:creationId xmlns:a16="http://schemas.microsoft.com/office/drawing/2014/main" id="{EFAE081D-B8F3-428E-8D02-D0EA8E6802F6}"/>
               </a:ext>
             </a:extLst>
           </p:cNvPr>
@@ -35442,7 +35442,7 @@
           <p:cNvPr id="56" name="">
             <a:extLst xmlns:a="http://schemas.openxmlformats.org/drawingml/2006/main">
               <a:ext uri="{FF2B5EF4-FFF2-40B4-BE49-F238E27FC236}">
-                <a16:creationId xmlns:a16="http://schemas.microsoft.com/office/drawing/2014/main" id="{CCEB7DAD-82B1-48B8-8042-7A2CCEB6C9FE}"/>
+                <a16:creationId xmlns:a16="http://schemas.microsoft.com/office/drawing/2014/main" id="{2F00CF1A-3504-4202-9C05-75BCB87611C4}"/>
               </a:ext>
             </a:extLst>
           </p:cNvPr>
@@ -35506,7 +35506,7 @@
           <p:cNvPr id="57" name="">
             <a:extLst xmlns:a="http://schemas.openxmlformats.org/drawingml/2006/main">
               <a:ext uri="{FF2B5EF4-FFF2-40B4-BE49-F238E27FC236}">
-                <a16:creationId xmlns:a16="http://schemas.microsoft.com/office/drawing/2014/main" id="{7C412144-D669-4ABF-8D58-2B96651C7619}"/>
+                <a16:creationId xmlns:a16="http://schemas.microsoft.com/office/drawing/2014/main" id="{4804F533-25D9-484D-B70E-076FC84A5F66}"/>
               </a:ext>
             </a:extLst>
           </p:cNvPr>
@@ -35543,7 +35543,7 @@
           <p:cNvPr id="58" name="">
             <a:extLst xmlns:a="http://schemas.openxmlformats.org/drawingml/2006/main">
               <a:ext uri="{FF2B5EF4-FFF2-40B4-BE49-F238E27FC236}">
-                <a16:creationId xmlns:a16="http://schemas.microsoft.com/office/drawing/2014/main" id="{C850AC4F-3D69-4B19-8099-CA22532DAC43}"/>
+                <a16:creationId xmlns:a16="http://schemas.microsoft.com/office/drawing/2014/main" id="{BF2C36FF-8759-484B-A496-180393825DA6}"/>
               </a:ext>
             </a:extLst>
           </p:cNvPr>
@@ -35605,7 +35605,7 @@
     </p:spTree>
     <p:extLst>
       <p:ext uri="{BB962C8B-B14F-4D97-AF65-F5344CB8AC3E}">
-        <p14:creationId xmlns:p14="http://schemas.microsoft.com/office/powerpoint/2010/main" val="1299013551"/>
+        <p14:creationId xmlns:p14="http://schemas.microsoft.com/office/powerpoint/2010/main" val="772065760"/>
       </p:ext>
     </p:extLst>
   </p:cSld>
@@ -35629,7 +35629,7 @@
           <p:cNvPr id="1" name="">
             <a:extLst xmlns:a="http://schemas.openxmlformats.org/drawingml/2006/main">
               <a:ext uri="{FF2B5EF4-FFF2-40B4-BE49-F238E27FC236}">
-                <a16:creationId xmlns:a16="http://schemas.microsoft.com/office/drawing/2014/main" id="{5CA5F7A9-1872-47AD-B4DB-1739643C2987}"/>
+                <a16:creationId xmlns:a16="http://schemas.microsoft.com/office/drawing/2014/main" id="{8416A478-1B9E-47C4-AE71-FC06085B342D}"/>
               </a:ext>
             </a:extLst>
           </p:cNvPr>
@@ -35664,7 +35664,7 @@
           <p:cNvPr id="2" name="">
             <a:extLst xmlns:a="http://schemas.openxmlformats.org/drawingml/2006/main">
               <a:ext uri="{FF2B5EF4-FFF2-40B4-BE49-F238E27FC236}">
-                <a16:creationId xmlns:a16="http://schemas.microsoft.com/office/drawing/2014/main" id="{6DDE26BD-518E-41FD-B7CC-C29D08ADF3EA}"/>
+                <a16:creationId xmlns:a16="http://schemas.microsoft.com/office/drawing/2014/main" id="{6642D658-D52B-4AEC-9226-913201E2F0BF}"/>
               </a:ext>
             </a:extLst>
           </p:cNvPr>
@@ -35710,7 +35710,7 @@
           <p:cNvPr id="3" name="">
             <a:extLst xmlns:a="http://schemas.openxmlformats.org/drawingml/2006/main">
               <a:ext uri="{FF2B5EF4-FFF2-40B4-BE49-F238E27FC236}">
-                <a16:creationId xmlns:a16="http://schemas.microsoft.com/office/drawing/2014/main" id="{469A2D4D-28F0-4016-90E2-B3B0FFD35EAA}"/>
+                <a16:creationId xmlns:a16="http://schemas.microsoft.com/office/drawing/2014/main" id="{97574F71-C79C-4FF9-8EF6-3EAB6D4578FE}"/>
               </a:ext>
             </a:extLst>
           </p:cNvPr>
@@ -35747,7 +35747,7 @@
           <p:cNvPr id="4" name="">
             <a:extLst xmlns:a="http://schemas.openxmlformats.org/drawingml/2006/main">
               <a:ext uri="{FF2B5EF4-FFF2-40B4-BE49-F238E27FC236}">
-                <a16:creationId xmlns:a16="http://schemas.microsoft.com/office/drawing/2014/main" id="{256D0812-F8A8-420E-B527-DB1FB2476942}"/>
+                <a16:creationId xmlns:a16="http://schemas.microsoft.com/office/drawing/2014/main" id="{9066B05D-0583-4B7E-A113-490313DE0E36}"/>
               </a:ext>
             </a:extLst>
           </p:cNvPr>
@@ -35784,7 +35784,7 @@
           <p:cNvPr id="5" name="">
             <a:extLst xmlns:a="http://schemas.openxmlformats.org/drawingml/2006/main">
               <a:ext uri="{FF2B5EF4-FFF2-40B4-BE49-F238E27FC236}">
-                <a16:creationId xmlns:a16="http://schemas.microsoft.com/office/drawing/2014/main" id="{CEA115EB-ACC0-40CC-8969-AB228D5C7AB4}"/>
+                <a16:creationId xmlns:a16="http://schemas.microsoft.com/office/drawing/2014/main" id="{F294BBE6-7F0D-4B05-9F65-7A78DB15BD54}"/>
               </a:ext>
             </a:extLst>
           </p:cNvPr>
@@ -35821,7 +35821,7 @@
           <p:cNvPr id="6" name="">
             <a:extLst xmlns:a="http://schemas.openxmlformats.org/drawingml/2006/main">
               <a:ext uri="{FF2B5EF4-FFF2-40B4-BE49-F238E27FC236}">
-                <a16:creationId xmlns:a16="http://schemas.microsoft.com/office/drawing/2014/main" id="{B9BA6177-3777-4F6B-AAA7-C98A6F5B8FCD}"/>
+                <a16:creationId xmlns:a16="http://schemas.microsoft.com/office/drawing/2014/main" id="{D33D030B-7BF5-4812-ABDF-7CAB75D2D628}"/>
               </a:ext>
             </a:extLst>
           </p:cNvPr>
@@ -35858,7 +35858,7 @@
           <p:cNvPr id="7" name="">
             <a:extLst xmlns:a="http://schemas.openxmlformats.org/drawingml/2006/main">
               <a:ext uri="{FF2B5EF4-FFF2-40B4-BE49-F238E27FC236}">
-                <a16:creationId xmlns:a16="http://schemas.microsoft.com/office/drawing/2014/main" id="{51E2D6CA-D64E-444C-9A3B-F3B6C831A721}"/>
+                <a16:creationId xmlns:a16="http://schemas.microsoft.com/office/drawing/2014/main" id="{B2559282-4539-4E15-9219-C640E3C9D81A}"/>
               </a:ext>
             </a:extLst>
           </p:cNvPr>
@@ -35895,7 +35895,7 @@
           <p:cNvPr id="8" name="">
             <a:extLst xmlns:a="http://schemas.openxmlformats.org/drawingml/2006/main">
               <a:ext uri="{FF2B5EF4-FFF2-40B4-BE49-F238E27FC236}">
-                <a16:creationId xmlns:a16="http://schemas.microsoft.com/office/drawing/2014/main" id="{5AFFCF35-A91F-4D6F-B601-A8EF6324C6DA}"/>
+                <a16:creationId xmlns:a16="http://schemas.microsoft.com/office/drawing/2014/main" id="{41709042-90C1-4BEB-A413-A73BDAE99454}"/>
               </a:ext>
             </a:extLst>
           </p:cNvPr>
@@ -35932,7 +35932,7 @@
           <p:cNvPr id="9" name="">
             <a:extLst xmlns:a="http://schemas.openxmlformats.org/drawingml/2006/main">
               <a:ext uri="{FF2B5EF4-FFF2-40B4-BE49-F238E27FC236}">
-                <a16:creationId xmlns:a16="http://schemas.microsoft.com/office/drawing/2014/main" id="{FBCEC747-3BDB-47DC-8782-02C63B0A909D}"/>
+                <a16:creationId xmlns:a16="http://schemas.microsoft.com/office/drawing/2014/main" id="{6E55FE61-7A78-44C3-84CD-1AAE33777DB3}"/>
               </a:ext>
             </a:extLst>
           </p:cNvPr>
@@ -35969,7 +35969,7 @@
           <p:cNvPr id="10" name="">
             <a:extLst xmlns:a="http://schemas.openxmlformats.org/drawingml/2006/main">
               <a:ext uri="{FF2B5EF4-FFF2-40B4-BE49-F238E27FC236}">
-                <a16:creationId xmlns:a16="http://schemas.microsoft.com/office/drawing/2014/main" id="{69CB0DFA-96C6-42DD-88BD-AB67CFB2C136}"/>
+                <a16:creationId xmlns:a16="http://schemas.microsoft.com/office/drawing/2014/main" id="{29E8F68C-865E-44FE-8490-439A1E4C134E}"/>
               </a:ext>
             </a:extLst>
           </p:cNvPr>
@@ -36006,7 +36006,7 @@
           <p:cNvPr id="11" name="">
             <a:extLst xmlns:a="http://schemas.openxmlformats.org/drawingml/2006/main">
               <a:ext uri="{FF2B5EF4-FFF2-40B4-BE49-F238E27FC236}">
-                <a16:creationId xmlns:a16="http://schemas.microsoft.com/office/drawing/2014/main" id="{481BE677-B3BD-44BB-9744-CAD6C98238BD}"/>
+                <a16:creationId xmlns:a16="http://schemas.microsoft.com/office/drawing/2014/main" id="{78D52054-5773-4821-AA3C-0DD57D71E372}"/>
               </a:ext>
             </a:extLst>
           </p:cNvPr>
@@ -36043,7 +36043,7 @@
           <p:cNvPr id="12" name="">
             <a:extLst xmlns:a="http://schemas.openxmlformats.org/drawingml/2006/main">
               <a:ext uri="{FF2B5EF4-FFF2-40B4-BE49-F238E27FC236}">
-                <a16:creationId xmlns:a16="http://schemas.microsoft.com/office/drawing/2014/main" id="{1C006480-8102-45F2-B5D3-21F18F7169BB}"/>
+                <a16:creationId xmlns:a16="http://schemas.microsoft.com/office/drawing/2014/main" id="{0486C2CF-431E-4F72-9931-2A874C3701BE}"/>
               </a:ext>
             </a:extLst>
           </p:cNvPr>
@@ -36080,7 +36080,7 @@
           <p:cNvPr id="13" name="">
             <a:extLst xmlns:a="http://schemas.openxmlformats.org/drawingml/2006/main">
               <a:ext uri="{FF2B5EF4-FFF2-40B4-BE49-F238E27FC236}">
-                <a16:creationId xmlns:a16="http://schemas.microsoft.com/office/drawing/2014/main" id="{474DCFF6-9E5C-4A0F-B055-0862D97083CD}"/>
+                <a16:creationId xmlns:a16="http://schemas.microsoft.com/office/drawing/2014/main" id="{344096BB-16A3-4F27-B496-CFAF274A8FBB}"/>
               </a:ext>
             </a:extLst>
           </p:cNvPr>
@@ -36117,7 +36117,7 @@
           <p:cNvPr id="14" name="">
             <a:extLst xmlns:a="http://schemas.openxmlformats.org/drawingml/2006/main">
               <a:ext uri="{FF2B5EF4-FFF2-40B4-BE49-F238E27FC236}">
-                <a16:creationId xmlns:a16="http://schemas.microsoft.com/office/drawing/2014/main" id="{8B6CDBBE-D4B3-4E4A-8932-FB9F3A2BBEE3}"/>
+                <a16:creationId xmlns:a16="http://schemas.microsoft.com/office/drawing/2014/main" id="{E29A1773-95B5-41AA-A728-B002BFE6F138}"/>
               </a:ext>
             </a:extLst>
           </p:cNvPr>
@@ -36154,7 +36154,7 @@
           <p:cNvPr id="15" name="">
             <a:extLst xmlns:a="http://schemas.openxmlformats.org/drawingml/2006/main">
               <a:ext uri="{FF2B5EF4-FFF2-40B4-BE49-F238E27FC236}">
-                <a16:creationId xmlns:a16="http://schemas.microsoft.com/office/drawing/2014/main" id="{48349990-A265-48B2-AE8B-98DB7DA4A713}"/>
+                <a16:creationId xmlns:a16="http://schemas.microsoft.com/office/drawing/2014/main" id="{1B0B4663-00CE-49B1-B45E-7F4AE4797BC7}"/>
               </a:ext>
             </a:extLst>
           </p:cNvPr>
@@ -36191,7 +36191,7 @@
           <p:cNvPr id="16" name="">
             <a:extLst xmlns:a="http://schemas.openxmlformats.org/drawingml/2006/main">
               <a:ext uri="{FF2B5EF4-FFF2-40B4-BE49-F238E27FC236}">
-                <a16:creationId xmlns:a16="http://schemas.microsoft.com/office/drawing/2014/main" id="{677560EC-FABD-44EB-A75C-240359657F23}"/>
+                <a16:creationId xmlns:a16="http://schemas.microsoft.com/office/drawing/2014/main" id="{AEA24815-3C96-4ABF-84E4-C64C2C344970}"/>
               </a:ext>
             </a:extLst>
           </p:cNvPr>
@@ -36228,7 +36228,7 @@
           <p:cNvPr id="17" name="">
             <a:extLst xmlns:a="http://schemas.openxmlformats.org/drawingml/2006/main">
               <a:ext uri="{FF2B5EF4-FFF2-40B4-BE49-F238E27FC236}">
-                <a16:creationId xmlns:a16="http://schemas.microsoft.com/office/drawing/2014/main" id="{09DC412D-9A3C-47A0-8A64-2DD09BB42E9B}"/>
+                <a16:creationId xmlns:a16="http://schemas.microsoft.com/office/drawing/2014/main" id="{DE6B1325-0EDE-433C-BF5E-F954A46B89A8}"/>
               </a:ext>
             </a:extLst>
           </p:cNvPr>
@@ -36265,7 +36265,7 @@
           <p:cNvPr id="18" name="">
             <a:extLst xmlns:a="http://schemas.openxmlformats.org/drawingml/2006/main">
               <a:ext uri="{FF2B5EF4-FFF2-40B4-BE49-F238E27FC236}">
-                <a16:creationId xmlns:a16="http://schemas.microsoft.com/office/drawing/2014/main" id="{B8C1F146-7F40-4100-A304-B167B3723E2D}"/>
+                <a16:creationId xmlns:a16="http://schemas.microsoft.com/office/drawing/2014/main" id="{95E9D316-DC64-42BA-AF63-D2C451B56EB5}"/>
               </a:ext>
             </a:extLst>
           </p:cNvPr>
@@ -36302,7 +36302,7 @@
           <p:cNvPr id="19" name="">
             <a:extLst xmlns:a="http://schemas.openxmlformats.org/drawingml/2006/main">
               <a:ext uri="{FF2B5EF4-FFF2-40B4-BE49-F238E27FC236}">
-                <a16:creationId xmlns:a16="http://schemas.microsoft.com/office/drawing/2014/main" id="{19EA575F-563D-47D4-AADE-27782E5FCF00}"/>
+                <a16:creationId xmlns:a16="http://schemas.microsoft.com/office/drawing/2014/main" id="{D09A5E55-7EB6-40C8-ACC9-C3C175452CED}"/>
               </a:ext>
             </a:extLst>
           </p:cNvPr>
@@ -36339,7 +36339,7 @@
           <p:cNvPr id="20" name="">
             <a:extLst xmlns:a="http://schemas.openxmlformats.org/drawingml/2006/main">
               <a:ext uri="{FF2B5EF4-FFF2-40B4-BE49-F238E27FC236}">
-                <a16:creationId xmlns:a16="http://schemas.microsoft.com/office/drawing/2014/main" id="{44B596E2-7BE7-416A-B5D9-1468ABC163D4}"/>
+                <a16:creationId xmlns:a16="http://schemas.microsoft.com/office/drawing/2014/main" id="{E4A55C7F-5ED5-493F-899B-F7109BF1CAB7}"/>
               </a:ext>
             </a:extLst>
           </p:cNvPr>
@@ -36376,7 +36376,7 @@
           <p:cNvPr id="21" name="">
             <a:extLst xmlns:a="http://schemas.openxmlformats.org/drawingml/2006/main">
               <a:ext uri="{FF2B5EF4-FFF2-40B4-BE49-F238E27FC236}">
-                <a16:creationId xmlns:a16="http://schemas.microsoft.com/office/drawing/2014/main" id="{5DD88E7C-583F-4F8B-8D25-3BBC799CCA69}"/>
+                <a16:creationId xmlns:a16="http://schemas.microsoft.com/office/drawing/2014/main" id="{8421F644-ECCB-461B-AEBC-53E1A7812987}"/>
               </a:ext>
             </a:extLst>
           </p:cNvPr>
@@ -36413,7 +36413,7 @@
           <p:cNvPr id="22" name="">
             <a:extLst xmlns:a="http://schemas.openxmlformats.org/drawingml/2006/main">
               <a:ext uri="{FF2B5EF4-FFF2-40B4-BE49-F238E27FC236}">
-                <a16:creationId xmlns:a16="http://schemas.microsoft.com/office/drawing/2014/main" id="{9FCCE441-D992-49B5-9B91-5147C11F936B}"/>
+                <a16:creationId xmlns:a16="http://schemas.microsoft.com/office/drawing/2014/main" id="{798D0D63-7525-495C-A7AA-7A72F51767BB}"/>
               </a:ext>
             </a:extLst>
           </p:cNvPr>
@@ -36450,7 +36450,7 @@
           <p:cNvPr id="23" name="">
             <a:extLst xmlns:a="http://schemas.openxmlformats.org/drawingml/2006/main">
               <a:ext uri="{FF2B5EF4-FFF2-40B4-BE49-F238E27FC236}">
-                <a16:creationId xmlns:a16="http://schemas.microsoft.com/office/drawing/2014/main" id="{A3DAD551-56AF-4DE2-B14D-1468F7B58CE1}"/>
+                <a16:creationId xmlns:a16="http://schemas.microsoft.com/office/drawing/2014/main" id="{A233BF5D-C3B2-4FDF-A563-0BDDFAE8ED26}"/>
               </a:ext>
             </a:extLst>
           </p:cNvPr>
@@ -36487,7 +36487,7 @@
           <p:cNvPr id="24" name="">
             <a:extLst xmlns:a="http://schemas.openxmlformats.org/drawingml/2006/main">
               <a:ext uri="{FF2B5EF4-FFF2-40B4-BE49-F238E27FC236}">
-                <a16:creationId xmlns:a16="http://schemas.microsoft.com/office/drawing/2014/main" id="{63AB5A4A-3595-4AB6-A3C7-E50425D71672}"/>
+                <a16:creationId xmlns:a16="http://schemas.microsoft.com/office/drawing/2014/main" id="{566EF3BE-C6F8-417D-8474-6755E33B0004}"/>
               </a:ext>
             </a:extLst>
           </p:cNvPr>
@@ -36524,7 +36524,7 @@
           <p:cNvPr id="25" name="">
             <a:extLst xmlns:a="http://schemas.openxmlformats.org/drawingml/2006/main">
               <a:ext uri="{FF2B5EF4-FFF2-40B4-BE49-F238E27FC236}">
-                <a16:creationId xmlns:a16="http://schemas.microsoft.com/office/drawing/2014/main" id="{22A56F76-1405-4B3D-A949-2FA9FFF181F2}"/>
+                <a16:creationId xmlns:a16="http://schemas.microsoft.com/office/drawing/2014/main" id="{705CFC7C-2E3C-491C-90FA-CEA61E0EA69B}"/>
               </a:ext>
             </a:extLst>
           </p:cNvPr>
@@ -36561,7 +36561,7 @@
           <p:cNvPr id="26" name="">
             <a:extLst xmlns:a="http://schemas.openxmlformats.org/drawingml/2006/main">
               <a:ext uri="{FF2B5EF4-FFF2-40B4-BE49-F238E27FC236}">
-                <a16:creationId xmlns:a16="http://schemas.microsoft.com/office/drawing/2014/main" id="{EC0CBEA5-7EB4-4DE0-A4D1-3424E491DD21}"/>
+                <a16:creationId xmlns:a16="http://schemas.microsoft.com/office/drawing/2014/main" id="{143F8BE9-EA06-4980-81F7-C240CB37DDA0}"/>
               </a:ext>
             </a:extLst>
           </p:cNvPr>
@@ -36608,7 +36608,7 @@
           <p:cNvPr id="27" name="">
             <a:extLst xmlns:a="http://schemas.openxmlformats.org/drawingml/2006/main">
               <a:ext uri="{FF2B5EF4-FFF2-40B4-BE49-F238E27FC236}">
-                <a16:creationId xmlns:a16="http://schemas.microsoft.com/office/drawing/2014/main" id="{9C622956-3910-495A-B5B9-17C42CCA63F5}"/>
+                <a16:creationId xmlns:a16="http://schemas.microsoft.com/office/drawing/2014/main" id="{FBD68224-6FC0-4BCD-B2FB-CF660D1AA5D7}"/>
               </a:ext>
             </a:extLst>
           </p:cNvPr>
@@ -36655,7 +36655,7 @@
           <p:cNvPr id="28" name="">
             <a:extLst xmlns:a="http://schemas.openxmlformats.org/drawingml/2006/main">
               <a:ext uri="{FF2B5EF4-FFF2-40B4-BE49-F238E27FC236}">
-                <a16:creationId xmlns:a16="http://schemas.microsoft.com/office/drawing/2014/main" id="{F6DD343D-520A-41AF-8BE6-20E3E6118D94}"/>
+                <a16:creationId xmlns:a16="http://schemas.microsoft.com/office/drawing/2014/main" id="{93BAE08D-E3E8-4D44-A6C7-DDF717A42306}"/>
               </a:ext>
             </a:extLst>
           </p:cNvPr>
@@ -36719,7 +36719,7 @@
           <p:cNvPr id="29" name="">
             <a:extLst xmlns:a="http://schemas.openxmlformats.org/drawingml/2006/main">
               <a:ext uri="{FF2B5EF4-FFF2-40B4-BE49-F238E27FC236}">
-                <a16:creationId xmlns:a16="http://schemas.microsoft.com/office/drawing/2014/main" id="{49F7CB9B-6790-411D-94B7-D0CB6C749D52}"/>
+                <a16:creationId xmlns:a16="http://schemas.microsoft.com/office/drawing/2014/main" id="{D552B79A-8BF7-4737-8F73-B97259D83F93}"/>
               </a:ext>
             </a:extLst>
           </p:cNvPr>
@@ -36783,7 +36783,7 @@
           <p:cNvPr id="30" name="">
             <a:extLst xmlns:a="http://schemas.openxmlformats.org/drawingml/2006/main">
               <a:ext uri="{FF2B5EF4-FFF2-40B4-BE49-F238E27FC236}">
-                <a16:creationId xmlns:a16="http://schemas.microsoft.com/office/drawing/2014/main" id="{AB44B628-46CE-46C7-985B-D1D67077B591}"/>
+                <a16:creationId xmlns:a16="http://schemas.microsoft.com/office/drawing/2014/main" id="{AF7814D1-624B-4DE4-A5EB-B197F31F94A8}"/>
               </a:ext>
             </a:extLst>
           </p:cNvPr>
@@ -36847,7 +36847,7 @@
           <p:cNvPr id="31" name="">
             <a:extLst xmlns:a="http://schemas.openxmlformats.org/drawingml/2006/main">
               <a:ext uri="{FF2B5EF4-FFF2-40B4-BE49-F238E27FC236}">
-                <a16:creationId xmlns:a16="http://schemas.microsoft.com/office/drawing/2014/main" id="{DEBB0EBE-DDE3-4CBF-A507-76D99FA385A7}"/>
+                <a16:creationId xmlns:a16="http://schemas.microsoft.com/office/drawing/2014/main" id="{2B9A4F5D-D8F3-4BC6-ADF9-F2BB774BB63E}"/>
               </a:ext>
             </a:extLst>
           </p:cNvPr>
@@ -36911,7 +36911,7 @@
           <p:cNvPr id="32" name="">
             <a:extLst xmlns:a="http://schemas.openxmlformats.org/drawingml/2006/main">
               <a:ext uri="{FF2B5EF4-FFF2-40B4-BE49-F238E27FC236}">
-                <a16:creationId xmlns:a16="http://schemas.microsoft.com/office/drawing/2014/main" id="{6C882727-7D37-41F0-AB75-A3875C2A83CD}"/>
+                <a16:creationId xmlns:a16="http://schemas.microsoft.com/office/drawing/2014/main" id="{A4B446EF-D748-4721-BAFA-C1C2327CD4A0}"/>
               </a:ext>
             </a:extLst>
           </p:cNvPr>
@@ -36948,7 +36948,7 @@
           <p:cNvPr id="33" name="">
             <a:extLst xmlns:a="http://schemas.openxmlformats.org/drawingml/2006/main">
               <a:ext uri="{FF2B5EF4-FFF2-40B4-BE49-F238E27FC236}">
-                <a16:creationId xmlns:a16="http://schemas.microsoft.com/office/drawing/2014/main" id="{C6CF88C9-4006-4059-9C86-9CEA9ADE6DF7}"/>
+                <a16:creationId xmlns:a16="http://schemas.microsoft.com/office/drawing/2014/main" id="{EDDAB2CE-21E0-47FA-864E-793DF7660691}"/>
               </a:ext>
             </a:extLst>
           </p:cNvPr>
@@ -36985,7 +36985,7 @@
           <p:cNvPr id="34" name="">
             <a:extLst xmlns:a="http://schemas.openxmlformats.org/drawingml/2006/main">
               <a:ext uri="{FF2B5EF4-FFF2-40B4-BE49-F238E27FC236}">
-                <a16:creationId xmlns:a16="http://schemas.microsoft.com/office/drawing/2014/main" id="{2FCD03BE-1AD6-4D79-8C9B-F2E2970E4415}"/>
+                <a16:creationId xmlns:a16="http://schemas.microsoft.com/office/drawing/2014/main" id="{EBB53B7C-6DDF-435D-8752-2AF1F5E7E158}"/>
               </a:ext>
             </a:extLst>
           </p:cNvPr>
@@ -37022,7 +37022,7 @@
           <p:cNvPr id="35" name="">
             <a:extLst xmlns:a="http://schemas.openxmlformats.org/drawingml/2006/main">
               <a:ext uri="{FF2B5EF4-FFF2-40B4-BE49-F238E27FC236}">
-                <a16:creationId xmlns:a16="http://schemas.microsoft.com/office/drawing/2014/main" id="{81ADB038-FAA5-4975-B70B-3861916B954D}"/>
+                <a16:creationId xmlns:a16="http://schemas.microsoft.com/office/drawing/2014/main" id="{CF931D9F-2C0F-4535-803F-7274AA8B3248}"/>
               </a:ext>
             </a:extLst>
           </p:cNvPr>
@@ -37086,7 +37086,7 @@
           <p:cNvPr id="36" name="">
             <a:extLst xmlns:a="http://schemas.openxmlformats.org/drawingml/2006/main">
               <a:ext uri="{FF2B5EF4-FFF2-40B4-BE49-F238E27FC236}">
-                <a16:creationId xmlns:a16="http://schemas.microsoft.com/office/drawing/2014/main" id="{38FB5611-388D-465F-BA78-340077ECD20C}"/>
+                <a16:creationId xmlns:a16="http://schemas.microsoft.com/office/drawing/2014/main" id="{B5578902-1134-46FF-8630-CF3D0E2E369C}"/>
               </a:ext>
             </a:extLst>
           </p:cNvPr>
@@ -37150,7 +37150,7 @@
           <p:cNvPr id="37" name="">
             <a:extLst xmlns:a="http://schemas.openxmlformats.org/drawingml/2006/main">
               <a:ext uri="{FF2B5EF4-FFF2-40B4-BE49-F238E27FC236}">
-                <a16:creationId xmlns:a16="http://schemas.microsoft.com/office/drawing/2014/main" id="{126B41A5-EA87-4E1E-B442-F6D9B7E399ED}"/>
+                <a16:creationId xmlns:a16="http://schemas.microsoft.com/office/drawing/2014/main" id="{39878954-52B6-4627-B8DA-7E370018A3DD}"/>
               </a:ext>
             </a:extLst>
           </p:cNvPr>
@@ -37260,7 +37260,7 @@
           <p:cNvPr id="38" name="">
             <a:extLst xmlns:a="http://schemas.openxmlformats.org/drawingml/2006/main">
               <a:ext uri="{FF2B5EF4-FFF2-40B4-BE49-F238E27FC236}">
-                <a16:creationId xmlns:a16="http://schemas.microsoft.com/office/drawing/2014/main" id="{3CB76ED3-F08E-4B31-A0A0-329B41931BBA}"/>
+                <a16:creationId xmlns:a16="http://schemas.microsoft.com/office/drawing/2014/main" id="{51142007-935D-4ABE-9311-B139F4D7AB80}"/>
               </a:ext>
             </a:extLst>
           </p:cNvPr>
@@ -37297,7 +37297,7 @@
           <p:cNvPr id="39" name="">
             <a:extLst xmlns:a="http://schemas.openxmlformats.org/drawingml/2006/main">
               <a:ext uri="{FF2B5EF4-FFF2-40B4-BE49-F238E27FC236}">
-                <a16:creationId xmlns:a16="http://schemas.microsoft.com/office/drawing/2014/main" id="{AEF089F2-A6F3-45B3-85D9-754CB159A881}"/>
+                <a16:creationId xmlns:a16="http://schemas.microsoft.com/office/drawing/2014/main" id="{7B6FB4E2-CF1D-46E8-A01B-A92E3EB9B53E}"/>
               </a:ext>
             </a:extLst>
           </p:cNvPr>
@@ -37334,7 +37334,7 @@
           <p:cNvPr id="40" name="">
             <a:extLst xmlns:a="http://schemas.openxmlformats.org/drawingml/2006/main">
               <a:ext uri="{FF2B5EF4-FFF2-40B4-BE49-F238E27FC236}">
-                <a16:creationId xmlns:a16="http://schemas.microsoft.com/office/drawing/2014/main" id="{89254908-A82F-4E1A-9297-B94340FD4BCE}"/>
+                <a16:creationId xmlns:a16="http://schemas.microsoft.com/office/drawing/2014/main" id="{DC81560A-1D17-4B06-9C59-EF74B442F7A1}"/>
               </a:ext>
             </a:extLst>
           </p:cNvPr>
@@ -37371,7 +37371,7 @@
           <p:cNvPr id="41" name="">
             <a:extLst xmlns:a="http://schemas.openxmlformats.org/drawingml/2006/main">
               <a:ext uri="{FF2B5EF4-FFF2-40B4-BE49-F238E27FC236}">
-                <a16:creationId xmlns:a16="http://schemas.microsoft.com/office/drawing/2014/main" id="{90EE735B-4DA3-402E-9E7E-C116B5DD4420}"/>
+                <a16:creationId xmlns:a16="http://schemas.microsoft.com/office/drawing/2014/main" id="{3DF230DB-3C93-4ADE-937C-139777439896}"/>
               </a:ext>
             </a:extLst>
           </p:cNvPr>
@@ -37435,7 +37435,7 @@
           <p:cNvPr id="42" name="">
             <a:extLst xmlns:a="http://schemas.openxmlformats.org/drawingml/2006/main">
               <a:ext uri="{FF2B5EF4-FFF2-40B4-BE49-F238E27FC236}">
-                <a16:creationId xmlns:a16="http://schemas.microsoft.com/office/drawing/2014/main" id="{DBA10355-CBA6-4528-8A70-4DA69B10CA3E}"/>
+                <a16:creationId xmlns:a16="http://schemas.microsoft.com/office/drawing/2014/main" id="{30781E4E-4492-4259-B214-05EF3E900739}"/>
               </a:ext>
             </a:extLst>
           </p:cNvPr>
@@ -37499,7 +37499,7 @@
           <p:cNvPr id="43" name="">
             <a:extLst xmlns:a="http://schemas.openxmlformats.org/drawingml/2006/main">
               <a:ext uri="{FF2B5EF4-FFF2-40B4-BE49-F238E27FC236}">
-                <a16:creationId xmlns:a16="http://schemas.microsoft.com/office/drawing/2014/main" id="{C4D77A4A-3580-4578-9BC3-B102DC58C14D}"/>
+                <a16:creationId xmlns:a16="http://schemas.microsoft.com/office/drawing/2014/main" id="{09648EF3-C75D-4CF3-B5E1-4F7CBEB2539C}"/>
               </a:ext>
             </a:extLst>
           </p:cNvPr>
@@ -37563,7 +37563,7 @@
           <p:cNvPr id="44" name="">
             <a:extLst xmlns:a="http://schemas.openxmlformats.org/drawingml/2006/main">
               <a:ext uri="{FF2B5EF4-FFF2-40B4-BE49-F238E27FC236}">
-                <a16:creationId xmlns:a16="http://schemas.microsoft.com/office/drawing/2014/main" id="{C0DE3A20-779F-42E7-8954-08376CBEA489}"/>
+                <a16:creationId xmlns:a16="http://schemas.microsoft.com/office/drawing/2014/main" id="{F7438299-690C-41FD-8C1D-93EAB865CB55}"/>
               </a:ext>
             </a:extLst>
           </p:cNvPr>
@@ -37600,7 +37600,7 @@
           <p:cNvPr id="45" name="">
             <a:extLst xmlns:a="http://schemas.openxmlformats.org/drawingml/2006/main">
               <a:ext uri="{FF2B5EF4-FFF2-40B4-BE49-F238E27FC236}">
-                <a16:creationId xmlns:a16="http://schemas.microsoft.com/office/drawing/2014/main" id="{BF153295-AD0B-4E17-9E1C-1ED16B9595DD}"/>
+                <a16:creationId xmlns:a16="http://schemas.microsoft.com/office/drawing/2014/main" id="{2BA76AE7-AD63-49A6-AF21-4F66EA36C296}"/>
               </a:ext>
             </a:extLst>
           </p:cNvPr>
@@ -37637,7 +37637,7 @@
           <p:cNvPr id="46" name="">
             <a:extLst xmlns:a="http://schemas.openxmlformats.org/drawingml/2006/main">
               <a:ext uri="{FF2B5EF4-FFF2-40B4-BE49-F238E27FC236}">
-                <a16:creationId xmlns:a16="http://schemas.microsoft.com/office/drawing/2014/main" id="{4A63F72B-7BB3-4E49-BC5D-943B827E7606}"/>
+                <a16:creationId xmlns:a16="http://schemas.microsoft.com/office/drawing/2014/main" id="{1C69A6D9-2C90-4BAF-8868-05AE3A9EE07E}"/>
               </a:ext>
             </a:extLst>
           </p:cNvPr>
@@ -37674,7 +37674,7 @@
           <p:cNvPr id="47" name="">
             <a:extLst xmlns:a="http://schemas.openxmlformats.org/drawingml/2006/main">
               <a:ext uri="{FF2B5EF4-FFF2-40B4-BE49-F238E27FC236}">
-                <a16:creationId xmlns:a16="http://schemas.microsoft.com/office/drawing/2014/main" id="{E7257271-4902-484D-8759-25745BDD8239}"/>
+                <a16:creationId xmlns:a16="http://schemas.microsoft.com/office/drawing/2014/main" id="{4D269C81-2CBA-4549-86AB-D2760C165A3E}"/>
               </a:ext>
             </a:extLst>
           </p:cNvPr>
@@ -37738,7 +37738,7 @@
           <p:cNvPr id="48" name="">
             <a:extLst xmlns:a="http://schemas.openxmlformats.org/drawingml/2006/main">
               <a:ext uri="{FF2B5EF4-FFF2-40B4-BE49-F238E27FC236}">
-                <a16:creationId xmlns:a16="http://schemas.microsoft.com/office/drawing/2014/main" id="{0407FE4B-C242-411B-934C-8842DBBCC556}"/>
+                <a16:creationId xmlns:a16="http://schemas.microsoft.com/office/drawing/2014/main" id="{815BD043-AD10-480B-B71D-F63BFA610269}"/>
               </a:ext>
             </a:extLst>
           </p:cNvPr>
@@ -37802,7 +37802,7 @@
           <p:cNvPr id="49" name="">
             <a:extLst xmlns:a="http://schemas.openxmlformats.org/drawingml/2006/main">
               <a:ext uri="{FF2B5EF4-FFF2-40B4-BE49-F238E27FC236}">
-                <a16:creationId xmlns:a16="http://schemas.microsoft.com/office/drawing/2014/main" id="{BF7C353E-AAAE-4986-919D-C954C005D697}"/>
+                <a16:creationId xmlns:a16="http://schemas.microsoft.com/office/drawing/2014/main" id="{0DA6FE02-85E9-445C-9B81-54394932A1FB}"/>
               </a:ext>
             </a:extLst>
           </p:cNvPr>
@@ -37935,7 +37935,7 @@
           <p:cNvPr id="50" name="">
             <a:extLst xmlns:a="http://schemas.openxmlformats.org/drawingml/2006/main">
               <a:ext uri="{FF2B5EF4-FFF2-40B4-BE49-F238E27FC236}">
-                <a16:creationId xmlns:a16="http://schemas.microsoft.com/office/drawing/2014/main" id="{92653A39-DF76-49AC-9DBA-3117C1B973C9}"/>
+                <a16:creationId xmlns:a16="http://schemas.microsoft.com/office/drawing/2014/main" id="{3176937B-3E4D-4D26-8000-D26F25FA34F0}"/>
               </a:ext>
             </a:extLst>
           </p:cNvPr>
@@ -37972,7 +37972,7 @@
           <p:cNvPr id="51" name="">
             <a:extLst xmlns:a="http://schemas.openxmlformats.org/drawingml/2006/main">
               <a:ext uri="{FF2B5EF4-FFF2-40B4-BE49-F238E27FC236}">
-                <a16:creationId xmlns:a16="http://schemas.microsoft.com/office/drawing/2014/main" id="{AC2872E4-8795-47DF-9433-566ED6FFE5A9}"/>
+                <a16:creationId xmlns:a16="http://schemas.microsoft.com/office/drawing/2014/main" id="{FDC8DD46-D198-4997-8DA9-8516677A3CD1}"/>
               </a:ext>
             </a:extLst>
           </p:cNvPr>
@@ -38036,7 +38036,7 @@
           <p:cNvPr id="52" name="">
             <a:extLst xmlns:a="http://schemas.openxmlformats.org/drawingml/2006/main">
               <a:ext uri="{FF2B5EF4-FFF2-40B4-BE49-F238E27FC236}">
-                <a16:creationId xmlns:a16="http://schemas.microsoft.com/office/drawing/2014/main" id="{76B7DFDE-1C9B-45D2-BE96-36FEA6EF7320}"/>
+                <a16:creationId xmlns:a16="http://schemas.microsoft.com/office/drawing/2014/main" id="{B58A2FE0-6157-4228-83C8-6EE35FBAF3E5}"/>
               </a:ext>
             </a:extLst>
           </p:cNvPr>
@@ -38073,7 +38073,7 @@
           <p:cNvPr id="53" name="">
             <a:extLst xmlns:a="http://schemas.openxmlformats.org/drawingml/2006/main">
               <a:ext uri="{FF2B5EF4-FFF2-40B4-BE49-F238E27FC236}">
-                <a16:creationId xmlns:a16="http://schemas.microsoft.com/office/drawing/2014/main" id="{924C3A2B-A2A9-4DFF-8C22-AC59839AADAF}"/>
+                <a16:creationId xmlns:a16="http://schemas.microsoft.com/office/drawing/2014/main" id="{53622634-240C-4C5E-AE77-28D7901622E9}"/>
               </a:ext>
             </a:extLst>
           </p:cNvPr>
@@ -38137,7 +38137,7 @@
           <p:cNvPr id="54" name="">
             <a:extLst xmlns:a="http://schemas.openxmlformats.org/drawingml/2006/main">
               <a:ext uri="{FF2B5EF4-FFF2-40B4-BE49-F238E27FC236}">
-                <a16:creationId xmlns:a16="http://schemas.microsoft.com/office/drawing/2014/main" id="{D485BF9C-E690-42EF-A8E9-0842AAF98FB8}"/>
+                <a16:creationId xmlns:a16="http://schemas.microsoft.com/office/drawing/2014/main" id="{65DC745E-57F7-4F3D-BA63-6F0555D23210}"/>
               </a:ext>
             </a:extLst>
           </p:cNvPr>
@@ -38201,7 +38201,7 @@
           <p:cNvPr id="55" name="">
             <a:extLst xmlns:a="http://schemas.openxmlformats.org/drawingml/2006/main">
               <a:ext uri="{FF2B5EF4-FFF2-40B4-BE49-F238E27FC236}">
-                <a16:creationId xmlns:a16="http://schemas.microsoft.com/office/drawing/2014/main" id="{B36DA34F-F014-486D-94FC-0149810D399D}"/>
+                <a16:creationId xmlns:a16="http://schemas.microsoft.com/office/drawing/2014/main" id="{C1A3109A-5A9E-4D44-AF3A-FAC216A5772B}"/>
               </a:ext>
             </a:extLst>
           </p:cNvPr>
@@ -38238,7 +38238,7 @@
           <p:cNvPr id="56" name="">
             <a:extLst xmlns:a="http://schemas.openxmlformats.org/drawingml/2006/main">
               <a:ext uri="{FF2B5EF4-FFF2-40B4-BE49-F238E27FC236}">
-                <a16:creationId xmlns:a16="http://schemas.microsoft.com/office/drawing/2014/main" id="{A8FA2158-23F7-4586-B8F7-DBF487202788}"/>
+                <a16:creationId xmlns:a16="http://schemas.microsoft.com/office/drawing/2014/main" id="{D4D76E45-F5D3-4761-BD3B-A137840BE9E7}"/>
               </a:ext>
             </a:extLst>
           </p:cNvPr>
@@ -38300,7 +38300,7 @@
     </p:spTree>
     <p:extLst>
       <p:ext uri="{BB962C8B-B14F-4D97-AF65-F5344CB8AC3E}">
-        <p14:creationId xmlns:p14="http://schemas.microsoft.com/office/powerpoint/2010/main" val="655673943"/>
+        <p14:creationId xmlns:p14="http://schemas.microsoft.com/office/powerpoint/2010/main" val="693272528"/>
       </p:ext>
     </p:extLst>
   </p:cSld>
@@ -38324,7 +38324,7 @@
           <p:cNvPr id="1" name="">
             <a:extLst xmlns:a="http://schemas.openxmlformats.org/drawingml/2006/main">
               <a:ext uri="{FF2B5EF4-FFF2-40B4-BE49-F238E27FC236}">
-                <a16:creationId xmlns:a16="http://schemas.microsoft.com/office/drawing/2014/main" id="{98E36D40-6281-46B2-8C5B-9118C784CC24}"/>
+                <a16:creationId xmlns:a16="http://schemas.microsoft.com/office/drawing/2014/main" id="{87E9A97F-DA47-468A-9773-623AD56E4F4B}"/>
               </a:ext>
             </a:extLst>
           </p:cNvPr>
@@ -38359,7 +38359,7 @@
           <p:cNvPr id="2" name="">
             <a:extLst xmlns:a="http://schemas.openxmlformats.org/drawingml/2006/main">
               <a:ext uri="{FF2B5EF4-FFF2-40B4-BE49-F238E27FC236}">
-                <a16:creationId xmlns:a16="http://schemas.microsoft.com/office/drawing/2014/main" id="{93FE6694-7202-4432-AFD8-DD987BFA356C}"/>
+                <a16:creationId xmlns:a16="http://schemas.microsoft.com/office/drawing/2014/main" id="{D99C1EDC-820F-47F1-BDA6-7A7171675F2A}"/>
               </a:ext>
             </a:extLst>
           </p:cNvPr>
@@ -38405,7 +38405,7 @@
           <p:cNvPr id="3" name="">
             <a:extLst xmlns:a="http://schemas.openxmlformats.org/drawingml/2006/main">
               <a:ext uri="{FF2B5EF4-FFF2-40B4-BE49-F238E27FC236}">
-                <a16:creationId xmlns:a16="http://schemas.microsoft.com/office/drawing/2014/main" id="{F68AAE35-B04F-47A8-97D4-D0BEBA0D6DFF}"/>
+                <a16:creationId xmlns:a16="http://schemas.microsoft.com/office/drawing/2014/main" id="{96B9C8C8-C85F-4280-90A1-032414CC955F}"/>
               </a:ext>
             </a:extLst>
           </p:cNvPr>
@@ -38442,7 +38442,7 @@
           <p:cNvPr id="4" name="">
             <a:extLst xmlns:a="http://schemas.openxmlformats.org/drawingml/2006/main">
               <a:ext uri="{FF2B5EF4-FFF2-40B4-BE49-F238E27FC236}">
-                <a16:creationId xmlns:a16="http://schemas.microsoft.com/office/drawing/2014/main" id="{222B37EE-72FB-4E1B-ACAF-80C0124E07FC}"/>
+                <a16:creationId xmlns:a16="http://schemas.microsoft.com/office/drawing/2014/main" id="{DFAE4943-CD05-43B1-A231-AFAE840694EA}"/>
               </a:ext>
             </a:extLst>
           </p:cNvPr>
@@ -38479,7 +38479,7 @@
           <p:cNvPr id="5" name="">
             <a:extLst xmlns:a="http://schemas.openxmlformats.org/drawingml/2006/main">
               <a:ext uri="{FF2B5EF4-FFF2-40B4-BE49-F238E27FC236}">
-                <a16:creationId xmlns:a16="http://schemas.microsoft.com/office/drawing/2014/main" id="{B91E8722-A1CE-40DF-B281-C996A9097C7B}"/>
+                <a16:creationId xmlns:a16="http://schemas.microsoft.com/office/drawing/2014/main" id="{56D506BD-E296-45E0-8BE5-ED5CB41D6810}"/>
               </a:ext>
             </a:extLst>
           </p:cNvPr>
@@ -38516,7 +38516,7 @@
           <p:cNvPr id="6" name="">
             <a:extLst xmlns:a="http://schemas.openxmlformats.org/drawingml/2006/main">
               <a:ext uri="{FF2B5EF4-FFF2-40B4-BE49-F238E27FC236}">
-                <a16:creationId xmlns:a16="http://schemas.microsoft.com/office/drawing/2014/main" id="{3757BCAD-9BF9-4FF7-8757-06896ED18AB1}"/>
+                <a16:creationId xmlns:a16="http://schemas.microsoft.com/office/drawing/2014/main" id="{E7F92608-426F-4CAA-90EE-58ABC4C4CE02}"/>
               </a:ext>
             </a:extLst>
           </p:cNvPr>
@@ -38553,7 +38553,7 @@
           <p:cNvPr id="7" name="">
             <a:extLst xmlns:a="http://schemas.openxmlformats.org/drawingml/2006/main">
               <a:ext uri="{FF2B5EF4-FFF2-40B4-BE49-F238E27FC236}">
-                <a16:creationId xmlns:a16="http://schemas.microsoft.com/office/drawing/2014/main" id="{982EF4B8-0D40-4462-B084-DD2107B65455}"/>
+                <a16:creationId xmlns:a16="http://schemas.microsoft.com/office/drawing/2014/main" id="{01EEE731-D069-4AD3-80FA-DFBB1F56E4D5}"/>
               </a:ext>
             </a:extLst>
           </p:cNvPr>
@@ -38590,7 +38590,7 @@
           <p:cNvPr id="8" name="">
             <a:extLst xmlns:a="http://schemas.openxmlformats.org/drawingml/2006/main">
               <a:ext uri="{FF2B5EF4-FFF2-40B4-BE49-F238E27FC236}">
-                <a16:creationId xmlns:a16="http://schemas.microsoft.com/office/drawing/2014/main" id="{68287ACF-E16A-471F-B626-50372F53AD75}"/>
+                <a16:creationId xmlns:a16="http://schemas.microsoft.com/office/drawing/2014/main" id="{DF90F014-C46A-4918-BF8B-DB28573BFCB6}"/>
               </a:ext>
             </a:extLst>
           </p:cNvPr>
@@ -38627,7 +38627,7 @@
           <p:cNvPr id="9" name="">
             <a:extLst xmlns:a="http://schemas.openxmlformats.org/drawingml/2006/main">
               <a:ext uri="{FF2B5EF4-FFF2-40B4-BE49-F238E27FC236}">
-                <a16:creationId xmlns:a16="http://schemas.microsoft.com/office/drawing/2014/main" id="{423C5515-CCB9-4F03-A1FE-E8DFA57A6050}"/>
+                <a16:creationId xmlns:a16="http://schemas.microsoft.com/office/drawing/2014/main" id="{94596088-EDEF-4027-85F1-F03B528ABF74}"/>
               </a:ext>
             </a:extLst>
           </p:cNvPr>
@@ -38664,7 +38664,7 @@
           <p:cNvPr id="10" name="">
             <a:extLst xmlns:a="http://schemas.openxmlformats.org/drawingml/2006/main">
               <a:ext uri="{FF2B5EF4-FFF2-40B4-BE49-F238E27FC236}">
-                <a16:creationId xmlns:a16="http://schemas.microsoft.com/office/drawing/2014/main" id="{A03DD312-3431-402B-8829-5AE1DC79783B}"/>
+                <a16:creationId xmlns:a16="http://schemas.microsoft.com/office/drawing/2014/main" id="{1E9E5D34-1EAC-49D3-8FBD-1BC0979ECA64}"/>
               </a:ext>
             </a:extLst>
           </p:cNvPr>
@@ -38701,7 +38701,7 @@
           <p:cNvPr id="11" name="">
             <a:extLst xmlns:a="http://schemas.openxmlformats.org/drawingml/2006/main">
               <a:ext uri="{FF2B5EF4-FFF2-40B4-BE49-F238E27FC236}">
-                <a16:creationId xmlns:a16="http://schemas.microsoft.com/office/drawing/2014/main" id="{2FD0FE6F-2C40-45A7-99A1-2BDE7C33135A}"/>
+                <a16:creationId xmlns:a16="http://schemas.microsoft.com/office/drawing/2014/main" id="{10E63B58-9A27-46CB-AB5C-A367395591E8}"/>
               </a:ext>
             </a:extLst>
           </p:cNvPr>
@@ -38738,7 +38738,7 @@
           <p:cNvPr id="12" name="">
             <a:extLst xmlns:a="http://schemas.openxmlformats.org/drawingml/2006/main">
               <a:ext uri="{FF2B5EF4-FFF2-40B4-BE49-F238E27FC236}">
-                <a16:creationId xmlns:a16="http://schemas.microsoft.com/office/drawing/2014/main" id="{96CDD8F9-9D52-4724-8DAE-A0F43BA14AB3}"/>
+                <a16:creationId xmlns:a16="http://schemas.microsoft.com/office/drawing/2014/main" id="{D3C7AB6D-FBCE-4186-969B-52B3793986E3}"/>
               </a:ext>
             </a:extLst>
           </p:cNvPr>
@@ -38775,7 +38775,7 @@
           <p:cNvPr id="13" name="">
             <a:extLst xmlns:a="http://schemas.openxmlformats.org/drawingml/2006/main">
               <a:ext uri="{FF2B5EF4-FFF2-40B4-BE49-F238E27FC236}">
-                <a16:creationId xmlns:a16="http://schemas.microsoft.com/office/drawing/2014/main" id="{93E9F0EB-9279-40B6-B1F2-697579D6D669}"/>
+                <a16:creationId xmlns:a16="http://schemas.microsoft.com/office/drawing/2014/main" id="{1C54E7B9-D538-425A-A84E-BA0A17AEBA41}"/>
               </a:ext>
             </a:extLst>
           </p:cNvPr>
@@ -38812,7 +38812,7 @@
           <p:cNvPr id="14" name="">
             <a:extLst xmlns:a="http://schemas.openxmlformats.org/drawingml/2006/main">
               <a:ext uri="{FF2B5EF4-FFF2-40B4-BE49-F238E27FC236}">
-                <a16:creationId xmlns:a16="http://schemas.microsoft.com/office/drawing/2014/main" id="{A614BCDC-477A-4CCC-82C4-D609784072E3}"/>
+                <a16:creationId xmlns:a16="http://schemas.microsoft.com/office/drawing/2014/main" id="{A03C3059-278B-4A48-A49F-2E9DEAA93079}"/>
               </a:ext>
             </a:extLst>
           </p:cNvPr>
@@ -38849,7 +38849,7 @@
           <p:cNvPr id="15" name="">
             <a:extLst xmlns:a="http://schemas.openxmlformats.org/drawingml/2006/main">
               <a:ext uri="{FF2B5EF4-FFF2-40B4-BE49-F238E27FC236}">
-                <a16:creationId xmlns:a16="http://schemas.microsoft.com/office/drawing/2014/main" id="{DA51E9C4-DD43-4017-A22F-2F509685E0D1}"/>
+                <a16:creationId xmlns:a16="http://schemas.microsoft.com/office/drawing/2014/main" id="{DFF7D8B7-D9F2-4738-A2C3-066E02BC905C}"/>
               </a:ext>
             </a:extLst>
           </p:cNvPr>
@@ -38886,7 +38886,7 @@
           <p:cNvPr id="16" name="">
             <a:extLst xmlns:a="http://schemas.openxmlformats.org/drawingml/2006/main">
               <a:ext uri="{FF2B5EF4-FFF2-40B4-BE49-F238E27FC236}">
-                <a16:creationId xmlns:a16="http://schemas.microsoft.com/office/drawing/2014/main" id="{95FD3366-5670-4BC5-8410-E0229C177ACA}"/>
+                <a16:creationId xmlns:a16="http://schemas.microsoft.com/office/drawing/2014/main" id="{E6312E0A-593E-43F7-9E96-88B502C30CEB}"/>
               </a:ext>
             </a:extLst>
           </p:cNvPr>
@@ -38923,7 +38923,7 @@
           <p:cNvPr id="17" name="">
             <a:extLst xmlns:a="http://schemas.openxmlformats.org/drawingml/2006/main">
               <a:ext uri="{FF2B5EF4-FFF2-40B4-BE49-F238E27FC236}">
-                <a16:creationId xmlns:a16="http://schemas.microsoft.com/office/drawing/2014/main" id="{3937E659-9A54-4911-B8AF-81F4A7034C83}"/>
+                <a16:creationId xmlns:a16="http://schemas.microsoft.com/office/drawing/2014/main" id="{C517AEB4-0048-4CC4-B564-31F0303BDE39}"/>
               </a:ext>
             </a:extLst>
           </p:cNvPr>
@@ -38960,7 +38960,7 @@
           <p:cNvPr id="18" name="">
             <a:extLst xmlns:a="http://schemas.openxmlformats.org/drawingml/2006/main">
               <a:ext uri="{FF2B5EF4-FFF2-40B4-BE49-F238E27FC236}">
-                <a16:creationId xmlns:a16="http://schemas.microsoft.com/office/drawing/2014/main" id="{4EDCF3D4-CAFD-449B-9B43-5540CFBBE646}"/>
+                <a16:creationId xmlns:a16="http://schemas.microsoft.com/office/drawing/2014/main" id="{C63406A2-FBC1-46AC-9965-51BB03B3ECD1}"/>
               </a:ext>
             </a:extLst>
           </p:cNvPr>
@@ -38997,7 +38997,7 @@
           <p:cNvPr id="19" name="">
             <a:extLst xmlns:a="http://schemas.openxmlformats.org/drawingml/2006/main">
               <a:ext uri="{FF2B5EF4-FFF2-40B4-BE49-F238E27FC236}">
-                <a16:creationId xmlns:a16="http://schemas.microsoft.com/office/drawing/2014/main" id="{7E8C9029-FC7C-49B2-8981-D50E5C57186B}"/>
+                <a16:creationId xmlns:a16="http://schemas.microsoft.com/office/drawing/2014/main" id="{8EAD20C4-0998-46C8-BB14-DFAA69A7B69B}"/>
               </a:ext>
             </a:extLst>
           </p:cNvPr>
@@ -39034,7 +39034,7 @@
           <p:cNvPr id="20" name="">
             <a:extLst xmlns:a="http://schemas.openxmlformats.org/drawingml/2006/main">
               <a:ext uri="{FF2B5EF4-FFF2-40B4-BE49-F238E27FC236}">
-                <a16:creationId xmlns:a16="http://schemas.microsoft.com/office/drawing/2014/main" id="{41EF98AE-7F0E-48A7-9244-5ED8F1B589D3}"/>
+                <a16:creationId xmlns:a16="http://schemas.microsoft.com/office/drawing/2014/main" id="{1EEE6444-3090-4378-B810-A451A6DDB61B}"/>
               </a:ext>
             </a:extLst>
           </p:cNvPr>
@@ -39071,7 +39071,7 @@
           <p:cNvPr id="21" name="">
             <a:extLst xmlns:a="http://schemas.openxmlformats.org/drawingml/2006/main">
               <a:ext uri="{FF2B5EF4-FFF2-40B4-BE49-F238E27FC236}">
-                <a16:creationId xmlns:a16="http://schemas.microsoft.com/office/drawing/2014/main" id="{798B5588-0C17-44D8-82E0-E67C8F2701BF}"/>
+                <a16:creationId xmlns:a16="http://schemas.microsoft.com/office/drawing/2014/main" id="{A046CFF1-30EB-45B0-BDF1-04CF567FFF65}"/>
               </a:ext>
             </a:extLst>
           </p:cNvPr>
@@ -39108,7 +39108,7 @@
           <p:cNvPr id="22" name="">
             <a:extLst xmlns:a="http://schemas.openxmlformats.org/drawingml/2006/main">
               <a:ext uri="{FF2B5EF4-FFF2-40B4-BE49-F238E27FC236}">
-                <a16:creationId xmlns:a16="http://schemas.microsoft.com/office/drawing/2014/main" id="{33837860-A0D8-4BC1-B335-2F7BED010673}"/>
+                <a16:creationId xmlns:a16="http://schemas.microsoft.com/office/drawing/2014/main" id="{2239A4C5-AFC6-4CC5-AC55-117C4A948D32}"/>
               </a:ext>
             </a:extLst>
           </p:cNvPr>
@@ -39145,7 +39145,7 @@
           <p:cNvPr id="23" name="">
             <a:extLst xmlns:a="http://schemas.openxmlformats.org/drawingml/2006/main">
               <a:ext uri="{FF2B5EF4-FFF2-40B4-BE49-F238E27FC236}">
-                <a16:creationId xmlns:a16="http://schemas.microsoft.com/office/drawing/2014/main" id="{2F055590-B1C7-4301-97CD-A4D5CFBEC9F2}"/>
+                <a16:creationId xmlns:a16="http://schemas.microsoft.com/office/drawing/2014/main" id="{997C6960-DA2E-47D2-9B4B-2FBBE4AC444D}"/>
               </a:ext>
             </a:extLst>
           </p:cNvPr>
@@ -39182,7 +39182,7 @@
           <p:cNvPr id="24" name="">
             <a:extLst xmlns:a="http://schemas.openxmlformats.org/drawingml/2006/main">
               <a:ext uri="{FF2B5EF4-FFF2-40B4-BE49-F238E27FC236}">
-                <a16:creationId xmlns:a16="http://schemas.microsoft.com/office/drawing/2014/main" id="{05360E8C-9EBF-4C45-AE3D-B26BC79A1689}"/>
+                <a16:creationId xmlns:a16="http://schemas.microsoft.com/office/drawing/2014/main" id="{C213674C-E435-4C74-8CD1-07068EE29963}"/>
               </a:ext>
             </a:extLst>
           </p:cNvPr>
@@ -39219,7 +39219,7 @@
           <p:cNvPr id="25" name="">
             <a:extLst xmlns:a="http://schemas.openxmlformats.org/drawingml/2006/main">
               <a:ext uri="{FF2B5EF4-FFF2-40B4-BE49-F238E27FC236}">
-                <a16:creationId xmlns:a16="http://schemas.microsoft.com/office/drawing/2014/main" id="{6F208787-C824-41F7-880C-883F994B550D}"/>
+                <a16:creationId xmlns:a16="http://schemas.microsoft.com/office/drawing/2014/main" id="{EB176DC2-D44D-4269-9A67-600075DD2B04}"/>
               </a:ext>
             </a:extLst>
           </p:cNvPr>
@@ -39256,7 +39256,7 @@
           <p:cNvPr id="26" name="">
             <a:extLst xmlns:a="http://schemas.openxmlformats.org/drawingml/2006/main">
               <a:ext uri="{FF2B5EF4-FFF2-40B4-BE49-F238E27FC236}">
-                <a16:creationId xmlns:a16="http://schemas.microsoft.com/office/drawing/2014/main" id="{E45878B5-9396-44DE-910C-8370050C24C4}"/>
+                <a16:creationId xmlns:a16="http://schemas.microsoft.com/office/drawing/2014/main" id="{F77AA19F-BD2E-4D0F-9858-8029A46D3C4B}"/>
               </a:ext>
             </a:extLst>
           </p:cNvPr>
@@ -39303,7 +39303,7 @@
           <p:cNvPr id="27" name="">
             <a:extLst xmlns:a="http://schemas.openxmlformats.org/drawingml/2006/main">
               <a:ext uri="{FF2B5EF4-FFF2-40B4-BE49-F238E27FC236}">
-                <a16:creationId xmlns:a16="http://schemas.microsoft.com/office/drawing/2014/main" id="{5F7704F4-46AC-4037-8728-4D04EF0E7DF8}"/>
+                <a16:creationId xmlns:a16="http://schemas.microsoft.com/office/drawing/2014/main" id="{B24B3FE5-15E1-4380-92B0-EF439733A965}"/>
               </a:ext>
             </a:extLst>
           </p:cNvPr>
@@ -39350,7 +39350,7 @@
           <p:cNvPr id="28" name="">
             <a:extLst xmlns:a="http://schemas.openxmlformats.org/drawingml/2006/main">
               <a:ext uri="{FF2B5EF4-FFF2-40B4-BE49-F238E27FC236}">
-                <a16:creationId xmlns:a16="http://schemas.microsoft.com/office/drawing/2014/main" id="{6C8995A2-7C83-476E-A72D-0202B332AE02}"/>
+                <a16:creationId xmlns:a16="http://schemas.microsoft.com/office/drawing/2014/main" id="{CD085A24-F84A-4721-B40E-F7FC50850A47}"/>
               </a:ext>
             </a:extLst>
           </p:cNvPr>
@@ -39414,7 +39414,7 @@
           <p:cNvPr id="29" name="">
             <a:extLst xmlns:a="http://schemas.openxmlformats.org/drawingml/2006/main">
               <a:ext uri="{FF2B5EF4-FFF2-40B4-BE49-F238E27FC236}">
-                <a16:creationId xmlns:a16="http://schemas.microsoft.com/office/drawing/2014/main" id="{9E4F138A-B252-44A7-9AFD-F6D75C96BF41}"/>
+                <a16:creationId xmlns:a16="http://schemas.microsoft.com/office/drawing/2014/main" id="{72486208-C3F8-4E9F-88B5-B67599A2CCF8}"/>
               </a:ext>
             </a:extLst>
           </p:cNvPr>
@@ -39478,7 +39478,7 @@
           <p:cNvPr id="30" name="">
             <a:extLst xmlns:a="http://schemas.openxmlformats.org/drawingml/2006/main">
               <a:ext uri="{FF2B5EF4-FFF2-40B4-BE49-F238E27FC236}">
-                <a16:creationId xmlns:a16="http://schemas.microsoft.com/office/drawing/2014/main" id="{1FD35EF4-EF68-4700-8786-B70DB8059B77}"/>
+                <a16:creationId xmlns:a16="http://schemas.microsoft.com/office/drawing/2014/main" id="{6D5B2AF9-2814-4BCE-89E3-BF8ACB5AC5BC}"/>
               </a:ext>
             </a:extLst>
           </p:cNvPr>
@@ -39542,7 +39542,7 @@
           <p:cNvPr id="31" name="">
             <a:extLst xmlns:a="http://schemas.openxmlformats.org/drawingml/2006/main">
               <a:ext uri="{FF2B5EF4-FFF2-40B4-BE49-F238E27FC236}">
-                <a16:creationId xmlns:a16="http://schemas.microsoft.com/office/drawing/2014/main" id="{FB565DBE-B4AE-4EB8-9A96-F2DFAF3DEAD5}"/>
+                <a16:creationId xmlns:a16="http://schemas.microsoft.com/office/drawing/2014/main" id="{DEBFA91C-4B1E-4C88-9ADE-14AB9322A91C}"/>
               </a:ext>
             </a:extLst>
           </p:cNvPr>
@@ -39606,7 +39606,7 @@
           <p:cNvPr id="32" name="">
             <a:extLst xmlns:a="http://schemas.openxmlformats.org/drawingml/2006/main">
               <a:ext uri="{FF2B5EF4-FFF2-40B4-BE49-F238E27FC236}">
-                <a16:creationId xmlns:a16="http://schemas.microsoft.com/office/drawing/2014/main" id="{47843F7A-1A28-420B-8823-B304E6A8E7D7}"/>
+                <a16:creationId xmlns:a16="http://schemas.microsoft.com/office/drawing/2014/main" id="{CA2925AE-3BBF-4A17-BC54-4B9DC2B14B59}"/>
               </a:ext>
             </a:extLst>
           </p:cNvPr>
@@ -39643,7 +39643,7 @@
           <p:cNvPr id="33" name="">
             <a:extLst xmlns:a="http://schemas.openxmlformats.org/drawingml/2006/main">
               <a:ext uri="{FF2B5EF4-FFF2-40B4-BE49-F238E27FC236}">
-                <a16:creationId xmlns:a16="http://schemas.microsoft.com/office/drawing/2014/main" id="{7430B873-536E-4410-8C3A-A8C39A88EA1F}"/>
+                <a16:creationId xmlns:a16="http://schemas.microsoft.com/office/drawing/2014/main" id="{778856E4-1504-44A6-8911-C3DB8A7529FD}"/>
               </a:ext>
             </a:extLst>
           </p:cNvPr>
@@ -39680,7 +39680,7 @@
           <p:cNvPr id="34" name="">
             <a:extLst xmlns:a="http://schemas.openxmlformats.org/drawingml/2006/main">
               <a:ext uri="{FF2B5EF4-FFF2-40B4-BE49-F238E27FC236}">
-                <a16:creationId xmlns:a16="http://schemas.microsoft.com/office/drawing/2014/main" id="{5A67DEAC-A39F-4F2D-A43F-9B505069B88C}"/>
+                <a16:creationId xmlns:a16="http://schemas.microsoft.com/office/drawing/2014/main" id="{41F3893F-E93E-402A-BFDD-F3F244D746EA}"/>
               </a:ext>
             </a:extLst>
           </p:cNvPr>
@@ -39744,7 +39744,7 @@
           <p:cNvPr id="35" name="">
             <a:extLst xmlns:a="http://schemas.openxmlformats.org/drawingml/2006/main">
               <a:ext uri="{FF2B5EF4-FFF2-40B4-BE49-F238E27FC236}">
-                <a16:creationId xmlns:a16="http://schemas.microsoft.com/office/drawing/2014/main" id="{EFD2A616-F887-4689-9ED8-806508A3A66E}"/>
+                <a16:creationId xmlns:a16="http://schemas.microsoft.com/office/drawing/2014/main" id="{F97EC1BD-8E46-4E01-A81D-B19763D601D8}"/>
               </a:ext>
             </a:extLst>
           </p:cNvPr>
@@ -39854,7 +39854,7 @@
           <p:cNvPr id="36" name="">
             <a:extLst xmlns:a="http://schemas.openxmlformats.org/drawingml/2006/main">
               <a:ext uri="{FF2B5EF4-FFF2-40B4-BE49-F238E27FC236}">
-                <a16:creationId xmlns:a16="http://schemas.microsoft.com/office/drawing/2014/main" id="{7D06D78F-4672-465F-9A72-22F2118A8A67}"/>
+                <a16:creationId xmlns:a16="http://schemas.microsoft.com/office/drawing/2014/main" id="{402B4AA3-6B37-481C-9679-46FA160AA4D9}"/>
               </a:ext>
             </a:extLst>
           </p:cNvPr>
@@ -39891,7 +39891,7 @@
           <p:cNvPr id="37" name="">
             <a:extLst xmlns:a="http://schemas.openxmlformats.org/drawingml/2006/main">
               <a:ext uri="{FF2B5EF4-FFF2-40B4-BE49-F238E27FC236}">
-                <a16:creationId xmlns:a16="http://schemas.microsoft.com/office/drawing/2014/main" id="{62B18C98-5914-4664-80A7-4763CAB0ECC4}"/>
+                <a16:creationId xmlns:a16="http://schemas.microsoft.com/office/drawing/2014/main" id="{4FC4B81B-4287-4078-8C3B-5F53436C0527}"/>
               </a:ext>
             </a:extLst>
           </p:cNvPr>
@@ -39928,7 +39928,7 @@
           <p:cNvPr id="38" name="">
             <a:extLst xmlns:a="http://schemas.openxmlformats.org/drawingml/2006/main">
               <a:ext uri="{FF2B5EF4-FFF2-40B4-BE49-F238E27FC236}">
-                <a16:creationId xmlns:a16="http://schemas.microsoft.com/office/drawing/2014/main" id="{5FD552D8-7253-4D42-8157-7805A398A6C4}"/>
+                <a16:creationId xmlns:a16="http://schemas.microsoft.com/office/drawing/2014/main" id="{83F3E61F-C37B-4D8D-B180-0A4A8EE8756F}"/>
               </a:ext>
             </a:extLst>
           </p:cNvPr>
@@ -39992,7 +39992,7 @@
           <p:cNvPr id="39" name="">
             <a:extLst xmlns:a="http://schemas.openxmlformats.org/drawingml/2006/main">
               <a:ext uri="{FF2B5EF4-FFF2-40B4-BE49-F238E27FC236}">
-                <a16:creationId xmlns:a16="http://schemas.microsoft.com/office/drawing/2014/main" id="{3AF091F9-503B-45E0-884A-C82EF9C8CC97}"/>
+                <a16:creationId xmlns:a16="http://schemas.microsoft.com/office/drawing/2014/main" id="{83C977FD-F079-47D0-9BAF-EF70E5B97FD5}"/>
               </a:ext>
             </a:extLst>
           </p:cNvPr>
@@ -40102,7 +40102,7 @@
           <p:cNvPr id="40" name="">
             <a:extLst xmlns:a="http://schemas.openxmlformats.org/drawingml/2006/main">
               <a:ext uri="{FF2B5EF4-FFF2-40B4-BE49-F238E27FC236}">
-                <a16:creationId xmlns:a16="http://schemas.microsoft.com/office/drawing/2014/main" id="{0613FD13-4F14-4587-9FBB-68334AE859E9}"/>
+                <a16:creationId xmlns:a16="http://schemas.microsoft.com/office/drawing/2014/main" id="{91638A04-5EB2-44EF-B3D4-FD91D18C198C}"/>
               </a:ext>
             </a:extLst>
           </p:cNvPr>
@@ -40139,7 +40139,7 @@
           <p:cNvPr id="41" name="">
             <a:extLst xmlns:a="http://schemas.openxmlformats.org/drawingml/2006/main">
               <a:ext uri="{FF2B5EF4-FFF2-40B4-BE49-F238E27FC236}">
-                <a16:creationId xmlns:a16="http://schemas.microsoft.com/office/drawing/2014/main" id="{D48A47EF-5AF9-40D1-9A1F-349024DD1B5A}"/>
+                <a16:creationId xmlns:a16="http://schemas.microsoft.com/office/drawing/2014/main" id="{62D1F239-6527-4D1F-B092-558A949A3F65}"/>
               </a:ext>
             </a:extLst>
           </p:cNvPr>
@@ -40176,7 +40176,7 @@
           <p:cNvPr id="42" name="">
             <a:extLst xmlns:a="http://schemas.openxmlformats.org/drawingml/2006/main">
               <a:ext uri="{FF2B5EF4-FFF2-40B4-BE49-F238E27FC236}">
-                <a16:creationId xmlns:a16="http://schemas.microsoft.com/office/drawing/2014/main" id="{187DAF59-4593-44C7-AC89-F52E811C2546}"/>
+                <a16:creationId xmlns:a16="http://schemas.microsoft.com/office/drawing/2014/main" id="{DE0037A7-E711-42E5-9421-DE89F9C2079D}"/>
               </a:ext>
             </a:extLst>
           </p:cNvPr>
@@ -40240,7 +40240,7 @@
           <p:cNvPr id="43" name="">
             <a:extLst xmlns:a="http://schemas.openxmlformats.org/drawingml/2006/main">
               <a:ext uri="{FF2B5EF4-FFF2-40B4-BE49-F238E27FC236}">
-                <a16:creationId xmlns:a16="http://schemas.microsoft.com/office/drawing/2014/main" id="{4C5166D8-FB24-417A-992C-256C316C97C0}"/>
+                <a16:creationId xmlns:a16="http://schemas.microsoft.com/office/drawing/2014/main" id="{1F6F759B-67A3-4CC8-9481-F49364A41F3F}"/>
               </a:ext>
             </a:extLst>
           </p:cNvPr>
@@ -40304,7 +40304,7 @@
           <p:cNvPr id="44" name="">
             <a:extLst xmlns:a="http://schemas.openxmlformats.org/drawingml/2006/main">
               <a:ext uri="{FF2B5EF4-FFF2-40B4-BE49-F238E27FC236}">
-                <a16:creationId xmlns:a16="http://schemas.microsoft.com/office/drawing/2014/main" id="{94997AAB-6556-4CC6-83C4-19D25506A266}"/>
+                <a16:creationId xmlns:a16="http://schemas.microsoft.com/office/drawing/2014/main" id="{6E520C15-1406-40D8-8953-DD3D9DAB7235}"/>
               </a:ext>
             </a:extLst>
           </p:cNvPr>
@@ -40341,7 +40341,7 @@
           <p:cNvPr id="45" name="">
             <a:extLst xmlns:a="http://schemas.openxmlformats.org/drawingml/2006/main">
               <a:ext uri="{FF2B5EF4-FFF2-40B4-BE49-F238E27FC236}">
-                <a16:creationId xmlns:a16="http://schemas.microsoft.com/office/drawing/2014/main" id="{8851A059-1938-4A77-B6BE-108D3A858E20}"/>
+                <a16:creationId xmlns:a16="http://schemas.microsoft.com/office/drawing/2014/main" id="{61E71D79-CDB4-449B-A11D-EC4AD15BDB49}"/>
               </a:ext>
             </a:extLst>
           </p:cNvPr>
@@ -40378,7 +40378,7 @@
           <p:cNvPr id="46" name="">
             <a:extLst xmlns:a="http://schemas.openxmlformats.org/drawingml/2006/main">
               <a:ext uri="{FF2B5EF4-FFF2-40B4-BE49-F238E27FC236}">
-                <a16:creationId xmlns:a16="http://schemas.microsoft.com/office/drawing/2014/main" id="{B9823369-1AE7-4028-9DFC-44ED42E9E844}"/>
+                <a16:creationId xmlns:a16="http://schemas.microsoft.com/office/drawing/2014/main" id="{09DD773F-E977-448C-8FEB-0211B85F46ED}"/>
               </a:ext>
             </a:extLst>
           </p:cNvPr>
@@ -40442,7 +40442,7 @@
           <p:cNvPr id="47" name="">
             <a:extLst xmlns:a="http://schemas.openxmlformats.org/drawingml/2006/main">
               <a:ext uri="{FF2B5EF4-FFF2-40B4-BE49-F238E27FC236}">
-                <a16:creationId xmlns:a16="http://schemas.microsoft.com/office/drawing/2014/main" id="{AC228FBE-9F7E-4636-B754-BA9B9ABD3351}"/>
+                <a16:creationId xmlns:a16="http://schemas.microsoft.com/office/drawing/2014/main" id="{BC32D9C1-BA44-4956-8EA6-7B97CC7D0DCD}"/>
               </a:ext>
             </a:extLst>
           </p:cNvPr>
@@ -40506,7 +40506,7 @@
           <p:cNvPr id="48" name="">
             <a:extLst xmlns:a="http://schemas.openxmlformats.org/drawingml/2006/main">
               <a:ext uri="{FF2B5EF4-FFF2-40B4-BE49-F238E27FC236}">
-                <a16:creationId xmlns:a16="http://schemas.microsoft.com/office/drawing/2014/main" id="{1490A37B-29F2-4A4D-BB90-A640685B61C3}"/>
+                <a16:creationId xmlns:a16="http://schemas.microsoft.com/office/drawing/2014/main" id="{B73287B2-ECFC-45D9-B94F-766193B8EE79}"/>
               </a:ext>
             </a:extLst>
           </p:cNvPr>
@@ -40543,7 +40543,7 @@
           <p:cNvPr id="49" name="">
             <a:extLst xmlns:a="http://schemas.openxmlformats.org/drawingml/2006/main">
               <a:ext uri="{FF2B5EF4-FFF2-40B4-BE49-F238E27FC236}">
-                <a16:creationId xmlns:a16="http://schemas.microsoft.com/office/drawing/2014/main" id="{1A2EF7F8-38B3-413E-909F-9DCAA4D0DD96}"/>
+                <a16:creationId xmlns:a16="http://schemas.microsoft.com/office/drawing/2014/main" id="{CD570ED9-706F-4477-91EA-CD9728C23B33}"/>
               </a:ext>
             </a:extLst>
           </p:cNvPr>
@@ -40580,7 +40580,7 @@
           <p:cNvPr id="50" name="">
             <a:extLst xmlns:a="http://schemas.openxmlformats.org/drawingml/2006/main">
               <a:ext uri="{FF2B5EF4-FFF2-40B4-BE49-F238E27FC236}">
-                <a16:creationId xmlns:a16="http://schemas.microsoft.com/office/drawing/2014/main" id="{1EC62C85-5E6D-487C-A8A3-9A5386D2CD07}"/>
+                <a16:creationId xmlns:a16="http://schemas.microsoft.com/office/drawing/2014/main" id="{6C2DCD82-4BB9-4306-845C-3418668A558D}"/>
               </a:ext>
             </a:extLst>
           </p:cNvPr>
@@ -40644,7 +40644,7 @@
           <p:cNvPr id="51" name="">
             <a:extLst xmlns:a="http://schemas.openxmlformats.org/drawingml/2006/main">
               <a:ext uri="{FF2B5EF4-FFF2-40B4-BE49-F238E27FC236}">
-                <a16:creationId xmlns:a16="http://schemas.microsoft.com/office/drawing/2014/main" id="{8650510D-2F9A-4050-8DDB-F8B98A175FD5}"/>
+                <a16:creationId xmlns:a16="http://schemas.microsoft.com/office/drawing/2014/main" id="{E6F01A45-DF4A-4757-AE55-BAA43FFAF475}"/>
               </a:ext>
             </a:extLst>
           </p:cNvPr>
@@ -40708,7 +40708,7 @@
           <p:cNvPr id="52" name="">
             <a:extLst xmlns:a="http://schemas.openxmlformats.org/drawingml/2006/main">
               <a:ext uri="{FF2B5EF4-FFF2-40B4-BE49-F238E27FC236}">
-                <a16:creationId xmlns:a16="http://schemas.microsoft.com/office/drawing/2014/main" id="{8EDEB4DE-4ACF-48D6-A927-20D4CF0F8DB3}"/>
+                <a16:creationId xmlns:a16="http://schemas.microsoft.com/office/drawing/2014/main" id="{CABB07EF-9274-42C1-8923-92DD6F564AC8}"/>
               </a:ext>
             </a:extLst>
           </p:cNvPr>
@@ -40745,7 +40745,7 @@
           <p:cNvPr id="53" name="">
             <a:extLst xmlns:a="http://schemas.openxmlformats.org/drawingml/2006/main">
               <a:ext uri="{FF2B5EF4-FFF2-40B4-BE49-F238E27FC236}">
-                <a16:creationId xmlns:a16="http://schemas.microsoft.com/office/drawing/2014/main" id="{0783BA1F-C676-4784-AFE8-7F471E5F0A5E}"/>
+                <a16:creationId xmlns:a16="http://schemas.microsoft.com/office/drawing/2014/main" id="{ADF7858C-AB75-406D-B559-1C73F9C9625D}"/>
               </a:ext>
             </a:extLst>
           </p:cNvPr>
@@ -40782,7 +40782,7 @@
           <p:cNvPr id="54" name="">
             <a:extLst xmlns:a="http://schemas.openxmlformats.org/drawingml/2006/main">
               <a:ext uri="{FF2B5EF4-FFF2-40B4-BE49-F238E27FC236}">
-                <a16:creationId xmlns:a16="http://schemas.microsoft.com/office/drawing/2014/main" id="{C156D214-0386-4F18-A243-934D436B7F3D}"/>
+                <a16:creationId xmlns:a16="http://schemas.microsoft.com/office/drawing/2014/main" id="{09B6B212-64B4-4CBB-8FD3-EFAD7AA5ABE4}"/>
               </a:ext>
             </a:extLst>
           </p:cNvPr>
@@ -40846,7 +40846,7 @@
           <p:cNvPr id="55" name="">
             <a:extLst xmlns:a="http://schemas.openxmlformats.org/drawingml/2006/main">
               <a:ext uri="{FF2B5EF4-FFF2-40B4-BE49-F238E27FC236}">
-                <a16:creationId xmlns:a16="http://schemas.microsoft.com/office/drawing/2014/main" id="{86BC5560-0B11-468B-8C2B-B4C8C772C138}"/>
+                <a16:creationId xmlns:a16="http://schemas.microsoft.com/office/drawing/2014/main" id="{3BFEED06-9C9A-4D0C-BD53-90895298D694}"/>
               </a:ext>
             </a:extLst>
           </p:cNvPr>
@@ -40910,7 +40910,7 @@
           <p:cNvPr id="56" name="">
             <a:extLst xmlns:a="http://schemas.openxmlformats.org/drawingml/2006/main">
               <a:ext uri="{FF2B5EF4-FFF2-40B4-BE49-F238E27FC236}">
-                <a16:creationId xmlns:a16="http://schemas.microsoft.com/office/drawing/2014/main" id="{9420EA6C-81D8-49B1-9B02-D814B104B30E}"/>
+                <a16:creationId xmlns:a16="http://schemas.microsoft.com/office/drawing/2014/main" id="{5BA2CC86-51B8-488F-B43D-AABEE3AE9E4F}"/>
               </a:ext>
             </a:extLst>
           </p:cNvPr>
@@ -40947,7 +40947,7 @@
           <p:cNvPr id="57" name="">
             <a:extLst xmlns:a="http://schemas.openxmlformats.org/drawingml/2006/main">
               <a:ext uri="{FF2B5EF4-FFF2-40B4-BE49-F238E27FC236}">
-                <a16:creationId xmlns:a16="http://schemas.microsoft.com/office/drawing/2014/main" id="{F24FC4BD-7B0B-48EA-A10A-C7F41F568D97}"/>
+                <a16:creationId xmlns:a16="http://schemas.microsoft.com/office/drawing/2014/main" id="{94F02772-90CC-4CEF-A866-5ABC2184E843}"/>
               </a:ext>
             </a:extLst>
           </p:cNvPr>
@@ -41009,7 +41009,7 @@
     </p:spTree>
     <p:extLst>
       <p:ext uri="{BB962C8B-B14F-4D97-AF65-F5344CB8AC3E}">
-        <p14:creationId xmlns:p14="http://schemas.microsoft.com/office/powerpoint/2010/main" val="1532413537"/>
+        <p14:creationId xmlns:p14="http://schemas.microsoft.com/office/powerpoint/2010/main" val="2081917429"/>
       </p:ext>
     </p:extLst>
   </p:cSld>
@@ -41033,7 +41033,7 @@
           <p:cNvPr id="1" name="">
             <a:extLst xmlns:a="http://schemas.openxmlformats.org/drawingml/2006/main">
               <a:ext uri="{FF2B5EF4-FFF2-40B4-BE49-F238E27FC236}">
-                <a16:creationId xmlns:a16="http://schemas.microsoft.com/office/drawing/2014/main" id="{988BE0A1-CA07-4282-A2DB-ADE764E53BAD}"/>
+                <a16:creationId xmlns:a16="http://schemas.microsoft.com/office/drawing/2014/main" id="{B1840E7A-ED0E-460A-AABE-CFEF84CABA1C}"/>
               </a:ext>
             </a:extLst>
           </p:cNvPr>
@@ -41068,7 +41068,7 @@
           <p:cNvPr id="2" name="">
             <a:extLst xmlns:a="http://schemas.openxmlformats.org/drawingml/2006/main">
               <a:ext uri="{FF2B5EF4-FFF2-40B4-BE49-F238E27FC236}">
-                <a16:creationId xmlns:a16="http://schemas.microsoft.com/office/drawing/2014/main" id="{27934C47-AD92-40AE-BBFA-0161F63DDABF}"/>
+                <a16:creationId xmlns:a16="http://schemas.microsoft.com/office/drawing/2014/main" id="{468B079A-CF30-4377-A5F7-691005246FCC}"/>
               </a:ext>
             </a:extLst>
           </p:cNvPr>
@@ -41114,7 +41114,7 @@
           <p:cNvPr id="3" name="">
             <a:extLst xmlns:a="http://schemas.openxmlformats.org/drawingml/2006/main">
               <a:ext uri="{FF2B5EF4-FFF2-40B4-BE49-F238E27FC236}">
-                <a16:creationId xmlns:a16="http://schemas.microsoft.com/office/drawing/2014/main" id="{5BFE561F-F0B0-4FBA-8612-6388EE7A15CD}"/>
+                <a16:creationId xmlns:a16="http://schemas.microsoft.com/office/drawing/2014/main" id="{B64B9BF8-1324-45E9-8D22-2D83A8957993}"/>
               </a:ext>
             </a:extLst>
           </p:cNvPr>
@@ -41151,7 +41151,7 @@
           <p:cNvPr id="4" name="">
             <a:extLst xmlns:a="http://schemas.openxmlformats.org/drawingml/2006/main">
               <a:ext uri="{FF2B5EF4-FFF2-40B4-BE49-F238E27FC236}">
-                <a16:creationId xmlns:a16="http://schemas.microsoft.com/office/drawing/2014/main" id="{577E7A2F-02C8-4D48-9E01-966E32DE5814}"/>
+                <a16:creationId xmlns:a16="http://schemas.microsoft.com/office/drawing/2014/main" id="{9FA79077-729F-4B48-9336-02EC8E0D1C94}"/>
               </a:ext>
             </a:extLst>
           </p:cNvPr>
@@ -41188,7 +41188,7 @@
           <p:cNvPr id="5" name="">
             <a:extLst xmlns:a="http://schemas.openxmlformats.org/drawingml/2006/main">
               <a:ext uri="{FF2B5EF4-FFF2-40B4-BE49-F238E27FC236}">
-                <a16:creationId xmlns:a16="http://schemas.microsoft.com/office/drawing/2014/main" id="{D794E1A3-7C7C-4465-BC77-03EA68F5AA64}"/>
+                <a16:creationId xmlns:a16="http://schemas.microsoft.com/office/drawing/2014/main" id="{06C4A764-FFE2-4191-9B89-2354C379DDA0}"/>
               </a:ext>
             </a:extLst>
           </p:cNvPr>
@@ -41225,7 +41225,7 @@
           <p:cNvPr id="6" name="">
             <a:extLst xmlns:a="http://schemas.openxmlformats.org/drawingml/2006/main">
               <a:ext uri="{FF2B5EF4-FFF2-40B4-BE49-F238E27FC236}">
-                <a16:creationId xmlns:a16="http://schemas.microsoft.com/office/drawing/2014/main" id="{6AD238FF-EE31-4474-A0D9-6279B38CA26A}"/>
+                <a16:creationId xmlns:a16="http://schemas.microsoft.com/office/drawing/2014/main" id="{9ED1AB9A-FD9E-495A-ABA2-5D250D42E691}"/>
               </a:ext>
             </a:extLst>
           </p:cNvPr>
@@ -41262,7 +41262,7 @@
           <p:cNvPr id="7" name="">
             <a:extLst xmlns:a="http://schemas.openxmlformats.org/drawingml/2006/main">
               <a:ext uri="{FF2B5EF4-FFF2-40B4-BE49-F238E27FC236}">
-                <a16:creationId xmlns:a16="http://schemas.microsoft.com/office/drawing/2014/main" id="{D46454E4-53AF-49F0-BF6B-66FAE5D9F401}"/>
+                <a16:creationId xmlns:a16="http://schemas.microsoft.com/office/drawing/2014/main" id="{DBF4996A-D312-4DC5-8589-2D4356679B8E}"/>
               </a:ext>
             </a:extLst>
           </p:cNvPr>
@@ -41299,7 +41299,7 @@
           <p:cNvPr id="8" name="">
             <a:extLst xmlns:a="http://schemas.openxmlformats.org/drawingml/2006/main">
               <a:ext uri="{FF2B5EF4-FFF2-40B4-BE49-F238E27FC236}">
-                <a16:creationId xmlns:a16="http://schemas.microsoft.com/office/drawing/2014/main" id="{F8F91AAB-13C6-4F2C-9AD6-E8C932B3713F}"/>
+                <a16:creationId xmlns:a16="http://schemas.microsoft.com/office/drawing/2014/main" id="{C8514F53-0476-4F27-A60E-B57965EB61BB}"/>
               </a:ext>
             </a:extLst>
           </p:cNvPr>
@@ -41336,7 +41336,7 @@
           <p:cNvPr id="9" name="">
             <a:extLst xmlns:a="http://schemas.openxmlformats.org/drawingml/2006/main">
               <a:ext uri="{FF2B5EF4-FFF2-40B4-BE49-F238E27FC236}">
-                <a16:creationId xmlns:a16="http://schemas.microsoft.com/office/drawing/2014/main" id="{CFB1BC3D-ED7D-48DA-AB8F-E9AE78ADF301}"/>
+                <a16:creationId xmlns:a16="http://schemas.microsoft.com/office/drawing/2014/main" id="{86DBC101-C3D2-4625-8B12-AC1DD5D702F9}"/>
               </a:ext>
             </a:extLst>
           </p:cNvPr>
@@ -41373,7 +41373,7 @@
           <p:cNvPr id="10" name="">
             <a:extLst xmlns:a="http://schemas.openxmlformats.org/drawingml/2006/main">
               <a:ext uri="{FF2B5EF4-FFF2-40B4-BE49-F238E27FC236}">
-                <a16:creationId xmlns:a16="http://schemas.microsoft.com/office/drawing/2014/main" id="{D3F740D5-6039-4FB8-8DE3-61B30CE44A6E}"/>
+                <a16:creationId xmlns:a16="http://schemas.microsoft.com/office/drawing/2014/main" id="{657CAF17-44AD-4DAD-A10D-8889507C4BBE}"/>
               </a:ext>
             </a:extLst>
           </p:cNvPr>
@@ -41410,7 +41410,7 @@
           <p:cNvPr id="11" name="">
             <a:extLst xmlns:a="http://schemas.openxmlformats.org/drawingml/2006/main">
               <a:ext uri="{FF2B5EF4-FFF2-40B4-BE49-F238E27FC236}">
-                <a16:creationId xmlns:a16="http://schemas.microsoft.com/office/drawing/2014/main" id="{BE9B1ED4-F338-4F9B-B339-90F7F7722EA0}"/>
+                <a16:creationId xmlns:a16="http://schemas.microsoft.com/office/drawing/2014/main" id="{88F65378-4813-4E46-8177-6D806B62EF5D}"/>
               </a:ext>
             </a:extLst>
           </p:cNvPr>
@@ -41447,7 +41447,7 @@
           <p:cNvPr id="12" name="">
             <a:extLst xmlns:a="http://schemas.openxmlformats.org/drawingml/2006/main">
               <a:ext uri="{FF2B5EF4-FFF2-40B4-BE49-F238E27FC236}">
-                <a16:creationId xmlns:a16="http://schemas.microsoft.com/office/drawing/2014/main" id="{A9A46A0A-3EE9-41E5-8B9F-C572DC3968A9}"/>
+                <a16:creationId xmlns:a16="http://schemas.microsoft.com/office/drawing/2014/main" id="{600CBBD3-D3E9-490F-93BE-4EEDA595B178}"/>
               </a:ext>
             </a:extLst>
           </p:cNvPr>
@@ -41484,7 +41484,7 @@
           <p:cNvPr id="13" name="">
             <a:extLst xmlns:a="http://schemas.openxmlformats.org/drawingml/2006/main">
               <a:ext uri="{FF2B5EF4-FFF2-40B4-BE49-F238E27FC236}">
-                <a16:creationId xmlns:a16="http://schemas.microsoft.com/office/drawing/2014/main" id="{D6C33EFD-AEFB-4457-880F-39549B9ACFE3}"/>
+                <a16:creationId xmlns:a16="http://schemas.microsoft.com/office/drawing/2014/main" id="{411ECA67-D658-49C5-8C1B-3E63912C0FDE}"/>
               </a:ext>
             </a:extLst>
           </p:cNvPr>
@@ -41521,7 +41521,7 @@
           <p:cNvPr id="14" name="">
             <a:extLst xmlns:a="http://schemas.openxmlformats.org/drawingml/2006/main">
               <a:ext uri="{FF2B5EF4-FFF2-40B4-BE49-F238E27FC236}">
-                <a16:creationId xmlns:a16="http://schemas.microsoft.com/office/drawing/2014/main" id="{014F5A49-48AF-4138-948D-E8C0542F680D}"/>
+                <a16:creationId xmlns:a16="http://schemas.microsoft.com/office/drawing/2014/main" id="{AE9639A3-8C35-4AF0-86EA-421A1A4AA97D}"/>
               </a:ext>
             </a:extLst>
           </p:cNvPr>
@@ -41558,7 +41558,7 @@
           <p:cNvPr id="15" name="">
             <a:extLst xmlns:a="http://schemas.openxmlformats.org/drawingml/2006/main">
               <a:ext uri="{FF2B5EF4-FFF2-40B4-BE49-F238E27FC236}">
-                <a16:creationId xmlns:a16="http://schemas.microsoft.com/office/drawing/2014/main" id="{068D15AD-8F7D-4469-980B-C37344CD0867}"/>
+                <a16:creationId xmlns:a16="http://schemas.microsoft.com/office/drawing/2014/main" id="{3A9ED849-500C-4C28-8CC6-6B1630D8DE94}"/>
               </a:ext>
             </a:extLst>
           </p:cNvPr>
@@ -41595,7 +41595,7 @@
           <p:cNvPr id="16" name="">
             <a:extLst xmlns:a="http://schemas.openxmlformats.org/drawingml/2006/main">
               <a:ext uri="{FF2B5EF4-FFF2-40B4-BE49-F238E27FC236}">
-                <a16:creationId xmlns:a16="http://schemas.microsoft.com/office/drawing/2014/main" id="{169DD236-14DE-4616-8744-17196FD3E54A}"/>
+                <a16:creationId xmlns:a16="http://schemas.microsoft.com/office/drawing/2014/main" id="{B6C16F6B-06D1-4632-A931-5E3170192F35}"/>
               </a:ext>
             </a:extLst>
           </p:cNvPr>
@@ -41632,7 +41632,7 @@
           <p:cNvPr id="17" name="">
             <a:extLst xmlns:a="http://schemas.openxmlformats.org/drawingml/2006/main">
               <a:ext uri="{FF2B5EF4-FFF2-40B4-BE49-F238E27FC236}">
-                <a16:creationId xmlns:a16="http://schemas.microsoft.com/office/drawing/2014/main" id="{9110AB91-A76A-4598-815C-49AC8309E9ED}"/>
+                <a16:creationId xmlns:a16="http://schemas.microsoft.com/office/drawing/2014/main" id="{58AA7648-AB7E-4197-944C-C44FCEEF54E9}"/>
               </a:ext>
             </a:extLst>
           </p:cNvPr>
@@ -41669,7 +41669,7 @@
           <p:cNvPr id="18" name="">
             <a:extLst xmlns:a="http://schemas.openxmlformats.org/drawingml/2006/main">
               <a:ext uri="{FF2B5EF4-FFF2-40B4-BE49-F238E27FC236}">
-                <a16:creationId xmlns:a16="http://schemas.microsoft.com/office/drawing/2014/main" id="{E33352C0-335A-419C-B772-735CC3B74039}"/>
+                <a16:creationId xmlns:a16="http://schemas.microsoft.com/office/drawing/2014/main" id="{CB9BCEA9-EE38-494D-BB30-2E49491F838B}"/>
               </a:ext>
             </a:extLst>
           </p:cNvPr>
@@ -41706,7 +41706,7 @@
           <p:cNvPr id="19" name="">
             <a:extLst xmlns:a="http://schemas.openxmlformats.org/drawingml/2006/main">
               <a:ext uri="{FF2B5EF4-FFF2-40B4-BE49-F238E27FC236}">
-                <a16:creationId xmlns:a16="http://schemas.microsoft.com/office/drawing/2014/main" id="{161F1E2D-5E7E-479F-8CAA-03AAE1BDB624}"/>
+                <a16:creationId xmlns:a16="http://schemas.microsoft.com/office/drawing/2014/main" id="{7D0DDA7B-8075-4634-8552-EADEC0F30F3F}"/>
               </a:ext>
             </a:extLst>
           </p:cNvPr>
@@ -41743,7 +41743,7 @@
           <p:cNvPr id="20" name="">
             <a:extLst xmlns:a="http://schemas.openxmlformats.org/drawingml/2006/main">
               <a:ext uri="{FF2B5EF4-FFF2-40B4-BE49-F238E27FC236}">
-                <a16:creationId xmlns:a16="http://schemas.microsoft.com/office/drawing/2014/main" id="{A1DAF1DA-9220-4700-80FC-ABBB5F27DC22}"/>
+                <a16:creationId xmlns:a16="http://schemas.microsoft.com/office/drawing/2014/main" id="{4A728A91-4514-415E-B3DD-6CED54F668CC}"/>
               </a:ext>
             </a:extLst>
           </p:cNvPr>
@@ -41780,7 +41780,7 @@
           <p:cNvPr id="21" name="">
             <a:extLst xmlns:a="http://schemas.openxmlformats.org/drawingml/2006/main">
               <a:ext uri="{FF2B5EF4-FFF2-40B4-BE49-F238E27FC236}">
-                <a16:creationId xmlns:a16="http://schemas.microsoft.com/office/drawing/2014/main" id="{FF6F3FA0-6D32-416F-BE84-613409F3A40E}"/>
+                <a16:creationId xmlns:a16="http://schemas.microsoft.com/office/drawing/2014/main" id="{DFC5702B-225A-43E2-82CC-036A7ABEE79D}"/>
               </a:ext>
             </a:extLst>
           </p:cNvPr>
@@ -41817,7 +41817,7 @@
           <p:cNvPr id="22" name="">
             <a:extLst xmlns:a="http://schemas.openxmlformats.org/drawingml/2006/main">
               <a:ext uri="{FF2B5EF4-FFF2-40B4-BE49-F238E27FC236}">
-                <a16:creationId xmlns:a16="http://schemas.microsoft.com/office/drawing/2014/main" id="{7169718D-4F19-4DDD-9D95-48B7DD4E711A}"/>
+                <a16:creationId xmlns:a16="http://schemas.microsoft.com/office/drawing/2014/main" id="{C1773A43-3E7E-40DF-B120-B6BDB7CA3F3C}"/>
               </a:ext>
             </a:extLst>
           </p:cNvPr>
@@ -41854,7 +41854,7 @@
           <p:cNvPr id="23" name="">
             <a:extLst xmlns:a="http://schemas.openxmlformats.org/drawingml/2006/main">
               <a:ext uri="{FF2B5EF4-FFF2-40B4-BE49-F238E27FC236}">
-                <a16:creationId xmlns:a16="http://schemas.microsoft.com/office/drawing/2014/main" id="{46CEFB5F-3382-4172-8AE7-DA26CC35E747}"/>
+                <a16:creationId xmlns:a16="http://schemas.microsoft.com/office/drawing/2014/main" id="{DFF39440-ACE6-444A-88A0-DE8CF3E16E93}"/>
               </a:ext>
             </a:extLst>
           </p:cNvPr>
@@ -41891,7 +41891,7 @@
           <p:cNvPr id="24" name="">
             <a:extLst xmlns:a="http://schemas.openxmlformats.org/drawingml/2006/main">
               <a:ext uri="{FF2B5EF4-FFF2-40B4-BE49-F238E27FC236}">
-                <a16:creationId xmlns:a16="http://schemas.microsoft.com/office/drawing/2014/main" id="{287B6F15-AC24-4672-99F6-76A937D0828A}"/>
+                <a16:creationId xmlns:a16="http://schemas.microsoft.com/office/drawing/2014/main" id="{27716118-1BDB-47C5-B40B-998E28EAC795}"/>
               </a:ext>
             </a:extLst>
           </p:cNvPr>
@@ -41928,7 +41928,7 @@
           <p:cNvPr id="25" name="">
             <a:extLst xmlns:a="http://schemas.openxmlformats.org/drawingml/2006/main">
               <a:ext uri="{FF2B5EF4-FFF2-40B4-BE49-F238E27FC236}">
-                <a16:creationId xmlns:a16="http://schemas.microsoft.com/office/drawing/2014/main" id="{29B10597-6C46-42B6-84A7-A8E583412083}"/>
+                <a16:creationId xmlns:a16="http://schemas.microsoft.com/office/drawing/2014/main" id="{8FC5201C-48D0-44C7-9D28-9BE73F05190F}"/>
               </a:ext>
             </a:extLst>
           </p:cNvPr>
@@ -41965,7 +41965,7 @@
           <p:cNvPr id="26" name="">
             <a:extLst xmlns:a="http://schemas.openxmlformats.org/drawingml/2006/main">
               <a:ext uri="{FF2B5EF4-FFF2-40B4-BE49-F238E27FC236}">
-                <a16:creationId xmlns:a16="http://schemas.microsoft.com/office/drawing/2014/main" id="{280A0F1C-C98E-487D-85D7-7E5A3C28F4DF}"/>
+                <a16:creationId xmlns:a16="http://schemas.microsoft.com/office/drawing/2014/main" id="{1B43CEE6-351F-45FB-A948-62800FFB91BC}"/>
               </a:ext>
             </a:extLst>
           </p:cNvPr>
@@ -42012,7 +42012,7 @@
           <p:cNvPr id="27" name="">
             <a:extLst xmlns:a="http://schemas.openxmlformats.org/drawingml/2006/main">
               <a:ext uri="{FF2B5EF4-FFF2-40B4-BE49-F238E27FC236}">
-                <a16:creationId xmlns:a16="http://schemas.microsoft.com/office/drawing/2014/main" id="{EE1925CC-D025-4F5E-8D03-DE0D4B2A7A2D}"/>
+                <a16:creationId xmlns:a16="http://schemas.microsoft.com/office/drawing/2014/main" id="{08C90B20-25A1-49B4-853C-F41C23DCD14B}"/>
               </a:ext>
             </a:extLst>
           </p:cNvPr>
@@ -42059,7 +42059,7 @@
           <p:cNvPr id="28" name="">
             <a:extLst xmlns:a="http://schemas.openxmlformats.org/drawingml/2006/main">
               <a:ext uri="{FF2B5EF4-FFF2-40B4-BE49-F238E27FC236}">
-                <a16:creationId xmlns:a16="http://schemas.microsoft.com/office/drawing/2014/main" id="{05211A82-7575-4FAF-ABFB-CE1909D6CCE6}"/>
+                <a16:creationId xmlns:a16="http://schemas.microsoft.com/office/drawing/2014/main" id="{525F9FF7-997C-4933-A0E2-74B19B70E97B}"/>
               </a:ext>
             </a:extLst>
           </p:cNvPr>
@@ -42123,7 +42123,7 @@
           <p:cNvPr id="29" name="">
             <a:extLst xmlns:a="http://schemas.openxmlformats.org/drawingml/2006/main">
               <a:ext uri="{FF2B5EF4-FFF2-40B4-BE49-F238E27FC236}">
-                <a16:creationId xmlns:a16="http://schemas.microsoft.com/office/drawing/2014/main" id="{C5CB37E3-E3CA-4B16-AD53-1BA46509AF20}"/>
+                <a16:creationId xmlns:a16="http://schemas.microsoft.com/office/drawing/2014/main" id="{CA291955-67C0-4844-B37A-DE497ACF37DB}"/>
               </a:ext>
             </a:extLst>
           </p:cNvPr>
@@ -42187,7 +42187,7 @@
           <p:cNvPr id="30" name="">
             <a:extLst xmlns:a="http://schemas.openxmlformats.org/drawingml/2006/main">
               <a:ext uri="{FF2B5EF4-FFF2-40B4-BE49-F238E27FC236}">
-                <a16:creationId xmlns:a16="http://schemas.microsoft.com/office/drawing/2014/main" id="{CA2C1DCF-3548-4367-97B7-BC2231439DF5}"/>
+                <a16:creationId xmlns:a16="http://schemas.microsoft.com/office/drawing/2014/main" id="{C623010F-B957-4107-80EB-DA165DC1363C}"/>
               </a:ext>
             </a:extLst>
           </p:cNvPr>
@@ -42251,7 +42251,7 @@
           <p:cNvPr id="31" name="">
             <a:extLst xmlns:a="http://schemas.openxmlformats.org/drawingml/2006/main">
               <a:ext uri="{FF2B5EF4-FFF2-40B4-BE49-F238E27FC236}">
-                <a16:creationId xmlns:a16="http://schemas.microsoft.com/office/drawing/2014/main" id="{0E629AC3-B9C1-4ECC-B367-E23F81CB799A}"/>
+                <a16:creationId xmlns:a16="http://schemas.microsoft.com/office/drawing/2014/main" id="{9E1BFD95-C3DF-4CAB-923A-449182D07D2D}"/>
               </a:ext>
             </a:extLst>
           </p:cNvPr>
@@ -42315,7 +42315,7 @@
           <p:cNvPr id="32" name="">
             <a:extLst xmlns:a="http://schemas.openxmlformats.org/drawingml/2006/main">
               <a:ext uri="{FF2B5EF4-FFF2-40B4-BE49-F238E27FC236}">
-                <a16:creationId xmlns:a16="http://schemas.microsoft.com/office/drawing/2014/main" id="{5FD7C14F-6942-4CC8-A77D-F146AAF9F772}"/>
+                <a16:creationId xmlns:a16="http://schemas.microsoft.com/office/drawing/2014/main" id="{49571099-9039-4587-A0F2-804451E131B4}"/>
               </a:ext>
             </a:extLst>
           </p:cNvPr>
@@ -42350,7 +42350,7 @@
           <p:cNvPr id="33" name="">
             <a:extLst xmlns:a="http://schemas.openxmlformats.org/drawingml/2006/main">
               <a:ext uri="{FF2B5EF4-FFF2-40B4-BE49-F238E27FC236}">
-                <a16:creationId xmlns:a16="http://schemas.microsoft.com/office/drawing/2014/main" id="{E604B94D-0763-4578-9E06-31C9CDEA5521}"/>
+                <a16:creationId xmlns:a16="http://schemas.microsoft.com/office/drawing/2014/main" id="{4D66758E-F0E4-46B8-B698-816EBCE4EE64}"/>
               </a:ext>
             </a:extLst>
           </p:cNvPr>
@@ -42437,7 +42437,7 @@
           <p:cNvPr id="34" name="">
             <a:extLst xmlns:a="http://schemas.openxmlformats.org/drawingml/2006/main">
               <a:ext uri="{FF2B5EF4-FFF2-40B4-BE49-F238E27FC236}">
-                <a16:creationId xmlns:a16="http://schemas.microsoft.com/office/drawing/2014/main" id="{4DDCE74D-3102-4A53-85D3-1F5AF04988CC}"/>
+                <a16:creationId xmlns:a16="http://schemas.microsoft.com/office/drawing/2014/main" id="{D6082C50-338F-4F06-A660-642BA127758E}"/>
               </a:ext>
             </a:extLst>
           </p:cNvPr>
@@ -42474,7 +42474,7 @@
           <p:cNvPr id="35" name="">
             <a:extLst xmlns:a="http://schemas.openxmlformats.org/drawingml/2006/main">
               <a:ext uri="{FF2B5EF4-FFF2-40B4-BE49-F238E27FC236}">
-                <a16:creationId xmlns:a16="http://schemas.microsoft.com/office/drawing/2014/main" id="{BBD6A8A0-6233-479F-B5F9-9CAB91033B9C}"/>
+                <a16:creationId xmlns:a16="http://schemas.microsoft.com/office/drawing/2014/main" id="{834D1593-E6B5-4F34-BE8E-BAFC3E80BB7B}"/>
               </a:ext>
             </a:extLst>
           </p:cNvPr>
@@ -42511,7 +42511,7 @@
           <p:cNvPr id="36" name="">
             <a:extLst xmlns:a="http://schemas.openxmlformats.org/drawingml/2006/main">
               <a:ext uri="{FF2B5EF4-FFF2-40B4-BE49-F238E27FC236}">
-                <a16:creationId xmlns:a16="http://schemas.microsoft.com/office/drawing/2014/main" id="{D7788D11-847F-4080-82ED-691771602CF5}"/>
+                <a16:creationId xmlns:a16="http://schemas.microsoft.com/office/drawing/2014/main" id="{8EE0359A-8FBA-4A31-A4F9-4600EF56D829}"/>
               </a:ext>
             </a:extLst>
           </p:cNvPr>
@@ -42548,7 +42548,7 @@
           <p:cNvPr id="37" name="">
             <a:extLst xmlns:a="http://schemas.openxmlformats.org/drawingml/2006/main">
               <a:ext uri="{FF2B5EF4-FFF2-40B4-BE49-F238E27FC236}">
-                <a16:creationId xmlns:a16="http://schemas.microsoft.com/office/drawing/2014/main" id="{100F8242-975F-4730-A8B0-DB1074135012}"/>
+                <a16:creationId xmlns:a16="http://schemas.microsoft.com/office/drawing/2014/main" id="{E2DE327D-05D1-4122-B45C-602AFF11F053}"/>
               </a:ext>
             </a:extLst>
           </p:cNvPr>
@@ -42612,7 +42612,7 @@
           <p:cNvPr id="38" name="">
             <a:extLst xmlns:a="http://schemas.openxmlformats.org/drawingml/2006/main">
               <a:ext uri="{FF2B5EF4-FFF2-40B4-BE49-F238E27FC236}">
-                <a16:creationId xmlns:a16="http://schemas.microsoft.com/office/drawing/2014/main" id="{C8D47844-AE56-4A95-BFC8-E711801D5620}"/>
+                <a16:creationId xmlns:a16="http://schemas.microsoft.com/office/drawing/2014/main" id="{DD58F013-D760-427E-A369-FE45D23A89A8}"/>
               </a:ext>
             </a:extLst>
           </p:cNvPr>
@@ -42676,7 +42676,7 @@
           <p:cNvPr id="39" name="">
             <a:extLst xmlns:a="http://schemas.openxmlformats.org/drawingml/2006/main">
               <a:ext uri="{FF2B5EF4-FFF2-40B4-BE49-F238E27FC236}">
-                <a16:creationId xmlns:a16="http://schemas.microsoft.com/office/drawing/2014/main" id="{277B4E90-F612-47A5-96F0-A4EF87487E6C}"/>
+                <a16:creationId xmlns:a16="http://schemas.microsoft.com/office/drawing/2014/main" id="{61642835-B99E-45AB-835E-3F4E3EE91448}"/>
               </a:ext>
             </a:extLst>
           </p:cNvPr>
@@ -42740,7 +42740,7 @@
           <p:cNvPr id="40" name="">
             <a:extLst xmlns:a="http://schemas.openxmlformats.org/drawingml/2006/main">
               <a:ext uri="{FF2B5EF4-FFF2-40B4-BE49-F238E27FC236}">
-                <a16:creationId xmlns:a16="http://schemas.microsoft.com/office/drawing/2014/main" id="{CB6D86DF-15C8-44D3-98AB-965F56429405}"/>
+                <a16:creationId xmlns:a16="http://schemas.microsoft.com/office/drawing/2014/main" id="{BB6BCB25-A804-40D8-A5D2-85D8C38F54F9}"/>
               </a:ext>
             </a:extLst>
           </p:cNvPr>
@@ -42777,7 +42777,7 @@
           <p:cNvPr id="41" name="">
             <a:extLst xmlns:a="http://schemas.openxmlformats.org/drawingml/2006/main">
               <a:ext uri="{FF2B5EF4-FFF2-40B4-BE49-F238E27FC236}">
-                <a16:creationId xmlns:a16="http://schemas.microsoft.com/office/drawing/2014/main" id="{7E9AB2D6-3DDF-4D86-BB5C-933129EEAF44}"/>
+                <a16:creationId xmlns:a16="http://schemas.microsoft.com/office/drawing/2014/main" id="{4F567FD5-DD91-46F4-84B4-4F0E4C464C52}"/>
               </a:ext>
             </a:extLst>
           </p:cNvPr>
@@ -42814,7 +42814,7 @@
           <p:cNvPr id="42" name="">
             <a:extLst xmlns:a="http://schemas.openxmlformats.org/drawingml/2006/main">
               <a:ext uri="{FF2B5EF4-FFF2-40B4-BE49-F238E27FC236}">
-                <a16:creationId xmlns:a16="http://schemas.microsoft.com/office/drawing/2014/main" id="{EA2A57A3-0F36-4300-85F8-21DC3C710651}"/>
+                <a16:creationId xmlns:a16="http://schemas.microsoft.com/office/drawing/2014/main" id="{5F1F766F-E7F3-494B-B040-855F5FAEE570}"/>
               </a:ext>
             </a:extLst>
           </p:cNvPr>
@@ -42851,7 +42851,7 @@
           <p:cNvPr id="43" name="">
             <a:extLst xmlns:a="http://schemas.openxmlformats.org/drawingml/2006/main">
               <a:ext uri="{FF2B5EF4-FFF2-40B4-BE49-F238E27FC236}">
-                <a16:creationId xmlns:a16="http://schemas.microsoft.com/office/drawing/2014/main" id="{0235235D-2D03-4868-8A36-C48FAF3A9732}"/>
+                <a16:creationId xmlns:a16="http://schemas.microsoft.com/office/drawing/2014/main" id="{B1EBC172-5BD9-424C-A479-64C25763C5A3}"/>
               </a:ext>
             </a:extLst>
           </p:cNvPr>
@@ -42915,7 +42915,7 @@
           <p:cNvPr id="44" name="">
             <a:extLst xmlns:a="http://schemas.openxmlformats.org/drawingml/2006/main">
               <a:ext uri="{FF2B5EF4-FFF2-40B4-BE49-F238E27FC236}">
-                <a16:creationId xmlns:a16="http://schemas.microsoft.com/office/drawing/2014/main" id="{397A38E8-A904-4190-A6AA-2D3733C5E5C7}"/>
+                <a16:creationId xmlns:a16="http://schemas.microsoft.com/office/drawing/2014/main" id="{DDE45C2F-793B-4B5B-A0DB-007892B63715}"/>
               </a:ext>
             </a:extLst>
           </p:cNvPr>
@@ -42979,7 +42979,7 @@
           <p:cNvPr id="45" name="">
             <a:extLst xmlns:a="http://schemas.openxmlformats.org/drawingml/2006/main">
               <a:ext uri="{FF2B5EF4-FFF2-40B4-BE49-F238E27FC236}">
-                <a16:creationId xmlns:a16="http://schemas.microsoft.com/office/drawing/2014/main" id="{F4C3ECED-780A-4915-95B1-B34B8383AAA5}"/>
+                <a16:creationId xmlns:a16="http://schemas.microsoft.com/office/drawing/2014/main" id="{8DB9EED4-B687-4E12-B9CD-CA09DD5E0198}"/>
               </a:ext>
             </a:extLst>
           </p:cNvPr>
@@ -43043,7 +43043,7 @@
           <p:cNvPr id="46" name="">
             <a:extLst xmlns:a="http://schemas.openxmlformats.org/drawingml/2006/main">
               <a:ext uri="{FF2B5EF4-FFF2-40B4-BE49-F238E27FC236}">
-                <a16:creationId xmlns:a16="http://schemas.microsoft.com/office/drawing/2014/main" id="{A2BCD121-93DC-4E6F-8E87-8E24E8544B66}"/>
+                <a16:creationId xmlns:a16="http://schemas.microsoft.com/office/drawing/2014/main" id="{3D1AE6E3-19B0-4445-837E-4D9C97E2FA47}"/>
               </a:ext>
             </a:extLst>
           </p:cNvPr>
@@ -43080,7 +43080,7 @@
           <p:cNvPr id="47" name="">
             <a:extLst xmlns:a="http://schemas.openxmlformats.org/drawingml/2006/main">
               <a:ext uri="{FF2B5EF4-FFF2-40B4-BE49-F238E27FC236}">
-                <a16:creationId xmlns:a16="http://schemas.microsoft.com/office/drawing/2014/main" id="{4091C5E7-E8B1-41C4-8FC5-219BBBA10BA9}"/>
+                <a16:creationId xmlns:a16="http://schemas.microsoft.com/office/drawing/2014/main" id="{3FE58BE4-CE1C-4C9F-83E2-9B63DA8B03D3}"/>
               </a:ext>
             </a:extLst>
           </p:cNvPr>
@@ -43117,7 +43117,7 @@
           <p:cNvPr id="48" name="">
             <a:extLst xmlns:a="http://schemas.openxmlformats.org/drawingml/2006/main">
               <a:ext uri="{FF2B5EF4-FFF2-40B4-BE49-F238E27FC236}">
-                <a16:creationId xmlns:a16="http://schemas.microsoft.com/office/drawing/2014/main" id="{50944F61-8621-4D6B-B4D6-BBDF5F0FF685}"/>
+                <a16:creationId xmlns:a16="http://schemas.microsoft.com/office/drawing/2014/main" id="{8CA1992C-0174-4FC3-94C0-485CC41D04F7}"/>
               </a:ext>
             </a:extLst>
           </p:cNvPr>
@@ -43154,7 +43154,7 @@
           <p:cNvPr id="49" name="">
             <a:extLst xmlns:a="http://schemas.openxmlformats.org/drawingml/2006/main">
               <a:ext uri="{FF2B5EF4-FFF2-40B4-BE49-F238E27FC236}">
-                <a16:creationId xmlns:a16="http://schemas.microsoft.com/office/drawing/2014/main" id="{FAC36F95-CA2B-4A35-86F7-D79B5431FEF2}"/>
+                <a16:creationId xmlns:a16="http://schemas.microsoft.com/office/drawing/2014/main" id="{22E4AB04-B3F4-4F3C-8CA4-44FAF5D634BF}"/>
               </a:ext>
             </a:extLst>
           </p:cNvPr>
@@ -43218,7 +43218,7 @@
           <p:cNvPr id="50" name="">
             <a:extLst xmlns:a="http://schemas.openxmlformats.org/drawingml/2006/main">
               <a:ext uri="{FF2B5EF4-FFF2-40B4-BE49-F238E27FC236}">
-                <a16:creationId xmlns:a16="http://schemas.microsoft.com/office/drawing/2014/main" id="{B32D37BF-EA49-49C1-A81E-FEA39D01CF7E}"/>
+                <a16:creationId xmlns:a16="http://schemas.microsoft.com/office/drawing/2014/main" id="{CBD5D553-4331-4342-B545-310750C919E7}"/>
               </a:ext>
             </a:extLst>
           </p:cNvPr>
@@ -43282,7 +43282,7 @@
           <p:cNvPr id="51" name="">
             <a:extLst xmlns:a="http://schemas.openxmlformats.org/drawingml/2006/main">
               <a:ext uri="{FF2B5EF4-FFF2-40B4-BE49-F238E27FC236}">
-                <a16:creationId xmlns:a16="http://schemas.microsoft.com/office/drawing/2014/main" id="{B7CAE77A-D3A4-4106-9C61-E2401573729B}"/>
+                <a16:creationId xmlns:a16="http://schemas.microsoft.com/office/drawing/2014/main" id="{6477BAEE-0954-42F1-8EC2-A04EF5813251}"/>
               </a:ext>
             </a:extLst>
           </p:cNvPr>
@@ -43346,7 +43346,7 @@
           <p:cNvPr id="52" name="">
             <a:extLst xmlns:a="http://schemas.openxmlformats.org/drawingml/2006/main">
               <a:ext uri="{FF2B5EF4-FFF2-40B4-BE49-F238E27FC236}">
-                <a16:creationId xmlns:a16="http://schemas.microsoft.com/office/drawing/2014/main" id="{C956D391-4A8E-42FD-A3C5-911EDAB951BE}"/>
+                <a16:creationId xmlns:a16="http://schemas.microsoft.com/office/drawing/2014/main" id="{253DDD7A-6BE6-404E-91E0-72452E150AAA}"/>
               </a:ext>
             </a:extLst>
           </p:cNvPr>
@@ -43383,7 +43383,7 @@
           <p:cNvPr id="53" name="">
             <a:extLst xmlns:a="http://schemas.openxmlformats.org/drawingml/2006/main">
               <a:ext uri="{FF2B5EF4-FFF2-40B4-BE49-F238E27FC236}">
-                <a16:creationId xmlns:a16="http://schemas.microsoft.com/office/drawing/2014/main" id="{0C71E678-3530-435C-A62B-52F02BFB6DD9}"/>
+                <a16:creationId xmlns:a16="http://schemas.microsoft.com/office/drawing/2014/main" id="{3B420A43-80E6-40EE-9555-96080FA54E14}"/>
               </a:ext>
             </a:extLst>
           </p:cNvPr>
@@ -43420,7 +43420,7 @@
           <p:cNvPr id="54" name="">
             <a:extLst xmlns:a="http://schemas.openxmlformats.org/drawingml/2006/main">
               <a:ext uri="{FF2B5EF4-FFF2-40B4-BE49-F238E27FC236}">
-                <a16:creationId xmlns:a16="http://schemas.microsoft.com/office/drawing/2014/main" id="{421BC9E4-3221-40CB-BF20-0DBC4FAD664D}"/>
+                <a16:creationId xmlns:a16="http://schemas.microsoft.com/office/drawing/2014/main" id="{F5BD0B48-10AD-409E-A1AB-47E1926289B2}"/>
               </a:ext>
             </a:extLst>
           </p:cNvPr>
@@ -43457,7 +43457,7 @@
           <p:cNvPr id="55" name="">
             <a:extLst xmlns:a="http://schemas.openxmlformats.org/drawingml/2006/main">
               <a:ext uri="{FF2B5EF4-FFF2-40B4-BE49-F238E27FC236}">
-                <a16:creationId xmlns:a16="http://schemas.microsoft.com/office/drawing/2014/main" id="{8DAEC064-85AA-49F0-BA41-EC37DAF6CF65}"/>
+                <a16:creationId xmlns:a16="http://schemas.microsoft.com/office/drawing/2014/main" id="{551386D3-DBBB-4239-B2D2-24EBA2CB7E72}"/>
               </a:ext>
             </a:extLst>
           </p:cNvPr>
@@ -43521,7 +43521,7 @@
           <p:cNvPr id="56" name="">
             <a:extLst xmlns:a="http://schemas.openxmlformats.org/drawingml/2006/main">
               <a:ext uri="{FF2B5EF4-FFF2-40B4-BE49-F238E27FC236}">
-                <a16:creationId xmlns:a16="http://schemas.microsoft.com/office/drawing/2014/main" id="{8961CF9D-3D8A-46AF-A75B-D6B52A1F2663}"/>
+                <a16:creationId xmlns:a16="http://schemas.microsoft.com/office/drawing/2014/main" id="{5294F9F3-2C99-433D-8ECB-EBA41F64E7A5}"/>
               </a:ext>
             </a:extLst>
           </p:cNvPr>
@@ -43585,7 +43585,7 @@
           <p:cNvPr id="57" name="">
             <a:extLst xmlns:a="http://schemas.openxmlformats.org/drawingml/2006/main">
               <a:ext uri="{FF2B5EF4-FFF2-40B4-BE49-F238E27FC236}">
-                <a16:creationId xmlns:a16="http://schemas.microsoft.com/office/drawing/2014/main" id="{445364F1-A40C-437B-98C8-F6BED64E3E23}"/>
+                <a16:creationId xmlns:a16="http://schemas.microsoft.com/office/drawing/2014/main" id="{BCA4352D-3489-45E2-ABBD-7A3B99F92D7C}"/>
               </a:ext>
             </a:extLst>
           </p:cNvPr>
@@ -43672,7 +43672,7 @@
           <p:cNvPr id="58" name="">
             <a:extLst xmlns:a="http://schemas.openxmlformats.org/drawingml/2006/main">
               <a:ext uri="{FF2B5EF4-FFF2-40B4-BE49-F238E27FC236}">
-                <a16:creationId xmlns:a16="http://schemas.microsoft.com/office/drawing/2014/main" id="{AD643306-9A03-4069-8356-412987387021}"/>
+                <a16:creationId xmlns:a16="http://schemas.microsoft.com/office/drawing/2014/main" id="{F1EFA660-DF50-4DEC-A334-9566BFD9489A}"/>
               </a:ext>
             </a:extLst>
           </p:cNvPr>
@@ -43709,7 +43709,7 @@
           <p:cNvPr id="59" name="">
             <a:extLst xmlns:a="http://schemas.openxmlformats.org/drawingml/2006/main">
               <a:ext uri="{FF2B5EF4-FFF2-40B4-BE49-F238E27FC236}">
-                <a16:creationId xmlns:a16="http://schemas.microsoft.com/office/drawing/2014/main" id="{0A85AE05-CF42-4818-BAC8-EAA996148470}"/>
+                <a16:creationId xmlns:a16="http://schemas.microsoft.com/office/drawing/2014/main" id="{CD7D01B2-4561-4893-BFFA-B7D56CFE6E3E}"/>
               </a:ext>
             </a:extLst>
           </p:cNvPr>
@@ -43773,7 +43773,7 @@
           <p:cNvPr id="60" name="">
             <a:extLst xmlns:a="http://schemas.openxmlformats.org/drawingml/2006/main">
               <a:ext uri="{FF2B5EF4-FFF2-40B4-BE49-F238E27FC236}">
-                <a16:creationId xmlns:a16="http://schemas.microsoft.com/office/drawing/2014/main" id="{EE4FF146-54B7-4CA3-ABCE-25F06CB2BC8D}"/>
+                <a16:creationId xmlns:a16="http://schemas.microsoft.com/office/drawing/2014/main" id="{EFBE27F1-46FD-44B1-BB26-51B65E9F7DA4}"/>
               </a:ext>
             </a:extLst>
           </p:cNvPr>
@@ -43810,7 +43810,7 @@
           <p:cNvPr id="61" name="">
             <a:extLst xmlns:a="http://schemas.openxmlformats.org/drawingml/2006/main">
               <a:ext uri="{FF2B5EF4-FFF2-40B4-BE49-F238E27FC236}">
-                <a16:creationId xmlns:a16="http://schemas.microsoft.com/office/drawing/2014/main" id="{0FA24FDA-87C6-432D-84FB-A6B230F07D79}"/>
+                <a16:creationId xmlns:a16="http://schemas.microsoft.com/office/drawing/2014/main" id="{3E7E5730-3F59-4557-9644-9C7D773B72B6}"/>
               </a:ext>
             </a:extLst>
           </p:cNvPr>
@@ -43874,7 +43874,7 @@
           <p:cNvPr id="62" name="">
             <a:extLst xmlns:a="http://schemas.openxmlformats.org/drawingml/2006/main">
               <a:ext uri="{FF2B5EF4-FFF2-40B4-BE49-F238E27FC236}">
-                <a16:creationId xmlns:a16="http://schemas.microsoft.com/office/drawing/2014/main" id="{44B9AE6A-90B2-4D4C-BF5D-80B8B19E22AD}"/>
+                <a16:creationId xmlns:a16="http://schemas.microsoft.com/office/drawing/2014/main" id="{80AD070C-D96B-4E8D-9D29-59A768ADCB3C}"/>
               </a:ext>
             </a:extLst>
           </p:cNvPr>
@@ -43911,7 +43911,7 @@
           <p:cNvPr id="63" name="">
             <a:extLst xmlns:a="http://schemas.openxmlformats.org/drawingml/2006/main">
               <a:ext uri="{FF2B5EF4-FFF2-40B4-BE49-F238E27FC236}">
-                <a16:creationId xmlns:a16="http://schemas.microsoft.com/office/drawing/2014/main" id="{64685A6A-2762-4EB0-A10D-D9AFAFCF3889}"/>
+                <a16:creationId xmlns:a16="http://schemas.microsoft.com/office/drawing/2014/main" id="{BC37D236-713E-4277-A674-FF8AD0778EB8}"/>
               </a:ext>
             </a:extLst>
           </p:cNvPr>
@@ -43975,7 +43975,7 @@
           <p:cNvPr id="64" name="">
             <a:extLst xmlns:a="http://schemas.openxmlformats.org/drawingml/2006/main">
               <a:ext uri="{FF2B5EF4-FFF2-40B4-BE49-F238E27FC236}">
-                <a16:creationId xmlns:a16="http://schemas.microsoft.com/office/drawing/2014/main" id="{072B86B8-8D5A-4430-AC8B-8084999792E6}"/>
+                <a16:creationId xmlns:a16="http://schemas.microsoft.com/office/drawing/2014/main" id="{3283CE39-5611-4677-88F4-EBA3FF5F81EF}"/>
               </a:ext>
             </a:extLst>
           </p:cNvPr>
@@ -44039,7 +44039,7 @@
           <p:cNvPr id="65" name="">
             <a:extLst xmlns:a="http://schemas.openxmlformats.org/drawingml/2006/main">
               <a:ext uri="{FF2B5EF4-FFF2-40B4-BE49-F238E27FC236}">
-                <a16:creationId xmlns:a16="http://schemas.microsoft.com/office/drawing/2014/main" id="{DED15F64-4CBB-4D2E-8B4D-CC16A990C2FF}"/>
+                <a16:creationId xmlns:a16="http://schemas.microsoft.com/office/drawing/2014/main" id="{B3E01510-FB8A-4F39-A916-0193C0F8476F}"/>
               </a:ext>
             </a:extLst>
           </p:cNvPr>
@@ -44076,7 +44076,7 @@
           <p:cNvPr id="66" name="">
             <a:extLst xmlns:a="http://schemas.openxmlformats.org/drawingml/2006/main">
               <a:ext uri="{FF2B5EF4-FFF2-40B4-BE49-F238E27FC236}">
-                <a16:creationId xmlns:a16="http://schemas.microsoft.com/office/drawing/2014/main" id="{BDFF0594-4689-43F3-B957-8AE50463068A}"/>
+                <a16:creationId xmlns:a16="http://schemas.microsoft.com/office/drawing/2014/main" id="{E56DD3E0-2BDF-40C1-B518-D058B29236F4}"/>
               </a:ext>
             </a:extLst>
           </p:cNvPr>
@@ -44138,7 +44138,7 @@
     </p:spTree>
     <p:extLst>
       <p:ext uri="{BB962C8B-B14F-4D97-AF65-F5344CB8AC3E}">
-        <p14:creationId xmlns:p14="http://schemas.microsoft.com/office/powerpoint/2010/main" val="835180442"/>
+        <p14:creationId xmlns:p14="http://schemas.microsoft.com/office/powerpoint/2010/main" val="1937813836"/>
       </p:ext>
     </p:extLst>
   </p:cSld>
